--- a/decks/agentic-rag/agentic-rag.pptx
+++ b/decks/agentic-rag/agentic-rag.pptx
@@ -1299,6 +1299,13 @@
 <file path=ppt/slides/slide1.xml><?xml version="1.0" encoding="utf-8"?>
 <p:sld xmlns:a="http://schemas.openxmlformats.org/drawingml/2006/main" xmlns:r="http://schemas.openxmlformats.org/officeDocument/2006/relationships" xmlns:p="http://schemas.openxmlformats.org/presentationml/2006/main">
   <p:cSld name="Slide 1">
+    <p:bg>
+      <p:bgPr>
+        <a:solidFill>
+          <a:srgbClr val="0E1B3D"/>
+        </a:solidFill>
+      </p:bgPr>
+    </p:bg>
     <p:spTree>
       <p:nvGrpSpPr>
         <p:cNvPr id="1" name=""/>
@@ -1313,30 +1320,673 @@
           <a:chExt cx="0" cy="0"/>
         </a:xfrm>
       </p:grpSpPr>
-      <p:pic>
-        <p:nvPicPr>
-          <p:cNvPr id="2" name="Image 0" descr="/tmp/slide-1787840614286-ani3y7e2ybu.png">    </p:cNvPr>
-          <p:cNvPicPr>
-            <a:picLocks noChangeAspect="1"/>
-          </p:cNvPicPr>
-          <p:nvPr/>
-        </p:nvPicPr>
-        <p:blipFill>
-          <a:blip r:embed="rId1"/>
-          <a:stretch>
-            <a:fillRect/>
-          </a:stretch>
-        </p:blipFill>
-        <p:spPr>
-          <a:xfrm>
-            <a:off x="0" y="0"/>
-            <a:ext cx="12188952" cy="6858000"/>
-          </a:xfrm>
-          <a:prstGeom prst="rect">
-            <a:avLst/>
-          </a:prstGeom>
-        </p:spPr>
-      </p:pic>
+      <p:sp>
+        <p:nvSpPr>
+          <p:cNvPr id="2" name="Text 0"/>
+          <p:cNvSpPr/>
+          <p:nvPr/>
+        </p:nvSpPr>
+        <p:spPr>
+          <a:xfrm>
+            <a:off x="575523" y="669528"/>
+            <a:ext cx="9186542" cy="314920"/>
+          </a:xfrm>
+          <a:prstGeom prst="rect">
+            <a:avLst/>
+          </a:prstGeom>
+          <a:noFill/>
+          <a:ln/>
+        </p:spPr>
+        <p:txBody>
+          <a:bodyPr wrap="square" lIns="0" tIns="0" rIns="0" bIns="0" rtlCol="0" anchor="t"/>
+          <a:lstStyle/>
+          <a:p>
+            <a:pPr algn="l" indent="0" marL="0">
+              <a:lnSpc>
+                <a:spcPts val="2480"/>
+              </a:lnSpc>
+              <a:spcAft>
+                <a:spcPts val="2400"/>
+              </a:spcAft>
+              <a:buNone/>
+            </a:pPr>
+            <a:r>
+              <a:rPr lang="en-US" sz="1600" dirty="0">
+                <a:solidFill>
+                  <a:srgbClr val="4FC8E8"/>
+                </a:solidFill>
+                <a:latin typeface="JetBrainsMono" pitchFamily="34" charset="0"/>
+                <a:ea typeface="JetBrainsMono" pitchFamily="34" charset="-122"/>
+                <a:cs typeface="JetBrainsMono" pitchFamily="34" charset="-120"/>
+              </a:rPr>
+              <a:t>RETRIEVAL ARCHITECTURE / 2026</a:t>
+            </a:r>
+            <a:endParaRPr lang="en-US" sz="1600" dirty="0"/>
+          </a:p>
+        </p:txBody>
+      </p:sp>
+      <p:sp>
+        <p:nvSpPr>
+          <p:cNvPr id="3" name="Text 1"/>
+          <p:cNvSpPr/>
+          <p:nvPr/>
+        </p:nvSpPr>
+        <p:spPr>
+          <a:xfrm>
+            <a:off x="575523" y="1289248"/>
+            <a:ext cx="9186542" cy="1937147"/>
+          </a:xfrm>
+          <a:prstGeom prst="rect">
+            <a:avLst/>
+          </a:prstGeom>
+          <a:noFill/>
+          <a:ln/>
+        </p:spPr>
+        <p:txBody>
+          <a:bodyPr wrap="square" lIns="0" tIns="0" rIns="0" bIns="0" rtlCol="0" anchor="t"/>
+          <a:lstStyle/>
+          <a:p>
+            <a:pPr algn="l" indent="0" marL="0">
+              <a:lnSpc>
+                <a:spcPts val="7626"/>
+              </a:lnSpc>
+              <a:buNone/>
+            </a:pPr>
+            <a:r>
+              <a:rPr lang="en-US" sz="5866" dirty="0">
+                <a:solidFill>
+                  <a:srgbClr val="E8EEF7"/>
+                </a:solidFill>
+                <a:latin typeface="Inter" pitchFamily="34" charset="0"/>
+                <a:ea typeface="Inter" pitchFamily="34" charset="-122"/>
+                <a:cs typeface="Inter" pitchFamily="34" charset="-120"/>
+              </a:rPr>
+              <a:t>From RAG to</a:t>
+            </a:r>
+            <a:endParaRPr lang="en-US" sz="5866" dirty="0"/>
+          </a:p>
+          <a:p>
+            <a:pPr algn="l" indent="0" marL="0">
+              <a:lnSpc>
+                <a:spcPts val="7626"/>
+              </a:lnSpc>
+              <a:buNone/>
+            </a:pPr>
+            <a:r>
+              <a:rPr lang="en-US" sz="5866" dirty="0">
+                <a:solidFill>
+                  <a:srgbClr val="E8EEF7"/>
+                </a:solidFill>
+                <a:latin typeface="Inter" pitchFamily="34" charset="0"/>
+                <a:ea typeface="Inter" pitchFamily="34" charset="-122"/>
+                <a:cs typeface="Inter" pitchFamily="34" charset="-120"/>
+              </a:rPr>
+              <a:t>Agentic RAG</a:t>
+            </a:r>
+            <a:endParaRPr lang="en-US" sz="5866" dirty="0"/>
+          </a:p>
+        </p:txBody>
+      </p:sp>
+      <p:sp>
+        <p:nvSpPr>
+          <p:cNvPr id="4" name="Text 2"/>
+          <p:cNvSpPr/>
+          <p:nvPr/>
+        </p:nvSpPr>
+        <p:spPr>
+          <a:xfrm>
+            <a:off x="575523" y="3564930"/>
+            <a:ext cx="2539365" cy="12700"/>
+          </a:xfrm>
+          <a:prstGeom prst="rect">
+            <a:avLst/>
+          </a:prstGeom>
+          <a:solidFill>
+            <a:srgbClr val="4FC8E8"/>
+          </a:solidFill>
+          <a:ln/>
+        </p:spPr>
+        <p:txBody>
+          <a:bodyPr wrap="square" rtlCol="0" anchor="ctr"/>
+          <a:lstStyle/>
+          <a:p>
+            <a:pPr indent="0" marL="0">
+              <a:buNone/>
+            </a:pPr>
+            <a:endParaRPr lang="en-US" dirty="0"/>
+          </a:p>
+        </p:txBody>
+      </p:sp>
+      <p:sp>
+        <p:nvSpPr>
+          <p:cNvPr id="5" name="Text 3"/>
+          <p:cNvSpPr/>
+          <p:nvPr/>
+        </p:nvSpPr>
+        <p:spPr>
+          <a:xfrm>
+            <a:off x="575523" y="3848497"/>
+            <a:ext cx="7425036" cy="787400"/>
+          </a:xfrm>
+          <a:prstGeom prst="rect">
+            <a:avLst/>
+          </a:prstGeom>
+          <a:noFill/>
+          <a:ln/>
+        </p:spPr>
+        <p:txBody>
+          <a:bodyPr wrap="square" lIns="0" tIns="0" rIns="0" bIns="0" rtlCol="0" anchor="t"/>
+          <a:lstStyle/>
+          <a:p>
+            <a:pPr algn="l" indent="0" marL="0">
+              <a:lnSpc>
+                <a:spcPts val="3100"/>
+              </a:lnSpc>
+              <a:buNone/>
+            </a:pPr>
+            <a:r>
+              <a:rPr lang="en-US" sz="2000" dirty="0">
+                <a:solidFill>
+                  <a:srgbClr val="8FA3C8"/>
+                </a:solidFill>
+                <a:latin typeface="Inter" pitchFamily="34" charset="0"/>
+                <a:ea typeface="Inter" pitchFamily="34" charset="-122"/>
+                <a:cs typeface="Inter" pitchFamily="34" charset="-120"/>
+              </a:rPr>
+              <a:t>When retrieval stops being one step and becomes a loop the model controls.</a:t>
+            </a:r>
+            <a:endParaRPr lang="en-US" sz="2000" dirty="0"/>
+          </a:p>
+        </p:txBody>
+      </p:sp>
+      <p:sp>
+        <p:nvSpPr>
+          <p:cNvPr id="6" name="Shape 4"/>
+          <p:cNvSpPr/>
+          <p:nvPr/>
+        </p:nvSpPr>
+        <p:spPr>
+          <a:xfrm>
+            <a:off x="575523" y="4803775"/>
+            <a:ext cx="11037905" cy="0"/>
+          </a:xfrm>
+          <a:prstGeom prst="line">
+            <a:avLst/>
+          </a:prstGeom>
+          <a:noFill/>
+          <a:ln w="12698">
+            <a:solidFill>
+              <a:srgbClr val="2A4A8C"/>
+            </a:solidFill>
+            <a:prstDash val="solid"/>
+          </a:ln>
+        </p:spPr>
+      </p:sp>
+      <p:sp>
+        <p:nvSpPr>
+          <p:cNvPr id="7" name="Text 5"/>
+          <p:cNvSpPr/>
+          <p:nvPr/>
+        </p:nvSpPr>
+        <p:spPr>
+          <a:xfrm>
+            <a:off x="575523" y="5047059"/>
+            <a:ext cx="2072122" cy="314920"/>
+          </a:xfrm>
+          <a:prstGeom prst="rect">
+            <a:avLst/>
+          </a:prstGeom>
+          <a:noFill/>
+          <a:ln/>
+        </p:spPr>
+        <p:txBody>
+          <a:bodyPr wrap="square" lIns="0" tIns="0" rIns="0" bIns="0" rtlCol="0" anchor="t"/>
+          <a:lstStyle/>
+          <a:p>
+            <a:pPr algn="l" indent="0" marL="0">
+              <a:lnSpc>
+                <a:spcPts val="2480"/>
+              </a:lnSpc>
+              <a:spcAft>
+                <a:spcPts val="533"/>
+              </a:spcAft>
+              <a:buNone/>
+            </a:pPr>
+            <a:r>
+              <a:rPr lang="en-US" sz="1600" dirty="0">
+                <a:solidFill>
+                  <a:srgbClr val="8FA3C8"/>
+                </a:solidFill>
+                <a:latin typeface="Inter" pitchFamily="34" charset="0"/>
+                <a:ea typeface="Inter" pitchFamily="34" charset="-122"/>
+                <a:cs typeface="Inter" pitchFamily="34" charset="-120"/>
+              </a:rPr>
+              <a:t>PRESENTED BY</a:t>
+            </a:r>
+            <a:endParaRPr lang="en-US" sz="1600" dirty="0"/>
+          </a:p>
+        </p:txBody>
+      </p:sp>
+      <p:sp>
+        <p:nvSpPr>
+          <p:cNvPr id="8" name="Text 6"/>
+          <p:cNvSpPr/>
+          <p:nvPr/>
+        </p:nvSpPr>
+        <p:spPr>
+          <a:xfrm>
+            <a:off x="575523" y="5429647"/>
+            <a:ext cx="2072122" cy="314920"/>
+          </a:xfrm>
+          <a:prstGeom prst="rect">
+            <a:avLst/>
+          </a:prstGeom>
+          <a:noFill/>
+          <a:ln/>
+        </p:spPr>
+        <p:txBody>
+          <a:bodyPr wrap="square" lIns="0" tIns="0" rIns="0" bIns="0" rtlCol="0" anchor="t"/>
+          <a:lstStyle/>
+          <a:p>
+            <a:pPr algn="l" indent="0" marL="0">
+              <a:lnSpc>
+                <a:spcPts val="2480"/>
+              </a:lnSpc>
+              <a:buNone/>
+            </a:pPr>
+            <a:r>
+              <a:rPr lang="en-US" sz="1600" dirty="0">
+                <a:solidFill>
+                  <a:srgbClr val="E8EEF7"/>
+                </a:solidFill>
+                <a:latin typeface="JetBrainsMono" pitchFamily="34" charset="0"/>
+                <a:ea typeface="JetBrainsMono" pitchFamily="34" charset="-122"/>
+                <a:cs typeface="JetBrainsMono" pitchFamily="34" charset="-120"/>
+              </a:rPr>
+              <a:t>PRESENTER · TEAM</a:t>
+            </a:r>
+            <a:endParaRPr lang="en-US" sz="1600" dirty="0"/>
+          </a:p>
+        </p:txBody>
+      </p:sp>
+      <p:sp>
+        <p:nvSpPr>
+          <p:cNvPr id="9" name="Text 7"/>
+          <p:cNvSpPr/>
+          <p:nvPr/>
+        </p:nvSpPr>
+        <p:spPr>
+          <a:xfrm>
+            <a:off x="3351763" y="5047059"/>
+            <a:ext cx="906553" cy="314920"/>
+          </a:xfrm>
+          <a:prstGeom prst="rect">
+            <a:avLst/>
+          </a:prstGeom>
+          <a:noFill/>
+          <a:ln/>
+        </p:spPr>
+        <p:txBody>
+          <a:bodyPr wrap="square" lIns="0" tIns="0" rIns="0" bIns="0" rtlCol="0" anchor="t"/>
+          <a:lstStyle/>
+          <a:p>
+            <a:pPr algn="l" indent="0" marL="0">
+              <a:lnSpc>
+                <a:spcPts val="2480"/>
+              </a:lnSpc>
+              <a:spcAft>
+                <a:spcPts val="533"/>
+              </a:spcAft>
+              <a:buNone/>
+            </a:pPr>
+            <a:r>
+              <a:rPr lang="en-US" sz="1600" dirty="0">
+                <a:solidFill>
+                  <a:srgbClr val="8FA3C8"/>
+                </a:solidFill>
+                <a:latin typeface="Inter" pitchFamily="34" charset="0"/>
+                <a:ea typeface="Inter" pitchFamily="34" charset="-122"/>
+                <a:cs typeface="Inter" pitchFamily="34" charset="-120"/>
+              </a:rPr>
+              <a:t>DATE</a:t>
+            </a:r>
+            <a:endParaRPr lang="en-US" sz="1600" dirty="0"/>
+          </a:p>
+        </p:txBody>
+      </p:sp>
+      <p:sp>
+        <p:nvSpPr>
+          <p:cNvPr id="10" name="Text 8"/>
+          <p:cNvSpPr/>
+          <p:nvPr/>
+        </p:nvSpPr>
+        <p:spPr>
+          <a:xfrm>
+            <a:off x="3351763" y="5429647"/>
+            <a:ext cx="906553" cy="314920"/>
+          </a:xfrm>
+          <a:prstGeom prst="rect">
+            <a:avLst/>
+          </a:prstGeom>
+          <a:noFill/>
+          <a:ln/>
+        </p:spPr>
+        <p:txBody>
+          <a:bodyPr wrap="square" lIns="0" tIns="0" rIns="0" bIns="0" rtlCol="0" anchor="t"/>
+          <a:lstStyle/>
+          <a:p>
+            <a:pPr algn="l" indent="0" marL="0">
+              <a:lnSpc>
+                <a:spcPts val="2480"/>
+              </a:lnSpc>
+              <a:buNone/>
+            </a:pPr>
+            <a:r>
+              <a:rPr lang="en-US" sz="1600" dirty="0">
+                <a:solidFill>
+                  <a:srgbClr val="E8EEF7"/>
+                </a:solidFill>
+                <a:latin typeface="JetBrainsMono" pitchFamily="34" charset="0"/>
+                <a:ea typeface="JetBrainsMono" pitchFamily="34" charset="-122"/>
+                <a:cs typeface="JetBrainsMono" pitchFamily="34" charset="-120"/>
+              </a:rPr>
+              <a:t>2026.08</a:t>
+            </a:r>
+            <a:endParaRPr lang="en-US" sz="1600" dirty="0"/>
+          </a:p>
+        </p:txBody>
+      </p:sp>
+      <p:sp>
+        <p:nvSpPr>
+          <p:cNvPr id="11" name="Text 9"/>
+          <p:cNvSpPr/>
+          <p:nvPr/>
+        </p:nvSpPr>
+        <p:spPr>
+          <a:xfrm>
+            <a:off x="4985289" y="5047059"/>
+            <a:ext cx="1036061" cy="314920"/>
+          </a:xfrm>
+          <a:prstGeom prst="rect">
+            <a:avLst/>
+          </a:prstGeom>
+          <a:noFill/>
+          <a:ln/>
+        </p:spPr>
+        <p:txBody>
+          <a:bodyPr wrap="square" lIns="0" tIns="0" rIns="0" bIns="0" rtlCol="0" anchor="t"/>
+          <a:lstStyle/>
+          <a:p>
+            <a:pPr algn="l" indent="0" marL="0">
+              <a:lnSpc>
+                <a:spcPts val="2480"/>
+              </a:lnSpc>
+              <a:spcAft>
+                <a:spcPts val="533"/>
+              </a:spcAft>
+              <a:buNone/>
+            </a:pPr>
+            <a:r>
+              <a:rPr lang="en-US" sz="1600" dirty="0">
+                <a:solidFill>
+                  <a:srgbClr val="8FA3C8"/>
+                </a:solidFill>
+                <a:latin typeface="Inter" pitchFamily="34" charset="0"/>
+                <a:ea typeface="Inter" pitchFamily="34" charset="-122"/>
+                <a:cs typeface="Inter" pitchFamily="34" charset="-120"/>
+              </a:rPr>
+              <a:t>SCOPE</a:t>
+            </a:r>
+            <a:endParaRPr lang="en-US" sz="1600" dirty="0"/>
+          </a:p>
+        </p:txBody>
+      </p:sp>
+      <p:sp>
+        <p:nvSpPr>
+          <p:cNvPr id="12" name="Text 10"/>
+          <p:cNvSpPr/>
+          <p:nvPr/>
+        </p:nvSpPr>
+        <p:spPr>
+          <a:xfrm>
+            <a:off x="4985289" y="5429647"/>
+            <a:ext cx="1036061" cy="314920"/>
+          </a:xfrm>
+          <a:prstGeom prst="rect">
+            <a:avLst/>
+          </a:prstGeom>
+          <a:noFill/>
+          <a:ln/>
+        </p:spPr>
+        <p:txBody>
+          <a:bodyPr wrap="square" lIns="0" tIns="0" rIns="0" bIns="0" rtlCol="0" anchor="t"/>
+          <a:lstStyle/>
+          <a:p>
+            <a:pPr algn="l" indent="0" marL="0">
+              <a:lnSpc>
+                <a:spcPts val="2480"/>
+              </a:lnSpc>
+              <a:buNone/>
+            </a:pPr>
+            <a:r>
+              <a:rPr lang="en-US" sz="1600" dirty="0">
+                <a:solidFill>
+                  <a:srgbClr val="E8EEF7"/>
+                </a:solidFill>
+                <a:latin typeface="JetBrainsMono" pitchFamily="34" charset="0"/>
+                <a:ea typeface="JetBrainsMono" pitchFamily="34" charset="-122"/>
+                <a:cs typeface="JetBrainsMono" pitchFamily="34" charset="-120"/>
+              </a:rPr>
+              <a:t>INTERNAL</a:t>
+            </a:r>
+            <a:endParaRPr lang="en-US" sz="1600" dirty="0"/>
+          </a:p>
+        </p:txBody>
+      </p:sp>
+      <p:sp>
+        <p:nvSpPr>
+          <p:cNvPr id="13" name="Text 11"/>
+          <p:cNvSpPr/>
+          <p:nvPr/>
+        </p:nvSpPr>
+        <p:spPr>
+          <a:xfrm>
+            <a:off x="6401580" y="5981502"/>
+            <a:ext cx="5211848" cy="465138"/>
+          </a:xfrm>
+          <a:prstGeom prst="rect">
+            <a:avLst/>
+          </a:prstGeom>
+          <a:noFill/>
+          <a:ln w="12698">
+            <a:solidFill>
+              <a:srgbClr val="4FC8E8"/>
+            </a:solidFill>
+          </a:ln>
+        </p:spPr>
+        <p:txBody>
+          <a:bodyPr wrap="square" rtlCol="0" anchor="ctr"/>
+          <a:lstStyle/>
+          <a:p>
+            <a:pPr indent="0" marL="0">
+              <a:buNone/>
+            </a:pPr>
+            <a:endParaRPr lang="en-US" dirty="0"/>
+          </a:p>
+        </p:txBody>
+      </p:sp>
+      <p:sp>
+        <p:nvSpPr>
+          <p:cNvPr id="14" name="Text 12"/>
+          <p:cNvSpPr/>
+          <p:nvPr/>
+        </p:nvSpPr>
+        <p:spPr>
+          <a:xfrm>
+            <a:off x="6600365" y="6078736"/>
+            <a:ext cx="207212" cy="270669"/>
+          </a:xfrm>
+          <a:prstGeom prst="rect">
+            <a:avLst/>
+          </a:prstGeom>
+          <a:noFill/>
+          <a:ln/>
+        </p:spPr>
+        <p:txBody>
+          <a:bodyPr wrap="square" lIns="0" tIns="0" rIns="0" bIns="0" rtlCol="0" anchor="t"/>
+          <a:lstStyle/>
+          <a:p>
+            <a:pPr algn="l" indent="0" marL="0">
+              <a:lnSpc>
+                <a:spcPts val="2133"/>
+              </a:lnSpc>
+              <a:buNone/>
+            </a:pPr>
+            <a:r>
+              <a:rPr lang="en-US" sz="1333" dirty="0">
+                <a:solidFill>
+                  <a:srgbClr val="4FC8E8"/>
+                </a:solidFill>
+                <a:latin typeface="JetBrainsMono" pitchFamily="34" charset="0"/>
+                <a:ea typeface="JetBrainsMono" pitchFamily="34" charset="-122"/>
+                <a:cs typeface="JetBrainsMono" pitchFamily="34" charset="-120"/>
+              </a:rPr>
+              <a:t>01</a:t>
+            </a:r>
+            <a:endParaRPr lang="en-US" sz="1333" dirty="0"/>
+          </a:p>
+        </p:txBody>
+      </p:sp>
+      <p:sp>
+        <p:nvSpPr>
+          <p:cNvPr id="15" name="Shape 13"/>
+          <p:cNvSpPr/>
+          <p:nvPr/>
+        </p:nvSpPr>
+        <p:spPr>
+          <a:xfrm>
+            <a:off x="6995951" y="5994202"/>
+            <a:ext cx="0" cy="439737"/>
+          </a:xfrm>
+          <a:prstGeom prst="line">
+            <a:avLst/>
+          </a:prstGeom>
+          <a:noFill/>
+          <a:ln w="12698">
+            <a:solidFill>
+              <a:srgbClr val="4FC8E8"/>
+            </a:solidFill>
+            <a:prstDash val="solid"/>
+          </a:ln>
+        </p:spPr>
+      </p:sp>
+      <p:sp>
+        <p:nvSpPr>
+          <p:cNvPr id="16" name="Text 14"/>
+          <p:cNvSpPr/>
+          <p:nvPr/>
+        </p:nvSpPr>
+        <p:spPr>
+          <a:xfrm>
+            <a:off x="7188387" y="6078736"/>
+            <a:ext cx="2778545" cy="270669"/>
+          </a:xfrm>
+          <a:prstGeom prst="rect">
+            <a:avLst/>
+          </a:prstGeom>
+          <a:noFill/>
+          <a:ln/>
+        </p:spPr>
+        <p:txBody>
+          <a:bodyPr wrap="square" lIns="0" tIns="0" rIns="0" bIns="0" rtlCol="0" anchor="t"/>
+          <a:lstStyle/>
+          <a:p>
+            <a:pPr algn="l" indent="0" marL="0">
+              <a:lnSpc>
+                <a:spcPts val="2133"/>
+              </a:lnSpc>
+              <a:buNone/>
+            </a:pPr>
+            <a:r>
+              <a:rPr lang="en-US" sz="1333" dirty="0">
+                <a:solidFill>
+                  <a:srgbClr val="E8EEF7"/>
+                </a:solidFill>
+                <a:latin typeface="Inter" pitchFamily="34" charset="0"/>
+                <a:ea typeface="Inter" pitchFamily="34" charset="-122"/>
+                <a:cs typeface="Inter" pitchFamily="34" charset="-120"/>
+              </a:rPr>
+              <a:t>FROM RAG TO AGENTIC RAG</a:t>
+            </a:r>
+            <a:endParaRPr lang="en-US" sz="1333" dirty="0"/>
+          </a:p>
+        </p:txBody>
+      </p:sp>
+      <p:sp>
+        <p:nvSpPr>
+          <p:cNvPr id="17" name="Shape 15"/>
+          <p:cNvSpPr/>
+          <p:nvPr/>
+        </p:nvSpPr>
+        <p:spPr>
+          <a:xfrm>
+            <a:off x="10104887" y="5994202"/>
+            <a:ext cx="0" cy="439737"/>
+          </a:xfrm>
+          <a:prstGeom prst="line">
+            <a:avLst/>
+          </a:prstGeom>
+          <a:noFill/>
+          <a:ln w="12698">
+            <a:solidFill>
+              <a:srgbClr val="4FC8E8"/>
+            </a:solidFill>
+            <a:prstDash val="solid"/>
+          </a:ln>
+        </p:spPr>
+      </p:sp>
+      <p:sp>
+        <p:nvSpPr>
+          <p:cNvPr id="18" name="Text 16"/>
+          <p:cNvSpPr/>
+          <p:nvPr/>
+        </p:nvSpPr>
+        <p:spPr>
+          <a:xfrm>
+            <a:off x="10297323" y="6078736"/>
+            <a:ext cx="1139667" cy="270669"/>
+          </a:xfrm>
+          <a:prstGeom prst="rect">
+            <a:avLst/>
+          </a:prstGeom>
+          <a:noFill/>
+          <a:ln/>
+        </p:spPr>
+        <p:txBody>
+          <a:bodyPr wrap="square" lIns="0" tIns="0" rIns="0" bIns="0" rtlCol="0" anchor="t"/>
+          <a:lstStyle/>
+          <a:p>
+            <a:pPr algn="l" indent="0" marL="0">
+              <a:lnSpc>
+                <a:spcPts val="2133"/>
+              </a:lnSpc>
+              <a:buNone/>
+            </a:pPr>
+            <a:r>
+              <a:rPr lang="en-US" sz="1333" dirty="0">
+                <a:solidFill>
+                  <a:srgbClr val="8FA3C8"/>
+                </a:solidFill>
+                <a:latin typeface="JetBrainsMono" pitchFamily="34" charset="0"/>
+                <a:ea typeface="JetBrainsMono" pitchFamily="34" charset="-122"/>
+                <a:cs typeface="JetBrainsMono" pitchFamily="34" charset="-120"/>
+              </a:rPr>
+              <a:t>SHEET 01/06</a:t>
+            </a:r>
+            <a:endParaRPr lang="en-US" sz="1333" dirty="0"/>
+          </a:p>
+        </p:txBody>
+      </p:sp>
     </p:spTree>
   </p:cSld>
   <p:clrMapOvr>
@@ -1348,6 +1998,13 @@
 <file path=ppt/slides/slide2.xml><?xml version="1.0" encoding="utf-8"?>
 <p:sld xmlns:a="http://schemas.openxmlformats.org/drawingml/2006/main" xmlns:r="http://schemas.openxmlformats.org/officeDocument/2006/relationships" xmlns:p="http://schemas.openxmlformats.org/presentationml/2006/main">
   <p:cSld name="Slide 2">
+    <p:bg>
+      <p:bgPr>
+        <a:solidFill>
+          <a:srgbClr val="0E1B3D"/>
+        </a:solidFill>
+      </p:bgPr>
+    </p:bg>
     <p:spTree>
       <p:nvGrpSpPr>
         <p:cNvPr id="1" name=""/>
@@ -1362,30 +2019,1398 @@
           <a:chExt cx="0" cy="0"/>
         </a:xfrm>
       </p:grpSpPr>
+      <p:sp>
+        <p:nvSpPr>
+          <p:cNvPr id="2" name="Text 0"/>
+          <p:cNvSpPr/>
+          <p:nvPr/>
+        </p:nvSpPr>
+        <p:spPr>
+          <a:xfrm>
+            <a:off x="575523" y="508000"/>
+            <a:ext cx="11258664" cy="484187"/>
+          </a:xfrm>
+          <a:prstGeom prst="rect">
+            <a:avLst/>
+          </a:prstGeom>
+          <a:noFill/>
+          <a:ln/>
+        </p:spPr>
+        <p:txBody>
+          <a:bodyPr wrap="square" lIns="0" tIns="0" rIns="0" bIns="0" rtlCol="0" anchor="t"/>
+          <a:lstStyle/>
+          <a:p>
+            <a:pPr algn="l" indent="0" marL="0">
+              <a:lnSpc>
+                <a:spcPts val="3813"/>
+              </a:lnSpc>
+              <a:spcAft>
+                <a:spcPts val="1600"/>
+              </a:spcAft>
+              <a:buNone/>
+            </a:pPr>
+            <a:r>
+              <a:rPr lang="en-US" sz="2933" dirty="0">
+                <a:solidFill>
+                  <a:srgbClr val="E8EEF7"/>
+                </a:solidFill>
+                <a:latin typeface="Inter" pitchFamily="34" charset="0"/>
+                <a:ea typeface="Inter" pitchFamily="34" charset="-122"/>
+                <a:cs typeface="Inter" pitchFamily="34" charset="-120"/>
+              </a:rPr>
+              <a:t>What classic RAG does, and where it stops</a:t>
+            </a:r>
+            <a:endParaRPr lang="en-US" sz="2933" dirty="0"/>
+          </a:p>
+        </p:txBody>
+      </p:sp>
+      <p:sp>
+        <p:nvSpPr>
+          <p:cNvPr id="3" name="Text 1"/>
+          <p:cNvSpPr/>
+          <p:nvPr/>
+        </p:nvSpPr>
+        <p:spPr>
+          <a:xfrm>
+            <a:off x="575523" y="1195387"/>
+            <a:ext cx="1042132" cy="563959"/>
+          </a:xfrm>
+          <a:prstGeom prst="rect">
+            <a:avLst/>
+          </a:prstGeom>
+          <a:noFill/>
+          <a:ln w="12698">
+            <a:solidFill>
+              <a:srgbClr val="4FC8E8"/>
+            </a:solidFill>
+          </a:ln>
+        </p:spPr>
+        <p:txBody>
+          <a:bodyPr wrap="square" rtlCol="0" anchor="ctr"/>
+          <a:lstStyle/>
+          <a:p>
+            <a:pPr indent="0" marL="0">
+              <a:buNone/>
+            </a:pPr>
+            <a:endParaRPr lang="en-US" dirty="0"/>
+          </a:p>
+        </p:txBody>
+      </p:sp>
+      <p:sp>
+        <p:nvSpPr>
+          <p:cNvPr id="4" name="Text 2"/>
+          <p:cNvSpPr/>
+          <p:nvPr/>
+        </p:nvSpPr>
+        <p:spPr>
+          <a:xfrm>
+            <a:off x="791369" y="1326555"/>
+            <a:ext cx="622648" cy="301625"/>
+          </a:xfrm>
+          <a:prstGeom prst="rect">
+            <a:avLst/>
+          </a:prstGeom>
+          <a:noFill/>
+          <a:ln/>
+        </p:spPr>
+        <p:txBody>
+          <a:bodyPr wrap="square" lIns="0" tIns="0" rIns="0" bIns="0" rtlCol="0" anchor="t"/>
+          <a:lstStyle/>
+          <a:p>
+            <a:pPr algn="l" indent="0" marL="0">
+              <a:lnSpc>
+                <a:spcPts val="2376"/>
+              </a:lnSpc>
+              <a:buNone/>
+            </a:pPr>
+            <a:r>
+              <a:rPr lang="en-US" sz="1533" dirty="0">
+                <a:solidFill>
+                  <a:srgbClr val="E8EEF7"/>
+                </a:solidFill>
+                <a:latin typeface="JetBrainsMono" pitchFamily="34" charset="0"/>
+                <a:ea typeface="JetBrainsMono" pitchFamily="34" charset="-122"/>
+                <a:cs typeface="JetBrainsMono" pitchFamily="34" charset="-120"/>
+              </a:rPr>
+              <a:t>QUERY</a:t>
+            </a:r>
+            <a:endParaRPr lang="en-US" sz="1533" dirty="0"/>
+          </a:p>
+        </p:txBody>
+      </p:sp>
       <p:pic>
         <p:nvPicPr>
-          <p:cNvPr id="2" name="Image 0" descr="/tmp/slide-1787840614575-fnzma0uo62.png">    </p:cNvPr>
+          <p:cNvPr id="5" name="Image 0" descr="preencoded.png">    </p:cNvPr>
           <p:cNvPicPr>
             <a:picLocks noChangeAspect="1"/>
           </p:cNvPicPr>
           <p:nvPr/>
         </p:nvPicPr>
         <p:blipFill>
-          <a:blip r:embed="rId1"/>
+          <a:blip r:embed="rId1">
+            <a:extLst>
+              <a:ext uri="{96DAC541-7B7A-43D3-8B79-37D633B846F1}">
+                <asvg:svgBlip xmlns:asvg="http://schemas.microsoft.com/office/drawing/2016/SVG/main" r:embed="rId2"/>
+              </a:ext>
+            </a:extLst>
+          </a:blip>
           <a:stretch>
             <a:fillRect/>
           </a:stretch>
         </p:blipFill>
         <p:spPr>
           <a:xfrm>
-            <a:off x="0" y="0"/>
-            <a:ext cx="12188952" cy="6858000"/>
+            <a:off x="1752955" y="1375767"/>
+            <a:ext cx="338450" cy="203200"/>
           </a:xfrm>
           <a:prstGeom prst="rect">
             <a:avLst/>
           </a:prstGeom>
         </p:spPr>
       </p:pic>
+      <p:sp>
+        <p:nvSpPr>
+          <p:cNvPr id="6" name="Text 3"/>
+          <p:cNvSpPr/>
+          <p:nvPr/>
+        </p:nvSpPr>
+        <p:spPr>
+          <a:xfrm>
+            <a:off x="2226706" y="1195387"/>
+            <a:ext cx="1042132" cy="563959"/>
+          </a:xfrm>
+          <a:prstGeom prst="rect">
+            <a:avLst/>
+          </a:prstGeom>
+          <a:noFill/>
+          <a:ln w="12698">
+            <a:solidFill>
+              <a:srgbClr val="4FC8E8"/>
+            </a:solidFill>
+          </a:ln>
+        </p:spPr>
+        <p:txBody>
+          <a:bodyPr wrap="square" rtlCol="0" anchor="ctr"/>
+          <a:lstStyle/>
+          <a:p>
+            <a:pPr indent="0" marL="0">
+              <a:buNone/>
+            </a:pPr>
+            <a:endParaRPr lang="en-US" dirty="0"/>
+          </a:p>
+        </p:txBody>
+      </p:sp>
+      <p:sp>
+        <p:nvSpPr>
+          <p:cNvPr id="7" name="Text 4"/>
+          <p:cNvSpPr/>
+          <p:nvPr/>
+        </p:nvSpPr>
+        <p:spPr>
+          <a:xfrm>
+            <a:off x="2442552" y="1326555"/>
+            <a:ext cx="622648" cy="301625"/>
+          </a:xfrm>
+          <a:prstGeom prst="rect">
+            <a:avLst/>
+          </a:prstGeom>
+          <a:noFill/>
+          <a:ln/>
+        </p:spPr>
+        <p:txBody>
+          <a:bodyPr wrap="square" lIns="0" tIns="0" rIns="0" bIns="0" rtlCol="0" anchor="t"/>
+          <a:lstStyle/>
+          <a:p>
+            <a:pPr algn="l" indent="0" marL="0">
+              <a:lnSpc>
+                <a:spcPts val="2376"/>
+              </a:lnSpc>
+              <a:buNone/>
+            </a:pPr>
+            <a:r>
+              <a:rPr lang="en-US" sz="1533" dirty="0">
+                <a:solidFill>
+                  <a:srgbClr val="E8EEF7"/>
+                </a:solidFill>
+                <a:latin typeface="JetBrainsMono" pitchFamily="34" charset="0"/>
+                <a:ea typeface="JetBrainsMono" pitchFamily="34" charset="-122"/>
+                <a:cs typeface="JetBrainsMono" pitchFamily="34" charset="-120"/>
+              </a:rPr>
+              <a:t>EMBED</a:t>
+            </a:r>
+            <a:endParaRPr lang="en-US" sz="1533" dirty="0"/>
+          </a:p>
+        </p:txBody>
+      </p:sp>
+      <p:pic>
+        <p:nvPicPr>
+          <p:cNvPr id="8" name="Image 1" descr="preencoded.png">    </p:cNvPr>
+          <p:cNvPicPr>
+            <a:picLocks noChangeAspect="1"/>
+          </p:cNvPicPr>
+          <p:nvPr/>
+        </p:nvPicPr>
+        <p:blipFill>
+          <a:blip r:embed="rId3">
+            <a:extLst>
+              <a:ext uri="{96DAC541-7B7A-43D3-8B79-37D633B846F1}">
+                <asvg:svgBlip xmlns:asvg="http://schemas.microsoft.com/office/drawing/2016/SVG/main" r:embed="rId4"/>
+              </a:ext>
+            </a:extLst>
+          </a:blip>
+          <a:stretch>
+            <a:fillRect/>
+          </a:stretch>
+        </p:blipFill>
+        <p:spPr>
+          <a:xfrm>
+            <a:off x="3404138" y="1375767"/>
+            <a:ext cx="338450" cy="203200"/>
+          </a:xfrm>
+          <a:prstGeom prst="rect">
+            <a:avLst/>
+          </a:prstGeom>
+        </p:spPr>
+      </p:pic>
+      <p:sp>
+        <p:nvSpPr>
+          <p:cNvPr id="9" name="Text 5"/>
+          <p:cNvSpPr/>
+          <p:nvPr/>
+        </p:nvSpPr>
+        <p:spPr>
+          <a:xfrm>
+            <a:off x="3877888" y="1195387"/>
+            <a:ext cx="1042132" cy="563959"/>
+          </a:xfrm>
+          <a:prstGeom prst="rect">
+            <a:avLst/>
+          </a:prstGeom>
+          <a:noFill/>
+          <a:ln w="12698">
+            <a:solidFill>
+              <a:srgbClr val="4FC8E8"/>
+            </a:solidFill>
+          </a:ln>
+        </p:spPr>
+        <p:txBody>
+          <a:bodyPr wrap="square" rtlCol="0" anchor="ctr"/>
+          <a:lstStyle/>
+          <a:p>
+            <a:pPr indent="0" marL="0">
+              <a:buNone/>
+            </a:pPr>
+            <a:endParaRPr lang="en-US" dirty="0"/>
+          </a:p>
+        </p:txBody>
+      </p:sp>
+      <p:sp>
+        <p:nvSpPr>
+          <p:cNvPr id="10" name="Text 6"/>
+          <p:cNvSpPr/>
+          <p:nvPr/>
+        </p:nvSpPr>
+        <p:spPr>
+          <a:xfrm>
+            <a:off x="4093734" y="1326555"/>
+            <a:ext cx="622648" cy="301625"/>
+          </a:xfrm>
+          <a:prstGeom prst="rect">
+            <a:avLst/>
+          </a:prstGeom>
+          <a:noFill/>
+          <a:ln/>
+        </p:spPr>
+        <p:txBody>
+          <a:bodyPr wrap="square" lIns="0" tIns="0" rIns="0" bIns="0" rtlCol="0" anchor="t"/>
+          <a:lstStyle/>
+          <a:p>
+            <a:pPr algn="l" indent="0" marL="0">
+              <a:lnSpc>
+                <a:spcPts val="2376"/>
+              </a:lnSpc>
+              <a:buNone/>
+            </a:pPr>
+            <a:r>
+              <a:rPr lang="en-US" sz="1533" dirty="0">
+                <a:solidFill>
+                  <a:srgbClr val="E8EEF7"/>
+                </a:solidFill>
+                <a:latin typeface="JetBrainsMono" pitchFamily="34" charset="0"/>
+                <a:ea typeface="JetBrainsMono" pitchFamily="34" charset="-122"/>
+                <a:cs typeface="JetBrainsMono" pitchFamily="34" charset="-120"/>
+              </a:rPr>
+              <a:t>TOP-K</a:t>
+            </a:r>
+            <a:endParaRPr lang="en-US" sz="1533" dirty="0"/>
+          </a:p>
+        </p:txBody>
+      </p:sp>
+      <p:pic>
+        <p:nvPicPr>
+          <p:cNvPr id="11" name="Image 2" descr="preencoded.png">    </p:cNvPr>
+          <p:cNvPicPr>
+            <a:picLocks noChangeAspect="1"/>
+          </p:cNvPicPr>
+          <p:nvPr/>
+        </p:nvPicPr>
+        <p:blipFill>
+          <a:blip r:embed="rId5">
+            <a:extLst>
+              <a:ext uri="{96DAC541-7B7A-43D3-8B79-37D633B846F1}">
+                <asvg:svgBlip xmlns:asvg="http://schemas.microsoft.com/office/drawing/2016/SVG/main" r:embed="rId6"/>
+              </a:ext>
+            </a:extLst>
+          </a:blip>
+          <a:stretch>
+            <a:fillRect/>
+          </a:stretch>
+        </p:blipFill>
+        <p:spPr>
+          <a:xfrm>
+            <a:off x="5055320" y="1375767"/>
+            <a:ext cx="338450" cy="203200"/>
+          </a:xfrm>
+          <a:prstGeom prst="rect">
+            <a:avLst/>
+          </a:prstGeom>
+        </p:spPr>
+      </p:pic>
+      <p:sp>
+        <p:nvSpPr>
+          <p:cNvPr id="12" name="Text 7"/>
+          <p:cNvSpPr/>
+          <p:nvPr/>
+        </p:nvSpPr>
+        <p:spPr>
+          <a:xfrm>
+            <a:off x="5529071" y="1195387"/>
+            <a:ext cx="1286149" cy="563959"/>
+          </a:xfrm>
+          <a:prstGeom prst="rect">
+            <a:avLst/>
+          </a:prstGeom>
+          <a:noFill/>
+          <a:ln w="12698">
+            <a:solidFill>
+              <a:srgbClr val="4FC8E8"/>
+            </a:solidFill>
+          </a:ln>
+        </p:spPr>
+        <p:txBody>
+          <a:bodyPr wrap="square" rtlCol="0" anchor="ctr"/>
+          <a:lstStyle/>
+          <a:p>
+            <a:pPr indent="0" marL="0">
+              <a:buNone/>
+            </a:pPr>
+            <a:endParaRPr lang="en-US" dirty="0"/>
+          </a:p>
+        </p:txBody>
+      </p:sp>
+      <p:sp>
+        <p:nvSpPr>
+          <p:cNvPr id="13" name="Text 8"/>
+          <p:cNvSpPr/>
+          <p:nvPr/>
+        </p:nvSpPr>
+        <p:spPr>
+          <a:xfrm>
+            <a:off x="5744917" y="1326555"/>
+            <a:ext cx="871546" cy="301625"/>
+          </a:xfrm>
+          <a:prstGeom prst="rect">
+            <a:avLst/>
+          </a:prstGeom>
+          <a:noFill/>
+          <a:ln/>
+        </p:spPr>
+        <p:txBody>
+          <a:bodyPr wrap="square" lIns="0" tIns="0" rIns="0" bIns="0" rtlCol="0" anchor="t"/>
+          <a:lstStyle/>
+          <a:p>
+            <a:pPr algn="l" indent="0" marL="0">
+              <a:lnSpc>
+                <a:spcPts val="2376"/>
+              </a:lnSpc>
+              <a:buNone/>
+            </a:pPr>
+            <a:r>
+              <a:rPr lang="en-US" sz="1533" dirty="0">
+                <a:solidFill>
+                  <a:srgbClr val="E8EEF7"/>
+                </a:solidFill>
+                <a:latin typeface="JetBrainsMono" pitchFamily="34" charset="0"/>
+                <a:ea typeface="JetBrainsMono" pitchFamily="34" charset="-122"/>
+                <a:cs typeface="JetBrainsMono" pitchFamily="34" charset="-120"/>
+              </a:rPr>
+              <a:t>CONTEXT</a:t>
+            </a:r>
+            <a:endParaRPr lang="en-US" sz="1533" dirty="0"/>
+          </a:p>
+        </p:txBody>
+      </p:sp>
+      <p:pic>
+        <p:nvPicPr>
+          <p:cNvPr id="14" name="Image 3" descr="preencoded.png">    </p:cNvPr>
+          <p:cNvPicPr>
+            <a:picLocks noChangeAspect="1"/>
+          </p:cNvPicPr>
+          <p:nvPr/>
+        </p:nvPicPr>
+        <p:blipFill>
+          <a:blip r:embed="rId7">
+            <a:extLst>
+              <a:ext uri="{96DAC541-7B7A-43D3-8B79-37D633B846F1}">
+                <asvg:svgBlip xmlns:asvg="http://schemas.microsoft.com/office/drawing/2016/SVG/main" r:embed="rId8"/>
+              </a:ext>
+            </a:extLst>
+          </a:blip>
+          <a:stretch>
+            <a:fillRect/>
+          </a:stretch>
+        </p:blipFill>
+        <p:spPr>
+          <a:xfrm>
+            <a:off x="6950520" y="1375767"/>
+            <a:ext cx="338450" cy="203200"/>
+          </a:xfrm>
+          <a:prstGeom prst="rect">
+            <a:avLst/>
+          </a:prstGeom>
+        </p:spPr>
+      </p:pic>
+      <p:sp>
+        <p:nvSpPr>
+          <p:cNvPr id="15" name="Text 9"/>
+          <p:cNvSpPr/>
+          <p:nvPr/>
+        </p:nvSpPr>
+        <p:spPr>
+          <a:xfrm>
+            <a:off x="7424270" y="1195387"/>
+            <a:ext cx="1408356" cy="563959"/>
+          </a:xfrm>
+          <a:prstGeom prst="rect">
+            <a:avLst/>
+          </a:prstGeom>
+          <a:noFill/>
+          <a:ln w="12698">
+            <a:solidFill>
+              <a:srgbClr val="4FC8E8"/>
+            </a:solidFill>
+          </a:ln>
+        </p:spPr>
+        <p:txBody>
+          <a:bodyPr wrap="square" rtlCol="0" anchor="ctr"/>
+          <a:lstStyle/>
+          <a:p>
+            <a:pPr indent="0" marL="0">
+              <a:buNone/>
+            </a:pPr>
+            <a:endParaRPr lang="en-US" dirty="0"/>
+          </a:p>
+        </p:txBody>
+      </p:sp>
+      <p:sp>
+        <p:nvSpPr>
+          <p:cNvPr id="16" name="Text 10"/>
+          <p:cNvSpPr/>
+          <p:nvPr/>
+        </p:nvSpPr>
+        <p:spPr>
+          <a:xfrm>
+            <a:off x="7640116" y="1326555"/>
+            <a:ext cx="996197" cy="301625"/>
+          </a:xfrm>
+          <a:prstGeom prst="rect">
+            <a:avLst/>
+          </a:prstGeom>
+          <a:noFill/>
+          <a:ln/>
+        </p:spPr>
+        <p:txBody>
+          <a:bodyPr wrap="square" lIns="0" tIns="0" rIns="0" bIns="0" rtlCol="0" anchor="t"/>
+          <a:lstStyle/>
+          <a:p>
+            <a:pPr algn="l" indent="0" marL="0">
+              <a:lnSpc>
+                <a:spcPts val="2376"/>
+              </a:lnSpc>
+              <a:buNone/>
+            </a:pPr>
+            <a:r>
+              <a:rPr lang="en-US" sz="1533" dirty="0">
+                <a:solidFill>
+                  <a:srgbClr val="E8EEF7"/>
+                </a:solidFill>
+                <a:latin typeface="JetBrainsMono" pitchFamily="34" charset="0"/>
+                <a:ea typeface="JetBrainsMono" pitchFamily="34" charset="-122"/>
+                <a:cs typeface="JetBrainsMono" pitchFamily="34" charset="-120"/>
+              </a:rPr>
+              <a:t>GENERATE</a:t>
+            </a:r>
+            <a:endParaRPr lang="en-US" sz="1533" dirty="0"/>
+          </a:p>
+        </p:txBody>
+      </p:sp>
+      <p:sp>
+        <p:nvSpPr>
+          <p:cNvPr id="17" name="Text 11"/>
+          <p:cNvSpPr/>
+          <p:nvPr/>
+        </p:nvSpPr>
+        <p:spPr>
+          <a:xfrm>
+            <a:off x="575523" y="1894681"/>
+            <a:ext cx="11258664" cy="314920"/>
+          </a:xfrm>
+          <a:prstGeom prst="rect">
+            <a:avLst/>
+          </a:prstGeom>
+          <a:noFill/>
+          <a:ln/>
+        </p:spPr>
+        <p:txBody>
+          <a:bodyPr wrap="square" lIns="0" tIns="0" rIns="0" bIns="0" rtlCol="0" anchor="t"/>
+          <a:lstStyle/>
+          <a:p>
+            <a:pPr algn="l" indent="0" marL="0">
+              <a:lnSpc>
+                <a:spcPts val="2480"/>
+              </a:lnSpc>
+              <a:spcBef>
+                <a:spcPts val="1067"/>
+              </a:spcBef>
+              <a:buNone/>
+            </a:pPr>
+            <a:r>
+              <a:rPr lang="en-US" sz="1600" dirty="0">
+                <a:solidFill>
+                  <a:srgbClr val="8FA3C8"/>
+                </a:solidFill>
+                <a:latin typeface="Inter" pitchFamily="34" charset="0"/>
+                <a:ea typeface="Inter" pitchFamily="34" charset="-122"/>
+                <a:cs typeface="Inter" pitchFamily="34" charset="-120"/>
+              </a:rPr>
+              <a:t>ONE PASS · NO FEEDBACK — THE PIPELINE CANNOT LOOK AGAIN</a:t>
+            </a:r>
+            <a:endParaRPr lang="en-US" sz="1600" dirty="0"/>
+          </a:p>
+        </p:txBody>
+      </p:sp>
+      <p:sp>
+        <p:nvSpPr>
+          <p:cNvPr id="18" name="Text 12"/>
+          <p:cNvSpPr/>
+          <p:nvPr/>
+        </p:nvSpPr>
+        <p:spPr>
+          <a:xfrm>
+            <a:off x="575523" y="2385219"/>
+            <a:ext cx="3284030" cy="314920"/>
+          </a:xfrm>
+          <a:prstGeom prst="rect">
+            <a:avLst/>
+          </a:prstGeom>
+          <a:noFill/>
+          <a:ln/>
+        </p:spPr>
+        <p:txBody>
+          <a:bodyPr wrap="square" lIns="0" tIns="0" rIns="0" bIns="0" rtlCol="0" anchor="t"/>
+          <a:lstStyle/>
+          <a:p>
+            <a:pPr algn="l" indent="0" marL="0">
+              <a:lnSpc>
+                <a:spcPts val="2480"/>
+              </a:lnSpc>
+              <a:spcAft>
+                <a:spcPts val="1200"/>
+              </a:spcAft>
+              <a:buNone/>
+            </a:pPr>
+            <a:r>
+              <a:rPr lang="en-US" sz="1600" dirty="0">
+                <a:solidFill>
+                  <a:srgbClr val="4FC8E8"/>
+                </a:solidFill>
+                <a:latin typeface="JetBrainsMono" pitchFamily="34" charset="0"/>
+                <a:ea typeface="JetBrainsMono" pitchFamily="34" charset="-122"/>
+                <a:cs typeface="JetBrainsMono" pitchFamily="34" charset="-120"/>
+              </a:rPr>
+              <a:t>F-01</a:t>
+            </a:r>
+            <a:endParaRPr lang="en-US" sz="1600" dirty="0"/>
+          </a:p>
+        </p:txBody>
+      </p:sp>
+      <p:sp>
+        <p:nvSpPr>
+          <p:cNvPr id="19" name="Text 13"/>
+          <p:cNvSpPr/>
+          <p:nvPr/>
+        </p:nvSpPr>
+        <p:spPr>
+          <a:xfrm>
+            <a:off x="575523" y="2852539"/>
+            <a:ext cx="3284030" cy="685800"/>
+          </a:xfrm>
+          <a:prstGeom prst="rect">
+            <a:avLst/>
+          </a:prstGeom>
+          <a:noFill/>
+          <a:ln/>
+        </p:spPr>
+        <p:txBody>
+          <a:bodyPr wrap="square" lIns="0" tIns="0" rIns="0" bIns="0" rtlCol="0" anchor="t"/>
+          <a:lstStyle/>
+          <a:p>
+            <a:pPr algn="l" indent="0" marL="0">
+              <a:lnSpc>
+                <a:spcPts val="2700"/>
+              </a:lnSpc>
+              <a:spcAft>
+                <a:spcPts val="1067"/>
+              </a:spcAft>
+              <a:buNone/>
+            </a:pPr>
+            <a:r>
+              <a:rPr lang="en-US" sz="2000" b="1" dirty="0">
+                <a:solidFill>
+                  <a:srgbClr val="E8EEF7"/>
+                </a:solidFill>
+                <a:latin typeface="Inter" pitchFamily="34" charset="0"/>
+                <a:ea typeface="Inter" pitchFamily="34" charset="-122"/>
+                <a:cs typeface="Inter" pitchFamily="34" charset="-120"/>
+              </a:rPr>
+              <a:t>The question is not the query</a:t>
+            </a:r>
+            <a:endParaRPr lang="en-US" sz="2000" dirty="0"/>
+          </a:p>
+        </p:txBody>
+      </p:sp>
+      <p:sp>
+        <p:nvSpPr>
+          <p:cNvPr id="20" name="Text 14"/>
+          <p:cNvSpPr/>
+          <p:nvPr/>
+        </p:nvSpPr>
+        <p:spPr>
+          <a:xfrm>
+            <a:off x="575523" y="3673673"/>
+            <a:ext cx="3284030" cy="1066800"/>
+          </a:xfrm>
+          <a:prstGeom prst="rect">
+            <a:avLst/>
+          </a:prstGeom>
+          <a:noFill/>
+          <a:ln/>
+        </p:spPr>
+        <p:txBody>
+          <a:bodyPr wrap="square" lIns="0" tIns="0" rIns="0" bIns="0" rtlCol="0" anchor="t"/>
+          <a:lstStyle/>
+          <a:p>
+            <a:pPr algn="l" indent="0" marL="0">
+              <a:lnSpc>
+                <a:spcPts val="2800"/>
+              </a:lnSpc>
+              <a:buNone/>
+            </a:pPr>
+            <a:r>
+              <a:rPr lang="en-US" sz="1866" dirty="0">
+                <a:solidFill>
+                  <a:srgbClr val="8FA3C8"/>
+                </a:solidFill>
+                <a:latin typeface="Inter" pitchFamily="34" charset="0"/>
+                <a:ea typeface="Inter" pitchFamily="34" charset="-122"/>
+                <a:cs typeface="Inter" pitchFamily="34" charset="-120"/>
+              </a:rPr>
+              <a:t>The user asks in their words; the corpus is written in someone else’s.</a:t>
+            </a:r>
+            <a:endParaRPr lang="en-US" sz="1866" dirty="0"/>
+          </a:p>
+        </p:txBody>
+      </p:sp>
+      <p:sp>
+        <p:nvSpPr>
+          <p:cNvPr id="21" name="Shape 15"/>
+          <p:cNvSpPr/>
+          <p:nvPr/>
+        </p:nvSpPr>
+        <p:spPr>
+          <a:xfrm>
+            <a:off x="4139959" y="2378869"/>
+            <a:ext cx="0" cy="2367955"/>
+          </a:xfrm>
+          <a:prstGeom prst="line">
+            <a:avLst/>
+          </a:prstGeom>
+          <a:noFill/>
+          <a:ln w="12698">
+            <a:solidFill>
+              <a:srgbClr val="2A4A8C"/>
+            </a:solidFill>
+            <a:prstDash val="solid"/>
+          </a:ln>
+        </p:spPr>
+      </p:sp>
+      <p:sp>
+        <p:nvSpPr>
+          <p:cNvPr id="22" name="Text 16"/>
+          <p:cNvSpPr/>
+          <p:nvPr/>
+        </p:nvSpPr>
+        <p:spPr>
+          <a:xfrm>
+            <a:off x="4484757" y="2378869"/>
+            <a:ext cx="3284030" cy="314920"/>
+          </a:xfrm>
+          <a:prstGeom prst="rect">
+            <a:avLst/>
+          </a:prstGeom>
+          <a:noFill/>
+          <a:ln/>
+        </p:spPr>
+        <p:txBody>
+          <a:bodyPr wrap="square" lIns="0" tIns="0" rIns="0" bIns="0" rtlCol="0" anchor="t"/>
+          <a:lstStyle/>
+          <a:p>
+            <a:pPr algn="l" indent="0" marL="0">
+              <a:lnSpc>
+                <a:spcPts val="2480"/>
+              </a:lnSpc>
+              <a:spcAft>
+                <a:spcPts val="1200"/>
+              </a:spcAft>
+              <a:buNone/>
+            </a:pPr>
+            <a:r>
+              <a:rPr lang="en-US" sz="1600" dirty="0">
+                <a:solidFill>
+                  <a:srgbClr val="4FC8E8"/>
+                </a:solidFill>
+                <a:latin typeface="JetBrainsMono" pitchFamily="34" charset="0"/>
+                <a:ea typeface="JetBrainsMono" pitchFamily="34" charset="-122"/>
+                <a:cs typeface="JetBrainsMono" pitchFamily="34" charset="-120"/>
+              </a:rPr>
+              <a:t>F-02</a:t>
+            </a:r>
+            <a:endParaRPr lang="en-US" sz="1600" dirty="0"/>
+          </a:p>
+        </p:txBody>
+      </p:sp>
+      <p:sp>
+        <p:nvSpPr>
+          <p:cNvPr id="23" name="Text 17"/>
+          <p:cNvSpPr/>
+          <p:nvPr/>
+        </p:nvSpPr>
+        <p:spPr>
+          <a:xfrm>
+            <a:off x="4484757" y="2846189"/>
+            <a:ext cx="3284030" cy="342900"/>
+          </a:xfrm>
+          <a:prstGeom prst="rect">
+            <a:avLst/>
+          </a:prstGeom>
+          <a:noFill/>
+          <a:ln/>
+        </p:spPr>
+        <p:txBody>
+          <a:bodyPr wrap="square" lIns="0" tIns="0" rIns="0" bIns="0" rtlCol="0" anchor="t"/>
+          <a:lstStyle/>
+          <a:p>
+            <a:pPr algn="l" indent="0" marL="0">
+              <a:lnSpc>
+                <a:spcPts val="2700"/>
+              </a:lnSpc>
+              <a:spcAft>
+                <a:spcPts val="1067"/>
+              </a:spcAft>
+              <a:buNone/>
+            </a:pPr>
+            <a:r>
+              <a:rPr lang="en-US" sz="2000" b="1" dirty="0">
+                <a:solidFill>
+                  <a:srgbClr val="E8EEF7"/>
+                </a:solidFill>
+                <a:latin typeface="Inter" pitchFamily="34" charset="0"/>
+                <a:ea typeface="Inter" pitchFamily="34" charset="-122"/>
+                <a:cs typeface="Inter" pitchFamily="34" charset="-120"/>
+              </a:rPr>
+              <a:t>One hop is not enough</a:t>
+            </a:r>
+            <a:endParaRPr lang="en-US" sz="2000" dirty="0"/>
+          </a:p>
+        </p:txBody>
+      </p:sp>
+      <p:sp>
+        <p:nvSpPr>
+          <p:cNvPr id="24" name="Text 18"/>
+          <p:cNvSpPr/>
+          <p:nvPr/>
+        </p:nvSpPr>
+        <p:spPr>
+          <a:xfrm>
+            <a:off x="4484757" y="3324423"/>
+            <a:ext cx="3284030" cy="1422400"/>
+          </a:xfrm>
+          <a:prstGeom prst="rect">
+            <a:avLst/>
+          </a:prstGeom>
+          <a:noFill/>
+          <a:ln/>
+        </p:spPr>
+        <p:txBody>
+          <a:bodyPr wrap="square" lIns="0" tIns="0" rIns="0" bIns="0" rtlCol="0" anchor="t"/>
+          <a:lstStyle/>
+          <a:p>
+            <a:pPr algn="l" indent="0" marL="0">
+              <a:lnSpc>
+                <a:spcPts val="2800"/>
+              </a:lnSpc>
+              <a:buNone/>
+            </a:pPr>
+            <a:r>
+              <a:rPr lang="en-US" sz="1866" dirty="0">
+                <a:solidFill>
+                  <a:srgbClr val="8FA3C8"/>
+                </a:solidFill>
+                <a:latin typeface="Inter" pitchFamily="34" charset="0"/>
+                <a:ea typeface="Inter" pitchFamily="34" charset="-122"/>
+                <a:cs typeface="Inter" pitchFamily="34" charset="-120"/>
+              </a:rPr>
+              <a:t>An answer that requires joining two documents cannot be retrieved in one shot.</a:t>
+            </a:r>
+            <a:endParaRPr lang="en-US" sz="1866" dirty="0"/>
+          </a:p>
+        </p:txBody>
+      </p:sp>
+      <p:sp>
+        <p:nvSpPr>
+          <p:cNvPr id="25" name="Shape 19"/>
+          <p:cNvSpPr/>
+          <p:nvPr/>
+        </p:nvSpPr>
+        <p:spPr>
+          <a:xfrm>
+            <a:off x="8049192" y="2385219"/>
+            <a:ext cx="0" cy="2355255"/>
+          </a:xfrm>
+          <a:prstGeom prst="line">
+            <a:avLst/>
+          </a:prstGeom>
+          <a:noFill/>
+          <a:ln w="12698">
+            <a:solidFill>
+              <a:srgbClr val="2A4A8C"/>
+            </a:solidFill>
+            <a:prstDash val="solid"/>
+          </a:ln>
+        </p:spPr>
+      </p:sp>
+      <p:sp>
+        <p:nvSpPr>
+          <p:cNvPr id="26" name="Text 20"/>
+          <p:cNvSpPr/>
+          <p:nvPr/>
+        </p:nvSpPr>
+        <p:spPr>
+          <a:xfrm>
+            <a:off x="8393990" y="2385219"/>
+            <a:ext cx="3284030" cy="314920"/>
+          </a:xfrm>
+          <a:prstGeom prst="rect">
+            <a:avLst/>
+          </a:prstGeom>
+          <a:noFill/>
+          <a:ln/>
+        </p:spPr>
+        <p:txBody>
+          <a:bodyPr wrap="square" lIns="0" tIns="0" rIns="0" bIns="0" rtlCol="0" anchor="t"/>
+          <a:lstStyle/>
+          <a:p>
+            <a:pPr algn="l" indent="0" marL="0">
+              <a:lnSpc>
+                <a:spcPts val="2480"/>
+              </a:lnSpc>
+              <a:spcAft>
+                <a:spcPts val="1200"/>
+              </a:spcAft>
+              <a:buNone/>
+            </a:pPr>
+            <a:r>
+              <a:rPr lang="en-US" sz="1600" dirty="0">
+                <a:solidFill>
+                  <a:srgbClr val="4FC8E8"/>
+                </a:solidFill>
+                <a:latin typeface="JetBrainsMono" pitchFamily="34" charset="0"/>
+                <a:ea typeface="JetBrainsMono" pitchFamily="34" charset="-122"/>
+                <a:cs typeface="JetBrainsMono" pitchFamily="34" charset="-120"/>
+              </a:rPr>
+              <a:t>F-03</a:t>
+            </a:r>
+            <a:endParaRPr lang="en-US" sz="1600" dirty="0"/>
+          </a:p>
+        </p:txBody>
+      </p:sp>
+      <p:sp>
+        <p:nvSpPr>
+          <p:cNvPr id="27" name="Text 21"/>
+          <p:cNvSpPr/>
+          <p:nvPr/>
+        </p:nvSpPr>
+        <p:spPr>
+          <a:xfrm>
+            <a:off x="8393990" y="2852539"/>
+            <a:ext cx="3284030" cy="685800"/>
+          </a:xfrm>
+          <a:prstGeom prst="rect">
+            <a:avLst/>
+          </a:prstGeom>
+          <a:noFill/>
+          <a:ln/>
+        </p:spPr>
+        <p:txBody>
+          <a:bodyPr wrap="square" lIns="0" tIns="0" rIns="0" bIns="0" rtlCol="0" anchor="t"/>
+          <a:lstStyle/>
+          <a:p>
+            <a:pPr algn="l" indent="0" marL="0">
+              <a:lnSpc>
+                <a:spcPts val="2700"/>
+              </a:lnSpc>
+              <a:spcAft>
+                <a:spcPts val="1067"/>
+              </a:spcAft>
+              <a:buNone/>
+            </a:pPr>
+            <a:r>
+              <a:rPr lang="en-US" sz="2000" b="1" dirty="0">
+                <a:solidFill>
+                  <a:srgbClr val="E8EEF7"/>
+                </a:solidFill>
+                <a:latin typeface="Inter" pitchFamily="34" charset="0"/>
+                <a:ea typeface="Inter" pitchFamily="34" charset="-122"/>
+                <a:cs typeface="Inter" pitchFamily="34" charset="-120"/>
+              </a:rPr>
+              <a:t>Nothing can notice the miss</a:t>
+            </a:r>
+            <a:endParaRPr lang="en-US" sz="2000" dirty="0"/>
+          </a:p>
+        </p:txBody>
+      </p:sp>
+      <p:sp>
+        <p:nvSpPr>
+          <p:cNvPr id="28" name="Text 22"/>
+          <p:cNvSpPr/>
+          <p:nvPr/>
+        </p:nvSpPr>
+        <p:spPr>
+          <a:xfrm>
+            <a:off x="8393990" y="3673673"/>
+            <a:ext cx="3284030" cy="1066800"/>
+          </a:xfrm>
+          <a:prstGeom prst="rect">
+            <a:avLst/>
+          </a:prstGeom>
+          <a:noFill/>
+          <a:ln/>
+        </p:spPr>
+        <p:txBody>
+          <a:bodyPr wrap="square" lIns="0" tIns="0" rIns="0" bIns="0" rtlCol="0" anchor="t"/>
+          <a:lstStyle/>
+          <a:p>
+            <a:pPr algn="l" indent="0" marL="0">
+              <a:lnSpc>
+                <a:spcPts val="2800"/>
+              </a:lnSpc>
+              <a:buNone/>
+            </a:pPr>
+            <a:r>
+              <a:rPr lang="en-US" sz="1866" dirty="0">
+                <a:solidFill>
+                  <a:srgbClr val="8FA3C8"/>
+                </a:solidFill>
+                <a:latin typeface="Inter" pitchFamily="34" charset="0"/>
+                <a:ea typeface="Inter" pitchFamily="34" charset="-122"/>
+                <a:cs typeface="Inter" pitchFamily="34" charset="-120"/>
+              </a:rPr>
+              <a:t>Retrieval always returns its top k. Nothing can say the evidence is not enough.</a:t>
+            </a:r>
+            <a:endParaRPr lang="en-US" sz="1866" dirty="0"/>
+          </a:p>
+        </p:txBody>
+      </p:sp>
+      <p:sp>
+        <p:nvSpPr>
+          <p:cNvPr id="29" name="Text 23"/>
+          <p:cNvSpPr/>
+          <p:nvPr/>
+        </p:nvSpPr>
+        <p:spPr>
+          <a:xfrm>
+            <a:off x="575523" y="4882158"/>
+            <a:ext cx="11037905" cy="1098947"/>
+          </a:xfrm>
+          <a:prstGeom prst="rect">
+            <a:avLst/>
+          </a:prstGeom>
+          <a:solidFill>
+            <a:srgbClr val="4FC8E8">
+              <a:alpha val="12000"/>
+            </a:srgbClr>
+          </a:solidFill>
+          <a:ln/>
+        </p:spPr>
+        <p:txBody>
+          <a:bodyPr wrap="square" rtlCol="0" anchor="ctr"/>
+          <a:lstStyle/>
+          <a:p>
+            <a:pPr indent="0" marL="0">
+              <a:buNone/>
+            </a:pPr>
+            <a:endParaRPr lang="en-US" dirty="0"/>
+          </a:p>
+        </p:txBody>
+      </p:sp>
+      <p:sp>
+        <p:nvSpPr>
+          <p:cNvPr id="30" name="Shape 24"/>
+          <p:cNvSpPr/>
+          <p:nvPr/>
+        </p:nvSpPr>
+        <p:spPr>
+          <a:xfrm>
+            <a:off x="575523" y="4888508"/>
+            <a:ext cx="11037905" cy="0"/>
+          </a:xfrm>
+          <a:prstGeom prst="line">
+            <a:avLst/>
+          </a:prstGeom>
+          <a:noFill/>
+          <a:ln w="12698">
+            <a:solidFill>
+              <a:srgbClr val="4FC8E8"/>
+            </a:solidFill>
+            <a:prstDash val="solid"/>
+          </a:ln>
+        </p:spPr>
+      </p:sp>
+      <p:sp>
+        <p:nvSpPr>
+          <p:cNvPr id="31" name="Shape 25"/>
+          <p:cNvSpPr/>
+          <p:nvPr/>
+        </p:nvSpPr>
+        <p:spPr>
+          <a:xfrm>
+            <a:off x="11607080" y="4882158"/>
+            <a:ext cx="0" cy="1098947"/>
+          </a:xfrm>
+          <a:prstGeom prst="line">
+            <a:avLst/>
+          </a:prstGeom>
+          <a:noFill/>
+          <a:ln w="12698">
+            <a:solidFill>
+              <a:srgbClr val="4FC8E8"/>
+            </a:solidFill>
+            <a:prstDash val="solid"/>
+          </a:ln>
+        </p:spPr>
+      </p:sp>
+      <p:sp>
+        <p:nvSpPr>
+          <p:cNvPr id="32" name="Shape 26"/>
+          <p:cNvSpPr/>
+          <p:nvPr/>
+        </p:nvSpPr>
+        <p:spPr>
+          <a:xfrm>
+            <a:off x="575523" y="5974755"/>
+            <a:ext cx="11037905" cy="0"/>
+          </a:xfrm>
+          <a:prstGeom prst="line">
+            <a:avLst/>
+          </a:prstGeom>
+          <a:noFill/>
+          <a:ln w="12698">
+            <a:solidFill>
+              <a:srgbClr val="4FC8E8"/>
+            </a:solidFill>
+            <a:prstDash val="solid"/>
+          </a:ln>
+        </p:spPr>
+      </p:sp>
+      <p:sp>
+        <p:nvSpPr>
+          <p:cNvPr id="33" name="Shape 27"/>
+          <p:cNvSpPr/>
+          <p:nvPr/>
+        </p:nvSpPr>
+        <p:spPr>
+          <a:xfrm>
+            <a:off x="600917" y="4882158"/>
+            <a:ext cx="0" cy="1098947"/>
+          </a:xfrm>
+          <a:prstGeom prst="line">
+            <a:avLst/>
+          </a:prstGeom>
+          <a:noFill/>
+          <a:ln w="50794">
+            <a:solidFill>
+              <a:srgbClr val="4FC8E8"/>
+            </a:solidFill>
+            <a:prstDash val="solid"/>
+          </a:ln>
+        </p:spPr>
+      </p:sp>
+      <p:sp>
+        <p:nvSpPr>
+          <p:cNvPr id="34" name="Text 28"/>
+          <p:cNvSpPr/>
+          <p:nvPr/>
+        </p:nvSpPr>
+        <p:spPr>
+          <a:xfrm>
+            <a:off x="880247" y="5064125"/>
+            <a:ext cx="10675879" cy="735013"/>
+          </a:xfrm>
+          <a:prstGeom prst="rect">
+            <a:avLst/>
+          </a:prstGeom>
+          <a:noFill/>
+          <a:ln/>
+        </p:spPr>
+        <p:txBody>
+          <a:bodyPr wrap="square" lIns="0" tIns="0" rIns="0" bIns="0" rtlCol="0" anchor="t"/>
+          <a:lstStyle/>
+          <a:p>
+            <a:pPr algn="l" indent="0" marL="0">
+              <a:lnSpc>
+                <a:spcPts val="2893"/>
+              </a:lnSpc>
+              <a:buNone/>
+            </a:pPr>
+            <a:r>
+              <a:rPr lang="en-US" sz="1866" dirty="0">
+                <a:solidFill>
+                  <a:srgbClr val="E8EEF7"/>
+                </a:solidFill>
+                <a:latin typeface="Inter" pitchFamily="34" charset="0"/>
+                <a:ea typeface="Inter" pitchFamily="34" charset="-122"/>
+                <a:cs typeface="Inter" pitchFamily="34" charset="-120"/>
+              </a:rPr>
+              <a:t>Classic RAG assumes the first retrieval was the right one. No part of the pipeline is able to disagree.</a:t>
+            </a:r>
+            <a:endParaRPr lang="en-US" sz="1866" dirty="0"/>
+          </a:p>
+        </p:txBody>
+      </p:sp>
+      <p:sp>
+        <p:nvSpPr>
+          <p:cNvPr id="35" name="Text 29"/>
+          <p:cNvSpPr/>
+          <p:nvPr/>
+        </p:nvSpPr>
+        <p:spPr>
+          <a:xfrm>
+            <a:off x="6363490" y="5981502"/>
+            <a:ext cx="5249939" cy="465138"/>
+          </a:xfrm>
+          <a:prstGeom prst="rect">
+            <a:avLst/>
+          </a:prstGeom>
+          <a:noFill/>
+          <a:ln w="12698">
+            <a:solidFill>
+              <a:srgbClr val="4FC8E8"/>
+            </a:solidFill>
+          </a:ln>
+        </p:spPr>
+        <p:txBody>
+          <a:bodyPr wrap="square" rtlCol="0" anchor="ctr"/>
+          <a:lstStyle/>
+          <a:p>
+            <a:pPr indent="0" marL="0">
+              <a:buNone/>
+            </a:pPr>
+            <a:endParaRPr lang="en-US" dirty="0"/>
+          </a:p>
+        </p:txBody>
+      </p:sp>
+      <p:sp>
+        <p:nvSpPr>
+          <p:cNvPr id="36" name="Text 30"/>
+          <p:cNvSpPr/>
+          <p:nvPr/>
+        </p:nvSpPr>
+        <p:spPr>
+          <a:xfrm>
+            <a:off x="6562275" y="6078736"/>
+            <a:ext cx="207212" cy="270669"/>
+          </a:xfrm>
+          <a:prstGeom prst="rect">
+            <a:avLst/>
+          </a:prstGeom>
+          <a:noFill/>
+          <a:ln/>
+        </p:spPr>
+        <p:txBody>
+          <a:bodyPr wrap="square" lIns="0" tIns="0" rIns="0" bIns="0" rtlCol="0" anchor="t"/>
+          <a:lstStyle/>
+          <a:p>
+            <a:pPr algn="l" indent="0" marL="0">
+              <a:lnSpc>
+                <a:spcPts val="2133"/>
+              </a:lnSpc>
+              <a:buNone/>
+            </a:pPr>
+            <a:r>
+              <a:rPr lang="en-US" sz="1333" dirty="0">
+                <a:solidFill>
+                  <a:srgbClr val="4FC8E8"/>
+                </a:solidFill>
+                <a:latin typeface="JetBrainsMono" pitchFamily="34" charset="0"/>
+                <a:ea typeface="JetBrainsMono" pitchFamily="34" charset="-122"/>
+                <a:cs typeface="JetBrainsMono" pitchFamily="34" charset="-120"/>
+              </a:rPr>
+              <a:t>02</a:t>
+            </a:r>
+            <a:endParaRPr lang="en-US" sz="1333" dirty="0"/>
+          </a:p>
+        </p:txBody>
+      </p:sp>
+      <p:sp>
+        <p:nvSpPr>
+          <p:cNvPr id="37" name="Shape 31"/>
+          <p:cNvSpPr/>
+          <p:nvPr/>
+        </p:nvSpPr>
+        <p:spPr>
+          <a:xfrm>
+            <a:off x="6957860" y="5994202"/>
+            <a:ext cx="0" cy="439737"/>
+          </a:xfrm>
+          <a:prstGeom prst="line">
+            <a:avLst/>
+          </a:prstGeom>
+          <a:noFill/>
+          <a:ln w="12698">
+            <a:solidFill>
+              <a:srgbClr val="4FC8E8"/>
+            </a:solidFill>
+            <a:prstDash val="solid"/>
+          </a:ln>
+        </p:spPr>
+      </p:sp>
+      <p:sp>
+        <p:nvSpPr>
+          <p:cNvPr id="38" name="Text 32"/>
+          <p:cNvSpPr/>
+          <p:nvPr/>
+        </p:nvSpPr>
+        <p:spPr>
+          <a:xfrm>
+            <a:off x="7150296" y="6078736"/>
+            <a:ext cx="2817398" cy="270669"/>
+          </a:xfrm>
+          <a:prstGeom prst="rect">
+            <a:avLst/>
+          </a:prstGeom>
+          <a:noFill/>
+          <a:ln/>
+        </p:spPr>
+        <p:txBody>
+          <a:bodyPr wrap="square" lIns="0" tIns="0" rIns="0" bIns="0" rtlCol="0" anchor="t"/>
+          <a:lstStyle/>
+          <a:p>
+            <a:pPr algn="l" indent="0" marL="0">
+              <a:lnSpc>
+                <a:spcPts val="2133"/>
+              </a:lnSpc>
+              <a:buNone/>
+            </a:pPr>
+            <a:r>
+              <a:rPr lang="en-US" sz="1333" dirty="0">
+                <a:solidFill>
+                  <a:srgbClr val="E8EEF7"/>
+                </a:solidFill>
+                <a:latin typeface="Inter" pitchFamily="34" charset="0"/>
+                <a:ea typeface="Inter" pitchFamily="34" charset="-122"/>
+                <a:cs typeface="Inter" pitchFamily="34" charset="-120"/>
+              </a:rPr>
+              <a:t>WHERE CLASSIC RAG STOPS</a:t>
+            </a:r>
+            <a:endParaRPr lang="en-US" sz="1333" dirty="0"/>
+          </a:p>
+        </p:txBody>
+      </p:sp>
+      <p:sp>
+        <p:nvSpPr>
+          <p:cNvPr id="39" name="Shape 33"/>
+          <p:cNvSpPr/>
+          <p:nvPr/>
+        </p:nvSpPr>
+        <p:spPr>
+          <a:xfrm>
+            <a:off x="10104887" y="5994202"/>
+            <a:ext cx="0" cy="439737"/>
+          </a:xfrm>
+          <a:prstGeom prst="line">
+            <a:avLst/>
+          </a:prstGeom>
+          <a:noFill/>
+          <a:ln w="12698">
+            <a:solidFill>
+              <a:srgbClr val="4FC8E8"/>
+            </a:solidFill>
+            <a:prstDash val="solid"/>
+          </a:ln>
+        </p:spPr>
+      </p:sp>
+      <p:sp>
+        <p:nvSpPr>
+          <p:cNvPr id="40" name="Text 34"/>
+          <p:cNvSpPr/>
+          <p:nvPr/>
+        </p:nvSpPr>
+        <p:spPr>
+          <a:xfrm>
+            <a:off x="10297323" y="6078736"/>
+            <a:ext cx="1139667" cy="270669"/>
+          </a:xfrm>
+          <a:prstGeom prst="rect">
+            <a:avLst/>
+          </a:prstGeom>
+          <a:noFill/>
+          <a:ln/>
+        </p:spPr>
+        <p:txBody>
+          <a:bodyPr wrap="square" lIns="0" tIns="0" rIns="0" bIns="0" rtlCol="0" anchor="t"/>
+          <a:lstStyle/>
+          <a:p>
+            <a:pPr algn="l" indent="0" marL="0">
+              <a:lnSpc>
+                <a:spcPts val="2133"/>
+              </a:lnSpc>
+              <a:buNone/>
+            </a:pPr>
+            <a:r>
+              <a:rPr lang="en-US" sz="1333" dirty="0">
+                <a:solidFill>
+                  <a:srgbClr val="8FA3C8"/>
+                </a:solidFill>
+                <a:latin typeface="JetBrainsMono" pitchFamily="34" charset="0"/>
+                <a:ea typeface="JetBrainsMono" pitchFamily="34" charset="-122"/>
+                <a:cs typeface="JetBrainsMono" pitchFamily="34" charset="-120"/>
+              </a:rPr>
+              <a:t>SHEET 02/06</a:t>
+            </a:r>
+            <a:endParaRPr lang="en-US" sz="1333" dirty="0"/>
+          </a:p>
+        </p:txBody>
+      </p:sp>
     </p:spTree>
   </p:cSld>
   <p:clrMapOvr>
@@ -1397,6 +3422,13 @@
 <file path=ppt/slides/slide3.xml><?xml version="1.0" encoding="utf-8"?>
 <p:sld xmlns:a="http://schemas.openxmlformats.org/drawingml/2006/main" xmlns:r="http://schemas.openxmlformats.org/officeDocument/2006/relationships" xmlns:p="http://schemas.openxmlformats.org/presentationml/2006/main">
   <p:cSld name="Slide 3">
+    <p:bg>
+      <p:bgPr>
+        <a:solidFill>
+          <a:srgbClr val="0E1B3D"/>
+        </a:solidFill>
+      </p:bgPr>
+    </p:bg>
     <p:spTree>
       <p:nvGrpSpPr>
         <p:cNvPr id="1" name=""/>
@@ -1411,30 +3443,1211 @@
           <a:chExt cx="0" cy="0"/>
         </a:xfrm>
       </p:grpSpPr>
+      <p:sp>
+        <p:nvSpPr>
+          <p:cNvPr id="2" name="Text 0"/>
+          <p:cNvSpPr/>
+          <p:nvPr/>
+        </p:nvSpPr>
+        <p:spPr>
+          <a:xfrm>
+            <a:off x="575523" y="508000"/>
+            <a:ext cx="11258664" cy="484187"/>
+          </a:xfrm>
+          <a:prstGeom prst="rect">
+            <a:avLst/>
+          </a:prstGeom>
+          <a:noFill/>
+          <a:ln/>
+        </p:spPr>
+        <p:txBody>
+          <a:bodyPr wrap="square" lIns="0" tIns="0" rIns="0" bIns="0" rtlCol="0" anchor="t"/>
+          <a:lstStyle/>
+          <a:p>
+            <a:pPr algn="l" indent="0" marL="0">
+              <a:lnSpc>
+                <a:spcPts val="3813"/>
+              </a:lnSpc>
+              <a:spcAft>
+                <a:spcPts val="2133"/>
+              </a:spcAft>
+              <a:buNone/>
+            </a:pPr>
+            <a:r>
+              <a:rPr lang="en-US" sz="2933" dirty="0">
+                <a:solidFill>
+                  <a:srgbClr val="E8EEF7"/>
+                </a:solidFill>
+                <a:latin typeface="Inter" pitchFamily="34" charset="0"/>
+                <a:ea typeface="Inter" pitchFamily="34" charset="-122"/>
+                <a:cs typeface="Inter" pitchFamily="34" charset="-120"/>
+              </a:rPr>
+              <a:t>The shift: retrieval becomes a loop</a:t>
+            </a:r>
+            <a:endParaRPr lang="en-US" sz="2933" dirty="0"/>
+          </a:p>
+        </p:txBody>
+      </p:sp>
+      <p:sp>
+        <p:nvSpPr>
+          <p:cNvPr id="3" name="Text 1"/>
+          <p:cNvSpPr/>
+          <p:nvPr/>
+        </p:nvSpPr>
+        <p:spPr>
+          <a:xfrm>
+            <a:off x="575523" y="1263055"/>
+            <a:ext cx="2429458" cy="2810470"/>
+          </a:xfrm>
+          <a:prstGeom prst="rect">
+            <a:avLst/>
+          </a:prstGeom>
+          <a:noFill/>
+          <a:ln w="12698">
+            <a:solidFill>
+              <a:srgbClr val="4FC8E8"/>
+            </a:solidFill>
+          </a:ln>
+        </p:spPr>
+        <p:txBody>
+          <a:bodyPr wrap="square" rtlCol="0" anchor="ctr"/>
+          <a:lstStyle/>
+          <a:p>
+            <a:pPr indent="0" marL="0">
+              <a:buNone/>
+            </a:pPr>
+            <a:endParaRPr lang="en-US" dirty="0"/>
+          </a:p>
+        </p:txBody>
+      </p:sp>
+      <p:sp>
+        <p:nvSpPr>
+          <p:cNvPr id="4" name="Text 2"/>
+          <p:cNvSpPr/>
+          <p:nvPr/>
+        </p:nvSpPr>
+        <p:spPr>
+          <a:xfrm>
+            <a:off x="825095" y="1495822"/>
+            <a:ext cx="1968920" cy="314920"/>
+          </a:xfrm>
+          <a:prstGeom prst="rect">
+            <a:avLst/>
+          </a:prstGeom>
+          <a:noFill/>
+          <a:ln/>
+        </p:spPr>
+        <p:txBody>
+          <a:bodyPr wrap="square" lIns="0" tIns="0" rIns="0" bIns="0" rtlCol="0" anchor="t"/>
+          <a:lstStyle/>
+          <a:p>
+            <a:pPr algn="l" indent="0" marL="0">
+              <a:lnSpc>
+                <a:spcPts val="2480"/>
+              </a:lnSpc>
+              <a:spcAft>
+                <a:spcPts val="1200"/>
+              </a:spcAft>
+              <a:buNone/>
+            </a:pPr>
+            <a:r>
+              <a:rPr lang="en-US" sz="1600" dirty="0">
+                <a:solidFill>
+                  <a:srgbClr val="4FC8E8"/>
+                </a:solidFill>
+                <a:latin typeface="JetBrainsMono" pitchFamily="34" charset="0"/>
+                <a:ea typeface="JetBrainsMono" pitchFamily="34" charset="-122"/>
+                <a:cs typeface="JetBrainsMono" pitchFamily="34" charset="-120"/>
+              </a:rPr>
+              <a:t>01</a:t>
+            </a:r>
+            <a:endParaRPr lang="en-US" sz="1600" dirty="0"/>
+          </a:p>
+        </p:txBody>
+      </p:sp>
+      <p:sp>
+        <p:nvSpPr>
+          <p:cNvPr id="5" name="Text 3"/>
+          <p:cNvSpPr/>
+          <p:nvPr/>
+        </p:nvSpPr>
+        <p:spPr>
+          <a:xfrm>
+            <a:off x="825095" y="1963142"/>
+            <a:ext cx="1968920" cy="367506"/>
+          </a:xfrm>
+          <a:prstGeom prst="rect">
+            <a:avLst/>
+          </a:prstGeom>
+          <a:noFill/>
+          <a:ln/>
+        </p:spPr>
+        <p:txBody>
+          <a:bodyPr wrap="square" lIns="0" tIns="0" rIns="0" bIns="0" rtlCol="0" anchor="t"/>
+          <a:lstStyle/>
+          <a:p>
+            <a:pPr algn="l" indent="0" marL="0">
+              <a:lnSpc>
+                <a:spcPts val="2893"/>
+              </a:lnSpc>
+              <a:spcAft>
+                <a:spcPts val="1067"/>
+              </a:spcAft>
+              <a:buNone/>
+            </a:pPr>
+            <a:r>
+              <a:rPr lang="en-US" sz="1866" dirty="0">
+                <a:solidFill>
+                  <a:srgbClr val="E8EEF7"/>
+                </a:solidFill>
+                <a:latin typeface="JetBrainsMono" pitchFamily="34" charset="0"/>
+                <a:ea typeface="JetBrainsMono" pitchFamily="34" charset="-122"/>
+                <a:cs typeface="JetBrainsMono" pitchFamily="34" charset="-120"/>
+              </a:rPr>
+              <a:t>PLAN</a:t>
+            </a:r>
+            <a:endParaRPr lang="en-US" sz="1866" dirty="0"/>
+          </a:p>
+        </p:txBody>
+      </p:sp>
+      <p:sp>
+        <p:nvSpPr>
+          <p:cNvPr id="6" name="Text 4"/>
+          <p:cNvSpPr/>
+          <p:nvPr/>
+        </p:nvSpPr>
+        <p:spPr>
+          <a:xfrm>
+            <a:off x="825095" y="2465983"/>
+            <a:ext cx="1968920" cy="1031081"/>
+          </a:xfrm>
+          <a:prstGeom prst="rect">
+            <a:avLst/>
+          </a:prstGeom>
+          <a:noFill/>
+          <a:ln/>
+        </p:spPr>
+        <p:txBody>
+          <a:bodyPr wrap="square" lIns="0" tIns="0" rIns="0" bIns="0" rtlCol="0" anchor="t"/>
+          <a:lstStyle/>
+          <a:p>
+            <a:pPr algn="l" indent="0" marL="0">
+              <a:lnSpc>
+                <a:spcPts val="2706"/>
+              </a:lnSpc>
+              <a:buNone/>
+            </a:pPr>
+            <a:r>
+              <a:rPr lang="en-US" sz="1866" dirty="0">
+                <a:solidFill>
+                  <a:srgbClr val="8FA3C8"/>
+                </a:solidFill>
+                <a:latin typeface="Inter" pitchFamily="34" charset="0"/>
+                <a:ea typeface="Inter" pitchFamily="34" charset="-122"/>
+                <a:cs typeface="Inter" pitchFamily="34" charset="-120"/>
+              </a:rPr>
+              <a:t>Decide what to look for, and in which source.</a:t>
+            </a:r>
+            <a:endParaRPr lang="en-US" sz="1866" dirty="0"/>
+          </a:p>
+        </p:txBody>
+      </p:sp>
       <p:pic>
         <p:nvPicPr>
-          <p:cNvPr id="2" name="Image 0" descr="/tmp/slide-1787840614879-k4xa6d5583.png">    </p:cNvPr>
+          <p:cNvPr id="7" name="Image 0" descr="preencoded.png">    </p:cNvPr>
           <p:cNvPicPr>
             <a:picLocks noChangeAspect="1"/>
           </p:cNvPicPr>
           <p:nvPr/>
         </p:nvPicPr>
         <p:blipFill>
-          <a:blip r:embed="rId1"/>
+          <a:blip r:embed="rId1">
+            <a:extLst>
+              <a:ext uri="{96DAC541-7B7A-43D3-8B79-37D633B846F1}">
+                <asvg:svgBlip xmlns:asvg="http://schemas.microsoft.com/office/drawing/2016/SVG/main" r:embed="rId2"/>
+              </a:ext>
+            </a:extLst>
+          </a:blip>
           <a:stretch>
             <a:fillRect/>
           </a:stretch>
         </p:blipFill>
         <p:spPr>
           <a:xfrm>
-            <a:off x="0" y="0"/>
-            <a:ext cx="12188952" cy="6858000"/>
+            <a:off x="3004981" y="2566591"/>
+            <a:ext cx="440024" cy="203200"/>
           </a:xfrm>
           <a:prstGeom prst="rect">
             <a:avLst/>
           </a:prstGeom>
         </p:spPr>
       </p:pic>
+      <p:sp>
+        <p:nvSpPr>
+          <p:cNvPr id="8" name="Text 5"/>
+          <p:cNvSpPr/>
+          <p:nvPr/>
+        </p:nvSpPr>
+        <p:spPr>
+          <a:xfrm>
+            <a:off x="3445006" y="1263055"/>
+            <a:ext cx="2429458" cy="2810470"/>
+          </a:xfrm>
+          <a:prstGeom prst="rect">
+            <a:avLst/>
+          </a:prstGeom>
+          <a:noFill/>
+          <a:ln w="12698">
+            <a:solidFill>
+              <a:srgbClr val="4FC8E8"/>
+            </a:solidFill>
+          </a:ln>
+        </p:spPr>
+        <p:txBody>
+          <a:bodyPr wrap="square" rtlCol="0" anchor="ctr"/>
+          <a:lstStyle/>
+          <a:p>
+            <a:pPr indent="0" marL="0">
+              <a:buNone/>
+            </a:pPr>
+            <a:endParaRPr lang="en-US" dirty="0"/>
+          </a:p>
+        </p:txBody>
+      </p:sp>
+      <p:sp>
+        <p:nvSpPr>
+          <p:cNvPr id="9" name="Text 6"/>
+          <p:cNvSpPr/>
+          <p:nvPr/>
+        </p:nvSpPr>
+        <p:spPr>
+          <a:xfrm>
+            <a:off x="3694578" y="1495822"/>
+            <a:ext cx="1968920" cy="314920"/>
+          </a:xfrm>
+          <a:prstGeom prst="rect">
+            <a:avLst/>
+          </a:prstGeom>
+          <a:noFill/>
+          <a:ln/>
+        </p:spPr>
+        <p:txBody>
+          <a:bodyPr wrap="square" lIns="0" tIns="0" rIns="0" bIns="0" rtlCol="0" anchor="t"/>
+          <a:lstStyle/>
+          <a:p>
+            <a:pPr algn="l" indent="0" marL="0">
+              <a:lnSpc>
+                <a:spcPts val="2480"/>
+              </a:lnSpc>
+              <a:spcAft>
+                <a:spcPts val="1200"/>
+              </a:spcAft>
+              <a:buNone/>
+            </a:pPr>
+            <a:r>
+              <a:rPr lang="en-US" sz="1600" dirty="0">
+                <a:solidFill>
+                  <a:srgbClr val="4FC8E8"/>
+                </a:solidFill>
+                <a:latin typeface="JetBrainsMono" pitchFamily="34" charset="0"/>
+                <a:ea typeface="JetBrainsMono" pitchFamily="34" charset="-122"/>
+                <a:cs typeface="JetBrainsMono" pitchFamily="34" charset="-120"/>
+              </a:rPr>
+              <a:t>02</a:t>
+            </a:r>
+            <a:endParaRPr lang="en-US" sz="1600" dirty="0"/>
+          </a:p>
+        </p:txBody>
+      </p:sp>
+      <p:sp>
+        <p:nvSpPr>
+          <p:cNvPr id="10" name="Text 7"/>
+          <p:cNvSpPr/>
+          <p:nvPr/>
+        </p:nvSpPr>
+        <p:spPr>
+          <a:xfrm>
+            <a:off x="3694578" y="1963142"/>
+            <a:ext cx="1968920" cy="367506"/>
+          </a:xfrm>
+          <a:prstGeom prst="rect">
+            <a:avLst/>
+          </a:prstGeom>
+          <a:noFill/>
+          <a:ln/>
+        </p:spPr>
+        <p:txBody>
+          <a:bodyPr wrap="square" lIns="0" tIns="0" rIns="0" bIns="0" rtlCol="0" anchor="t"/>
+          <a:lstStyle/>
+          <a:p>
+            <a:pPr algn="l" indent="0" marL="0">
+              <a:lnSpc>
+                <a:spcPts val="2893"/>
+              </a:lnSpc>
+              <a:spcAft>
+                <a:spcPts val="1067"/>
+              </a:spcAft>
+              <a:buNone/>
+            </a:pPr>
+            <a:r>
+              <a:rPr lang="en-US" sz="1866" dirty="0">
+                <a:solidFill>
+                  <a:srgbClr val="E8EEF7"/>
+                </a:solidFill>
+                <a:latin typeface="JetBrainsMono" pitchFamily="34" charset="0"/>
+                <a:ea typeface="JetBrainsMono" pitchFamily="34" charset="-122"/>
+                <a:cs typeface="JetBrainsMono" pitchFamily="34" charset="-120"/>
+              </a:rPr>
+              <a:t>RETRIEVE</a:t>
+            </a:r>
+            <a:endParaRPr lang="en-US" sz="1866" dirty="0"/>
+          </a:p>
+        </p:txBody>
+      </p:sp>
+      <p:sp>
+        <p:nvSpPr>
+          <p:cNvPr id="11" name="Text 8"/>
+          <p:cNvSpPr/>
+          <p:nvPr/>
+        </p:nvSpPr>
+        <p:spPr>
+          <a:xfrm>
+            <a:off x="3694578" y="2465983"/>
+            <a:ext cx="1968920" cy="1374775"/>
+          </a:xfrm>
+          <a:prstGeom prst="rect">
+            <a:avLst/>
+          </a:prstGeom>
+          <a:noFill/>
+          <a:ln/>
+        </p:spPr>
+        <p:txBody>
+          <a:bodyPr wrap="square" lIns="0" tIns="0" rIns="0" bIns="0" rtlCol="0" anchor="t"/>
+          <a:lstStyle/>
+          <a:p>
+            <a:pPr algn="l" indent="0" marL="0">
+              <a:lnSpc>
+                <a:spcPts val="2706"/>
+              </a:lnSpc>
+              <a:buNone/>
+            </a:pPr>
+            <a:r>
+              <a:rPr lang="en-US" sz="1866" dirty="0">
+                <a:solidFill>
+                  <a:srgbClr val="8FA3C8"/>
+                </a:solidFill>
+                <a:latin typeface="Inter" pitchFamily="34" charset="0"/>
+                <a:ea typeface="Inter" pitchFamily="34" charset="-122"/>
+                <a:cs typeface="Inter" pitchFamily="34" charset="-120"/>
+              </a:rPr>
+              <a:t>Issue one or more queries — not necessarily the user’s words.</a:t>
+            </a:r>
+            <a:endParaRPr lang="en-US" sz="1866" dirty="0"/>
+          </a:p>
+        </p:txBody>
+      </p:sp>
+      <p:pic>
+        <p:nvPicPr>
+          <p:cNvPr id="12" name="Image 1" descr="preencoded.png">    </p:cNvPr>
+          <p:cNvPicPr>
+            <a:picLocks noChangeAspect="1"/>
+          </p:cNvPicPr>
+          <p:nvPr/>
+        </p:nvPicPr>
+        <p:blipFill>
+          <a:blip r:embed="rId3">
+            <a:extLst>
+              <a:ext uri="{96DAC541-7B7A-43D3-8B79-37D633B846F1}">
+                <asvg:svgBlip xmlns:asvg="http://schemas.microsoft.com/office/drawing/2016/SVG/main" r:embed="rId4"/>
+              </a:ext>
+            </a:extLst>
+          </a:blip>
+          <a:stretch>
+            <a:fillRect/>
+          </a:stretch>
+        </p:blipFill>
+        <p:spPr>
+          <a:xfrm>
+            <a:off x="5874464" y="2566591"/>
+            <a:ext cx="440024" cy="203200"/>
+          </a:xfrm>
+          <a:prstGeom prst="rect">
+            <a:avLst/>
+          </a:prstGeom>
+        </p:spPr>
+      </p:pic>
+      <p:sp>
+        <p:nvSpPr>
+          <p:cNvPr id="13" name="Text 9"/>
+          <p:cNvSpPr/>
+          <p:nvPr/>
+        </p:nvSpPr>
+        <p:spPr>
+          <a:xfrm>
+            <a:off x="6314488" y="1263055"/>
+            <a:ext cx="2429458" cy="2810470"/>
+          </a:xfrm>
+          <a:prstGeom prst="rect">
+            <a:avLst/>
+          </a:prstGeom>
+          <a:solidFill>
+            <a:srgbClr val="4FC8E8">
+              <a:alpha val="12000"/>
+            </a:srgbClr>
+          </a:solidFill>
+          <a:ln w="12698">
+            <a:solidFill>
+              <a:srgbClr val="4FC8E8"/>
+            </a:solidFill>
+          </a:ln>
+        </p:spPr>
+        <p:txBody>
+          <a:bodyPr wrap="square" rtlCol="0" anchor="ctr"/>
+          <a:lstStyle/>
+          <a:p>
+            <a:pPr indent="0" marL="0">
+              <a:buNone/>
+            </a:pPr>
+            <a:endParaRPr lang="en-US" dirty="0"/>
+          </a:p>
+        </p:txBody>
+      </p:sp>
+      <p:sp>
+        <p:nvSpPr>
+          <p:cNvPr id="14" name="Text 10"/>
+          <p:cNvSpPr/>
+          <p:nvPr/>
+        </p:nvSpPr>
+        <p:spPr>
+          <a:xfrm>
+            <a:off x="6564060" y="1495822"/>
+            <a:ext cx="1968920" cy="314920"/>
+          </a:xfrm>
+          <a:prstGeom prst="rect">
+            <a:avLst/>
+          </a:prstGeom>
+          <a:noFill/>
+          <a:ln/>
+        </p:spPr>
+        <p:txBody>
+          <a:bodyPr wrap="square" lIns="0" tIns="0" rIns="0" bIns="0" rtlCol="0" anchor="t"/>
+          <a:lstStyle/>
+          <a:p>
+            <a:pPr algn="l" indent="0" marL="0">
+              <a:lnSpc>
+                <a:spcPts val="2480"/>
+              </a:lnSpc>
+              <a:spcAft>
+                <a:spcPts val="1200"/>
+              </a:spcAft>
+              <a:buNone/>
+            </a:pPr>
+            <a:r>
+              <a:rPr lang="en-US" sz="1600" dirty="0">
+                <a:solidFill>
+                  <a:srgbClr val="4FC8E8"/>
+                </a:solidFill>
+                <a:latin typeface="JetBrainsMono" pitchFamily="34" charset="0"/>
+                <a:ea typeface="JetBrainsMono" pitchFamily="34" charset="-122"/>
+                <a:cs typeface="JetBrainsMono" pitchFamily="34" charset="-120"/>
+              </a:rPr>
+              <a:t>03</a:t>
+            </a:r>
+            <a:endParaRPr lang="en-US" sz="1600" dirty="0"/>
+          </a:p>
+        </p:txBody>
+      </p:sp>
+      <p:sp>
+        <p:nvSpPr>
+          <p:cNvPr id="15" name="Text 11"/>
+          <p:cNvSpPr/>
+          <p:nvPr/>
+        </p:nvSpPr>
+        <p:spPr>
+          <a:xfrm>
+            <a:off x="6564060" y="1963142"/>
+            <a:ext cx="1968920" cy="367506"/>
+          </a:xfrm>
+          <a:prstGeom prst="rect">
+            <a:avLst/>
+          </a:prstGeom>
+          <a:noFill/>
+          <a:ln/>
+        </p:spPr>
+        <p:txBody>
+          <a:bodyPr wrap="square" lIns="0" tIns="0" rIns="0" bIns="0" rtlCol="0" anchor="t"/>
+          <a:lstStyle/>
+          <a:p>
+            <a:pPr algn="l" indent="0" marL="0">
+              <a:lnSpc>
+                <a:spcPts val="2893"/>
+              </a:lnSpc>
+              <a:spcAft>
+                <a:spcPts val="1067"/>
+              </a:spcAft>
+              <a:buNone/>
+            </a:pPr>
+            <a:r>
+              <a:rPr lang="en-US" sz="1866" dirty="0">
+                <a:solidFill>
+                  <a:srgbClr val="E8EEF7"/>
+                </a:solidFill>
+                <a:latin typeface="JetBrainsMono" pitchFamily="34" charset="0"/>
+                <a:ea typeface="JetBrainsMono" pitchFamily="34" charset="-122"/>
+                <a:cs typeface="JetBrainsMono" pitchFamily="34" charset="-120"/>
+              </a:rPr>
+              <a:t>CRITIQUE</a:t>
+            </a:r>
+            <a:endParaRPr lang="en-US" sz="1866" dirty="0"/>
+          </a:p>
+        </p:txBody>
+      </p:sp>
+      <p:sp>
+        <p:nvSpPr>
+          <p:cNvPr id="16" name="Text 12"/>
+          <p:cNvSpPr/>
+          <p:nvPr/>
+        </p:nvSpPr>
+        <p:spPr>
+          <a:xfrm>
+            <a:off x="6564060" y="2465983"/>
+            <a:ext cx="1968920" cy="1374775"/>
+          </a:xfrm>
+          <a:prstGeom prst="rect">
+            <a:avLst/>
+          </a:prstGeom>
+          <a:noFill/>
+          <a:ln/>
+        </p:spPr>
+        <p:txBody>
+          <a:bodyPr wrap="square" lIns="0" tIns="0" rIns="0" bIns="0" rtlCol="0" anchor="t"/>
+          <a:lstStyle/>
+          <a:p>
+            <a:pPr algn="l" indent="0" marL="0">
+              <a:lnSpc>
+                <a:spcPts val="2706"/>
+              </a:lnSpc>
+              <a:buNone/>
+            </a:pPr>
+            <a:r>
+              <a:rPr lang="en-US" sz="1866" dirty="0">
+                <a:solidFill>
+                  <a:srgbClr val="8FA3C8"/>
+                </a:solidFill>
+                <a:latin typeface="Inter" pitchFamily="34" charset="0"/>
+                <a:ea typeface="Inter" pitchFamily="34" charset="-122"/>
+                <a:cs typeface="Inter" pitchFamily="34" charset="-120"/>
+              </a:rPr>
+              <a:t>Judge whether what came back can answer the question.</a:t>
+            </a:r>
+            <a:endParaRPr lang="en-US" sz="1866" dirty="0"/>
+          </a:p>
+        </p:txBody>
+      </p:sp>
+      <p:pic>
+        <p:nvPicPr>
+          <p:cNvPr id="17" name="Image 2" descr="preencoded.png">    </p:cNvPr>
+          <p:cNvPicPr>
+            <a:picLocks noChangeAspect="1"/>
+          </p:cNvPicPr>
+          <p:nvPr/>
+        </p:nvPicPr>
+        <p:blipFill>
+          <a:blip r:embed="rId5">
+            <a:extLst>
+              <a:ext uri="{96DAC541-7B7A-43D3-8B79-37D633B846F1}">
+                <asvg:svgBlip xmlns:asvg="http://schemas.microsoft.com/office/drawing/2016/SVG/main" r:embed="rId6"/>
+              </a:ext>
+            </a:extLst>
+          </a:blip>
+          <a:stretch>
+            <a:fillRect/>
+          </a:stretch>
+        </p:blipFill>
+        <p:spPr>
+          <a:xfrm>
+            <a:off x="8743946" y="2566591"/>
+            <a:ext cx="440024" cy="203200"/>
+          </a:xfrm>
+          <a:prstGeom prst="rect">
+            <a:avLst/>
+          </a:prstGeom>
+        </p:spPr>
+      </p:pic>
+      <p:sp>
+        <p:nvSpPr>
+          <p:cNvPr id="18" name="Text 13"/>
+          <p:cNvSpPr/>
+          <p:nvPr/>
+        </p:nvSpPr>
+        <p:spPr>
+          <a:xfrm>
+            <a:off x="9183971" y="1263055"/>
+            <a:ext cx="2429458" cy="2810470"/>
+          </a:xfrm>
+          <a:prstGeom prst="rect">
+            <a:avLst/>
+          </a:prstGeom>
+          <a:noFill/>
+          <a:ln w="12698">
+            <a:solidFill>
+              <a:srgbClr val="4FC8E8"/>
+            </a:solidFill>
+          </a:ln>
+        </p:spPr>
+        <p:txBody>
+          <a:bodyPr wrap="square" rtlCol="0" anchor="ctr"/>
+          <a:lstStyle/>
+          <a:p>
+            <a:pPr indent="0" marL="0">
+              <a:buNone/>
+            </a:pPr>
+            <a:endParaRPr lang="en-US" dirty="0"/>
+          </a:p>
+        </p:txBody>
+      </p:sp>
+      <p:sp>
+        <p:nvSpPr>
+          <p:cNvPr id="19" name="Text 14"/>
+          <p:cNvSpPr/>
+          <p:nvPr/>
+        </p:nvSpPr>
+        <p:spPr>
+          <a:xfrm>
+            <a:off x="9433543" y="1495822"/>
+            <a:ext cx="1968920" cy="314920"/>
+          </a:xfrm>
+          <a:prstGeom prst="rect">
+            <a:avLst/>
+          </a:prstGeom>
+          <a:noFill/>
+          <a:ln/>
+        </p:spPr>
+        <p:txBody>
+          <a:bodyPr wrap="square" lIns="0" tIns="0" rIns="0" bIns="0" rtlCol="0" anchor="t"/>
+          <a:lstStyle/>
+          <a:p>
+            <a:pPr algn="l" indent="0" marL="0">
+              <a:lnSpc>
+                <a:spcPts val="2480"/>
+              </a:lnSpc>
+              <a:spcAft>
+                <a:spcPts val="1200"/>
+              </a:spcAft>
+              <a:buNone/>
+            </a:pPr>
+            <a:r>
+              <a:rPr lang="en-US" sz="1600" dirty="0">
+                <a:solidFill>
+                  <a:srgbClr val="4FC8E8"/>
+                </a:solidFill>
+                <a:latin typeface="JetBrainsMono" pitchFamily="34" charset="0"/>
+                <a:ea typeface="JetBrainsMono" pitchFamily="34" charset="-122"/>
+                <a:cs typeface="JetBrainsMono" pitchFamily="34" charset="-120"/>
+              </a:rPr>
+              <a:t>04</a:t>
+            </a:r>
+            <a:endParaRPr lang="en-US" sz="1600" dirty="0"/>
+          </a:p>
+        </p:txBody>
+      </p:sp>
+      <p:sp>
+        <p:nvSpPr>
+          <p:cNvPr id="20" name="Text 15"/>
+          <p:cNvSpPr/>
+          <p:nvPr/>
+        </p:nvSpPr>
+        <p:spPr>
+          <a:xfrm>
+            <a:off x="9433543" y="1963142"/>
+            <a:ext cx="1968920" cy="367506"/>
+          </a:xfrm>
+          <a:prstGeom prst="rect">
+            <a:avLst/>
+          </a:prstGeom>
+          <a:noFill/>
+          <a:ln/>
+        </p:spPr>
+        <p:txBody>
+          <a:bodyPr wrap="square" lIns="0" tIns="0" rIns="0" bIns="0" rtlCol="0" anchor="t"/>
+          <a:lstStyle/>
+          <a:p>
+            <a:pPr algn="l" indent="0" marL="0">
+              <a:lnSpc>
+                <a:spcPts val="2893"/>
+              </a:lnSpc>
+              <a:spcAft>
+                <a:spcPts val="1067"/>
+              </a:spcAft>
+              <a:buNone/>
+            </a:pPr>
+            <a:r>
+              <a:rPr lang="en-US" sz="1866" dirty="0">
+                <a:solidFill>
+                  <a:srgbClr val="E8EEF7"/>
+                </a:solidFill>
+                <a:latin typeface="JetBrainsMono" pitchFamily="34" charset="0"/>
+                <a:ea typeface="JetBrainsMono" pitchFamily="34" charset="-122"/>
+                <a:cs typeface="JetBrainsMono" pitchFamily="34" charset="-120"/>
+              </a:rPr>
+              <a:t>ANSWER</a:t>
+            </a:r>
+            <a:endParaRPr lang="en-US" sz="1866" dirty="0"/>
+          </a:p>
+        </p:txBody>
+      </p:sp>
+      <p:sp>
+        <p:nvSpPr>
+          <p:cNvPr id="21" name="Text 16"/>
+          <p:cNvSpPr/>
+          <p:nvPr/>
+        </p:nvSpPr>
+        <p:spPr>
+          <a:xfrm>
+            <a:off x="9433543" y="2465983"/>
+            <a:ext cx="1968920" cy="1374775"/>
+          </a:xfrm>
+          <a:prstGeom prst="rect">
+            <a:avLst/>
+          </a:prstGeom>
+          <a:noFill/>
+          <a:ln/>
+        </p:spPr>
+        <p:txBody>
+          <a:bodyPr wrap="square" lIns="0" tIns="0" rIns="0" bIns="0" rtlCol="0" anchor="t"/>
+          <a:lstStyle/>
+          <a:p>
+            <a:pPr algn="l" indent="0" marL="0">
+              <a:lnSpc>
+                <a:spcPts val="2706"/>
+              </a:lnSpc>
+              <a:buNone/>
+            </a:pPr>
+            <a:r>
+              <a:rPr lang="en-US" sz="1866" dirty="0">
+                <a:solidFill>
+                  <a:srgbClr val="8FA3C8"/>
+                </a:solidFill>
+                <a:latin typeface="Inter" pitchFamily="34" charset="0"/>
+                <a:ea typeface="Inter" pitchFamily="34" charset="-122"/>
+                <a:cs typeface="Inter" pitchFamily="34" charset="-120"/>
+              </a:rPr>
+              <a:t>Generate, using only the evidence that survived.</a:t>
+            </a:r>
+            <a:endParaRPr lang="en-US" sz="1866" dirty="0"/>
+          </a:p>
+        </p:txBody>
+      </p:sp>
+      <p:pic>
+        <p:nvPicPr>
+          <p:cNvPr id="22" name="Image 3" descr="preencoded.png">    </p:cNvPr>
+          <p:cNvPicPr>
+            <a:picLocks noChangeAspect="1"/>
+          </p:cNvPicPr>
+          <p:nvPr/>
+        </p:nvPicPr>
+        <p:blipFill>
+          <a:blip r:embed="rId7">
+            <a:extLst>
+              <a:ext uri="{96DAC541-7B7A-43D3-8B79-37D633B846F1}">
+                <asvg:svgBlip xmlns:asvg="http://schemas.microsoft.com/office/drawing/2016/SVG/main" r:embed="rId8"/>
+              </a:ext>
+            </a:extLst>
+          </a:blip>
+          <a:stretch>
+            <a:fillRect/>
+          </a:stretch>
+        </p:blipFill>
+        <p:spPr>
+          <a:xfrm>
+            <a:off x="575523" y="4073525"/>
+            <a:ext cx="11037905" cy="440134"/>
+          </a:xfrm>
+          <a:prstGeom prst="rect">
+            <a:avLst/>
+          </a:prstGeom>
+        </p:spPr>
+      </p:pic>
+      <p:sp>
+        <p:nvSpPr>
+          <p:cNvPr id="23" name="Text 17"/>
+          <p:cNvSpPr/>
+          <p:nvPr/>
+        </p:nvSpPr>
+        <p:spPr>
+          <a:xfrm>
+            <a:off x="465144" y="4513659"/>
+            <a:ext cx="11258664" cy="314920"/>
+          </a:xfrm>
+          <a:prstGeom prst="rect">
+            <a:avLst/>
+          </a:prstGeom>
+          <a:noFill/>
+          <a:ln/>
+        </p:spPr>
+        <p:txBody>
+          <a:bodyPr wrap="square" lIns="0" tIns="0" rIns="0" bIns="0" rtlCol="0" anchor="t"/>
+          <a:lstStyle/>
+          <a:p>
+            <a:pPr algn="ctr" indent="0" marL="0">
+              <a:lnSpc>
+                <a:spcPts val="2480"/>
+              </a:lnSpc>
+              <a:buNone/>
+            </a:pPr>
+            <a:r>
+              <a:rPr lang="en-US" sz="1600" dirty="0">
+                <a:solidFill>
+                  <a:srgbClr val="8FA3C8"/>
+                </a:solidFill>
+                <a:latin typeface="Inter" pitchFamily="34" charset="0"/>
+                <a:ea typeface="Inter" pitchFamily="34" charset="-122"/>
+                <a:cs typeface="Inter" pitchFamily="34" charset="-120"/>
+              </a:rPr>
+              <a:t>THE RETURN EDGE IS THE WHOLE CHANGE</a:t>
+            </a:r>
+            <a:endParaRPr lang="en-US" sz="1600" dirty="0"/>
+          </a:p>
+        </p:txBody>
+      </p:sp>
+      <p:sp>
+        <p:nvSpPr>
+          <p:cNvPr id="24" name="Shape 18"/>
+          <p:cNvSpPr/>
+          <p:nvPr/>
+        </p:nvSpPr>
+        <p:spPr>
+          <a:xfrm>
+            <a:off x="575523" y="4938712"/>
+            <a:ext cx="11037905" cy="0"/>
+          </a:xfrm>
+          <a:prstGeom prst="line">
+            <a:avLst/>
+          </a:prstGeom>
+          <a:noFill/>
+          <a:ln w="12698">
+            <a:solidFill>
+              <a:srgbClr val="4FC8E8"/>
+            </a:solidFill>
+            <a:prstDash val="solid"/>
+          </a:ln>
+        </p:spPr>
+      </p:sp>
+      <p:sp>
+        <p:nvSpPr>
+          <p:cNvPr id="25" name="Shape 19"/>
+          <p:cNvSpPr/>
+          <p:nvPr/>
+        </p:nvSpPr>
+        <p:spPr>
+          <a:xfrm>
+            <a:off x="11607080" y="4932363"/>
+            <a:ext cx="0" cy="812205"/>
+          </a:xfrm>
+          <a:prstGeom prst="line">
+            <a:avLst/>
+          </a:prstGeom>
+          <a:noFill/>
+          <a:ln w="12698">
+            <a:solidFill>
+              <a:srgbClr val="4FC8E8"/>
+            </a:solidFill>
+            <a:prstDash val="solid"/>
+          </a:ln>
+        </p:spPr>
+      </p:sp>
+      <p:sp>
+        <p:nvSpPr>
+          <p:cNvPr id="26" name="Shape 20"/>
+          <p:cNvSpPr/>
+          <p:nvPr/>
+        </p:nvSpPr>
+        <p:spPr>
+          <a:xfrm>
+            <a:off x="575523" y="5738217"/>
+            <a:ext cx="11037905" cy="0"/>
+          </a:xfrm>
+          <a:prstGeom prst="line">
+            <a:avLst/>
+          </a:prstGeom>
+          <a:noFill/>
+          <a:ln w="12698">
+            <a:solidFill>
+              <a:srgbClr val="4FC8E8"/>
+            </a:solidFill>
+            <a:prstDash val="solid"/>
+          </a:ln>
+        </p:spPr>
+      </p:sp>
+      <p:sp>
+        <p:nvSpPr>
+          <p:cNvPr id="27" name="Shape 21"/>
+          <p:cNvSpPr/>
+          <p:nvPr/>
+        </p:nvSpPr>
+        <p:spPr>
+          <a:xfrm>
+            <a:off x="600917" y="4932363"/>
+            <a:ext cx="0" cy="812205"/>
+          </a:xfrm>
+          <a:prstGeom prst="line">
+            <a:avLst/>
+          </a:prstGeom>
+          <a:noFill/>
+          <a:ln w="50794">
+            <a:solidFill>
+              <a:srgbClr val="4FC8E8"/>
+            </a:solidFill>
+            <a:prstDash val="solid"/>
+          </a:ln>
+        </p:spPr>
+      </p:sp>
+      <p:sp>
+        <p:nvSpPr>
+          <p:cNvPr id="28" name="Text 22"/>
+          <p:cNvSpPr/>
+          <p:nvPr/>
+        </p:nvSpPr>
+        <p:spPr>
+          <a:xfrm>
+            <a:off x="897110" y="5148263"/>
+            <a:ext cx="10641479" cy="380405"/>
+          </a:xfrm>
+          <a:prstGeom prst="rect">
+            <a:avLst/>
+          </a:prstGeom>
+          <a:noFill/>
+          <a:ln/>
+        </p:spPr>
+        <p:txBody>
+          <a:bodyPr wrap="square" lIns="0" tIns="0" rIns="0" bIns="0" rtlCol="0" anchor="t"/>
+          <a:lstStyle/>
+          <a:p>
+            <a:pPr algn="l" indent="0" marL="0">
+              <a:lnSpc>
+                <a:spcPts val="2996"/>
+              </a:lnSpc>
+              <a:buNone/>
+            </a:pPr>
+            <a:r>
+              <a:rPr lang="en-US" sz="1933" dirty="0">
+                <a:solidFill>
+                  <a:srgbClr val="E8EEF7"/>
+                </a:solidFill>
+                <a:latin typeface="Inter" pitchFamily="34" charset="0"/>
+                <a:ea typeface="Inter" pitchFamily="34" charset="-122"/>
+                <a:cs typeface="Inter" pitchFamily="34" charset="-120"/>
+              </a:rPr>
+              <a:t>The model stops being the last step in the pipeline and starts being the thing that drives it.</a:t>
+            </a:r>
+            <a:endParaRPr lang="en-US" sz="1933" dirty="0"/>
+          </a:p>
+        </p:txBody>
+      </p:sp>
+      <p:sp>
+        <p:nvSpPr>
+          <p:cNvPr id="29" name="Text 23"/>
+          <p:cNvSpPr/>
+          <p:nvPr/>
+        </p:nvSpPr>
+        <p:spPr>
+          <a:xfrm>
+            <a:off x="6989007" y="5981502"/>
+            <a:ext cx="4624422" cy="465138"/>
+          </a:xfrm>
+          <a:prstGeom prst="rect">
+            <a:avLst/>
+          </a:prstGeom>
+          <a:noFill/>
+          <a:ln w="12698">
+            <a:solidFill>
+              <a:srgbClr val="4FC8E8"/>
+            </a:solidFill>
+          </a:ln>
+        </p:spPr>
+        <p:txBody>
+          <a:bodyPr wrap="square" rtlCol="0" anchor="ctr"/>
+          <a:lstStyle/>
+          <a:p>
+            <a:pPr indent="0" marL="0">
+              <a:buNone/>
+            </a:pPr>
+            <a:endParaRPr lang="en-US" dirty="0"/>
+          </a:p>
+        </p:txBody>
+      </p:sp>
+      <p:sp>
+        <p:nvSpPr>
+          <p:cNvPr id="30" name="Text 24"/>
+          <p:cNvSpPr/>
+          <p:nvPr/>
+        </p:nvSpPr>
+        <p:spPr>
+          <a:xfrm>
+            <a:off x="7187792" y="6078736"/>
+            <a:ext cx="207212" cy="270669"/>
+          </a:xfrm>
+          <a:prstGeom prst="rect">
+            <a:avLst/>
+          </a:prstGeom>
+          <a:noFill/>
+          <a:ln/>
+        </p:spPr>
+        <p:txBody>
+          <a:bodyPr wrap="square" lIns="0" tIns="0" rIns="0" bIns="0" rtlCol="0" anchor="t"/>
+          <a:lstStyle/>
+          <a:p>
+            <a:pPr algn="l" indent="0" marL="0">
+              <a:lnSpc>
+                <a:spcPts val="2133"/>
+              </a:lnSpc>
+              <a:buNone/>
+            </a:pPr>
+            <a:r>
+              <a:rPr lang="en-US" sz="1333" dirty="0">
+                <a:solidFill>
+                  <a:srgbClr val="4FC8E8"/>
+                </a:solidFill>
+                <a:latin typeface="JetBrainsMono" pitchFamily="34" charset="0"/>
+                <a:ea typeface="JetBrainsMono" pitchFamily="34" charset="-122"/>
+                <a:cs typeface="JetBrainsMono" pitchFamily="34" charset="-120"/>
+              </a:rPr>
+              <a:t>03</a:t>
+            </a:r>
+            <a:endParaRPr lang="en-US" sz="1333" dirty="0"/>
+          </a:p>
+        </p:txBody>
+      </p:sp>
+      <p:sp>
+        <p:nvSpPr>
+          <p:cNvPr id="31" name="Shape 25"/>
+          <p:cNvSpPr/>
+          <p:nvPr/>
+        </p:nvSpPr>
+        <p:spPr>
+          <a:xfrm>
+            <a:off x="7583377" y="5994202"/>
+            <a:ext cx="0" cy="439737"/>
+          </a:xfrm>
+          <a:prstGeom prst="line">
+            <a:avLst/>
+          </a:prstGeom>
+          <a:noFill/>
+          <a:ln w="12698">
+            <a:solidFill>
+              <a:srgbClr val="4FC8E8"/>
+            </a:solidFill>
+            <a:prstDash val="solid"/>
+          </a:ln>
+        </p:spPr>
+      </p:sp>
+      <p:sp>
+        <p:nvSpPr>
+          <p:cNvPr id="32" name="Text 26"/>
+          <p:cNvSpPr/>
+          <p:nvPr/>
+        </p:nvSpPr>
+        <p:spPr>
+          <a:xfrm>
+            <a:off x="7775813" y="6078736"/>
+            <a:ext cx="2179370" cy="270669"/>
+          </a:xfrm>
+          <a:prstGeom prst="rect">
+            <a:avLst/>
+          </a:prstGeom>
+          <a:noFill/>
+          <a:ln/>
+        </p:spPr>
+        <p:txBody>
+          <a:bodyPr wrap="square" lIns="0" tIns="0" rIns="0" bIns="0" rtlCol="0" anchor="t"/>
+          <a:lstStyle/>
+          <a:p>
+            <a:pPr algn="l" indent="0" marL="0">
+              <a:lnSpc>
+                <a:spcPts val="2133"/>
+              </a:lnSpc>
+              <a:buNone/>
+            </a:pPr>
+            <a:r>
+              <a:rPr lang="en-US" sz="1333" dirty="0">
+                <a:solidFill>
+                  <a:srgbClr val="E8EEF7"/>
+                </a:solidFill>
+                <a:latin typeface="Inter" pitchFamily="34" charset="0"/>
+                <a:ea typeface="Inter" pitchFamily="34" charset="-122"/>
+                <a:cs typeface="Inter" pitchFamily="34" charset="-120"/>
+              </a:rPr>
+              <a:t>RETRIEVAL AS A LOOP</a:t>
+            </a:r>
+            <a:endParaRPr lang="en-US" sz="1333" dirty="0"/>
+          </a:p>
+        </p:txBody>
+      </p:sp>
+      <p:sp>
+        <p:nvSpPr>
+          <p:cNvPr id="33" name="Shape 27"/>
+          <p:cNvSpPr/>
+          <p:nvPr/>
+        </p:nvSpPr>
+        <p:spPr>
+          <a:xfrm>
+            <a:off x="10104887" y="5994202"/>
+            <a:ext cx="0" cy="439737"/>
+          </a:xfrm>
+          <a:prstGeom prst="line">
+            <a:avLst/>
+          </a:prstGeom>
+          <a:noFill/>
+          <a:ln w="12698">
+            <a:solidFill>
+              <a:srgbClr val="4FC8E8"/>
+            </a:solidFill>
+            <a:prstDash val="solid"/>
+          </a:ln>
+        </p:spPr>
+      </p:sp>
+      <p:sp>
+        <p:nvSpPr>
+          <p:cNvPr id="34" name="Text 28"/>
+          <p:cNvSpPr/>
+          <p:nvPr/>
+        </p:nvSpPr>
+        <p:spPr>
+          <a:xfrm>
+            <a:off x="10297323" y="6078736"/>
+            <a:ext cx="1139667" cy="270669"/>
+          </a:xfrm>
+          <a:prstGeom prst="rect">
+            <a:avLst/>
+          </a:prstGeom>
+          <a:noFill/>
+          <a:ln/>
+        </p:spPr>
+        <p:txBody>
+          <a:bodyPr wrap="square" lIns="0" tIns="0" rIns="0" bIns="0" rtlCol="0" anchor="t"/>
+          <a:lstStyle/>
+          <a:p>
+            <a:pPr algn="l" indent="0" marL="0">
+              <a:lnSpc>
+                <a:spcPts val="2133"/>
+              </a:lnSpc>
+              <a:buNone/>
+            </a:pPr>
+            <a:r>
+              <a:rPr lang="en-US" sz="1333" dirty="0">
+                <a:solidFill>
+                  <a:srgbClr val="8FA3C8"/>
+                </a:solidFill>
+                <a:latin typeface="JetBrainsMono" pitchFamily="34" charset="0"/>
+                <a:ea typeface="JetBrainsMono" pitchFamily="34" charset="-122"/>
+                <a:cs typeface="JetBrainsMono" pitchFamily="34" charset="-120"/>
+              </a:rPr>
+              <a:t>SHEET 03/06</a:t>
+            </a:r>
+            <a:endParaRPr lang="en-US" sz="1333" dirty="0"/>
+          </a:p>
+        </p:txBody>
+      </p:sp>
     </p:spTree>
   </p:cSld>
   <p:clrMapOvr>
@@ -1446,6 +4659,13 @@
 <file path=ppt/slides/slide4.xml><?xml version="1.0" encoding="utf-8"?>
 <p:sld xmlns:a="http://schemas.openxmlformats.org/drawingml/2006/main" xmlns:r="http://schemas.openxmlformats.org/officeDocument/2006/relationships" xmlns:p="http://schemas.openxmlformats.org/presentationml/2006/main">
   <p:cSld name="Slide 4">
+    <p:bg>
+      <p:bgPr>
+        <a:solidFill>
+          <a:srgbClr val="0E1B3D"/>
+        </a:solidFill>
+      </p:bgPr>
+    </p:bg>
     <p:spTree>
       <p:nvGrpSpPr>
         <p:cNvPr id="1" name=""/>
@@ -1460,30 +4680,1260 @@
           <a:chExt cx="0" cy="0"/>
         </a:xfrm>
       </p:grpSpPr>
-      <p:pic>
-        <p:nvPicPr>
-          <p:cNvPr id="2" name="Image 0" descr="/tmp/slide-1787840615181-qwhvcphpm4.png">    </p:cNvPr>
-          <p:cNvPicPr>
-            <a:picLocks noChangeAspect="1"/>
-          </p:cNvPicPr>
-          <p:nvPr/>
-        </p:nvPicPr>
-        <p:blipFill>
-          <a:blip r:embed="rId1"/>
-          <a:stretch>
-            <a:fillRect/>
-          </a:stretch>
-        </p:blipFill>
-        <p:spPr>
-          <a:xfrm>
-            <a:off x="0" y="0"/>
-            <a:ext cx="12188952" cy="6858000"/>
-          </a:xfrm>
-          <a:prstGeom prst="rect">
-            <a:avLst/>
-          </a:prstGeom>
-        </p:spPr>
-      </p:pic>
+      <p:sp>
+        <p:nvSpPr>
+          <p:cNvPr id="2" name="Text 0"/>
+          <p:cNvSpPr/>
+          <p:nvPr/>
+        </p:nvSpPr>
+        <p:spPr>
+          <a:xfrm>
+            <a:off x="575523" y="508000"/>
+            <a:ext cx="11258664" cy="484187"/>
+          </a:xfrm>
+          <a:prstGeom prst="rect">
+            <a:avLst/>
+          </a:prstGeom>
+          <a:noFill/>
+          <a:ln/>
+        </p:spPr>
+        <p:txBody>
+          <a:bodyPr wrap="square" lIns="0" tIns="0" rIns="0" bIns="0" rtlCol="0" anchor="t"/>
+          <a:lstStyle/>
+          <a:p>
+            <a:pPr algn="l" indent="0" marL="0">
+              <a:lnSpc>
+                <a:spcPts val="3813"/>
+              </a:lnSpc>
+              <a:spcAft>
+                <a:spcPts val="800"/>
+              </a:spcAft>
+              <a:buNone/>
+            </a:pPr>
+            <a:r>
+              <a:rPr lang="en-US" sz="2933" dirty="0">
+                <a:solidFill>
+                  <a:srgbClr val="E8EEF7"/>
+                </a:solidFill>
+                <a:latin typeface="Inter" pitchFamily="34" charset="0"/>
+                <a:ea typeface="Inter" pitchFamily="34" charset="-122"/>
+                <a:cs typeface="Inter" pitchFamily="34" charset="-120"/>
+              </a:rPr>
+              <a:t>Patterns you can adopt one at a time</a:t>
+            </a:r>
+            <a:endParaRPr lang="en-US" sz="2933" dirty="0"/>
+          </a:p>
+        </p:txBody>
+      </p:sp>
+      <p:sp>
+        <p:nvSpPr>
+          <p:cNvPr id="3" name="Text 1"/>
+          <p:cNvSpPr/>
+          <p:nvPr/>
+        </p:nvSpPr>
+        <p:spPr>
+          <a:xfrm>
+            <a:off x="575523" y="1093787"/>
+            <a:ext cx="11258664" cy="314920"/>
+          </a:xfrm>
+          <a:prstGeom prst="rect">
+            <a:avLst/>
+          </a:prstGeom>
+          <a:noFill/>
+          <a:ln/>
+        </p:spPr>
+        <p:txBody>
+          <a:bodyPr wrap="square" lIns="0" tIns="0" rIns="0" bIns="0" rtlCol="0" anchor="t"/>
+          <a:lstStyle/>
+          <a:p>
+            <a:pPr algn="l" indent="0" marL="0">
+              <a:lnSpc>
+                <a:spcPts val="2480"/>
+              </a:lnSpc>
+              <a:spcAft>
+                <a:spcPts val="1866"/>
+              </a:spcAft>
+              <a:buNone/>
+            </a:pPr>
+            <a:r>
+              <a:rPr lang="en-US" sz="1600" dirty="0">
+                <a:solidFill>
+                  <a:srgbClr val="8FA3C8"/>
+                </a:solidFill>
+                <a:latin typeface="Inter" pitchFamily="34" charset="0"/>
+                <a:ea typeface="Inter" pitchFamily="34" charset="-122"/>
+                <a:cs typeface="Inter" pitchFamily="34" charset="-120"/>
+              </a:rPr>
+              <a:t>INDEPENDENT — ALL FOUR AT ONCE IS A REWRITE</a:t>
+            </a:r>
+            <a:endParaRPr lang="en-US" sz="1600" dirty="0"/>
+          </a:p>
+        </p:txBody>
+      </p:sp>
+      <p:sp>
+        <p:nvSpPr>
+          <p:cNvPr id="4" name="Text 2"/>
+          <p:cNvSpPr/>
+          <p:nvPr/>
+        </p:nvSpPr>
+        <p:spPr>
+          <a:xfrm>
+            <a:off x="575523" y="1645642"/>
+            <a:ext cx="5408847" cy="1939330"/>
+          </a:xfrm>
+          <a:prstGeom prst="rect">
+            <a:avLst/>
+          </a:prstGeom>
+          <a:noFill/>
+          <a:ln w="12698">
+            <a:solidFill>
+              <a:srgbClr val="4FC8E8"/>
+            </a:solidFill>
+          </a:ln>
+        </p:spPr>
+        <p:txBody>
+          <a:bodyPr wrap="square" rtlCol="0" anchor="ctr"/>
+          <a:lstStyle/>
+          <a:p>
+            <a:pPr indent="0" marL="0">
+              <a:buNone/>
+            </a:pPr>
+            <a:endParaRPr lang="en-US" dirty="0"/>
+          </a:p>
+        </p:txBody>
+      </p:sp>
+      <p:sp>
+        <p:nvSpPr>
+          <p:cNvPr id="5" name="Text 3"/>
+          <p:cNvSpPr/>
+          <p:nvPr/>
+        </p:nvSpPr>
+        <p:spPr>
+          <a:xfrm>
+            <a:off x="842157" y="1899642"/>
+            <a:ext cx="551217" cy="314920"/>
+          </a:xfrm>
+          <a:prstGeom prst="rect">
+            <a:avLst/>
+          </a:prstGeom>
+          <a:noFill/>
+          <a:ln/>
+        </p:spPr>
+        <p:txBody>
+          <a:bodyPr wrap="square" lIns="0" tIns="0" rIns="0" bIns="0" rtlCol="0" anchor="t"/>
+          <a:lstStyle/>
+          <a:p>
+            <a:pPr algn="l" indent="0" marL="0">
+              <a:lnSpc>
+                <a:spcPts val="2480"/>
+              </a:lnSpc>
+              <a:buNone/>
+            </a:pPr>
+            <a:r>
+              <a:rPr lang="en-US" sz="1600" dirty="0">
+                <a:solidFill>
+                  <a:srgbClr val="4FC8E8"/>
+                </a:solidFill>
+                <a:latin typeface="JetBrainsMono" pitchFamily="34" charset="0"/>
+                <a:ea typeface="JetBrainsMono" pitchFamily="34" charset="-122"/>
+                <a:cs typeface="JetBrainsMono" pitchFamily="34" charset="-120"/>
+              </a:rPr>
+              <a:t>P-01</a:t>
+            </a:r>
+            <a:endParaRPr lang="en-US" sz="1600" dirty="0"/>
+          </a:p>
+        </p:txBody>
+      </p:sp>
+      <p:sp>
+        <p:nvSpPr>
+          <p:cNvPr id="6" name="Text 4"/>
+          <p:cNvSpPr/>
+          <p:nvPr/>
+        </p:nvSpPr>
+        <p:spPr>
+          <a:xfrm>
+            <a:off x="1551790" y="1861542"/>
+            <a:ext cx="1994417" cy="342900"/>
+          </a:xfrm>
+          <a:prstGeom prst="rect">
+            <a:avLst/>
+          </a:prstGeom>
+          <a:noFill/>
+          <a:ln/>
+        </p:spPr>
+        <p:txBody>
+          <a:bodyPr wrap="square" lIns="0" tIns="0" rIns="0" bIns="0" rtlCol="0" anchor="t"/>
+          <a:lstStyle/>
+          <a:p>
+            <a:pPr algn="l" indent="0" marL="0">
+              <a:lnSpc>
+                <a:spcPts val="2700"/>
+              </a:lnSpc>
+              <a:buNone/>
+            </a:pPr>
+            <a:r>
+              <a:rPr lang="en-US" sz="2000" b="1" dirty="0">
+                <a:solidFill>
+                  <a:srgbClr val="E8EEF7"/>
+                </a:solidFill>
+                <a:latin typeface="Inter" pitchFamily="34" charset="0"/>
+                <a:ea typeface="Inter" pitchFamily="34" charset="-122"/>
+                <a:cs typeface="Inter" pitchFamily="34" charset="-120"/>
+              </a:rPr>
+              <a:t>Query rewriting</a:t>
+            </a:r>
+            <a:endParaRPr lang="en-US" sz="2000" dirty="0"/>
+          </a:p>
+        </p:txBody>
+      </p:sp>
+      <p:sp>
+        <p:nvSpPr>
+          <p:cNvPr id="7" name="Text 5"/>
+          <p:cNvSpPr/>
+          <p:nvPr/>
+        </p:nvSpPr>
+        <p:spPr>
+          <a:xfrm>
+            <a:off x="842157" y="2366963"/>
+            <a:ext cx="4973092" cy="367506"/>
+          </a:xfrm>
+          <a:prstGeom prst="rect">
+            <a:avLst/>
+          </a:prstGeom>
+          <a:noFill/>
+          <a:ln/>
+        </p:spPr>
+        <p:txBody>
+          <a:bodyPr wrap="square" lIns="0" tIns="0" rIns="0" bIns="0" rtlCol="0" anchor="t"/>
+          <a:lstStyle/>
+          <a:p>
+            <a:pPr algn="l" indent="0" marL="0">
+              <a:lnSpc>
+                <a:spcPts val="2893"/>
+              </a:lnSpc>
+              <a:spcAft>
+                <a:spcPts val="800"/>
+              </a:spcAft>
+              <a:buNone/>
+            </a:pPr>
+            <a:r>
+              <a:rPr lang="en-US" sz="1466" dirty="0">
+                <a:solidFill>
+                  <a:srgbClr val="4FC8E8"/>
+                </a:solidFill>
+                <a:latin typeface="Inter" pitchFamily="34" charset="0"/>
+                <a:ea typeface="Inter" pitchFamily="34" charset="-122"/>
+                <a:cs typeface="Inter" pitchFamily="34" charset="-120"/>
+              </a:rPr>
+              <a:t>ADDS</a:t>
+            </a:r>
+            <a:pPr algn="l" indent="0" marL="0">
+              <a:lnSpc>
+                <a:spcPts val="2893"/>
+              </a:lnSpc>
+              <a:spcAft>
+                <a:spcPts val="800"/>
+              </a:spcAft>
+              <a:buNone/>
+            </a:pPr>
+            <a:r>
+              <a:rPr lang="en-US" sz="1866" dirty="0">
+                <a:solidFill>
+                  <a:srgbClr val="E8EEF7"/>
+                </a:solidFill>
+                <a:latin typeface="Inter" pitchFamily="34" charset="0"/>
+                <a:ea typeface="Inter" pitchFamily="34" charset="-122"/>
+                <a:cs typeface="Inter" pitchFamily="34" charset="-120"/>
+              </a:rPr>
+              <a:t> The index sees a query written for it.</a:t>
+            </a:r>
+            <a:endParaRPr lang="en-US" sz="1866" dirty="0"/>
+          </a:p>
+        </p:txBody>
+      </p:sp>
+      <p:sp>
+        <p:nvSpPr>
+          <p:cNvPr id="8" name="Text 6"/>
+          <p:cNvSpPr/>
+          <p:nvPr/>
+        </p:nvSpPr>
+        <p:spPr>
+          <a:xfrm>
+            <a:off x="842157" y="2836069"/>
+            <a:ext cx="4973092" cy="367506"/>
+          </a:xfrm>
+          <a:prstGeom prst="rect">
+            <a:avLst/>
+          </a:prstGeom>
+          <a:noFill/>
+          <a:ln/>
+        </p:spPr>
+        <p:txBody>
+          <a:bodyPr wrap="square" lIns="0" tIns="0" rIns="0" bIns="0" rtlCol="0" anchor="t"/>
+          <a:lstStyle/>
+          <a:p>
+            <a:pPr algn="l" indent="0" marL="0">
+              <a:lnSpc>
+                <a:spcPts val="2893"/>
+              </a:lnSpc>
+              <a:buNone/>
+            </a:pPr>
+            <a:r>
+              <a:rPr lang="en-US" sz="1466" dirty="0">
+                <a:solidFill>
+                  <a:srgbClr val="8FA3C8"/>
+                </a:solidFill>
+                <a:latin typeface="Inter" pitchFamily="34" charset="0"/>
+                <a:ea typeface="Inter" pitchFamily="34" charset="-122"/>
+                <a:cs typeface="Inter" pitchFamily="34" charset="-120"/>
+              </a:rPr>
+              <a:t>COSTS</a:t>
+            </a:r>
+            <a:pPr algn="l" indent="0" marL="0">
+              <a:lnSpc>
+                <a:spcPts val="2893"/>
+              </a:lnSpc>
+              <a:buNone/>
+            </a:pPr>
+            <a:r>
+              <a:rPr lang="en-US" sz="1866" dirty="0">
+                <a:solidFill>
+                  <a:srgbClr val="8FA3C8"/>
+                </a:solidFill>
+                <a:latin typeface="Inter" pitchFamily="34" charset="0"/>
+                <a:ea typeface="Inter" pitchFamily="34" charset="-122"/>
+                <a:cs typeface="Inter" pitchFamily="34" charset="-120"/>
+              </a:rPr>
+              <a:t> One extra model call per retrieval.</a:t>
+            </a:r>
+            <a:endParaRPr lang="en-US" sz="1866" dirty="0"/>
+          </a:p>
+        </p:txBody>
+      </p:sp>
+      <p:sp>
+        <p:nvSpPr>
+          <p:cNvPr id="9" name="Text 7"/>
+          <p:cNvSpPr/>
+          <p:nvPr/>
+        </p:nvSpPr>
+        <p:spPr>
+          <a:xfrm>
+            <a:off x="6204383" y="1645642"/>
+            <a:ext cx="5409046" cy="1939330"/>
+          </a:xfrm>
+          <a:prstGeom prst="rect">
+            <a:avLst/>
+          </a:prstGeom>
+          <a:noFill/>
+          <a:ln w="12698">
+            <a:solidFill>
+              <a:srgbClr val="4FC8E8"/>
+            </a:solidFill>
+          </a:ln>
+        </p:spPr>
+        <p:txBody>
+          <a:bodyPr wrap="square" rtlCol="0" anchor="ctr"/>
+          <a:lstStyle/>
+          <a:p>
+            <a:pPr indent="0" marL="0">
+              <a:buNone/>
+            </a:pPr>
+            <a:endParaRPr lang="en-US" dirty="0"/>
+          </a:p>
+        </p:txBody>
+      </p:sp>
+      <p:sp>
+        <p:nvSpPr>
+          <p:cNvPr id="10" name="Text 8"/>
+          <p:cNvSpPr/>
+          <p:nvPr/>
+        </p:nvSpPr>
+        <p:spPr>
+          <a:xfrm>
+            <a:off x="6471016" y="1899642"/>
+            <a:ext cx="551217" cy="314920"/>
+          </a:xfrm>
+          <a:prstGeom prst="rect">
+            <a:avLst/>
+          </a:prstGeom>
+          <a:noFill/>
+          <a:ln/>
+        </p:spPr>
+        <p:txBody>
+          <a:bodyPr wrap="square" lIns="0" tIns="0" rIns="0" bIns="0" rtlCol="0" anchor="t"/>
+          <a:lstStyle/>
+          <a:p>
+            <a:pPr algn="l" indent="0" marL="0">
+              <a:lnSpc>
+                <a:spcPts val="2480"/>
+              </a:lnSpc>
+              <a:buNone/>
+            </a:pPr>
+            <a:r>
+              <a:rPr lang="en-US" sz="1600" dirty="0">
+                <a:solidFill>
+                  <a:srgbClr val="4FC8E8"/>
+                </a:solidFill>
+                <a:latin typeface="JetBrainsMono" pitchFamily="34" charset="0"/>
+                <a:ea typeface="JetBrainsMono" pitchFamily="34" charset="-122"/>
+                <a:cs typeface="JetBrainsMono" pitchFamily="34" charset="-120"/>
+              </a:rPr>
+              <a:t>P-02</a:t>
+            </a:r>
+            <a:endParaRPr lang="en-US" sz="1600" dirty="0"/>
+          </a:p>
+        </p:txBody>
+      </p:sp>
+      <p:sp>
+        <p:nvSpPr>
+          <p:cNvPr id="11" name="Text 9"/>
+          <p:cNvSpPr/>
+          <p:nvPr/>
+        </p:nvSpPr>
+        <p:spPr>
+          <a:xfrm>
+            <a:off x="7180650" y="1861542"/>
+            <a:ext cx="976568" cy="342900"/>
+          </a:xfrm>
+          <a:prstGeom prst="rect">
+            <a:avLst/>
+          </a:prstGeom>
+          <a:noFill/>
+          <a:ln/>
+        </p:spPr>
+        <p:txBody>
+          <a:bodyPr wrap="square" lIns="0" tIns="0" rIns="0" bIns="0" rtlCol="0" anchor="t"/>
+          <a:lstStyle/>
+          <a:p>
+            <a:pPr algn="l" indent="0" marL="0">
+              <a:lnSpc>
+                <a:spcPts val="2700"/>
+              </a:lnSpc>
+              <a:buNone/>
+            </a:pPr>
+            <a:r>
+              <a:rPr lang="en-US" sz="2000" b="1" dirty="0">
+                <a:solidFill>
+                  <a:srgbClr val="E8EEF7"/>
+                </a:solidFill>
+                <a:latin typeface="Inter" pitchFamily="34" charset="0"/>
+                <a:ea typeface="Inter" pitchFamily="34" charset="-122"/>
+                <a:cs typeface="Inter" pitchFamily="34" charset="-120"/>
+              </a:rPr>
+              <a:t>Routing</a:t>
+            </a:r>
+            <a:endParaRPr lang="en-US" sz="2000" dirty="0"/>
+          </a:p>
+        </p:txBody>
+      </p:sp>
+      <p:sp>
+        <p:nvSpPr>
+          <p:cNvPr id="12" name="Text 10"/>
+          <p:cNvSpPr/>
+          <p:nvPr/>
+        </p:nvSpPr>
+        <p:spPr>
+          <a:xfrm>
+            <a:off x="6471016" y="2366963"/>
+            <a:ext cx="4973295" cy="367506"/>
+          </a:xfrm>
+          <a:prstGeom prst="rect">
+            <a:avLst/>
+          </a:prstGeom>
+          <a:noFill/>
+          <a:ln/>
+        </p:spPr>
+        <p:txBody>
+          <a:bodyPr wrap="square" lIns="0" tIns="0" rIns="0" bIns="0" rtlCol="0" anchor="t"/>
+          <a:lstStyle/>
+          <a:p>
+            <a:pPr algn="l" indent="0" marL="0">
+              <a:lnSpc>
+                <a:spcPts val="2893"/>
+              </a:lnSpc>
+              <a:spcAft>
+                <a:spcPts val="800"/>
+              </a:spcAft>
+              <a:buNone/>
+            </a:pPr>
+            <a:r>
+              <a:rPr lang="en-US" sz="1466" dirty="0">
+                <a:solidFill>
+                  <a:srgbClr val="4FC8E8"/>
+                </a:solidFill>
+                <a:latin typeface="Inter" pitchFamily="34" charset="0"/>
+                <a:ea typeface="Inter" pitchFamily="34" charset="-122"/>
+                <a:cs typeface="Inter" pitchFamily="34" charset="-120"/>
+              </a:rPr>
+              <a:t>ADDS</a:t>
+            </a:r>
+            <a:pPr algn="l" indent="0" marL="0">
+              <a:lnSpc>
+                <a:spcPts val="2893"/>
+              </a:lnSpc>
+              <a:spcAft>
+                <a:spcPts val="800"/>
+              </a:spcAft>
+              <a:buNone/>
+            </a:pPr>
+            <a:r>
+              <a:rPr lang="en-US" sz="1866" dirty="0">
+                <a:solidFill>
+                  <a:srgbClr val="E8EEF7"/>
+                </a:solidFill>
+                <a:latin typeface="Inter" pitchFamily="34" charset="0"/>
+                <a:ea typeface="Inter" pitchFamily="34" charset="-122"/>
+                <a:cs typeface="Inter" pitchFamily="34" charset="-120"/>
+              </a:rPr>
+              <a:t> The right source per question.</a:t>
+            </a:r>
+            <a:endParaRPr lang="en-US" sz="1866" dirty="0"/>
+          </a:p>
+        </p:txBody>
+      </p:sp>
+      <p:sp>
+        <p:nvSpPr>
+          <p:cNvPr id="13" name="Text 11"/>
+          <p:cNvSpPr/>
+          <p:nvPr/>
+        </p:nvSpPr>
+        <p:spPr>
+          <a:xfrm>
+            <a:off x="6471016" y="2836069"/>
+            <a:ext cx="4973295" cy="367506"/>
+          </a:xfrm>
+          <a:prstGeom prst="rect">
+            <a:avLst/>
+          </a:prstGeom>
+          <a:noFill/>
+          <a:ln/>
+        </p:spPr>
+        <p:txBody>
+          <a:bodyPr wrap="square" lIns="0" tIns="0" rIns="0" bIns="0" rtlCol="0" anchor="t"/>
+          <a:lstStyle/>
+          <a:p>
+            <a:pPr algn="l" indent="0" marL="0">
+              <a:lnSpc>
+                <a:spcPts val="2893"/>
+              </a:lnSpc>
+              <a:buNone/>
+            </a:pPr>
+            <a:r>
+              <a:rPr lang="en-US" sz="1466" dirty="0">
+                <a:solidFill>
+                  <a:srgbClr val="8FA3C8"/>
+                </a:solidFill>
+                <a:latin typeface="Inter" pitchFamily="34" charset="0"/>
+                <a:ea typeface="Inter" pitchFamily="34" charset="-122"/>
+                <a:cs typeface="Inter" pitchFamily="34" charset="-120"/>
+              </a:rPr>
+              <a:t>COSTS</a:t>
+            </a:r>
+            <a:pPr algn="l" indent="0" marL="0">
+              <a:lnSpc>
+                <a:spcPts val="2893"/>
+              </a:lnSpc>
+              <a:buNone/>
+            </a:pPr>
+            <a:r>
+              <a:rPr lang="en-US" sz="1866" dirty="0">
+                <a:solidFill>
+                  <a:srgbClr val="8FA3C8"/>
+                </a:solidFill>
+                <a:latin typeface="Inter" pitchFamily="34" charset="0"/>
+                <a:ea typeface="Inter" pitchFamily="34" charset="-122"/>
+                <a:cs typeface="Inter" pitchFamily="34" charset="-120"/>
+              </a:rPr>
+              <a:t> A router to maintain and debug.</a:t>
+            </a:r>
+            <a:endParaRPr lang="en-US" sz="1866" dirty="0"/>
+          </a:p>
+        </p:txBody>
+      </p:sp>
+      <p:sp>
+        <p:nvSpPr>
+          <p:cNvPr id="14" name="Text 12"/>
+          <p:cNvSpPr/>
+          <p:nvPr/>
+        </p:nvSpPr>
+        <p:spPr>
+          <a:xfrm>
+            <a:off x="575523" y="3805039"/>
+            <a:ext cx="5408847" cy="1939528"/>
+          </a:xfrm>
+          <a:prstGeom prst="rect">
+            <a:avLst/>
+          </a:prstGeom>
+          <a:noFill/>
+          <a:ln w="12698">
+            <a:solidFill>
+              <a:srgbClr val="4FC8E8"/>
+            </a:solidFill>
+          </a:ln>
+        </p:spPr>
+        <p:txBody>
+          <a:bodyPr wrap="square" rtlCol="0" anchor="ctr"/>
+          <a:lstStyle/>
+          <a:p>
+            <a:pPr indent="0" marL="0">
+              <a:buNone/>
+            </a:pPr>
+            <a:endParaRPr lang="en-US" dirty="0"/>
+          </a:p>
+        </p:txBody>
+      </p:sp>
+      <p:sp>
+        <p:nvSpPr>
+          <p:cNvPr id="15" name="Text 13"/>
+          <p:cNvSpPr/>
+          <p:nvPr/>
+        </p:nvSpPr>
+        <p:spPr>
+          <a:xfrm>
+            <a:off x="842157" y="4059039"/>
+            <a:ext cx="551217" cy="314920"/>
+          </a:xfrm>
+          <a:prstGeom prst="rect">
+            <a:avLst/>
+          </a:prstGeom>
+          <a:noFill/>
+          <a:ln/>
+        </p:spPr>
+        <p:txBody>
+          <a:bodyPr wrap="square" lIns="0" tIns="0" rIns="0" bIns="0" rtlCol="0" anchor="t"/>
+          <a:lstStyle/>
+          <a:p>
+            <a:pPr algn="l" indent="0" marL="0">
+              <a:lnSpc>
+                <a:spcPts val="2480"/>
+              </a:lnSpc>
+              <a:buNone/>
+            </a:pPr>
+            <a:r>
+              <a:rPr lang="en-US" sz="1600" dirty="0">
+                <a:solidFill>
+                  <a:srgbClr val="4FC8E8"/>
+                </a:solidFill>
+                <a:latin typeface="JetBrainsMono" pitchFamily="34" charset="0"/>
+                <a:ea typeface="JetBrainsMono" pitchFamily="34" charset="-122"/>
+                <a:cs typeface="JetBrainsMono" pitchFamily="34" charset="-120"/>
+              </a:rPr>
+              <a:t>P-03</a:t>
+            </a:r>
+            <a:endParaRPr lang="en-US" sz="1600" dirty="0"/>
+          </a:p>
+        </p:txBody>
+      </p:sp>
+      <p:sp>
+        <p:nvSpPr>
+          <p:cNvPr id="16" name="Text 14"/>
+          <p:cNvSpPr/>
+          <p:nvPr/>
+        </p:nvSpPr>
+        <p:spPr>
+          <a:xfrm>
+            <a:off x="1551790" y="4020939"/>
+            <a:ext cx="1214943" cy="342900"/>
+          </a:xfrm>
+          <a:prstGeom prst="rect">
+            <a:avLst/>
+          </a:prstGeom>
+          <a:noFill/>
+          <a:ln/>
+        </p:spPr>
+        <p:txBody>
+          <a:bodyPr wrap="square" lIns="0" tIns="0" rIns="0" bIns="0" rtlCol="0" anchor="t"/>
+          <a:lstStyle/>
+          <a:p>
+            <a:pPr algn="l" indent="0" marL="0">
+              <a:lnSpc>
+                <a:spcPts val="2700"/>
+              </a:lnSpc>
+              <a:buNone/>
+            </a:pPr>
+            <a:r>
+              <a:rPr lang="en-US" sz="2000" b="1" dirty="0">
+                <a:solidFill>
+                  <a:srgbClr val="E8EEF7"/>
+                </a:solidFill>
+                <a:latin typeface="Inter" pitchFamily="34" charset="0"/>
+                <a:ea typeface="Inter" pitchFamily="34" charset="-122"/>
+                <a:cs typeface="Inter" pitchFamily="34" charset="-120"/>
+              </a:rPr>
+              <a:t>Multi-hop</a:t>
+            </a:r>
+            <a:endParaRPr lang="en-US" sz="2000" dirty="0"/>
+          </a:p>
+        </p:txBody>
+      </p:sp>
+      <p:sp>
+        <p:nvSpPr>
+          <p:cNvPr id="17" name="Text 15"/>
+          <p:cNvSpPr/>
+          <p:nvPr/>
+        </p:nvSpPr>
+        <p:spPr>
+          <a:xfrm>
+            <a:off x="842157" y="4526359"/>
+            <a:ext cx="4973092" cy="367506"/>
+          </a:xfrm>
+          <a:prstGeom prst="rect">
+            <a:avLst/>
+          </a:prstGeom>
+          <a:noFill/>
+          <a:ln/>
+        </p:spPr>
+        <p:txBody>
+          <a:bodyPr wrap="square" lIns="0" tIns="0" rIns="0" bIns="0" rtlCol="0" anchor="t"/>
+          <a:lstStyle/>
+          <a:p>
+            <a:pPr algn="l" indent="0" marL="0">
+              <a:lnSpc>
+                <a:spcPts val="2893"/>
+              </a:lnSpc>
+              <a:spcAft>
+                <a:spcPts val="800"/>
+              </a:spcAft>
+              <a:buNone/>
+            </a:pPr>
+            <a:r>
+              <a:rPr lang="en-US" sz="1466" dirty="0">
+                <a:solidFill>
+                  <a:srgbClr val="4FC8E8"/>
+                </a:solidFill>
+                <a:latin typeface="Inter" pitchFamily="34" charset="0"/>
+                <a:ea typeface="Inter" pitchFamily="34" charset="-122"/>
+                <a:cs typeface="Inter" pitchFamily="34" charset="-120"/>
+              </a:rPr>
+              <a:t>ADDS</a:t>
+            </a:r>
+            <a:pPr algn="l" indent="0" marL="0">
+              <a:lnSpc>
+                <a:spcPts val="2893"/>
+              </a:lnSpc>
+              <a:spcAft>
+                <a:spcPts val="800"/>
+              </a:spcAft>
+              <a:buNone/>
+            </a:pPr>
+            <a:r>
+              <a:rPr lang="en-US" sz="1866" dirty="0">
+                <a:solidFill>
+                  <a:srgbClr val="E8EEF7"/>
+                </a:solidFill>
+                <a:latin typeface="Inter" pitchFamily="34" charset="0"/>
+                <a:ea typeface="Inter" pitchFamily="34" charset="-122"/>
+                <a:cs typeface="Inter" pitchFamily="34" charset="-120"/>
+              </a:rPr>
+              <a:t> Answers that join two documents.</a:t>
+            </a:r>
+            <a:endParaRPr lang="en-US" sz="1866" dirty="0"/>
+          </a:p>
+        </p:txBody>
+      </p:sp>
+      <p:sp>
+        <p:nvSpPr>
+          <p:cNvPr id="18" name="Text 16"/>
+          <p:cNvSpPr/>
+          <p:nvPr/>
+        </p:nvSpPr>
+        <p:spPr>
+          <a:xfrm>
+            <a:off x="842157" y="4995466"/>
+            <a:ext cx="4973092" cy="367506"/>
+          </a:xfrm>
+          <a:prstGeom prst="rect">
+            <a:avLst/>
+          </a:prstGeom>
+          <a:noFill/>
+          <a:ln/>
+        </p:spPr>
+        <p:txBody>
+          <a:bodyPr wrap="square" lIns="0" tIns="0" rIns="0" bIns="0" rtlCol="0" anchor="t"/>
+          <a:lstStyle/>
+          <a:p>
+            <a:pPr algn="l" indent="0" marL="0">
+              <a:lnSpc>
+                <a:spcPts val="2893"/>
+              </a:lnSpc>
+              <a:buNone/>
+            </a:pPr>
+            <a:r>
+              <a:rPr lang="en-US" sz="1466" dirty="0">
+                <a:solidFill>
+                  <a:srgbClr val="8FA3C8"/>
+                </a:solidFill>
+                <a:latin typeface="Inter" pitchFamily="34" charset="0"/>
+                <a:ea typeface="Inter" pitchFamily="34" charset="-122"/>
+                <a:cs typeface="Inter" pitchFamily="34" charset="-120"/>
+              </a:rPr>
+              <a:t>COSTS</a:t>
+            </a:r>
+            <a:pPr algn="l" indent="0" marL="0">
+              <a:lnSpc>
+                <a:spcPts val="2893"/>
+              </a:lnSpc>
+              <a:buNone/>
+            </a:pPr>
+            <a:r>
+              <a:rPr lang="en-US" sz="1866" dirty="0">
+                <a:solidFill>
+                  <a:srgbClr val="8FA3C8"/>
+                </a:solidFill>
+                <a:latin typeface="Inter" pitchFamily="34" charset="0"/>
+                <a:ea typeface="Inter" pitchFamily="34" charset="-122"/>
+                <a:cs typeface="Inter" pitchFamily="34" charset="-120"/>
+              </a:rPr>
+              <a:t> Latency multiplies by hop count.</a:t>
+            </a:r>
+            <a:endParaRPr lang="en-US" sz="1866" dirty="0"/>
+          </a:p>
+        </p:txBody>
+      </p:sp>
+      <p:sp>
+        <p:nvSpPr>
+          <p:cNvPr id="19" name="Text 17"/>
+          <p:cNvSpPr/>
+          <p:nvPr/>
+        </p:nvSpPr>
+        <p:spPr>
+          <a:xfrm>
+            <a:off x="6204383" y="3805039"/>
+            <a:ext cx="5409046" cy="1939528"/>
+          </a:xfrm>
+          <a:prstGeom prst="rect">
+            <a:avLst/>
+          </a:prstGeom>
+          <a:noFill/>
+          <a:ln w="12698">
+            <a:solidFill>
+              <a:srgbClr val="4FC8E8"/>
+            </a:solidFill>
+          </a:ln>
+        </p:spPr>
+        <p:txBody>
+          <a:bodyPr wrap="square" rtlCol="0" anchor="ctr"/>
+          <a:lstStyle/>
+          <a:p>
+            <a:pPr indent="0" marL="0">
+              <a:buNone/>
+            </a:pPr>
+            <a:endParaRPr lang="en-US" dirty="0"/>
+          </a:p>
+        </p:txBody>
+      </p:sp>
+      <p:sp>
+        <p:nvSpPr>
+          <p:cNvPr id="20" name="Text 18"/>
+          <p:cNvSpPr/>
+          <p:nvPr/>
+        </p:nvSpPr>
+        <p:spPr>
+          <a:xfrm>
+            <a:off x="6471016" y="4059039"/>
+            <a:ext cx="551217" cy="314920"/>
+          </a:xfrm>
+          <a:prstGeom prst="rect">
+            <a:avLst/>
+          </a:prstGeom>
+          <a:noFill/>
+          <a:ln/>
+        </p:spPr>
+        <p:txBody>
+          <a:bodyPr wrap="square" lIns="0" tIns="0" rIns="0" bIns="0" rtlCol="0" anchor="t"/>
+          <a:lstStyle/>
+          <a:p>
+            <a:pPr algn="l" indent="0" marL="0">
+              <a:lnSpc>
+                <a:spcPts val="2480"/>
+              </a:lnSpc>
+              <a:buNone/>
+            </a:pPr>
+            <a:r>
+              <a:rPr lang="en-US" sz="1600" dirty="0">
+                <a:solidFill>
+                  <a:srgbClr val="4FC8E8"/>
+                </a:solidFill>
+                <a:latin typeface="JetBrainsMono" pitchFamily="34" charset="0"/>
+                <a:ea typeface="JetBrainsMono" pitchFamily="34" charset="-122"/>
+                <a:cs typeface="JetBrainsMono" pitchFamily="34" charset="-120"/>
+              </a:rPr>
+              <a:t>P-04</a:t>
+            </a:r>
+            <a:endParaRPr lang="en-US" sz="1600" dirty="0"/>
+          </a:p>
+        </p:txBody>
+      </p:sp>
+      <p:sp>
+        <p:nvSpPr>
+          <p:cNvPr id="21" name="Text 19"/>
+          <p:cNvSpPr/>
+          <p:nvPr/>
+        </p:nvSpPr>
+        <p:spPr>
+          <a:xfrm>
+            <a:off x="7180650" y="4020939"/>
+            <a:ext cx="2168038" cy="342900"/>
+          </a:xfrm>
+          <a:prstGeom prst="rect">
+            <a:avLst/>
+          </a:prstGeom>
+          <a:noFill/>
+          <a:ln/>
+        </p:spPr>
+        <p:txBody>
+          <a:bodyPr wrap="square" lIns="0" tIns="0" rIns="0" bIns="0" rtlCol="0" anchor="t"/>
+          <a:lstStyle/>
+          <a:p>
+            <a:pPr algn="l" indent="0" marL="0">
+              <a:lnSpc>
+                <a:spcPts val="2700"/>
+              </a:lnSpc>
+              <a:buNone/>
+            </a:pPr>
+            <a:r>
+              <a:rPr lang="en-US" sz="2000" b="1" dirty="0">
+                <a:solidFill>
+                  <a:srgbClr val="E8EEF7"/>
+                </a:solidFill>
+                <a:latin typeface="Inter" pitchFamily="34" charset="0"/>
+                <a:ea typeface="Inter" pitchFamily="34" charset="-122"/>
+                <a:cs typeface="Inter" pitchFamily="34" charset="-120"/>
+              </a:rPr>
+              <a:t>Retrieval grading</a:t>
+            </a:r>
+            <a:endParaRPr lang="en-US" sz="2000" dirty="0"/>
+          </a:p>
+        </p:txBody>
+      </p:sp>
+      <p:sp>
+        <p:nvSpPr>
+          <p:cNvPr id="22" name="Text 20"/>
+          <p:cNvSpPr/>
+          <p:nvPr/>
+        </p:nvSpPr>
+        <p:spPr>
+          <a:xfrm>
+            <a:off x="6471016" y="4526359"/>
+            <a:ext cx="4973295" cy="367506"/>
+          </a:xfrm>
+          <a:prstGeom prst="rect">
+            <a:avLst/>
+          </a:prstGeom>
+          <a:noFill/>
+          <a:ln/>
+        </p:spPr>
+        <p:txBody>
+          <a:bodyPr wrap="square" lIns="0" tIns="0" rIns="0" bIns="0" rtlCol="0" anchor="t"/>
+          <a:lstStyle/>
+          <a:p>
+            <a:pPr algn="l" indent="0" marL="0">
+              <a:lnSpc>
+                <a:spcPts val="2893"/>
+              </a:lnSpc>
+              <a:spcAft>
+                <a:spcPts val="800"/>
+              </a:spcAft>
+              <a:buNone/>
+            </a:pPr>
+            <a:r>
+              <a:rPr lang="en-US" sz="1466" dirty="0">
+                <a:solidFill>
+                  <a:srgbClr val="4FC8E8"/>
+                </a:solidFill>
+                <a:latin typeface="Inter" pitchFamily="34" charset="0"/>
+                <a:ea typeface="Inter" pitchFamily="34" charset="-122"/>
+                <a:cs typeface="Inter" pitchFamily="34" charset="-120"/>
+              </a:rPr>
+              <a:t>ADDS</a:t>
+            </a:r>
+            <a:pPr algn="l" indent="0" marL="0">
+              <a:lnSpc>
+                <a:spcPts val="2893"/>
+              </a:lnSpc>
+              <a:spcAft>
+                <a:spcPts val="800"/>
+              </a:spcAft>
+              <a:buNone/>
+            </a:pPr>
+            <a:r>
+              <a:rPr lang="en-US" sz="1866" dirty="0">
+                <a:solidFill>
+                  <a:srgbClr val="E8EEF7"/>
+                </a:solidFill>
+                <a:latin typeface="Inter" pitchFamily="34" charset="0"/>
+                <a:ea typeface="Inter" pitchFamily="34" charset="-122"/>
+                <a:cs typeface="Inter" pitchFamily="34" charset="-120"/>
+              </a:rPr>
+              <a:t> The loop can tell that it failed.</a:t>
+            </a:r>
+            <a:endParaRPr lang="en-US" sz="1866" dirty="0"/>
+          </a:p>
+        </p:txBody>
+      </p:sp>
+      <p:sp>
+        <p:nvSpPr>
+          <p:cNvPr id="23" name="Text 21"/>
+          <p:cNvSpPr/>
+          <p:nvPr/>
+        </p:nvSpPr>
+        <p:spPr>
+          <a:xfrm>
+            <a:off x="6471016" y="4995466"/>
+            <a:ext cx="4973295" cy="367506"/>
+          </a:xfrm>
+          <a:prstGeom prst="rect">
+            <a:avLst/>
+          </a:prstGeom>
+          <a:noFill/>
+          <a:ln/>
+        </p:spPr>
+        <p:txBody>
+          <a:bodyPr wrap="square" lIns="0" tIns="0" rIns="0" bIns="0" rtlCol="0" anchor="t"/>
+          <a:lstStyle/>
+          <a:p>
+            <a:pPr algn="l" indent="0" marL="0">
+              <a:lnSpc>
+                <a:spcPts val="2893"/>
+              </a:lnSpc>
+              <a:buNone/>
+            </a:pPr>
+            <a:r>
+              <a:rPr lang="en-US" sz="1466" dirty="0">
+                <a:solidFill>
+                  <a:srgbClr val="8FA3C8"/>
+                </a:solidFill>
+                <a:latin typeface="Inter" pitchFamily="34" charset="0"/>
+                <a:ea typeface="Inter" pitchFamily="34" charset="-122"/>
+                <a:cs typeface="Inter" pitchFamily="34" charset="-120"/>
+              </a:rPr>
+              <a:t>COSTS</a:t>
+            </a:r>
+            <a:pPr algn="l" indent="0" marL="0">
+              <a:lnSpc>
+                <a:spcPts val="2893"/>
+              </a:lnSpc>
+              <a:buNone/>
+            </a:pPr>
+            <a:r>
+              <a:rPr lang="en-US" sz="1866" dirty="0">
+                <a:solidFill>
+                  <a:srgbClr val="8FA3C8"/>
+                </a:solidFill>
+                <a:latin typeface="Inter" pitchFamily="34" charset="0"/>
+                <a:ea typeface="Inter" pitchFamily="34" charset="-122"/>
+                <a:cs typeface="Inter" pitchFamily="34" charset="-120"/>
+              </a:rPr>
+              <a:t> A judge whose mistakes are yours.</a:t>
+            </a:r>
+            <a:endParaRPr lang="en-US" sz="1866" dirty="0"/>
+          </a:p>
+        </p:txBody>
+      </p:sp>
+      <p:sp>
+        <p:nvSpPr>
+          <p:cNvPr id="24" name="Text 22"/>
+          <p:cNvSpPr/>
+          <p:nvPr/>
+        </p:nvSpPr>
+        <p:spPr>
+          <a:xfrm>
+            <a:off x="6926515" y="5981502"/>
+            <a:ext cx="4686914" cy="465138"/>
+          </a:xfrm>
+          <a:prstGeom prst="rect">
+            <a:avLst/>
+          </a:prstGeom>
+          <a:noFill/>
+          <a:ln w="12698">
+            <a:solidFill>
+              <a:srgbClr val="4FC8E8"/>
+            </a:solidFill>
+          </a:ln>
+        </p:spPr>
+        <p:txBody>
+          <a:bodyPr wrap="square" rtlCol="0" anchor="ctr"/>
+          <a:lstStyle/>
+          <a:p>
+            <a:pPr indent="0" marL="0">
+              <a:buNone/>
+            </a:pPr>
+            <a:endParaRPr lang="en-US" dirty="0"/>
+          </a:p>
+        </p:txBody>
+      </p:sp>
+      <p:sp>
+        <p:nvSpPr>
+          <p:cNvPr id="25" name="Text 23"/>
+          <p:cNvSpPr/>
+          <p:nvPr/>
+        </p:nvSpPr>
+        <p:spPr>
+          <a:xfrm>
+            <a:off x="7125299" y="6078736"/>
+            <a:ext cx="207212" cy="270669"/>
+          </a:xfrm>
+          <a:prstGeom prst="rect">
+            <a:avLst/>
+          </a:prstGeom>
+          <a:noFill/>
+          <a:ln/>
+        </p:spPr>
+        <p:txBody>
+          <a:bodyPr wrap="square" lIns="0" tIns="0" rIns="0" bIns="0" rtlCol="0" anchor="t"/>
+          <a:lstStyle/>
+          <a:p>
+            <a:pPr algn="l" indent="0" marL="0">
+              <a:lnSpc>
+                <a:spcPts val="2133"/>
+              </a:lnSpc>
+              <a:buNone/>
+            </a:pPr>
+            <a:r>
+              <a:rPr lang="en-US" sz="1333" dirty="0">
+                <a:solidFill>
+                  <a:srgbClr val="4FC8E8"/>
+                </a:solidFill>
+                <a:latin typeface="JetBrainsMono" pitchFamily="34" charset="0"/>
+                <a:ea typeface="JetBrainsMono" pitchFamily="34" charset="-122"/>
+                <a:cs typeface="JetBrainsMono" pitchFamily="34" charset="-120"/>
+              </a:rPr>
+              <a:t>04</a:t>
+            </a:r>
+            <a:endParaRPr lang="en-US" sz="1333" dirty="0"/>
+          </a:p>
+        </p:txBody>
+      </p:sp>
+      <p:sp>
+        <p:nvSpPr>
+          <p:cNvPr id="26" name="Shape 24"/>
+          <p:cNvSpPr/>
+          <p:nvPr/>
+        </p:nvSpPr>
+        <p:spPr>
+          <a:xfrm>
+            <a:off x="7520885" y="5994202"/>
+            <a:ext cx="0" cy="439737"/>
+          </a:xfrm>
+          <a:prstGeom prst="line">
+            <a:avLst/>
+          </a:prstGeom>
+          <a:noFill/>
+          <a:ln w="12698">
+            <a:solidFill>
+              <a:srgbClr val="4FC8E8"/>
+            </a:solidFill>
+            <a:prstDash val="solid"/>
+          </a:ln>
+        </p:spPr>
+      </p:sp>
+      <p:sp>
+        <p:nvSpPr>
+          <p:cNvPr id="27" name="Text 25"/>
+          <p:cNvSpPr/>
+          <p:nvPr/>
+        </p:nvSpPr>
+        <p:spPr>
+          <a:xfrm>
+            <a:off x="7713321" y="6078736"/>
+            <a:ext cx="2243112" cy="270669"/>
+          </a:xfrm>
+          <a:prstGeom prst="rect">
+            <a:avLst/>
+          </a:prstGeom>
+          <a:noFill/>
+          <a:ln/>
+        </p:spPr>
+        <p:txBody>
+          <a:bodyPr wrap="square" lIns="0" tIns="0" rIns="0" bIns="0" rtlCol="0" anchor="t"/>
+          <a:lstStyle/>
+          <a:p>
+            <a:pPr algn="l" indent="0" marL="0">
+              <a:lnSpc>
+                <a:spcPts val="2133"/>
+              </a:lnSpc>
+              <a:buNone/>
+            </a:pPr>
+            <a:r>
+              <a:rPr lang="en-US" sz="1333" dirty="0">
+                <a:solidFill>
+                  <a:srgbClr val="E8EEF7"/>
+                </a:solidFill>
+                <a:latin typeface="Inter" pitchFamily="34" charset="0"/>
+                <a:ea typeface="Inter" pitchFamily="34" charset="-122"/>
+                <a:cs typeface="Inter" pitchFamily="34" charset="-120"/>
+              </a:rPr>
+              <a:t>ADOPTABLE PATTERNS</a:t>
+            </a:r>
+            <a:endParaRPr lang="en-US" sz="1333" dirty="0"/>
+          </a:p>
+        </p:txBody>
+      </p:sp>
+      <p:sp>
+        <p:nvSpPr>
+          <p:cNvPr id="28" name="Shape 26"/>
+          <p:cNvSpPr/>
+          <p:nvPr/>
+        </p:nvSpPr>
+        <p:spPr>
+          <a:xfrm>
+            <a:off x="10104887" y="5994202"/>
+            <a:ext cx="0" cy="439737"/>
+          </a:xfrm>
+          <a:prstGeom prst="line">
+            <a:avLst/>
+          </a:prstGeom>
+          <a:noFill/>
+          <a:ln w="12698">
+            <a:solidFill>
+              <a:srgbClr val="4FC8E8"/>
+            </a:solidFill>
+            <a:prstDash val="solid"/>
+          </a:ln>
+        </p:spPr>
+      </p:sp>
+      <p:sp>
+        <p:nvSpPr>
+          <p:cNvPr id="29" name="Text 27"/>
+          <p:cNvSpPr/>
+          <p:nvPr/>
+        </p:nvSpPr>
+        <p:spPr>
+          <a:xfrm>
+            <a:off x="10297323" y="6078736"/>
+            <a:ext cx="1139667" cy="270669"/>
+          </a:xfrm>
+          <a:prstGeom prst="rect">
+            <a:avLst/>
+          </a:prstGeom>
+          <a:noFill/>
+          <a:ln/>
+        </p:spPr>
+        <p:txBody>
+          <a:bodyPr wrap="square" lIns="0" tIns="0" rIns="0" bIns="0" rtlCol="0" anchor="t"/>
+          <a:lstStyle/>
+          <a:p>
+            <a:pPr algn="l" indent="0" marL="0">
+              <a:lnSpc>
+                <a:spcPts val="2133"/>
+              </a:lnSpc>
+              <a:buNone/>
+            </a:pPr>
+            <a:r>
+              <a:rPr lang="en-US" sz="1333" dirty="0">
+                <a:solidFill>
+                  <a:srgbClr val="8FA3C8"/>
+                </a:solidFill>
+                <a:latin typeface="JetBrainsMono" pitchFamily="34" charset="0"/>
+                <a:ea typeface="JetBrainsMono" pitchFamily="34" charset="-122"/>
+                <a:cs typeface="JetBrainsMono" pitchFamily="34" charset="-120"/>
+              </a:rPr>
+              <a:t>SHEET 04/06</a:t>
+            </a:r>
+            <a:endParaRPr lang="en-US" sz="1333" dirty="0"/>
+          </a:p>
+        </p:txBody>
+      </p:sp>
     </p:spTree>
   </p:cSld>
   <p:clrMapOvr>
@@ -1495,6 +5945,13 @@
 <file path=ppt/slides/slide5.xml><?xml version="1.0" encoding="utf-8"?>
 <p:sld xmlns:a="http://schemas.openxmlformats.org/drawingml/2006/main" xmlns:r="http://schemas.openxmlformats.org/officeDocument/2006/relationships" xmlns:p="http://schemas.openxmlformats.org/presentationml/2006/main">
   <p:cSld name="Slide 5">
+    <p:bg>
+      <p:bgPr>
+        <a:solidFill>
+          <a:srgbClr val="0E1B3D"/>
+        </a:solidFill>
+      </p:bgPr>
+    </p:bg>
     <p:spTree>
       <p:nvGrpSpPr>
         <p:cNvPr id="1" name=""/>
@@ -1509,30 +5966,1569 @@
           <a:chExt cx="0" cy="0"/>
         </a:xfrm>
       </p:grpSpPr>
-      <p:pic>
-        <p:nvPicPr>
-          <p:cNvPr id="2" name="Image 0" descr="/tmp/slide-1787840615478-21j9qk7vbpd.png">    </p:cNvPr>
-          <p:cNvPicPr>
-            <a:picLocks noChangeAspect="1"/>
-          </p:cNvPicPr>
-          <p:nvPr/>
-        </p:nvPicPr>
-        <p:blipFill>
-          <a:blip r:embed="rId1"/>
-          <a:stretch>
-            <a:fillRect/>
-          </a:stretch>
-        </p:blipFill>
-        <p:spPr>
-          <a:xfrm>
-            <a:off x="0" y="0"/>
-            <a:ext cx="12188952" cy="6858000"/>
-          </a:xfrm>
-          <a:prstGeom prst="rect">
-            <a:avLst/>
-          </a:prstGeom>
-        </p:spPr>
-      </p:pic>
+      <p:sp>
+        <p:nvSpPr>
+          <p:cNvPr id="2" name="Text 0"/>
+          <p:cNvSpPr/>
+          <p:nvPr/>
+        </p:nvSpPr>
+        <p:spPr>
+          <a:xfrm>
+            <a:off x="575523" y="508000"/>
+            <a:ext cx="11258664" cy="484187"/>
+          </a:xfrm>
+          <a:prstGeom prst="rect">
+            <a:avLst/>
+          </a:prstGeom>
+          <a:noFill/>
+          <a:ln/>
+        </p:spPr>
+        <p:txBody>
+          <a:bodyPr wrap="square" lIns="0" tIns="0" rIns="0" bIns="0" rtlCol="0" anchor="t"/>
+          <a:lstStyle/>
+          <a:p>
+            <a:pPr algn="l" indent="0" marL="0">
+              <a:lnSpc>
+                <a:spcPts val="3813"/>
+              </a:lnSpc>
+              <a:spcAft>
+                <a:spcPts val="1866"/>
+              </a:spcAft>
+              <a:buNone/>
+            </a:pPr>
+            <a:r>
+              <a:rPr lang="en-US" sz="2933" dirty="0">
+                <a:solidFill>
+                  <a:srgbClr val="E8EEF7"/>
+                </a:solidFill>
+                <a:latin typeface="Inter" pitchFamily="34" charset="0"/>
+                <a:ea typeface="Inter" pitchFamily="34" charset="-122"/>
+                <a:cs typeface="Inter" pitchFamily="34" charset="-120"/>
+              </a:rPr>
+              <a:t>What it costs, and what to decide first</a:t>
+            </a:r>
+            <a:endParaRPr lang="en-US" sz="2933" dirty="0"/>
+          </a:p>
+        </p:txBody>
+      </p:sp>
+      <p:sp>
+        <p:nvSpPr>
+          <p:cNvPr id="3" name="Text 1"/>
+          <p:cNvSpPr/>
+          <p:nvPr/>
+        </p:nvSpPr>
+        <p:spPr>
+          <a:xfrm>
+            <a:off x="575523" y="1229122"/>
+            <a:ext cx="5383652" cy="3213298"/>
+          </a:xfrm>
+          <a:prstGeom prst="rect">
+            <a:avLst/>
+          </a:prstGeom>
+          <a:noFill/>
+          <a:ln w="12698">
+            <a:solidFill>
+              <a:srgbClr val="4FC8E8"/>
+            </a:solidFill>
+          </a:ln>
+        </p:spPr>
+        <p:txBody>
+          <a:bodyPr wrap="square" rtlCol="0" anchor="ctr"/>
+          <a:lstStyle/>
+          <a:p>
+            <a:pPr indent="0" marL="0">
+              <a:buNone/>
+            </a:pPr>
+            <a:endParaRPr lang="en-US" dirty="0"/>
+          </a:p>
+        </p:txBody>
+      </p:sp>
+      <p:sp>
+        <p:nvSpPr>
+          <p:cNvPr id="4" name="Text 2"/>
+          <p:cNvSpPr/>
+          <p:nvPr/>
+        </p:nvSpPr>
+        <p:spPr>
+          <a:xfrm>
+            <a:off x="588220" y="1241822"/>
+            <a:ext cx="5358259" cy="504627"/>
+          </a:xfrm>
+          <a:prstGeom prst="rect">
+            <a:avLst/>
+          </a:prstGeom>
+          <a:solidFill>
+            <a:srgbClr val="0E1B3D"/>
+          </a:solidFill>
+          <a:ln/>
+        </p:spPr>
+        <p:txBody>
+          <a:bodyPr wrap="square" rtlCol="0" anchor="ctr"/>
+          <a:lstStyle/>
+          <a:p>
+            <a:pPr indent="0" marL="0">
+              <a:buNone/>
+            </a:pPr>
+            <a:endParaRPr lang="en-US" dirty="0"/>
+          </a:p>
+        </p:txBody>
+      </p:sp>
+      <p:sp>
+        <p:nvSpPr>
+          <p:cNvPr id="5" name="Shape 3"/>
+          <p:cNvSpPr/>
+          <p:nvPr/>
+        </p:nvSpPr>
+        <p:spPr>
+          <a:xfrm>
+            <a:off x="588220" y="1740098"/>
+            <a:ext cx="5358259" cy="0"/>
+          </a:xfrm>
+          <a:prstGeom prst="line">
+            <a:avLst/>
+          </a:prstGeom>
+          <a:noFill/>
+          <a:ln w="12698">
+            <a:solidFill>
+              <a:srgbClr val="4FC8E8"/>
+            </a:solidFill>
+            <a:prstDash val="solid"/>
+          </a:ln>
+        </p:spPr>
+      </p:sp>
+      <p:sp>
+        <p:nvSpPr>
+          <p:cNvPr id="6" name="Shape 4"/>
+          <p:cNvSpPr/>
+          <p:nvPr/>
+        </p:nvSpPr>
+        <p:spPr>
+          <a:xfrm>
+            <a:off x="1148864" y="1241822"/>
+            <a:ext cx="0" cy="491927"/>
+          </a:xfrm>
+          <a:prstGeom prst="line">
+            <a:avLst/>
+          </a:prstGeom>
+          <a:noFill/>
+          <a:ln w="12698">
+            <a:solidFill>
+              <a:srgbClr val="4FC8E8"/>
+            </a:solidFill>
+            <a:prstDash val="solid"/>
+          </a:ln>
+        </p:spPr>
+      </p:sp>
+      <p:sp>
+        <p:nvSpPr>
+          <p:cNvPr id="7" name="Text 5"/>
+          <p:cNvSpPr/>
+          <p:nvPr/>
+        </p:nvSpPr>
+        <p:spPr>
+          <a:xfrm>
+            <a:off x="808232" y="1343422"/>
+            <a:ext cx="116557" cy="288727"/>
+          </a:xfrm>
+          <a:prstGeom prst="rect">
+            <a:avLst/>
+          </a:prstGeom>
+          <a:noFill/>
+          <a:ln/>
+        </p:spPr>
+        <p:txBody>
+          <a:bodyPr wrap="square" lIns="0" tIns="0" rIns="0" bIns="0" rtlCol="0" anchor="t"/>
+          <a:lstStyle/>
+          <a:p>
+            <a:pPr algn="l" indent="0" marL="0">
+              <a:lnSpc>
+                <a:spcPts val="2273"/>
+              </a:lnSpc>
+              <a:buNone/>
+            </a:pPr>
+            <a:r>
+              <a:rPr lang="en-US" sz="1466" dirty="0">
+                <a:solidFill>
+                  <a:srgbClr val="4FC8E8"/>
+                </a:solidFill>
+                <a:latin typeface="JetBrainsMono" pitchFamily="34" charset="0"/>
+                <a:ea typeface="JetBrainsMono" pitchFamily="34" charset="-122"/>
+                <a:cs typeface="JetBrainsMono" pitchFamily="34" charset="-120"/>
+              </a:rPr>
+              <a:t>A</a:t>
+            </a:r>
+            <a:endParaRPr lang="en-US" sz="1466" dirty="0"/>
+          </a:p>
+        </p:txBody>
+      </p:sp>
+      <p:sp>
+        <p:nvSpPr>
+          <p:cNvPr id="8" name="Text 6"/>
+          <p:cNvSpPr/>
+          <p:nvPr/>
+        </p:nvSpPr>
+        <p:spPr>
+          <a:xfrm>
+            <a:off x="1375225" y="1343422"/>
+            <a:ext cx="1581207" cy="288727"/>
+          </a:xfrm>
+          <a:prstGeom prst="rect">
+            <a:avLst/>
+          </a:prstGeom>
+          <a:noFill/>
+          <a:ln/>
+        </p:spPr>
+        <p:txBody>
+          <a:bodyPr wrap="square" lIns="0" tIns="0" rIns="0" bIns="0" rtlCol="0" anchor="t"/>
+          <a:lstStyle/>
+          <a:p>
+            <a:pPr algn="l" indent="0" marL="0">
+              <a:lnSpc>
+                <a:spcPts val="2273"/>
+              </a:lnSpc>
+              <a:buNone/>
+            </a:pPr>
+            <a:r>
+              <a:rPr lang="en-US" sz="1466" dirty="0">
+                <a:solidFill>
+                  <a:srgbClr val="E8EEF7"/>
+                </a:solidFill>
+                <a:latin typeface="JetBrainsMono" pitchFamily="34" charset="0"/>
+                <a:ea typeface="JetBrainsMono" pitchFamily="34" charset="-122"/>
+                <a:cs typeface="JetBrainsMono" pitchFamily="34" charset="-120"/>
+              </a:rPr>
+              <a:t>WHAT CHANGES</a:t>
+            </a:r>
+            <a:endParaRPr lang="en-US" sz="1466" dirty="0"/>
+          </a:p>
+        </p:txBody>
+      </p:sp>
+      <p:sp>
+        <p:nvSpPr>
+          <p:cNvPr id="9" name="Text 7"/>
+          <p:cNvSpPr/>
+          <p:nvPr/>
+        </p:nvSpPr>
+        <p:spPr>
+          <a:xfrm>
+            <a:off x="588220" y="1746448"/>
+            <a:ext cx="5358259" cy="2683272"/>
+          </a:xfrm>
+          <a:prstGeom prst="rect">
+            <a:avLst/>
+          </a:prstGeom>
+          <a:noFill/>
+          <a:ln/>
+        </p:spPr>
+        <p:txBody>
+          <a:bodyPr wrap="square" lIns="110053" tIns="0" rIns="0" bIns="0" rtlCol="0" anchor="t"/>
+          <a:lstStyle/>
+          <a:p>
+            <a:pPr algn="l" marL="110053" indent="-110053">
+              <a:buSzPct val="100000"/>
+              <a:buChar char="•"/>
+            </a:pPr>
+            <a:r>
+              <a:rPr lang="en-US" sz="1600" dirty="0">
+                <a:solidFill>
+                  <a:srgbClr val="E8EEF7"/>
+                </a:solidFill>
+                <a:latin typeface="Inter" pitchFamily="34" charset="0"/>
+                <a:ea typeface="Inter" pitchFamily="34" charset="-122"/>
+                <a:cs typeface="Inter" pitchFamily="34" charset="-120"/>
+              </a:rPr>
+              <a:t>Latency becomes a distribution</a:t>
+            </a:r>
+            <a:endParaRPr lang="en-US" sz="1600" dirty="0"/>
+          </a:p>
+          <a:p>
+            <a:pPr algn="l" marL="110053" indent="-110053">
+              <a:buSzPct val="100000"/>
+              <a:buChar char="•"/>
+            </a:pPr>
+            <a:r>
+              <a:rPr lang="en-US" sz="1600" dirty="0">
+                <a:solidFill>
+                  <a:srgbClr val="E8EEF7"/>
+                </a:solidFill>
+                <a:latin typeface="Inter" pitchFamily="34" charset="0"/>
+                <a:ea typeface="Inter" pitchFamily="34" charset="-122"/>
+                <a:cs typeface="Inter" pitchFamily="34" charset="-120"/>
+              </a:rPr>
+              <a:t>Token cost scales with attempts</a:t>
+            </a:r>
+            <a:endParaRPr lang="en-US" sz="1600" dirty="0"/>
+          </a:p>
+          <a:p>
+            <a:pPr algn="l" marL="110053" indent="-110053">
+              <a:buSzPct val="100000"/>
+              <a:buChar char="•"/>
+            </a:pPr>
+            <a:r>
+              <a:rPr lang="en-US" sz="1600" dirty="0">
+                <a:solidFill>
+                  <a:srgbClr val="E8EEF7"/>
+                </a:solidFill>
+                <a:latin typeface="Inter" pitchFamily="34" charset="0"/>
+                <a:ea typeface="Inter" pitchFamily="34" charset="-122"/>
+                <a:cs typeface="Inter" pitchFamily="34" charset="-120"/>
+              </a:rPr>
+              <a:t>The same question can take different paths</a:t>
+            </a:r>
+            <a:endParaRPr lang="en-US" sz="1600" dirty="0"/>
+          </a:p>
+          <a:p>
+            <a:pPr algn="l" marL="110053" indent="-110053">
+              <a:buSzPct val="100000"/>
+              <a:buChar char="•"/>
+            </a:pPr>
+            <a:r>
+              <a:rPr lang="en-US" sz="1600" dirty="0">
+                <a:solidFill>
+                  <a:srgbClr val="E8EEF7"/>
+                </a:solidFill>
+                <a:latin typeface="Inter" pitchFamily="34" charset="0"/>
+                <a:ea typeface="Inter" pitchFamily="34" charset="-122"/>
+                <a:cs typeface="Inter" pitchFamily="34" charset="-120"/>
+              </a:rPr>
+              <a:t>Failures become “never stopped”</a:t>
+            </a:r>
+            <a:endParaRPr lang="en-US" sz="1600" dirty="0"/>
+          </a:p>
+        </p:txBody>
+      </p:sp>
+      <p:sp>
+        <p:nvSpPr>
+          <p:cNvPr id="10" name="Text 8"/>
+          <p:cNvSpPr/>
+          <p:nvPr/>
+        </p:nvSpPr>
+        <p:spPr>
+          <a:xfrm>
+            <a:off x="808232" y="2101850"/>
+            <a:ext cx="84513" cy="84534"/>
+          </a:xfrm>
+          <a:prstGeom prst="rect">
+            <a:avLst/>
+          </a:prstGeom>
+          <a:solidFill>
+            <a:srgbClr val="4FC8E8"/>
+          </a:solidFill>
+          <a:ln/>
+        </p:spPr>
+        <p:txBody>
+          <a:bodyPr wrap="square" rtlCol="0" anchor="ctr"/>
+          <a:lstStyle/>
+          <a:p>
+            <a:pPr indent="0" marL="0">
+              <a:buNone/>
+            </a:pPr>
+            <a:endParaRPr lang="en-US" dirty="0"/>
+          </a:p>
+        </p:txBody>
+      </p:sp>
+      <p:sp>
+        <p:nvSpPr>
+          <p:cNvPr id="11" name="Text 9"/>
+          <p:cNvSpPr/>
+          <p:nvPr/>
+        </p:nvSpPr>
+        <p:spPr>
+          <a:xfrm>
+            <a:off x="1061970" y="2000250"/>
+            <a:ext cx="3561459" cy="343694"/>
+          </a:xfrm>
+          <a:prstGeom prst="rect">
+            <a:avLst/>
+          </a:prstGeom>
+          <a:noFill/>
+          <a:ln/>
+        </p:spPr>
+        <p:txBody>
+          <a:bodyPr wrap="square" lIns="0" tIns="0" rIns="0" bIns="0" rtlCol="0" anchor="t"/>
+          <a:lstStyle/>
+          <a:p>
+            <a:pPr algn="l" indent="0" marL="0">
+              <a:lnSpc>
+                <a:spcPts val="2706"/>
+              </a:lnSpc>
+              <a:buNone/>
+            </a:pPr>
+            <a:r>
+              <a:rPr lang="en-US" sz="1866" dirty="0">
+                <a:solidFill>
+                  <a:srgbClr val="E8EEF7"/>
+                </a:solidFill>
+                <a:latin typeface="Inter" pitchFamily="34" charset="0"/>
+                <a:ea typeface="Inter" pitchFamily="34" charset="-122"/>
+                <a:cs typeface="Inter" pitchFamily="34" charset="-120"/>
+              </a:rPr>
+              <a:t>Latency becomes a distribution</a:t>
+            </a:r>
+            <a:endParaRPr lang="en-US" sz="1866" dirty="0"/>
+          </a:p>
+        </p:txBody>
+      </p:sp>
+      <p:sp>
+        <p:nvSpPr>
+          <p:cNvPr id="12" name="Text 10"/>
+          <p:cNvSpPr/>
+          <p:nvPr/>
+        </p:nvSpPr>
+        <p:spPr>
+          <a:xfrm>
+            <a:off x="808232" y="2597944"/>
+            <a:ext cx="84513" cy="84534"/>
+          </a:xfrm>
+          <a:prstGeom prst="rect">
+            <a:avLst/>
+          </a:prstGeom>
+          <a:solidFill>
+            <a:srgbClr val="4FC8E8"/>
+          </a:solidFill>
+          <a:ln/>
+        </p:spPr>
+        <p:txBody>
+          <a:bodyPr wrap="square" rtlCol="0" anchor="ctr"/>
+          <a:lstStyle/>
+          <a:p>
+            <a:pPr indent="0" marL="0">
+              <a:buNone/>
+            </a:pPr>
+            <a:endParaRPr lang="en-US" dirty="0"/>
+          </a:p>
+        </p:txBody>
+      </p:sp>
+      <p:sp>
+        <p:nvSpPr>
+          <p:cNvPr id="13" name="Text 11"/>
+          <p:cNvSpPr/>
+          <p:nvPr/>
+        </p:nvSpPr>
+        <p:spPr>
+          <a:xfrm>
+            <a:off x="1061970" y="2496344"/>
+            <a:ext cx="3652115" cy="343694"/>
+          </a:xfrm>
+          <a:prstGeom prst="rect">
+            <a:avLst/>
+          </a:prstGeom>
+          <a:noFill/>
+          <a:ln/>
+        </p:spPr>
+        <p:txBody>
+          <a:bodyPr wrap="square" lIns="0" tIns="0" rIns="0" bIns="0" rtlCol="0" anchor="t"/>
+          <a:lstStyle/>
+          <a:p>
+            <a:pPr algn="l" indent="0" marL="0">
+              <a:lnSpc>
+                <a:spcPts val="2706"/>
+              </a:lnSpc>
+              <a:buNone/>
+            </a:pPr>
+            <a:r>
+              <a:rPr lang="en-US" sz="1866" dirty="0">
+                <a:solidFill>
+                  <a:srgbClr val="E8EEF7"/>
+                </a:solidFill>
+                <a:latin typeface="Inter" pitchFamily="34" charset="0"/>
+                <a:ea typeface="Inter" pitchFamily="34" charset="-122"/>
+                <a:cs typeface="Inter" pitchFamily="34" charset="-120"/>
+              </a:rPr>
+              <a:t>Token cost scales with attempts</a:t>
+            </a:r>
+            <a:endParaRPr lang="en-US" sz="1866" dirty="0"/>
+          </a:p>
+        </p:txBody>
+      </p:sp>
+      <p:sp>
+        <p:nvSpPr>
+          <p:cNvPr id="14" name="Text 12"/>
+          <p:cNvSpPr/>
+          <p:nvPr/>
+        </p:nvSpPr>
+        <p:spPr>
+          <a:xfrm>
+            <a:off x="808232" y="3094038"/>
+            <a:ext cx="84513" cy="84534"/>
+          </a:xfrm>
+          <a:prstGeom prst="rect">
+            <a:avLst/>
+          </a:prstGeom>
+          <a:solidFill>
+            <a:srgbClr val="4FC8E8"/>
+          </a:solidFill>
+          <a:ln/>
+        </p:spPr>
+        <p:txBody>
+          <a:bodyPr wrap="square" rtlCol="0" anchor="ctr"/>
+          <a:lstStyle/>
+          <a:p>
+            <a:pPr indent="0" marL="0">
+              <a:buNone/>
+            </a:pPr>
+            <a:endParaRPr lang="en-US" dirty="0"/>
+          </a:p>
+        </p:txBody>
+      </p:sp>
+      <p:sp>
+        <p:nvSpPr>
+          <p:cNvPr id="15" name="Text 13"/>
+          <p:cNvSpPr/>
+          <p:nvPr/>
+        </p:nvSpPr>
+        <p:spPr>
+          <a:xfrm>
+            <a:off x="1061970" y="2992438"/>
+            <a:ext cx="4757786" cy="687388"/>
+          </a:xfrm>
+          <a:prstGeom prst="rect">
+            <a:avLst/>
+          </a:prstGeom>
+          <a:noFill/>
+          <a:ln/>
+        </p:spPr>
+        <p:txBody>
+          <a:bodyPr wrap="square" lIns="0" tIns="0" rIns="0" bIns="0" rtlCol="0" anchor="t"/>
+          <a:lstStyle/>
+          <a:p>
+            <a:pPr algn="l" indent="0" marL="0">
+              <a:lnSpc>
+                <a:spcPts val="2706"/>
+              </a:lnSpc>
+              <a:buNone/>
+            </a:pPr>
+            <a:r>
+              <a:rPr lang="en-US" sz="1866" dirty="0">
+                <a:solidFill>
+                  <a:srgbClr val="E8EEF7"/>
+                </a:solidFill>
+                <a:latin typeface="Inter" pitchFamily="34" charset="0"/>
+                <a:ea typeface="Inter" pitchFamily="34" charset="-122"/>
+                <a:cs typeface="Inter" pitchFamily="34" charset="-120"/>
+              </a:rPr>
+              <a:t>The same question can take different paths</a:t>
+            </a:r>
+            <a:endParaRPr lang="en-US" sz="1866" dirty="0"/>
+          </a:p>
+        </p:txBody>
+      </p:sp>
+      <p:sp>
+        <p:nvSpPr>
+          <p:cNvPr id="16" name="Text 14"/>
+          <p:cNvSpPr/>
+          <p:nvPr/>
+        </p:nvSpPr>
+        <p:spPr>
+          <a:xfrm>
+            <a:off x="808232" y="3933825"/>
+            <a:ext cx="84513" cy="84534"/>
+          </a:xfrm>
+          <a:prstGeom prst="rect">
+            <a:avLst/>
+          </a:prstGeom>
+          <a:solidFill>
+            <a:srgbClr val="4FC8E8"/>
+          </a:solidFill>
+          <a:ln/>
+        </p:spPr>
+        <p:txBody>
+          <a:bodyPr wrap="square" rtlCol="0" anchor="ctr"/>
+          <a:lstStyle/>
+          <a:p>
+            <a:pPr indent="0" marL="0">
+              <a:buNone/>
+            </a:pPr>
+            <a:endParaRPr lang="en-US" dirty="0"/>
+          </a:p>
+        </p:txBody>
+      </p:sp>
+      <p:sp>
+        <p:nvSpPr>
+          <p:cNvPr id="17" name="Text 15"/>
+          <p:cNvSpPr/>
+          <p:nvPr/>
+        </p:nvSpPr>
+        <p:spPr>
+          <a:xfrm>
+            <a:off x="1061970" y="3832225"/>
+            <a:ext cx="3794573" cy="343694"/>
+          </a:xfrm>
+          <a:prstGeom prst="rect">
+            <a:avLst/>
+          </a:prstGeom>
+          <a:noFill/>
+          <a:ln/>
+        </p:spPr>
+        <p:txBody>
+          <a:bodyPr wrap="square" lIns="0" tIns="0" rIns="0" bIns="0" rtlCol="0" anchor="t"/>
+          <a:lstStyle/>
+          <a:p>
+            <a:pPr algn="l" indent="0" marL="0">
+              <a:lnSpc>
+                <a:spcPts val="2706"/>
+              </a:lnSpc>
+              <a:buNone/>
+            </a:pPr>
+            <a:r>
+              <a:rPr lang="en-US" sz="1866" dirty="0">
+                <a:solidFill>
+                  <a:srgbClr val="E8EEF7"/>
+                </a:solidFill>
+                <a:latin typeface="Inter" pitchFamily="34" charset="0"/>
+                <a:ea typeface="Inter" pitchFamily="34" charset="-122"/>
+                <a:cs typeface="Inter" pitchFamily="34" charset="-120"/>
+              </a:rPr>
+              <a:t>Failures become “never stopped”</a:t>
+            </a:r>
+            <a:endParaRPr lang="en-US" sz="1866" dirty="0"/>
+          </a:p>
+        </p:txBody>
+      </p:sp>
+      <p:sp>
+        <p:nvSpPr>
+          <p:cNvPr id="18" name="Text 16"/>
+          <p:cNvSpPr/>
+          <p:nvPr/>
+        </p:nvSpPr>
+        <p:spPr>
+          <a:xfrm>
+            <a:off x="6229975" y="1229122"/>
+            <a:ext cx="5383652" cy="3213298"/>
+          </a:xfrm>
+          <a:prstGeom prst="rect">
+            <a:avLst/>
+          </a:prstGeom>
+          <a:noFill/>
+          <a:ln w="12698">
+            <a:solidFill>
+              <a:srgbClr val="4FC8E8"/>
+            </a:solidFill>
+          </a:ln>
+        </p:spPr>
+        <p:txBody>
+          <a:bodyPr wrap="square" rtlCol="0" anchor="ctr"/>
+          <a:lstStyle/>
+          <a:p>
+            <a:pPr indent="0" marL="0">
+              <a:buNone/>
+            </a:pPr>
+            <a:endParaRPr lang="en-US" dirty="0"/>
+          </a:p>
+        </p:txBody>
+      </p:sp>
+      <p:sp>
+        <p:nvSpPr>
+          <p:cNvPr id="19" name="Text 17"/>
+          <p:cNvSpPr/>
+          <p:nvPr/>
+        </p:nvSpPr>
+        <p:spPr>
+          <a:xfrm>
+            <a:off x="6242672" y="1241822"/>
+            <a:ext cx="5358259" cy="504627"/>
+          </a:xfrm>
+          <a:prstGeom prst="rect">
+            <a:avLst/>
+          </a:prstGeom>
+          <a:solidFill>
+            <a:srgbClr val="0E1B3D"/>
+          </a:solidFill>
+          <a:ln/>
+        </p:spPr>
+        <p:txBody>
+          <a:bodyPr wrap="square" rtlCol="0" anchor="ctr"/>
+          <a:lstStyle/>
+          <a:p>
+            <a:pPr indent="0" marL="0">
+              <a:buNone/>
+            </a:pPr>
+            <a:endParaRPr lang="en-US" dirty="0"/>
+          </a:p>
+        </p:txBody>
+      </p:sp>
+      <p:sp>
+        <p:nvSpPr>
+          <p:cNvPr id="20" name="Shape 18"/>
+          <p:cNvSpPr/>
+          <p:nvPr/>
+        </p:nvSpPr>
+        <p:spPr>
+          <a:xfrm>
+            <a:off x="6242672" y="1740098"/>
+            <a:ext cx="5358259" cy="0"/>
+          </a:xfrm>
+          <a:prstGeom prst="line">
+            <a:avLst/>
+          </a:prstGeom>
+          <a:noFill/>
+          <a:ln w="12698">
+            <a:solidFill>
+              <a:srgbClr val="4FC8E8"/>
+            </a:solidFill>
+            <a:prstDash val="solid"/>
+          </a:ln>
+        </p:spPr>
+      </p:sp>
+      <p:sp>
+        <p:nvSpPr>
+          <p:cNvPr id="21" name="Shape 19"/>
+          <p:cNvSpPr/>
+          <p:nvPr/>
+        </p:nvSpPr>
+        <p:spPr>
+          <a:xfrm>
+            <a:off x="6803316" y="1241822"/>
+            <a:ext cx="0" cy="491927"/>
+          </a:xfrm>
+          <a:prstGeom prst="line">
+            <a:avLst/>
+          </a:prstGeom>
+          <a:noFill/>
+          <a:ln w="12698">
+            <a:solidFill>
+              <a:srgbClr val="4FC8E8"/>
+            </a:solidFill>
+            <a:prstDash val="solid"/>
+          </a:ln>
+        </p:spPr>
+      </p:sp>
+      <p:sp>
+        <p:nvSpPr>
+          <p:cNvPr id="22" name="Text 20"/>
+          <p:cNvSpPr/>
+          <p:nvPr/>
+        </p:nvSpPr>
+        <p:spPr>
+          <a:xfrm>
+            <a:off x="6462684" y="1343422"/>
+            <a:ext cx="116557" cy="288727"/>
+          </a:xfrm>
+          <a:prstGeom prst="rect">
+            <a:avLst/>
+          </a:prstGeom>
+          <a:noFill/>
+          <a:ln/>
+        </p:spPr>
+        <p:txBody>
+          <a:bodyPr wrap="square" lIns="0" tIns="0" rIns="0" bIns="0" rtlCol="0" anchor="t"/>
+          <a:lstStyle/>
+          <a:p>
+            <a:pPr algn="l" indent="0" marL="0">
+              <a:lnSpc>
+                <a:spcPts val="2273"/>
+              </a:lnSpc>
+              <a:buNone/>
+            </a:pPr>
+            <a:r>
+              <a:rPr lang="en-US" sz="1466" dirty="0">
+                <a:solidFill>
+                  <a:srgbClr val="4FC8E8"/>
+                </a:solidFill>
+                <a:latin typeface="JetBrainsMono" pitchFamily="34" charset="0"/>
+                <a:ea typeface="JetBrainsMono" pitchFamily="34" charset="-122"/>
+                <a:cs typeface="JetBrainsMono" pitchFamily="34" charset="-120"/>
+              </a:rPr>
+              <a:t>B</a:t>
+            </a:r>
+            <a:endParaRPr lang="en-US" sz="1466" dirty="0"/>
+          </a:p>
+        </p:txBody>
+      </p:sp>
+      <p:sp>
+        <p:nvSpPr>
+          <p:cNvPr id="23" name="Text 21"/>
+          <p:cNvSpPr/>
+          <p:nvPr/>
+        </p:nvSpPr>
+        <p:spPr>
+          <a:xfrm>
+            <a:off x="7029677" y="1343422"/>
+            <a:ext cx="3030478" cy="288727"/>
+          </a:xfrm>
+          <a:prstGeom prst="rect">
+            <a:avLst/>
+          </a:prstGeom>
+          <a:noFill/>
+          <a:ln/>
+        </p:spPr>
+        <p:txBody>
+          <a:bodyPr wrap="square" lIns="0" tIns="0" rIns="0" bIns="0" rtlCol="0" anchor="t"/>
+          <a:lstStyle/>
+          <a:p>
+            <a:pPr algn="l" indent="0" marL="0">
+              <a:lnSpc>
+                <a:spcPts val="2273"/>
+              </a:lnSpc>
+              <a:buNone/>
+            </a:pPr>
+            <a:r>
+              <a:rPr lang="en-US" sz="1466" dirty="0">
+                <a:solidFill>
+                  <a:srgbClr val="E8EEF7"/>
+                </a:solidFill>
+                <a:latin typeface="JetBrainsMono" pitchFamily="34" charset="0"/>
+                <a:ea typeface="JetBrainsMono" pitchFamily="34" charset="-122"/>
+                <a:cs typeface="JetBrainsMono" pitchFamily="34" charset="-120"/>
+              </a:rPr>
+              <a:t>DECIDE BEFORE YOU BUILD</a:t>
+            </a:r>
+            <a:endParaRPr lang="en-US" sz="1466" dirty="0"/>
+          </a:p>
+        </p:txBody>
+      </p:sp>
+      <p:sp>
+        <p:nvSpPr>
+          <p:cNvPr id="24" name="Text 22"/>
+          <p:cNvSpPr/>
+          <p:nvPr/>
+        </p:nvSpPr>
+        <p:spPr>
+          <a:xfrm>
+            <a:off x="6242672" y="1746448"/>
+            <a:ext cx="5358259" cy="2683272"/>
+          </a:xfrm>
+          <a:prstGeom prst="rect">
+            <a:avLst/>
+          </a:prstGeom>
+          <a:noFill/>
+          <a:ln/>
+        </p:spPr>
+        <p:txBody>
+          <a:bodyPr wrap="square" lIns="110053" tIns="0" rIns="0" bIns="0" rtlCol="0" anchor="t"/>
+          <a:lstStyle/>
+          <a:p>
+            <a:pPr algn="l" marL="110053" indent="-110053">
+              <a:buSzPct val="100000"/>
+              <a:buChar char="•"/>
+            </a:pPr>
+            <a:r>
+              <a:rPr lang="en-US" sz="1600" dirty="0">
+                <a:solidFill>
+                  <a:srgbClr val="E8EEF7"/>
+                </a:solidFill>
+                <a:latin typeface="Inter" pitchFamily="34" charset="0"/>
+                <a:ea typeface="Inter" pitchFamily="34" charset="-122"/>
+                <a:cs typeface="Inter" pitchFamily="34" charset="-120"/>
+              </a:rPr>
+              <a:t>The stop condition, written down</a:t>
+            </a:r>
+            <a:endParaRPr lang="en-US" sz="1600" dirty="0"/>
+          </a:p>
+          <a:p>
+            <a:pPr algn="l" marL="110053" indent="-110053">
+              <a:buSzPct val="100000"/>
+              <a:buChar char="•"/>
+            </a:pPr>
+            <a:r>
+              <a:rPr lang="en-US" sz="1600" dirty="0">
+                <a:solidFill>
+                  <a:srgbClr val="E8EEF7"/>
+                </a:solidFill>
+                <a:latin typeface="Inter" pitchFamily="34" charset="0"/>
+                <a:ea typeface="Inter" pitchFamily="34" charset="-122"/>
+                <a:cs typeface="Inter" pitchFamily="34" charset="-120"/>
+              </a:rPr>
+              <a:t>A hop budget, and the ceiling behavior</a:t>
+            </a:r>
+            <a:endParaRPr lang="en-US" sz="1600" dirty="0"/>
+          </a:p>
+          <a:p>
+            <a:pPr algn="l" marL="110053" indent="-110053">
+              <a:buSzPct val="100000"/>
+              <a:buChar char="•"/>
+            </a:pPr>
+            <a:r>
+              <a:rPr lang="en-US" sz="1600" dirty="0">
+                <a:solidFill>
+                  <a:srgbClr val="E8EEF7"/>
+                </a:solidFill>
+                <a:latin typeface="Inter" pitchFamily="34" charset="0"/>
+                <a:ea typeface="Inter" pitchFamily="34" charset="-122"/>
+                <a:cs typeface="Inter" pitchFamily="34" charset="-120"/>
+              </a:rPr>
+              <a:t>An eval set with real multi-hop questions</a:t>
+            </a:r>
+            <a:endParaRPr lang="en-US" sz="1600" dirty="0"/>
+          </a:p>
+          <a:p>
+            <a:pPr algn="l" marL="110053" indent="-110053">
+              <a:buSzPct val="100000"/>
+              <a:buChar char="•"/>
+            </a:pPr>
+            <a:r>
+              <a:rPr lang="en-US" sz="1600" dirty="0">
+                <a:solidFill>
+                  <a:srgbClr val="E8EEF7"/>
+                </a:solidFill>
+                <a:latin typeface="Inter" pitchFamily="34" charset="0"/>
+                <a:ea typeface="Inter" pitchFamily="34" charset="-122"/>
+                <a:cs typeface="Inter" pitchFamily="34" charset="-120"/>
+              </a:rPr>
+              <a:t>The fallback path back to one-shot</a:t>
+            </a:r>
+            <a:endParaRPr lang="en-US" sz="1600" dirty="0"/>
+          </a:p>
+        </p:txBody>
+      </p:sp>
+      <p:sp>
+        <p:nvSpPr>
+          <p:cNvPr id="25" name="Text 23"/>
+          <p:cNvSpPr/>
+          <p:nvPr/>
+        </p:nvSpPr>
+        <p:spPr>
+          <a:xfrm>
+            <a:off x="6462684" y="2273697"/>
+            <a:ext cx="84513" cy="84534"/>
+          </a:xfrm>
+          <a:prstGeom prst="rect">
+            <a:avLst/>
+          </a:prstGeom>
+          <a:solidFill>
+            <a:srgbClr val="4FC8E8"/>
+          </a:solidFill>
+          <a:ln/>
+        </p:spPr>
+        <p:txBody>
+          <a:bodyPr wrap="square" rtlCol="0" anchor="ctr"/>
+          <a:lstStyle/>
+          <a:p>
+            <a:pPr indent="0" marL="0">
+              <a:buNone/>
+            </a:pPr>
+            <a:endParaRPr lang="en-US" dirty="0"/>
+          </a:p>
+        </p:txBody>
+      </p:sp>
+      <p:sp>
+        <p:nvSpPr>
+          <p:cNvPr id="26" name="Text 24"/>
+          <p:cNvSpPr/>
+          <p:nvPr/>
+        </p:nvSpPr>
+        <p:spPr>
+          <a:xfrm>
+            <a:off x="6716422" y="2172097"/>
+            <a:ext cx="3729819" cy="343694"/>
+          </a:xfrm>
+          <a:prstGeom prst="rect">
+            <a:avLst/>
+          </a:prstGeom>
+          <a:noFill/>
+          <a:ln/>
+        </p:spPr>
+        <p:txBody>
+          <a:bodyPr wrap="square" lIns="0" tIns="0" rIns="0" bIns="0" rtlCol="0" anchor="t"/>
+          <a:lstStyle/>
+          <a:p>
+            <a:pPr algn="l" indent="0" marL="0">
+              <a:lnSpc>
+                <a:spcPts val="2706"/>
+              </a:lnSpc>
+              <a:buNone/>
+            </a:pPr>
+            <a:r>
+              <a:rPr lang="en-US" sz="1866" dirty="0">
+                <a:solidFill>
+                  <a:srgbClr val="E8EEF7"/>
+                </a:solidFill>
+                <a:latin typeface="Inter" pitchFamily="34" charset="0"/>
+                <a:ea typeface="Inter" pitchFamily="34" charset="-122"/>
+                <a:cs typeface="Inter" pitchFamily="34" charset="-120"/>
+              </a:rPr>
+              <a:t>The stop condition, written down</a:t>
+            </a:r>
+            <a:endParaRPr lang="en-US" sz="1866" dirty="0"/>
+          </a:p>
+        </p:txBody>
+      </p:sp>
+      <p:sp>
+        <p:nvSpPr>
+          <p:cNvPr id="27" name="Text 25"/>
+          <p:cNvSpPr/>
+          <p:nvPr/>
+        </p:nvSpPr>
+        <p:spPr>
+          <a:xfrm>
+            <a:off x="6462684" y="2769791"/>
+            <a:ext cx="84513" cy="84534"/>
+          </a:xfrm>
+          <a:prstGeom prst="rect">
+            <a:avLst/>
+          </a:prstGeom>
+          <a:solidFill>
+            <a:srgbClr val="4FC8E8"/>
+          </a:solidFill>
+          <a:ln/>
+        </p:spPr>
+        <p:txBody>
+          <a:bodyPr wrap="square" rtlCol="0" anchor="ctr"/>
+          <a:lstStyle/>
+          <a:p>
+            <a:pPr indent="0" marL="0">
+              <a:buNone/>
+            </a:pPr>
+            <a:endParaRPr lang="en-US" dirty="0"/>
+          </a:p>
+        </p:txBody>
+      </p:sp>
+      <p:sp>
+        <p:nvSpPr>
+          <p:cNvPr id="28" name="Text 26"/>
+          <p:cNvSpPr/>
+          <p:nvPr/>
+        </p:nvSpPr>
+        <p:spPr>
+          <a:xfrm>
+            <a:off x="6716422" y="2668191"/>
+            <a:ext cx="4364407" cy="343694"/>
+          </a:xfrm>
+          <a:prstGeom prst="rect">
+            <a:avLst/>
+          </a:prstGeom>
+          <a:noFill/>
+          <a:ln/>
+        </p:spPr>
+        <p:txBody>
+          <a:bodyPr wrap="square" lIns="0" tIns="0" rIns="0" bIns="0" rtlCol="0" anchor="t"/>
+          <a:lstStyle/>
+          <a:p>
+            <a:pPr algn="l" indent="0" marL="0">
+              <a:lnSpc>
+                <a:spcPts val="2706"/>
+              </a:lnSpc>
+              <a:buNone/>
+            </a:pPr>
+            <a:r>
+              <a:rPr lang="en-US" sz="1866" dirty="0">
+                <a:solidFill>
+                  <a:srgbClr val="E8EEF7"/>
+                </a:solidFill>
+                <a:latin typeface="Inter" pitchFamily="34" charset="0"/>
+                <a:ea typeface="Inter" pitchFamily="34" charset="-122"/>
+                <a:cs typeface="Inter" pitchFamily="34" charset="-120"/>
+              </a:rPr>
+              <a:t>A hop budget, and the ceiling behavior</a:t>
+            </a:r>
+            <a:endParaRPr lang="en-US" sz="1866" dirty="0"/>
+          </a:p>
+        </p:txBody>
+      </p:sp>
+      <p:sp>
+        <p:nvSpPr>
+          <p:cNvPr id="29" name="Text 27"/>
+          <p:cNvSpPr/>
+          <p:nvPr/>
+        </p:nvSpPr>
+        <p:spPr>
+          <a:xfrm>
+            <a:off x="6462684" y="3265884"/>
+            <a:ext cx="84513" cy="84534"/>
+          </a:xfrm>
+          <a:prstGeom prst="rect">
+            <a:avLst/>
+          </a:prstGeom>
+          <a:solidFill>
+            <a:srgbClr val="4FC8E8"/>
+          </a:solidFill>
+          <a:ln/>
+        </p:spPr>
+        <p:txBody>
+          <a:bodyPr wrap="square" rtlCol="0" anchor="ctr"/>
+          <a:lstStyle/>
+          <a:p>
+            <a:pPr indent="0" marL="0">
+              <a:buNone/>
+            </a:pPr>
+            <a:endParaRPr lang="en-US" dirty="0"/>
+          </a:p>
+        </p:txBody>
+      </p:sp>
+      <p:sp>
+        <p:nvSpPr>
+          <p:cNvPr id="30" name="Text 28"/>
+          <p:cNvSpPr/>
+          <p:nvPr/>
+        </p:nvSpPr>
+        <p:spPr>
+          <a:xfrm>
+            <a:off x="6716422" y="3164284"/>
+            <a:ext cx="4636373" cy="343694"/>
+          </a:xfrm>
+          <a:prstGeom prst="rect">
+            <a:avLst/>
+          </a:prstGeom>
+          <a:noFill/>
+          <a:ln/>
+        </p:spPr>
+        <p:txBody>
+          <a:bodyPr wrap="square" lIns="0" tIns="0" rIns="0" bIns="0" rtlCol="0" anchor="t"/>
+          <a:lstStyle/>
+          <a:p>
+            <a:pPr algn="l" indent="0" marL="0">
+              <a:lnSpc>
+                <a:spcPts val="2706"/>
+              </a:lnSpc>
+              <a:buNone/>
+            </a:pPr>
+            <a:r>
+              <a:rPr lang="en-US" sz="1866" dirty="0">
+                <a:solidFill>
+                  <a:srgbClr val="E8EEF7"/>
+                </a:solidFill>
+                <a:latin typeface="Inter" pitchFamily="34" charset="0"/>
+                <a:ea typeface="Inter" pitchFamily="34" charset="-122"/>
+                <a:cs typeface="Inter" pitchFamily="34" charset="-120"/>
+              </a:rPr>
+              <a:t>An eval set with real multi-hop questions</a:t>
+            </a:r>
+            <a:endParaRPr lang="en-US" sz="1866" dirty="0"/>
+          </a:p>
+        </p:txBody>
+      </p:sp>
+      <p:sp>
+        <p:nvSpPr>
+          <p:cNvPr id="31" name="Text 29"/>
+          <p:cNvSpPr/>
+          <p:nvPr/>
+        </p:nvSpPr>
+        <p:spPr>
+          <a:xfrm>
+            <a:off x="6462684" y="3761978"/>
+            <a:ext cx="84513" cy="84534"/>
+          </a:xfrm>
+          <a:prstGeom prst="rect">
+            <a:avLst/>
+          </a:prstGeom>
+          <a:solidFill>
+            <a:srgbClr val="4FC8E8"/>
+          </a:solidFill>
+          <a:ln/>
+        </p:spPr>
+        <p:txBody>
+          <a:bodyPr wrap="square" rtlCol="0" anchor="ctr"/>
+          <a:lstStyle/>
+          <a:p>
+            <a:pPr indent="0" marL="0">
+              <a:buNone/>
+            </a:pPr>
+            <a:endParaRPr lang="en-US" dirty="0"/>
+          </a:p>
+        </p:txBody>
+      </p:sp>
+      <p:sp>
+        <p:nvSpPr>
+          <p:cNvPr id="32" name="Text 30"/>
+          <p:cNvSpPr/>
+          <p:nvPr/>
+        </p:nvSpPr>
+        <p:spPr>
+          <a:xfrm>
+            <a:off x="6716422" y="3660378"/>
+            <a:ext cx="3949982" cy="343694"/>
+          </a:xfrm>
+          <a:prstGeom prst="rect">
+            <a:avLst/>
+          </a:prstGeom>
+          <a:noFill/>
+          <a:ln/>
+        </p:spPr>
+        <p:txBody>
+          <a:bodyPr wrap="square" lIns="0" tIns="0" rIns="0" bIns="0" rtlCol="0" anchor="t"/>
+          <a:lstStyle/>
+          <a:p>
+            <a:pPr algn="l" indent="0" marL="0">
+              <a:lnSpc>
+                <a:spcPts val="2706"/>
+              </a:lnSpc>
+              <a:buNone/>
+            </a:pPr>
+            <a:r>
+              <a:rPr lang="en-US" sz="1866" dirty="0">
+                <a:solidFill>
+                  <a:srgbClr val="E8EEF7"/>
+                </a:solidFill>
+                <a:latin typeface="Inter" pitchFamily="34" charset="0"/>
+                <a:ea typeface="Inter" pitchFamily="34" charset="-122"/>
+                <a:cs typeface="Inter" pitchFamily="34" charset="-120"/>
+              </a:rPr>
+              <a:t>The fallback path back to one-shot</a:t>
+            </a:r>
+            <a:endParaRPr lang="en-US" sz="1866" dirty="0"/>
+          </a:p>
+        </p:txBody>
+      </p:sp>
+      <p:sp>
+        <p:nvSpPr>
+          <p:cNvPr id="33" name="Text 31"/>
+          <p:cNvSpPr/>
+          <p:nvPr/>
+        </p:nvSpPr>
+        <p:spPr>
+          <a:xfrm>
+            <a:off x="575523" y="4645620"/>
+            <a:ext cx="11037905" cy="1098947"/>
+          </a:xfrm>
+          <a:prstGeom prst="rect">
+            <a:avLst/>
+          </a:prstGeom>
+          <a:solidFill>
+            <a:srgbClr val="4FC8E8">
+              <a:alpha val="12000"/>
+            </a:srgbClr>
+          </a:solidFill>
+          <a:ln/>
+        </p:spPr>
+        <p:txBody>
+          <a:bodyPr wrap="square" rtlCol="0" anchor="ctr"/>
+          <a:lstStyle/>
+          <a:p>
+            <a:pPr indent="0" marL="0">
+              <a:buNone/>
+            </a:pPr>
+            <a:endParaRPr lang="en-US" dirty="0"/>
+          </a:p>
+        </p:txBody>
+      </p:sp>
+      <p:sp>
+        <p:nvSpPr>
+          <p:cNvPr id="34" name="Shape 32"/>
+          <p:cNvSpPr/>
+          <p:nvPr/>
+        </p:nvSpPr>
+        <p:spPr>
+          <a:xfrm>
+            <a:off x="575523" y="4651970"/>
+            <a:ext cx="11037905" cy="0"/>
+          </a:xfrm>
+          <a:prstGeom prst="line">
+            <a:avLst/>
+          </a:prstGeom>
+          <a:noFill/>
+          <a:ln w="12698">
+            <a:solidFill>
+              <a:srgbClr val="4FC8E8"/>
+            </a:solidFill>
+            <a:prstDash val="solid"/>
+          </a:ln>
+        </p:spPr>
+      </p:sp>
+      <p:sp>
+        <p:nvSpPr>
+          <p:cNvPr id="35" name="Shape 33"/>
+          <p:cNvSpPr/>
+          <p:nvPr/>
+        </p:nvSpPr>
+        <p:spPr>
+          <a:xfrm>
+            <a:off x="11607080" y="4645620"/>
+            <a:ext cx="0" cy="1098947"/>
+          </a:xfrm>
+          <a:prstGeom prst="line">
+            <a:avLst/>
+          </a:prstGeom>
+          <a:noFill/>
+          <a:ln w="12698">
+            <a:solidFill>
+              <a:srgbClr val="4FC8E8"/>
+            </a:solidFill>
+            <a:prstDash val="solid"/>
+          </a:ln>
+        </p:spPr>
+      </p:sp>
+      <p:sp>
+        <p:nvSpPr>
+          <p:cNvPr id="36" name="Shape 34"/>
+          <p:cNvSpPr/>
+          <p:nvPr/>
+        </p:nvSpPr>
+        <p:spPr>
+          <a:xfrm>
+            <a:off x="575523" y="5738217"/>
+            <a:ext cx="11037905" cy="0"/>
+          </a:xfrm>
+          <a:prstGeom prst="line">
+            <a:avLst/>
+          </a:prstGeom>
+          <a:noFill/>
+          <a:ln w="12698">
+            <a:solidFill>
+              <a:srgbClr val="4FC8E8"/>
+            </a:solidFill>
+            <a:prstDash val="solid"/>
+          </a:ln>
+        </p:spPr>
+      </p:sp>
+      <p:sp>
+        <p:nvSpPr>
+          <p:cNvPr id="37" name="Shape 35"/>
+          <p:cNvSpPr/>
+          <p:nvPr/>
+        </p:nvSpPr>
+        <p:spPr>
+          <a:xfrm>
+            <a:off x="600917" y="4645620"/>
+            <a:ext cx="0" cy="1098947"/>
+          </a:xfrm>
+          <a:prstGeom prst="line">
+            <a:avLst/>
+          </a:prstGeom>
+          <a:noFill/>
+          <a:ln w="50794">
+            <a:solidFill>
+              <a:srgbClr val="4FC8E8"/>
+            </a:solidFill>
+            <a:prstDash val="solid"/>
+          </a:ln>
+        </p:spPr>
+      </p:sp>
+      <p:sp>
+        <p:nvSpPr>
+          <p:cNvPr id="38" name="Text 36"/>
+          <p:cNvSpPr/>
+          <p:nvPr/>
+        </p:nvSpPr>
+        <p:spPr>
+          <a:xfrm>
+            <a:off x="880247" y="4827588"/>
+            <a:ext cx="10675879" cy="735013"/>
+          </a:xfrm>
+          <a:prstGeom prst="rect">
+            <a:avLst/>
+          </a:prstGeom>
+          <a:noFill/>
+          <a:ln/>
+        </p:spPr>
+        <p:txBody>
+          <a:bodyPr wrap="square" lIns="0" tIns="0" rIns="0" bIns="0" rtlCol="0" anchor="t"/>
+          <a:lstStyle/>
+          <a:p>
+            <a:pPr algn="l" indent="0" marL="0">
+              <a:lnSpc>
+                <a:spcPts val="2893"/>
+              </a:lnSpc>
+              <a:buNone/>
+            </a:pPr>
+            <a:r>
+              <a:rPr lang="en-US" sz="1866" dirty="0">
+                <a:solidFill>
+                  <a:srgbClr val="E8EEF7"/>
+                </a:solidFill>
+                <a:latin typeface="Inter" pitchFamily="34" charset="0"/>
+                <a:ea typeface="Inter" pitchFamily="34" charset="-122"/>
+                <a:cs typeface="Inter" pitchFamily="34" charset="-120"/>
+              </a:rPr>
+              <a:t>Agentic RAG trades a predictable pipeline for a system that can recover. Budget the loop before you open it.</a:t>
+            </a:r>
+            <a:endParaRPr lang="en-US" sz="1866" dirty="0"/>
+          </a:p>
+        </p:txBody>
+      </p:sp>
+      <p:sp>
+        <p:nvSpPr>
+          <p:cNvPr id="39" name="Text 37"/>
+          <p:cNvSpPr/>
+          <p:nvPr/>
+        </p:nvSpPr>
+        <p:spPr>
+          <a:xfrm>
+            <a:off x="6989999" y="5981502"/>
+            <a:ext cx="4623430" cy="465138"/>
+          </a:xfrm>
+          <a:prstGeom prst="rect">
+            <a:avLst/>
+          </a:prstGeom>
+          <a:noFill/>
+          <a:ln w="12698">
+            <a:solidFill>
+              <a:srgbClr val="4FC8E8"/>
+            </a:solidFill>
+          </a:ln>
+        </p:spPr>
+        <p:txBody>
+          <a:bodyPr wrap="square" rtlCol="0" anchor="ctr"/>
+          <a:lstStyle/>
+          <a:p>
+            <a:pPr indent="0" marL="0">
+              <a:buNone/>
+            </a:pPr>
+            <a:endParaRPr lang="en-US" dirty="0"/>
+          </a:p>
+        </p:txBody>
+      </p:sp>
+      <p:sp>
+        <p:nvSpPr>
+          <p:cNvPr id="40" name="Text 38"/>
+          <p:cNvSpPr/>
+          <p:nvPr/>
+        </p:nvSpPr>
+        <p:spPr>
+          <a:xfrm>
+            <a:off x="7188784" y="6078736"/>
+            <a:ext cx="207212" cy="270669"/>
+          </a:xfrm>
+          <a:prstGeom prst="rect">
+            <a:avLst/>
+          </a:prstGeom>
+          <a:noFill/>
+          <a:ln/>
+        </p:spPr>
+        <p:txBody>
+          <a:bodyPr wrap="square" lIns="0" tIns="0" rIns="0" bIns="0" rtlCol="0" anchor="t"/>
+          <a:lstStyle/>
+          <a:p>
+            <a:pPr algn="l" indent="0" marL="0">
+              <a:lnSpc>
+                <a:spcPts val="2133"/>
+              </a:lnSpc>
+              <a:buNone/>
+            </a:pPr>
+            <a:r>
+              <a:rPr lang="en-US" sz="1333" dirty="0">
+                <a:solidFill>
+                  <a:srgbClr val="4FC8E8"/>
+                </a:solidFill>
+                <a:latin typeface="JetBrainsMono" pitchFamily="34" charset="0"/>
+                <a:ea typeface="JetBrainsMono" pitchFamily="34" charset="-122"/>
+                <a:cs typeface="JetBrainsMono" pitchFamily="34" charset="-120"/>
+              </a:rPr>
+              <a:t>05</a:t>
+            </a:r>
+            <a:endParaRPr lang="en-US" sz="1333" dirty="0"/>
+          </a:p>
+        </p:txBody>
+      </p:sp>
+      <p:sp>
+        <p:nvSpPr>
+          <p:cNvPr id="41" name="Shape 39"/>
+          <p:cNvSpPr/>
+          <p:nvPr/>
+        </p:nvSpPr>
+        <p:spPr>
+          <a:xfrm>
+            <a:off x="7584369" y="5994202"/>
+            <a:ext cx="0" cy="439737"/>
+          </a:xfrm>
+          <a:prstGeom prst="line">
+            <a:avLst/>
+          </a:prstGeom>
+          <a:noFill/>
+          <a:ln w="12698">
+            <a:solidFill>
+              <a:srgbClr val="4FC8E8"/>
+            </a:solidFill>
+            <a:prstDash val="solid"/>
+          </a:ln>
+        </p:spPr>
+      </p:sp>
+      <p:sp>
+        <p:nvSpPr>
+          <p:cNvPr id="42" name="Text 40"/>
+          <p:cNvSpPr/>
+          <p:nvPr/>
+        </p:nvSpPr>
+        <p:spPr>
+          <a:xfrm>
+            <a:off x="7776805" y="6078736"/>
+            <a:ext cx="2178359" cy="270669"/>
+          </a:xfrm>
+          <a:prstGeom prst="rect">
+            <a:avLst/>
+          </a:prstGeom>
+          <a:noFill/>
+          <a:ln/>
+        </p:spPr>
+        <p:txBody>
+          <a:bodyPr wrap="square" lIns="0" tIns="0" rIns="0" bIns="0" rtlCol="0" anchor="t"/>
+          <a:lstStyle/>
+          <a:p>
+            <a:pPr algn="l" indent="0" marL="0">
+              <a:lnSpc>
+                <a:spcPts val="2133"/>
+              </a:lnSpc>
+              <a:buNone/>
+            </a:pPr>
+            <a:r>
+              <a:rPr lang="en-US" sz="1333" dirty="0">
+                <a:solidFill>
+                  <a:srgbClr val="E8EEF7"/>
+                </a:solidFill>
+                <a:latin typeface="Inter" pitchFamily="34" charset="0"/>
+                <a:ea typeface="Inter" pitchFamily="34" charset="-122"/>
+                <a:cs typeface="Inter" pitchFamily="34" charset="-120"/>
+              </a:rPr>
+              <a:t>COST AND DECISIONS</a:t>
+            </a:r>
+            <a:endParaRPr lang="en-US" sz="1333" dirty="0"/>
+          </a:p>
+        </p:txBody>
+      </p:sp>
+      <p:sp>
+        <p:nvSpPr>
+          <p:cNvPr id="43" name="Shape 41"/>
+          <p:cNvSpPr/>
+          <p:nvPr/>
+        </p:nvSpPr>
+        <p:spPr>
+          <a:xfrm>
+            <a:off x="10104887" y="5994202"/>
+            <a:ext cx="0" cy="439737"/>
+          </a:xfrm>
+          <a:prstGeom prst="line">
+            <a:avLst/>
+          </a:prstGeom>
+          <a:noFill/>
+          <a:ln w="12698">
+            <a:solidFill>
+              <a:srgbClr val="4FC8E8"/>
+            </a:solidFill>
+            <a:prstDash val="solid"/>
+          </a:ln>
+        </p:spPr>
+      </p:sp>
+      <p:sp>
+        <p:nvSpPr>
+          <p:cNvPr id="44" name="Text 42"/>
+          <p:cNvSpPr/>
+          <p:nvPr/>
+        </p:nvSpPr>
+        <p:spPr>
+          <a:xfrm>
+            <a:off x="10297323" y="6078736"/>
+            <a:ext cx="1139667" cy="270669"/>
+          </a:xfrm>
+          <a:prstGeom prst="rect">
+            <a:avLst/>
+          </a:prstGeom>
+          <a:noFill/>
+          <a:ln/>
+        </p:spPr>
+        <p:txBody>
+          <a:bodyPr wrap="square" lIns="0" tIns="0" rIns="0" bIns="0" rtlCol="0" anchor="t"/>
+          <a:lstStyle/>
+          <a:p>
+            <a:pPr algn="l" indent="0" marL="0">
+              <a:lnSpc>
+                <a:spcPts val="2133"/>
+              </a:lnSpc>
+              <a:buNone/>
+            </a:pPr>
+            <a:r>
+              <a:rPr lang="en-US" sz="1333" dirty="0">
+                <a:solidFill>
+                  <a:srgbClr val="8FA3C8"/>
+                </a:solidFill>
+                <a:latin typeface="JetBrainsMono" pitchFamily="34" charset="0"/>
+                <a:ea typeface="JetBrainsMono" pitchFamily="34" charset="-122"/>
+                <a:cs typeface="JetBrainsMono" pitchFamily="34" charset="-120"/>
+              </a:rPr>
+              <a:t>SHEET 05/06</a:t>
+            </a:r>
+            <a:endParaRPr lang="en-US" sz="1333" dirty="0"/>
+          </a:p>
+        </p:txBody>
+      </p:sp>
     </p:spTree>
   </p:cSld>
   <p:clrMapOvr>
@@ -1544,6 +7540,13 @@
 <file path=ppt/slides/slide6.xml><?xml version="1.0" encoding="utf-8"?>
 <p:sld xmlns:a="http://schemas.openxmlformats.org/drawingml/2006/main" xmlns:r="http://schemas.openxmlformats.org/officeDocument/2006/relationships" xmlns:p="http://schemas.openxmlformats.org/presentationml/2006/main">
   <p:cSld name="Slide 6">
+    <p:bg>
+      <p:bgPr>
+        <a:solidFill>
+          <a:srgbClr val="0E1B3D"/>
+        </a:solidFill>
+      </p:bgPr>
+    </p:bg>
     <p:spTree>
       <p:nvGrpSpPr>
         <p:cNvPr id="1" name=""/>
@@ -1558,30 +7561,819 @@
           <a:chExt cx="0" cy="0"/>
         </a:xfrm>
       </p:grpSpPr>
-      <p:pic>
-        <p:nvPicPr>
-          <p:cNvPr id="2" name="Image 0" descr="/tmp/slide-1787840615761-4f4lc5pobx.png">    </p:cNvPr>
-          <p:cNvPicPr>
-            <a:picLocks noChangeAspect="1"/>
-          </p:cNvPicPr>
-          <p:nvPr/>
-        </p:nvPicPr>
-        <p:blipFill>
-          <a:blip r:embed="rId1"/>
-          <a:stretch>
-            <a:fillRect/>
-          </a:stretch>
-        </p:blipFill>
-        <p:spPr>
-          <a:xfrm>
-            <a:off x="0" y="0"/>
-            <a:ext cx="12188952" cy="6858000"/>
-          </a:xfrm>
-          <a:prstGeom prst="rect">
-            <a:avLst/>
-          </a:prstGeom>
-        </p:spPr>
-      </p:pic>
+      <p:sp>
+        <p:nvSpPr>
+          <p:cNvPr id="2" name="Text 0"/>
+          <p:cNvSpPr/>
+          <p:nvPr/>
+        </p:nvSpPr>
+        <p:spPr>
+          <a:xfrm>
+            <a:off x="575523" y="1637506"/>
+            <a:ext cx="4075038" cy="1144588"/>
+          </a:xfrm>
+          <a:prstGeom prst="rect">
+            <a:avLst/>
+          </a:prstGeom>
+          <a:noFill/>
+          <a:ln/>
+        </p:spPr>
+        <p:txBody>
+          <a:bodyPr wrap="square" lIns="0" tIns="0" rIns="0" bIns="0" rtlCol="0" anchor="t"/>
+          <a:lstStyle/>
+          <a:p>
+            <a:pPr algn="l" indent="0" marL="0">
+              <a:lnSpc>
+                <a:spcPts val="9012"/>
+              </a:lnSpc>
+              <a:buNone/>
+            </a:pPr>
+            <a:r>
+              <a:rPr lang="en-US" sz="6932" dirty="0">
+                <a:solidFill>
+                  <a:srgbClr val="E8EEF7"/>
+                </a:solidFill>
+                <a:latin typeface="Inter" pitchFamily="34" charset="0"/>
+                <a:ea typeface="Inter" pitchFamily="34" charset="-122"/>
+                <a:cs typeface="Inter" pitchFamily="34" charset="-120"/>
+              </a:rPr>
+              <a:t>Q&amp;A</a:t>
+            </a:r>
+            <a:endParaRPr lang="en-US" sz="6932" dirty="0"/>
+          </a:p>
+        </p:txBody>
+      </p:sp>
+      <p:sp>
+        <p:nvSpPr>
+          <p:cNvPr id="3" name="Text 1"/>
+          <p:cNvSpPr/>
+          <p:nvPr/>
+        </p:nvSpPr>
+        <p:spPr>
+          <a:xfrm>
+            <a:off x="575523" y="3086894"/>
+            <a:ext cx="1862069" cy="12700"/>
+          </a:xfrm>
+          <a:prstGeom prst="rect">
+            <a:avLst/>
+          </a:prstGeom>
+          <a:solidFill>
+            <a:srgbClr val="4FC8E8"/>
+          </a:solidFill>
+          <a:ln/>
+        </p:spPr>
+        <p:txBody>
+          <a:bodyPr wrap="square" rtlCol="0" anchor="ctr"/>
+          <a:lstStyle/>
+          <a:p>
+            <a:pPr indent="0" marL="0">
+              <a:buNone/>
+            </a:pPr>
+            <a:endParaRPr lang="en-US" dirty="0"/>
+          </a:p>
+        </p:txBody>
+      </p:sp>
+      <p:sp>
+        <p:nvSpPr>
+          <p:cNvPr id="4" name="Text 2"/>
+          <p:cNvSpPr/>
+          <p:nvPr/>
+        </p:nvSpPr>
+        <p:spPr>
+          <a:xfrm>
+            <a:off x="575523" y="3336528"/>
+            <a:ext cx="4075038" cy="735013"/>
+          </a:xfrm>
+          <a:prstGeom prst="rect">
+            <a:avLst/>
+          </a:prstGeom>
+          <a:noFill/>
+          <a:ln/>
+        </p:spPr>
+        <p:txBody>
+          <a:bodyPr wrap="square" lIns="0" tIns="0" rIns="0" bIns="0" rtlCol="0" anchor="t"/>
+          <a:lstStyle/>
+          <a:p>
+            <a:pPr algn="l" indent="0" marL="0">
+              <a:lnSpc>
+                <a:spcPts val="2893"/>
+              </a:lnSpc>
+              <a:buNone/>
+            </a:pPr>
+            <a:r>
+              <a:rPr lang="en-US" sz="1866" dirty="0">
+                <a:solidFill>
+                  <a:srgbClr val="8FA3C8"/>
+                </a:solidFill>
+                <a:latin typeface="Inter" pitchFamily="34" charset="0"/>
+                <a:ea typeface="Inter" pitchFamily="34" charset="-122"/>
+                <a:cs typeface="Inter" pitchFamily="34" charset="-120"/>
+              </a:rPr>
+              <a:t>Three things worth settling before the next build.</a:t>
+            </a:r>
+            <a:endParaRPr lang="en-US" sz="1866" dirty="0"/>
+          </a:p>
+        </p:txBody>
+      </p:sp>
+      <p:sp>
+        <p:nvSpPr>
+          <p:cNvPr id="5" name="Text 3"/>
+          <p:cNvSpPr/>
+          <p:nvPr/>
+        </p:nvSpPr>
+        <p:spPr>
+          <a:xfrm>
+            <a:off x="5349331" y="1546423"/>
+            <a:ext cx="6264098" cy="2616200"/>
+          </a:xfrm>
+          <a:prstGeom prst="rect">
+            <a:avLst/>
+          </a:prstGeom>
+          <a:noFill/>
+          <a:ln/>
+        </p:spPr>
+        <p:txBody>
+          <a:bodyPr wrap="square" lIns="0" tIns="0" rIns="0" bIns="0" rtlCol="0" anchor="t"/>
+          <a:lstStyle/>
+          <a:p>
+            <a:pPr algn="l" marL="342900" indent="-342900">
+              <a:spcAft>
+                <a:spcPts val="1600"/>
+              </a:spcAft>
+              <a:buSzPct val="100000"/>
+              <a:buChar char="•"/>
+            </a:pPr>
+            <a:r>
+              <a:rPr lang="en-US" sz="1600" dirty="0">
+                <a:solidFill>
+                  <a:srgbClr val="4FC8E8"/>
+                </a:solidFill>
+                <a:latin typeface="Inter" pitchFamily="34" charset="0"/>
+                <a:ea typeface="Inter" pitchFamily="34" charset="-122"/>
+                <a:cs typeface="Inter" pitchFamily="34" charset="-120"/>
+              </a:rPr>
+              <a:t>01</a:t>
+            </a:r>
+            <a:pPr algn="l" indent="0" marL="0">
+              <a:spcAft>
+                <a:spcPts val="1600"/>
+              </a:spcAft>
+              <a:buNone/>
+            </a:pPr>
+            <a:r>
+              <a:rPr lang="en-US" sz="1600" dirty="0">
+                <a:solidFill>
+                  <a:srgbClr val="E8EEF7"/>
+                </a:solidFill>
+                <a:latin typeface="Inter" pitchFamily="34" charset="0"/>
+                <a:ea typeface="Inter" pitchFamily="34" charset="-122"/>
+                <a:cs typeface="Inter" pitchFamily="34" charset="-120"/>
+              </a:rPr>
+              <a:t>Which of our failures are retrieval, and which are generation?</a:t>
+            </a:r>
+            <a:endParaRPr lang="en-US" sz="1600" dirty="0"/>
+          </a:p>
+          <a:p>
+            <a:pPr algn="l" marL="342900" indent="-342900">
+              <a:spcAft>
+                <a:spcPts val="1600"/>
+              </a:spcAft>
+              <a:buSzPct val="100000"/>
+              <a:buChar char="•"/>
+            </a:pPr>
+            <a:r>
+              <a:rPr lang="en-US" sz="1600" dirty="0">
+                <a:solidFill>
+                  <a:srgbClr val="4FC8E8"/>
+                </a:solidFill>
+                <a:latin typeface="Inter" pitchFamily="34" charset="0"/>
+                <a:ea typeface="Inter" pitchFamily="34" charset="-122"/>
+                <a:cs typeface="Inter" pitchFamily="34" charset="-120"/>
+              </a:rPr>
+              <a:t>02</a:t>
+            </a:r>
+            <a:pPr algn="l" indent="0" marL="0">
+              <a:spcAft>
+                <a:spcPts val="1600"/>
+              </a:spcAft>
+              <a:buNone/>
+            </a:pPr>
+            <a:r>
+              <a:rPr lang="en-US" sz="1600" dirty="0">
+                <a:solidFill>
+                  <a:srgbClr val="E8EEF7"/>
+                </a:solidFill>
+                <a:latin typeface="Inter" pitchFamily="34" charset="0"/>
+                <a:ea typeface="Inter" pitchFamily="34" charset="-122"/>
+                <a:cs typeface="Inter" pitchFamily="34" charset="-120"/>
+              </a:rPr>
+              <a:t>What is our stop condition, and who owns it?</a:t>
+            </a:r>
+            <a:endParaRPr lang="en-US" sz="1600" dirty="0"/>
+          </a:p>
+          <a:p>
+            <a:pPr algn="l" marL="342900" indent="-342900">
+              <a:spcAft>
+                <a:spcPts val="1600"/>
+              </a:spcAft>
+              <a:buSzPct val="100000"/>
+              <a:buChar char="•"/>
+            </a:pPr>
+            <a:r>
+              <a:rPr lang="en-US" sz="1600" dirty="0">
+                <a:solidFill>
+                  <a:srgbClr val="4FC8E8"/>
+                </a:solidFill>
+                <a:latin typeface="Inter" pitchFamily="34" charset="0"/>
+                <a:ea typeface="Inter" pitchFamily="34" charset="-122"/>
+                <a:cs typeface="Inter" pitchFamily="34" charset="-120"/>
+              </a:rPr>
+              <a:t>03</a:t>
+            </a:r>
+            <a:pPr algn="l" indent="0" marL="0">
+              <a:spcAft>
+                <a:spcPts val="1600"/>
+              </a:spcAft>
+              <a:buNone/>
+            </a:pPr>
+            <a:r>
+              <a:rPr lang="en-US" sz="1600" dirty="0">
+                <a:solidFill>
+                  <a:srgbClr val="E8EEF7"/>
+                </a:solidFill>
+                <a:latin typeface="Inter" pitchFamily="34" charset="0"/>
+                <a:ea typeface="Inter" pitchFamily="34" charset="-122"/>
+                <a:cs typeface="Inter" pitchFamily="34" charset="-120"/>
+              </a:rPr>
+              <a:t>How would we know the loop got better?</a:t>
+            </a:r>
+            <a:endParaRPr lang="en-US" sz="1600" dirty="0"/>
+          </a:p>
+        </p:txBody>
+      </p:sp>
+      <p:sp>
+        <p:nvSpPr>
+          <p:cNvPr id="6" name="Text 4"/>
+          <p:cNvSpPr/>
+          <p:nvPr/>
+        </p:nvSpPr>
+        <p:spPr>
+          <a:xfrm>
+            <a:off x="5349331" y="1546423"/>
+            <a:ext cx="275608" cy="348655"/>
+          </a:xfrm>
+          <a:prstGeom prst="rect">
+            <a:avLst/>
+          </a:prstGeom>
+          <a:noFill/>
+          <a:ln/>
+        </p:spPr>
+        <p:txBody>
+          <a:bodyPr wrap="square" lIns="0" tIns="33862" rIns="0" bIns="0" rtlCol="0" anchor="t"/>
+          <a:lstStyle/>
+          <a:p>
+            <a:pPr algn="l" indent="0" marL="0">
+              <a:lnSpc>
+                <a:spcPts val="2480"/>
+              </a:lnSpc>
+              <a:buNone/>
+            </a:pPr>
+            <a:r>
+              <a:rPr lang="en-US" sz="1600" dirty="0">
+                <a:solidFill>
+                  <a:srgbClr val="4FC8E8"/>
+                </a:solidFill>
+                <a:latin typeface="JetBrainsMono" pitchFamily="34" charset="0"/>
+                <a:ea typeface="JetBrainsMono" pitchFamily="34" charset="-122"/>
+                <a:cs typeface="JetBrainsMono" pitchFamily="34" charset="-120"/>
+              </a:rPr>
+              <a:t>01</a:t>
+            </a:r>
+            <a:endParaRPr lang="en-US" sz="1600" dirty="0"/>
+          </a:p>
+        </p:txBody>
+      </p:sp>
+      <p:sp>
+        <p:nvSpPr>
+          <p:cNvPr id="7" name="Text 5"/>
+          <p:cNvSpPr/>
+          <p:nvPr/>
+        </p:nvSpPr>
+        <p:spPr>
+          <a:xfrm>
+            <a:off x="5856411" y="1546423"/>
+            <a:ext cx="5872159" cy="787400"/>
+          </a:xfrm>
+          <a:prstGeom prst="rect">
+            <a:avLst/>
+          </a:prstGeom>
+          <a:noFill/>
+          <a:ln/>
+        </p:spPr>
+        <p:txBody>
+          <a:bodyPr wrap="square" lIns="0" tIns="0" rIns="0" bIns="0" rtlCol="0" anchor="t"/>
+          <a:lstStyle/>
+          <a:p>
+            <a:pPr algn="l" indent="0" marL="0">
+              <a:lnSpc>
+                <a:spcPts val="3100"/>
+              </a:lnSpc>
+              <a:buNone/>
+            </a:pPr>
+            <a:r>
+              <a:rPr lang="en-US" sz="2000" dirty="0">
+                <a:solidFill>
+                  <a:srgbClr val="E8EEF7"/>
+                </a:solidFill>
+                <a:latin typeface="Inter" pitchFamily="34" charset="0"/>
+                <a:ea typeface="Inter" pitchFamily="34" charset="-122"/>
+                <a:cs typeface="Inter" pitchFamily="34" charset="-120"/>
+              </a:rPr>
+              <a:t>Which of our failures are retrieval, and which are generation?</a:t>
+            </a:r>
+            <a:endParaRPr lang="en-US" sz="2000" dirty="0"/>
+          </a:p>
+        </p:txBody>
+      </p:sp>
+      <p:sp>
+        <p:nvSpPr>
+          <p:cNvPr id="8" name="Text 6"/>
+          <p:cNvSpPr/>
+          <p:nvPr/>
+        </p:nvSpPr>
+        <p:spPr>
+          <a:xfrm>
+            <a:off x="5349331" y="2752923"/>
+            <a:ext cx="275608" cy="348655"/>
+          </a:xfrm>
+          <a:prstGeom prst="rect">
+            <a:avLst/>
+          </a:prstGeom>
+          <a:noFill/>
+          <a:ln/>
+        </p:spPr>
+        <p:txBody>
+          <a:bodyPr wrap="square" lIns="0" tIns="33862" rIns="0" bIns="0" rtlCol="0" anchor="t"/>
+          <a:lstStyle/>
+          <a:p>
+            <a:pPr algn="l" indent="0" marL="0">
+              <a:lnSpc>
+                <a:spcPts val="2480"/>
+              </a:lnSpc>
+              <a:buNone/>
+            </a:pPr>
+            <a:r>
+              <a:rPr lang="en-US" sz="1600" dirty="0">
+                <a:solidFill>
+                  <a:srgbClr val="4FC8E8"/>
+                </a:solidFill>
+                <a:latin typeface="JetBrainsMono" pitchFamily="34" charset="0"/>
+                <a:ea typeface="JetBrainsMono" pitchFamily="34" charset="-122"/>
+                <a:cs typeface="JetBrainsMono" pitchFamily="34" charset="-120"/>
+              </a:rPr>
+              <a:t>02</a:t>
+            </a:r>
+            <a:endParaRPr lang="en-US" sz="1600" dirty="0"/>
+          </a:p>
+        </p:txBody>
+      </p:sp>
+      <p:sp>
+        <p:nvSpPr>
+          <p:cNvPr id="9" name="Text 7"/>
+          <p:cNvSpPr/>
+          <p:nvPr/>
+        </p:nvSpPr>
+        <p:spPr>
+          <a:xfrm>
+            <a:off x="5856411" y="2752923"/>
+            <a:ext cx="5568827" cy="393700"/>
+          </a:xfrm>
+          <a:prstGeom prst="rect">
+            <a:avLst/>
+          </a:prstGeom>
+          <a:noFill/>
+          <a:ln/>
+        </p:spPr>
+        <p:txBody>
+          <a:bodyPr wrap="square" lIns="0" tIns="0" rIns="0" bIns="0" rtlCol="0" anchor="t"/>
+          <a:lstStyle/>
+          <a:p>
+            <a:pPr algn="l" indent="0" marL="0">
+              <a:lnSpc>
+                <a:spcPts val="3100"/>
+              </a:lnSpc>
+              <a:buNone/>
+            </a:pPr>
+            <a:r>
+              <a:rPr lang="en-US" sz="2000" dirty="0">
+                <a:solidFill>
+                  <a:srgbClr val="E8EEF7"/>
+                </a:solidFill>
+                <a:latin typeface="Inter" pitchFamily="34" charset="0"/>
+                <a:ea typeface="Inter" pitchFamily="34" charset="-122"/>
+                <a:cs typeface="Inter" pitchFamily="34" charset="-120"/>
+              </a:rPr>
+              <a:t>What is our stop condition, and who owns it?</a:t>
+            </a:r>
+            <a:endParaRPr lang="en-US" sz="2000" dirty="0"/>
+          </a:p>
+        </p:txBody>
+      </p:sp>
+      <p:sp>
+        <p:nvSpPr>
+          <p:cNvPr id="10" name="Text 8"/>
+          <p:cNvSpPr/>
+          <p:nvPr/>
+        </p:nvSpPr>
+        <p:spPr>
+          <a:xfrm>
+            <a:off x="5349331" y="3565723"/>
+            <a:ext cx="275608" cy="348655"/>
+          </a:xfrm>
+          <a:prstGeom prst="rect">
+            <a:avLst/>
+          </a:prstGeom>
+          <a:noFill/>
+          <a:ln/>
+        </p:spPr>
+        <p:txBody>
+          <a:bodyPr wrap="square" lIns="0" tIns="33862" rIns="0" bIns="0" rtlCol="0" anchor="t"/>
+          <a:lstStyle/>
+          <a:p>
+            <a:pPr algn="l" indent="0" marL="0">
+              <a:lnSpc>
+                <a:spcPts val="2480"/>
+              </a:lnSpc>
+              <a:buNone/>
+            </a:pPr>
+            <a:r>
+              <a:rPr lang="en-US" sz="1600" dirty="0">
+                <a:solidFill>
+                  <a:srgbClr val="4FC8E8"/>
+                </a:solidFill>
+                <a:latin typeface="JetBrainsMono" pitchFamily="34" charset="0"/>
+                <a:ea typeface="JetBrainsMono" pitchFamily="34" charset="-122"/>
+                <a:cs typeface="JetBrainsMono" pitchFamily="34" charset="-120"/>
+              </a:rPr>
+              <a:t>03</a:t>
+            </a:r>
+            <a:endParaRPr lang="en-US" sz="1600" dirty="0"/>
+          </a:p>
+        </p:txBody>
+      </p:sp>
+      <p:sp>
+        <p:nvSpPr>
+          <p:cNvPr id="11" name="Text 9"/>
+          <p:cNvSpPr/>
+          <p:nvPr/>
+        </p:nvSpPr>
+        <p:spPr>
+          <a:xfrm>
+            <a:off x="5856411" y="3565723"/>
+            <a:ext cx="5076699" cy="393700"/>
+          </a:xfrm>
+          <a:prstGeom prst="rect">
+            <a:avLst/>
+          </a:prstGeom>
+          <a:noFill/>
+          <a:ln/>
+        </p:spPr>
+        <p:txBody>
+          <a:bodyPr wrap="square" lIns="0" tIns="0" rIns="0" bIns="0" rtlCol="0" anchor="t"/>
+          <a:lstStyle/>
+          <a:p>
+            <a:pPr algn="l" indent="0" marL="0">
+              <a:lnSpc>
+                <a:spcPts val="3100"/>
+              </a:lnSpc>
+              <a:buNone/>
+            </a:pPr>
+            <a:r>
+              <a:rPr lang="en-US" sz="2000" dirty="0">
+                <a:solidFill>
+                  <a:srgbClr val="E8EEF7"/>
+                </a:solidFill>
+                <a:latin typeface="Inter" pitchFamily="34" charset="0"/>
+                <a:ea typeface="Inter" pitchFamily="34" charset="-122"/>
+                <a:cs typeface="Inter" pitchFamily="34" charset="-120"/>
+              </a:rPr>
+              <a:t>How would we know the loop got better?</a:t>
+            </a:r>
+            <a:endParaRPr lang="en-US" sz="2000" dirty="0"/>
+          </a:p>
+        </p:txBody>
+      </p:sp>
+      <p:sp>
+        <p:nvSpPr>
+          <p:cNvPr id="12" name="Shape 10"/>
+          <p:cNvSpPr/>
+          <p:nvPr/>
+        </p:nvSpPr>
+        <p:spPr>
+          <a:xfrm>
+            <a:off x="575523" y="5207397"/>
+            <a:ext cx="11037905" cy="0"/>
+          </a:xfrm>
+          <a:prstGeom prst="line">
+            <a:avLst/>
+          </a:prstGeom>
+          <a:noFill/>
+          <a:ln w="12698">
+            <a:solidFill>
+              <a:srgbClr val="2A4A8C"/>
+            </a:solidFill>
+            <a:prstDash val="solid"/>
+          </a:ln>
+        </p:spPr>
+      </p:sp>
+      <p:sp>
+        <p:nvSpPr>
+          <p:cNvPr id="13" name="Text 11"/>
+          <p:cNvSpPr/>
+          <p:nvPr/>
+        </p:nvSpPr>
+        <p:spPr>
+          <a:xfrm>
+            <a:off x="575523" y="5429647"/>
+            <a:ext cx="1277471" cy="314920"/>
+          </a:xfrm>
+          <a:prstGeom prst="rect">
+            <a:avLst/>
+          </a:prstGeom>
+          <a:noFill/>
+          <a:ln/>
+        </p:spPr>
+        <p:txBody>
+          <a:bodyPr wrap="square" lIns="0" tIns="0" rIns="0" bIns="0" rtlCol="0" anchor="t"/>
+          <a:lstStyle/>
+          <a:p>
+            <a:pPr algn="l" indent="0" marL="0">
+              <a:lnSpc>
+                <a:spcPts val="2480"/>
+              </a:lnSpc>
+              <a:buNone/>
+            </a:pPr>
+            <a:r>
+              <a:rPr lang="en-US" sz="1600" dirty="0">
+                <a:solidFill>
+                  <a:srgbClr val="E8EEF7"/>
+                </a:solidFill>
+                <a:latin typeface="JetBrainsMono" pitchFamily="34" charset="0"/>
+                <a:ea typeface="JetBrainsMono" pitchFamily="34" charset="-122"/>
+                <a:cs typeface="JetBrainsMono" pitchFamily="34" charset="-120"/>
+              </a:rPr>
+              <a:t>THANK YOU</a:t>
+            </a:r>
+            <a:endParaRPr lang="en-US" sz="1600" dirty="0"/>
+          </a:p>
+        </p:txBody>
+      </p:sp>
+      <p:sp>
+        <p:nvSpPr>
+          <p:cNvPr id="14" name="Text 12"/>
+          <p:cNvSpPr/>
+          <p:nvPr/>
+        </p:nvSpPr>
+        <p:spPr>
+          <a:xfrm>
+            <a:off x="9423425" y="5416947"/>
+            <a:ext cx="2233804" cy="314920"/>
+          </a:xfrm>
+          <a:prstGeom prst="rect">
+            <a:avLst/>
+          </a:prstGeom>
+          <a:noFill/>
+          <a:ln/>
+        </p:spPr>
+        <p:txBody>
+          <a:bodyPr wrap="square" lIns="0" tIns="0" rIns="0" bIns="0" rtlCol="0" anchor="t"/>
+          <a:lstStyle/>
+          <a:p>
+            <a:pPr algn="l" indent="0" marL="0">
+              <a:lnSpc>
+                <a:spcPts val="2480"/>
+              </a:lnSpc>
+              <a:buNone/>
+            </a:pPr>
+            <a:r>
+              <a:rPr lang="en-US" sz="1600" dirty="0">
+                <a:solidFill>
+                  <a:srgbClr val="8FA3C8"/>
+                </a:solidFill>
+                <a:latin typeface="Inter" pitchFamily="34" charset="0"/>
+                <a:ea typeface="Inter" pitchFamily="34" charset="-122"/>
+                <a:cs typeface="Inter" pitchFamily="34" charset="-120"/>
+              </a:rPr>
+              <a:t>PRESENTER · TEAM</a:t>
+            </a:r>
+            <a:endParaRPr lang="en-US" sz="1600" dirty="0"/>
+          </a:p>
+        </p:txBody>
+      </p:sp>
+      <p:sp>
+        <p:nvSpPr>
+          <p:cNvPr id="15" name="Text 13"/>
+          <p:cNvSpPr/>
+          <p:nvPr/>
+        </p:nvSpPr>
+        <p:spPr>
+          <a:xfrm>
+            <a:off x="7910916" y="5981502"/>
+            <a:ext cx="3702513" cy="465138"/>
+          </a:xfrm>
+          <a:prstGeom prst="rect">
+            <a:avLst/>
+          </a:prstGeom>
+          <a:noFill/>
+          <a:ln w="12698">
+            <a:solidFill>
+              <a:srgbClr val="4FC8E8"/>
+            </a:solidFill>
+          </a:ln>
+        </p:spPr>
+        <p:txBody>
+          <a:bodyPr wrap="square" rtlCol="0" anchor="ctr"/>
+          <a:lstStyle/>
+          <a:p>
+            <a:pPr indent="0" marL="0">
+              <a:buNone/>
+            </a:pPr>
+            <a:endParaRPr lang="en-US" dirty="0"/>
+          </a:p>
+        </p:txBody>
+      </p:sp>
+      <p:sp>
+        <p:nvSpPr>
+          <p:cNvPr id="16" name="Text 14"/>
+          <p:cNvSpPr/>
+          <p:nvPr/>
+        </p:nvSpPr>
+        <p:spPr>
+          <a:xfrm>
+            <a:off x="8109700" y="6078736"/>
+            <a:ext cx="207212" cy="270669"/>
+          </a:xfrm>
+          <a:prstGeom prst="rect">
+            <a:avLst/>
+          </a:prstGeom>
+          <a:noFill/>
+          <a:ln/>
+        </p:spPr>
+        <p:txBody>
+          <a:bodyPr wrap="square" lIns="0" tIns="0" rIns="0" bIns="0" rtlCol="0" anchor="t"/>
+          <a:lstStyle/>
+          <a:p>
+            <a:pPr algn="l" indent="0" marL="0">
+              <a:lnSpc>
+                <a:spcPts val="2133"/>
+              </a:lnSpc>
+              <a:buNone/>
+            </a:pPr>
+            <a:r>
+              <a:rPr lang="en-US" sz="1333" dirty="0">
+                <a:solidFill>
+                  <a:srgbClr val="4FC8E8"/>
+                </a:solidFill>
+                <a:latin typeface="JetBrainsMono" pitchFamily="34" charset="0"/>
+                <a:ea typeface="JetBrainsMono" pitchFamily="34" charset="-122"/>
+                <a:cs typeface="JetBrainsMono" pitchFamily="34" charset="-120"/>
+              </a:rPr>
+              <a:t>06</a:t>
+            </a:r>
+            <a:endParaRPr lang="en-US" sz="1333" dirty="0"/>
+          </a:p>
+        </p:txBody>
+      </p:sp>
+      <p:sp>
+        <p:nvSpPr>
+          <p:cNvPr id="17" name="Shape 15"/>
+          <p:cNvSpPr/>
+          <p:nvPr/>
+        </p:nvSpPr>
+        <p:spPr>
+          <a:xfrm>
+            <a:off x="8505286" y="5994202"/>
+            <a:ext cx="0" cy="439737"/>
+          </a:xfrm>
+          <a:prstGeom prst="line">
+            <a:avLst/>
+          </a:prstGeom>
+          <a:noFill/>
+          <a:ln w="12698">
+            <a:solidFill>
+              <a:srgbClr val="4FC8E8"/>
+            </a:solidFill>
+            <a:prstDash val="solid"/>
+          </a:ln>
+        </p:spPr>
+      </p:sp>
+      <p:sp>
+        <p:nvSpPr>
+          <p:cNvPr id="18" name="Text 16"/>
+          <p:cNvSpPr/>
+          <p:nvPr/>
+        </p:nvSpPr>
+        <p:spPr>
+          <a:xfrm>
+            <a:off x="8697722" y="6078736"/>
+            <a:ext cx="1239024" cy="270669"/>
+          </a:xfrm>
+          <a:prstGeom prst="rect">
+            <a:avLst/>
+          </a:prstGeom>
+          <a:noFill/>
+          <a:ln/>
+        </p:spPr>
+        <p:txBody>
+          <a:bodyPr wrap="square" lIns="0" tIns="0" rIns="0" bIns="0" rtlCol="0" anchor="t"/>
+          <a:lstStyle/>
+          <a:p>
+            <a:pPr algn="l" indent="0" marL="0">
+              <a:lnSpc>
+                <a:spcPts val="2133"/>
+              </a:lnSpc>
+              <a:buNone/>
+            </a:pPr>
+            <a:r>
+              <a:rPr lang="en-US" sz="1333" dirty="0">
+                <a:solidFill>
+                  <a:srgbClr val="E8EEF7"/>
+                </a:solidFill>
+                <a:latin typeface="Inter" pitchFamily="34" charset="0"/>
+                <a:ea typeface="Inter" pitchFamily="34" charset="-122"/>
+                <a:cs typeface="Inter" pitchFamily="34" charset="-120"/>
+              </a:rPr>
+              <a:t>DISCUSSION</a:t>
+            </a:r>
+            <a:endParaRPr lang="en-US" sz="1333" dirty="0"/>
+          </a:p>
+        </p:txBody>
+      </p:sp>
+      <p:sp>
+        <p:nvSpPr>
+          <p:cNvPr id="19" name="Shape 17"/>
+          <p:cNvSpPr/>
+          <p:nvPr/>
+        </p:nvSpPr>
+        <p:spPr>
+          <a:xfrm>
+            <a:off x="10104887" y="5994202"/>
+            <a:ext cx="0" cy="439737"/>
+          </a:xfrm>
+          <a:prstGeom prst="line">
+            <a:avLst/>
+          </a:prstGeom>
+          <a:noFill/>
+          <a:ln w="12698">
+            <a:solidFill>
+              <a:srgbClr val="4FC8E8"/>
+            </a:solidFill>
+            <a:prstDash val="solid"/>
+          </a:ln>
+        </p:spPr>
+      </p:sp>
+      <p:sp>
+        <p:nvSpPr>
+          <p:cNvPr id="20" name="Text 18"/>
+          <p:cNvSpPr/>
+          <p:nvPr/>
+        </p:nvSpPr>
+        <p:spPr>
+          <a:xfrm>
+            <a:off x="10297323" y="6078736"/>
+            <a:ext cx="1139667" cy="270669"/>
+          </a:xfrm>
+          <a:prstGeom prst="rect">
+            <a:avLst/>
+          </a:prstGeom>
+          <a:noFill/>
+          <a:ln/>
+        </p:spPr>
+        <p:txBody>
+          <a:bodyPr wrap="square" lIns="0" tIns="0" rIns="0" bIns="0" rtlCol="0" anchor="t"/>
+          <a:lstStyle/>
+          <a:p>
+            <a:pPr algn="l" indent="0" marL="0">
+              <a:lnSpc>
+                <a:spcPts val="2133"/>
+              </a:lnSpc>
+              <a:buNone/>
+            </a:pPr>
+            <a:r>
+              <a:rPr lang="en-US" sz="1333" dirty="0">
+                <a:solidFill>
+                  <a:srgbClr val="8FA3C8"/>
+                </a:solidFill>
+                <a:latin typeface="JetBrainsMono" pitchFamily="34" charset="0"/>
+                <a:ea typeface="JetBrainsMono" pitchFamily="34" charset="-122"/>
+                <a:cs typeface="JetBrainsMono" pitchFamily="34" charset="-120"/>
+              </a:rPr>
+              <a:t>SHEET 06/06</a:t>
+            </a:r>
+            <a:endParaRPr lang="en-US" sz="1333" dirty="0"/>
+          </a:p>
+        </p:txBody>
+      </p:sp>
     </p:spTree>
   </p:cSld>
   <p:clrMapOvr>

--- a/decks/agentic-rag/agentic-rag.pptx
+++ b/decks/agentic-rag/agentic-rag.pptx
@@ -1338,7 +1338,7 @@
           <a:ln/>
         </p:spPr>
         <p:txBody>
-          <a:bodyPr wrap="square" lIns="0" tIns="0" rIns="0" bIns="0" rtlCol="0" anchor="t"/>
+          <a:bodyPr wrap="none" lIns="0" tIns="0" rIns="0" bIns="0" rtlCol="0" anchor="t"/>
           <a:lstStyle/>
           <a:p>
             <a:pPr algn="l" indent="0" marL="0">
@@ -1383,7 +1383,9 @@
           <a:ln/>
         </p:spPr>
         <p:txBody>
-          <a:bodyPr wrap="square" lIns="0" tIns="0" rIns="0" bIns="0" rtlCol="0" anchor="t"/>
+          <a:bodyPr wrap="square" lIns="0" tIns="0" rIns="0" bIns="0" rtlCol="0" anchor="t">
+            <a:normAutofit/>
+          </a:bodyPr>
           <a:lstStyle/>
           <a:p>
             <a:pPr algn="l" indent="0" marL="0">
@@ -1475,7 +1477,9 @@
           <a:ln/>
         </p:spPr>
         <p:txBody>
-          <a:bodyPr wrap="square" lIns="0" tIns="0" rIns="0" bIns="0" rtlCol="0" anchor="t"/>
+          <a:bodyPr wrap="square" lIns="0" tIns="0" rIns="0" bIns="0" rtlCol="0" anchor="t">
+            <a:normAutofit/>
+          </a:bodyPr>
           <a:lstStyle/>
           <a:p>
             <a:pPr algn="l" indent="0" marL="0">
@@ -1521,6 +1525,10 @@
             <a:prstDash val="solid"/>
           </a:ln>
         </p:spPr>
+        <p:txBody>
+          <a:bodyPr/>
+          <a:p/>
+        </p:txBody>
       </p:sp>
       <p:sp>
         <p:nvSpPr>
@@ -1540,7 +1548,7 @@
           <a:ln/>
         </p:spPr>
         <p:txBody>
-          <a:bodyPr wrap="square" lIns="0" tIns="0" rIns="0" bIns="0" rtlCol="0" anchor="t"/>
+          <a:bodyPr wrap="none" lIns="0" tIns="0" rIns="0" bIns="0" rtlCol="0" anchor="t"/>
           <a:lstStyle/>
           <a:p>
             <a:pPr algn="l" indent="0" marL="0">
@@ -1585,7 +1593,7 @@
           <a:ln/>
         </p:spPr>
         <p:txBody>
-          <a:bodyPr wrap="square" lIns="0" tIns="0" rIns="0" bIns="0" rtlCol="0" anchor="t"/>
+          <a:bodyPr wrap="none" lIns="0" tIns="0" rIns="0" bIns="0" rtlCol="0" anchor="t"/>
           <a:lstStyle/>
           <a:p>
             <a:pPr algn="l" indent="0" marL="0">
@@ -1627,7 +1635,7 @@
           <a:ln/>
         </p:spPr>
         <p:txBody>
-          <a:bodyPr wrap="square" lIns="0" tIns="0" rIns="0" bIns="0" rtlCol="0" anchor="t"/>
+          <a:bodyPr wrap="none" lIns="0" tIns="0" rIns="0" bIns="0" rtlCol="0" anchor="t"/>
           <a:lstStyle/>
           <a:p>
             <a:pPr algn="l" indent="0" marL="0">
@@ -1672,7 +1680,7 @@
           <a:ln/>
         </p:spPr>
         <p:txBody>
-          <a:bodyPr wrap="square" lIns="0" tIns="0" rIns="0" bIns="0" rtlCol="0" anchor="t"/>
+          <a:bodyPr wrap="none" lIns="0" tIns="0" rIns="0" bIns="0" rtlCol="0" anchor="t"/>
           <a:lstStyle/>
           <a:p>
             <a:pPr algn="l" indent="0" marL="0">
@@ -1714,7 +1722,7 @@
           <a:ln/>
         </p:spPr>
         <p:txBody>
-          <a:bodyPr wrap="square" lIns="0" tIns="0" rIns="0" bIns="0" rtlCol="0" anchor="t"/>
+          <a:bodyPr wrap="none" lIns="0" tIns="0" rIns="0" bIns="0" rtlCol="0" anchor="t"/>
           <a:lstStyle/>
           <a:p>
             <a:pPr algn="l" indent="0" marL="0">
@@ -1759,7 +1767,7 @@
           <a:ln/>
         </p:spPr>
         <p:txBody>
-          <a:bodyPr wrap="square" lIns="0" tIns="0" rIns="0" bIns="0" rtlCol="0" anchor="t"/>
+          <a:bodyPr wrap="none" lIns="0" tIns="0" rIns="0" bIns="0" rtlCol="0" anchor="t"/>
           <a:lstStyle/>
           <a:p>
             <a:pPr algn="l" indent="0" marL="0">
@@ -1833,7 +1841,7 @@
           <a:ln/>
         </p:spPr>
         <p:txBody>
-          <a:bodyPr wrap="square" lIns="0" tIns="0" rIns="0" bIns="0" rtlCol="0" anchor="t"/>
+          <a:bodyPr wrap="none" lIns="0" tIns="0" rIns="0" bIns="0" rtlCol="0" anchor="t"/>
           <a:lstStyle/>
           <a:p>
             <a:pPr algn="l" indent="0" marL="0">
@@ -1879,6 +1887,10 @@
             <a:prstDash val="solid"/>
           </a:ln>
         </p:spPr>
+        <p:txBody>
+          <a:bodyPr/>
+          <a:p/>
+        </p:txBody>
       </p:sp>
       <p:sp>
         <p:nvSpPr>
@@ -1898,7 +1910,7 @@
           <a:ln/>
         </p:spPr>
         <p:txBody>
-          <a:bodyPr wrap="square" lIns="0" tIns="0" rIns="0" bIns="0" rtlCol="0" anchor="t"/>
+          <a:bodyPr wrap="none" lIns="0" tIns="0" rIns="0" bIns="0" rtlCol="0" anchor="t"/>
           <a:lstStyle/>
           <a:p>
             <a:pPr algn="l" indent="0" marL="0">
@@ -1944,6 +1956,10 @@
             <a:prstDash val="solid"/>
           </a:ln>
         </p:spPr>
+        <p:txBody>
+          <a:bodyPr/>
+          <a:p/>
+        </p:txBody>
       </p:sp>
       <p:sp>
         <p:nvSpPr>
@@ -1963,7 +1979,7 @@
           <a:ln/>
         </p:spPr>
         <p:txBody>
-          <a:bodyPr wrap="square" lIns="0" tIns="0" rIns="0" bIns="0" rtlCol="0" anchor="t"/>
+          <a:bodyPr wrap="none" lIns="0" tIns="0" rIns="0" bIns="0" rtlCol="0" anchor="t"/>
           <a:lstStyle/>
           <a:p>
             <a:pPr algn="l" indent="0" marL="0">
@@ -2037,7 +2053,7 @@
           <a:ln/>
         </p:spPr>
         <p:txBody>
-          <a:bodyPr wrap="square" lIns="0" tIns="0" rIns="0" bIns="0" rtlCol="0" anchor="t"/>
+          <a:bodyPr wrap="none" lIns="0" tIns="0" rIns="0" bIns="0" rtlCol="0" anchor="t"/>
           <a:lstStyle/>
           <a:p>
             <a:pPr algn="l" indent="0" marL="0">
@@ -2114,7 +2130,7 @@
           <a:ln/>
         </p:spPr>
         <p:txBody>
-          <a:bodyPr wrap="square" lIns="0" tIns="0" rIns="0" bIns="0" rtlCol="0" anchor="t"/>
+          <a:bodyPr wrap="none" lIns="0" tIns="0" rIns="0" bIns="0" rtlCol="0" anchor="t"/>
           <a:lstStyle/>
           <a:p>
             <a:pPr algn="l" indent="0" marL="0">
@@ -2218,7 +2234,7 @@
           <a:ln/>
         </p:spPr>
         <p:txBody>
-          <a:bodyPr wrap="square" lIns="0" tIns="0" rIns="0" bIns="0" rtlCol="0" anchor="t"/>
+          <a:bodyPr wrap="none" lIns="0" tIns="0" rIns="0" bIns="0" rtlCol="0" anchor="t"/>
           <a:lstStyle/>
           <a:p>
             <a:pPr algn="l" indent="0" marL="0">
@@ -2322,7 +2338,7 @@
           <a:ln/>
         </p:spPr>
         <p:txBody>
-          <a:bodyPr wrap="square" lIns="0" tIns="0" rIns="0" bIns="0" rtlCol="0" anchor="t"/>
+          <a:bodyPr wrap="none" lIns="0" tIns="0" rIns="0" bIns="0" rtlCol="0" anchor="t"/>
           <a:lstStyle/>
           <a:p>
             <a:pPr algn="l" indent="0" marL="0">
@@ -2426,7 +2442,7 @@
           <a:ln/>
         </p:spPr>
         <p:txBody>
-          <a:bodyPr wrap="square" lIns="0" tIns="0" rIns="0" bIns="0" rtlCol="0" anchor="t"/>
+          <a:bodyPr wrap="none" lIns="0" tIns="0" rIns="0" bIns="0" rtlCol="0" anchor="t"/>
           <a:lstStyle/>
           <a:p>
             <a:pPr algn="l" indent="0" marL="0">
@@ -2530,7 +2546,7 @@
           <a:ln/>
         </p:spPr>
         <p:txBody>
-          <a:bodyPr wrap="square" lIns="0" tIns="0" rIns="0" bIns="0" rtlCol="0" anchor="t"/>
+          <a:bodyPr wrap="none" lIns="0" tIns="0" rIns="0" bIns="0" rtlCol="0" anchor="t"/>
           <a:lstStyle/>
           <a:p>
             <a:pPr algn="l" indent="0" marL="0">
@@ -2572,7 +2588,7 @@
           <a:ln/>
         </p:spPr>
         <p:txBody>
-          <a:bodyPr wrap="square" lIns="0" tIns="0" rIns="0" bIns="0" rtlCol="0" anchor="t"/>
+          <a:bodyPr wrap="none" lIns="0" tIns="0" rIns="0" bIns="0" rtlCol="0" anchor="t"/>
           <a:lstStyle/>
           <a:p>
             <a:pPr algn="l" indent="0" marL="0">
@@ -2617,7 +2633,7 @@
           <a:ln/>
         </p:spPr>
         <p:txBody>
-          <a:bodyPr wrap="square" lIns="0" tIns="0" rIns="0" bIns="0" rtlCol="0" anchor="t"/>
+          <a:bodyPr wrap="none" lIns="0" tIns="0" rIns="0" bIns="0" rtlCol="0" anchor="t"/>
           <a:lstStyle/>
           <a:p>
             <a:pPr algn="l" indent="0" marL="0">
@@ -2662,7 +2678,9 @@
           <a:ln/>
         </p:spPr>
         <p:txBody>
-          <a:bodyPr wrap="square" lIns="0" tIns="0" rIns="0" bIns="0" rtlCol="0" anchor="t"/>
+          <a:bodyPr wrap="square" lIns="0" tIns="0" rIns="0" bIns="0" rtlCol="0" anchor="t">
+            <a:normAutofit/>
+          </a:bodyPr>
           <a:lstStyle/>
           <a:p>
             <a:pPr algn="l" indent="0" marL="0">
@@ -2707,7 +2725,9 @@
           <a:ln/>
         </p:spPr>
         <p:txBody>
-          <a:bodyPr wrap="square" lIns="0" tIns="0" rIns="0" bIns="0" rtlCol="0" anchor="t"/>
+          <a:bodyPr wrap="square" lIns="0" tIns="0" rIns="0" bIns="0" rtlCol="0" anchor="t">
+            <a:normAutofit/>
+          </a:bodyPr>
           <a:lstStyle/>
           <a:p>
             <a:pPr algn="l" indent="0" marL="0">
@@ -2753,6 +2773,10 @@
             <a:prstDash val="solid"/>
           </a:ln>
         </p:spPr>
+        <p:txBody>
+          <a:bodyPr/>
+          <a:p/>
+        </p:txBody>
       </p:sp>
       <p:sp>
         <p:nvSpPr>
@@ -2772,7 +2796,7 @@
           <a:ln/>
         </p:spPr>
         <p:txBody>
-          <a:bodyPr wrap="square" lIns="0" tIns="0" rIns="0" bIns="0" rtlCol="0" anchor="t"/>
+          <a:bodyPr wrap="none" lIns="0" tIns="0" rIns="0" bIns="0" rtlCol="0" anchor="t"/>
           <a:lstStyle/>
           <a:p>
             <a:pPr algn="l" indent="0" marL="0">
@@ -2817,7 +2841,7 @@
           <a:ln/>
         </p:spPr>
         <p:txBody>
-          <a:bodyPr wrap="square" lIns="0" tIns="0" rIns="0" bIns="0" rtlCol="0" anchor="t"/>
+          <a:bodyPr wrap="none" lIns="0" tIns="0" rIns="0" bIns="0" rtlCol="0" anchor="t"/>
           <a:lstStyle/>
           <a:p>
             <a:pPr algn="l" indent="0" marL="0">
@@ -2862,7 +2886,9 @@
           <a:ln/>
         </p:spPr>
         <p:txBody>
-          <a:bodyPr wrap="square" lIns="0" tIns="0" rIns="0" bIns="0" rtlCol="0" anchor="t"/>
+          <a:bodyPr wrap="square" lIns="0" tIns="0" rIns="0" bIns="0" rtlCol="0" anchor="t">
+            <a:normAutofit/>
+          </a:bodyPr>
           <a:lstStyle/>
           <a:p>
             <a:pPr algn="l" indent="0" marL="0">
@@ -2908,6 +2934,10 @@
             <a:prstDash val="solid"/>
           </a:ln>
         </p:spPr>
+        <p:txBody>
+          <a:bodyPr/>
+          <a:p/>
+        </p:txBody>
       </p:sp>
       <p:sp>
         <p:nvSpPr>
@@ -2927,7 +2957,7 @@
           <a:ln/>
         </p:spPr>
         <p:txBody>
-          <a:bodyPr wrap="square" lIns="0" tIns="0" rIns="0" bIns="0" rtlCol="0" anchor="t"/>
+          <a:bodyPr wrap="none" lIns="0" tIns="0" rIns="0" bIns="0" rtlCol="0" anchor="t"/>
           <a:lstStyle/>
           <a:p>
             <a:pPr algn="l" indent="0" marL="0">
@@ -2972,7 +3002,9 @@
           <a:ln/>
         </p:spPr>
         <p:txBody>
-          <a:bodyPr wrap="square" lIns="0" tIns="0" rIns="0" bIns="0" rtlCol="0" anchor="t"/>
+          <a:bodyPr wrap="square" lIns="0" tIns="0" rIns="0" bIns="0" rtlCol="0" anchor="t">
+            <a:normAutofit/>
+          </a:bodyPr>
           <a:lstStyle/>
           <a:p>
             <a:pPr algn="l" indent="0" marL="0">
@@ -3017,7 +3049,9 @@
           <a:ln/>
         </p:spPr>
         <p:txBody>
-          <a:bodyPr wrap="square" lIns="0" tIns="0" rIns="0" bIns="0" rtlCol="0" anchor="t"/>
+          <a:bodyPr wrap="square" lIns="0" tIns="0" rIns="0" bIns="0" rtlCol="0" anchor="t">
+            <a:normAutofit/>
+          </a:bodyPr>
           <a:lstStyle/>
           <a:p>
             <a:pPr algn="l" indent="0" marL="0">
@@ -3095,6 +3129,10 @@
             <a:prstDash val="solid"/>
           </a:ln>
         </p:spPr>
+        <p:txBody>
+          <a:bodyPr/>
+          <a:p/>
+        </p:txBody>
       </p:sp>
       <p:sp>
         <p:nvSpPr>
@@ -3118,6 +3156,10 @@
             <a:prstDash val="solid"/>
           </a:ln>
         </p:spPr>
+        <p:txBody>
+          <a:bodyPr/>
+          <a:p/>
+        </p:txBody>
       </p:sp>
       <p:sp>
         <p:nvSpPr>
@@ -3141,6 +3183,10 @@
             <a:prstDash val="solid"/>
           </a:ln>
         </p:spPr>
+        <p:txBody>
+          <a:bodyPr/>
+          <a:p/>
+        </p:txBody>
       </p:sp>
       <p:sp>
         <p:nvSpPr>
@@ -3164,6 +3210,10 @@
             <a:prstDash val="solid"/>
           </a:ln>
         </p:spPr>
+        <p:txBody>
+          <a:bodyPr/>
+          <a:p/>
+        </p:txBody>
       </p:sp>
       <p:sp>
         <p:nvSpPr>
@@ -3183,7 +3233,9 @@
           <a:ln/>
         </p:spPr>
         <p:txBody>
-          <a:bodyPr wrap="square" lIns="0" tIns="0" rIns="0" bIns="0" rtlCol="0" anchor="t"/>
+          <a:bodyPr wrap="square" lIns="0" tIns="0" rIns="0" bIns="0" rtlCol="0" anchor="t">
+            <a:normAutofit/>
+          </a:bodyPr>
           <a:lstStyle/>
           <a:p>
             <a:pPr algn="l" indent="0" marL="0">
@@ -3257,7 +3309,7 @@
           <a:ln/>
         </p:spPr>
         <p:txBody>
-          <a:bodyPr wrap="square" lIns="0" tIns="0" rIns="0" bIns="0" rtlCol="0" anchor="t"/>
+          <a:bodyPr wrap="none" lIns="0" tIns="0" rIns="0" bIns="0" rtlCol="0" anchor="t"/>
           <a:lstStyle/>
           <a:p>
             <a:pPr algn="l" indent="0" marL="0">
@@ -3303,6 +3355,10 @@
             <a:prstDash val="solid"/>
           </a:ln>
         </p:spPr>
+        <p:txBody>
+          <a:bodyPr/>
+          <a:p/>
+        </p:txBody>
       </p:sp>
       <p:sp>
         <p:nvSpPr>
@@ -3322,7 +3378,7 @@
           <a:ln/>
         </p:spPr>
         <p:txBody>
-          <a:bodyPr wrap="square" lIns="0" tIns="0" rIns="0" bIns="0" rtlCol="0" anchor="t"/>
+          <a:bodyPr wrap="none" lIns="0" tIns="0" rIns="0" bIns="0" rtlCol="0" anchor="t"/>
           <a:lstStyle/>
           <a:p>
             <a:pPr algn="l" indent="0" marL="0">
@@ -3368,6 +3424,10 @@
             <a:prstDash val="solid"/>
           </a:ln>
         </p:spPr>
+        <p:txBody>
+          <a:bodyPr/>
+          <a:p/>
+        </p:txBody>
       </p:sp>
       <p:sp>
         <p:nvSpPr>
@@ -3387,7 +3447,7 @@
           <a:ln/>
         </p:spPr>
         <p:txBody>
-          <a:bodyPr wrap="square" lIns="0" tIns="0" rIns="0" bIns="0" rtlCol="0" anchor="t"/>
+          <a:bodyPr wrap="none" lIns="0" tIns="0" rIns="0" bIns="0" rtlCol="0" anchor="t"/>
           <a:lstStyle/>
           <a:p>
             <a:pPr algn="l" indent="0" marL="0">
@@ -3461,7 +3521,7 @@
           <a:ln/>
         </p:spPr>
         <p:txBody>
-          <a:bodyPr wrap="square" lIns="0" tIns="0" rIns="0" bIns="0" rtlCol="0" anchor="t"/>
+          <a:bodyPr wrap="none" lIns="0" tIns="0" rIns="0" bIns="0" rtlCol="0" anchor="t"/>
           <a:lstStyle/>
           <a:p>
             <a:pPr algn="l" indent="0" marL="0">
@@ -3538,7 +3598,7 @@
           <a:ln/>
         </p:spPr>
         <p:txBody>
-          <a:bodyPr wrap="square" lIns="0" tIns="0" rIns="0" bIns="0" rtlCol="0" anchor="t"/>
+          <a:bodyPr wrap="none" lIns="0" tIns="0" rIns="0" bIns="0" rtlCol="0" anchor="t"/>
           <a:lstStyle/>
           <a:p>
             <a:pPr algn="l" indent="0" marL="0">
@@ -3583,7 +3643,7 @@
           <a:ln/>
         </p:spPr>
         <p:txBody>
-          <a:bodyPr wrap="square" lIns="0" tIns="0" rIns="0" bIns="0" rtlCol="0" anchor="t"/>
+          <a:bodyPr wrap="none" lIns="0" tIns="0" rIns="0" bIns="0" rtlCol="0" anchor="t"/>
           <a:lstStyle/>
           <a:p>
             <a:pPr algn="l" indent="0" marL="0">
@@ -3628,7 +3688,9 @@
           <a:ln/>
         </p:spPr>
         <p:txBody>
-          <a:bodyPr wrap="square" lIns="0" tIns="0" rIns="0" bIns="0" rtlCol="0" anchor="t"/>
+          <a:bodyPr wrap="square" lIns="0" tIns="0" rIns="0" bIns="0" rtlCol="0" anchor="t">
+            <a:normAutofit/>
+          </a:bodyPr>
           <a:lstStyle/>
           <a:p>
             <a:pPr algn="l" indent="0" marL="0">
@@ -3732,7 +3794,7 @@
           <a:ln/>
         </p:spPr>
         <p:txBody>
-          <a:bodyPr wrap="square" lIns="0" tIns="0" rIns="0" bIns="0" rtlCol="0" anchor="t"/>
+          <a:bodyPr wrap="none" lIns="0" tIns="0" rIns="0" bIns="0" rtlCol="0" anchor="t"/>
           <a:lstStyle/>
           <a:p>
             <a:pPr algn="l" indent="0" marL="0">
@@ -3777,7 +3839,7 @@
           <a:ln/>
         </p:spPr>
         <p:txBody>
-          <a:bodyPr wrap="square" lIns="0" tIns="0" rIns="0" bIns="0" rtlCol="0" anchor="t"/>
+          <a:bodyPr wrap="none" lIns="0" tIns="0" rIns="0" bIns="0" rtlCol="0" anchor="t"/>
           <a:lstStyle/>
           <a:p>
             <a:pPr algn="l" indent="0" marL="0">
@@ -3822,7 +3884,9 @@
           <a:ln/>
         </p:spPr>
         <p:txBody>
-          <a:bodyPr wrap="square" lIns="0" tIns="0" rIns="0" bIns="0" rtlCol="0" anchor="t"/>
+          <a:bodyPr wrap="square" lIns="0" tIns="0" rIns="0" bIns="0" rtlCol="0" anchor="t">
+            <a:normAutofit/>
+          </a:bodyPr>
           <a:lstStyle/>
           <a:p>
             <a:pPr algn="l" indent="0" marL="0">
@@ -3930,7 +3994,7 @@
           <a:ln/>
         </p:spPr>
         <p:txBody>
-          <a:bodyPr wrap="square" lIns="0" tIns="0" rIns="0" bIns="0" rtlCol="0" anchor="t"/>
+          <a:bodyPr wrap="none" lIns="0" tIns="0" rIns="0" bIns="0" rtlCol="0" anchor="t"/>
           <a:lstStyle/>
           <a:p>
             <a:pPr algn="l" indent="0" marL="0">
@@ -3975,7 +4039,7 @@
           <a:ln/>
         </p:spPr>
         <p:txBody>
-          <a:bodyPr wrap="square" lIns="0" tIns="0" rIns="0" bIns="0" rtlCol="0" anchor="t"/>
+          <a:bodyPr wrap="none" lIns="0" tIns="0" rIns="0" bIns="0" rtlCol="0" anchor="t"/>
           <a:lstStyle/>
           <a:p>
             <a:pPr algn="l" indent="0" marL="0">
@@ -4020,7 +4084,9 @@
           <a:ln/>
         </p:spPr>
         <p:txBody>
-          <a:bodyPr wrap="square" lIns="0" tIns="0" rIns="0" bIns="0" rtlCol="0" anchor="t"/>
+          <a:bodyPr wrap="square" lIns="0" tIns="0" rIns="0" bIns="0" rtlCol="0" anchor="t">
+            <a:normAutofit/>
+          </a:bodyPr>
           <a:lstStyle/>
           <a:p>
             <a:pPr algn="l" indent="0" marL="0">
@@ -4124,7 +4190,7 @@
           <a:ln/>
         </p:spPr>
         <p:txBody>
-          <a:bodyPr wrap="square" lIns="0" tIns="0" rIns="0" bIns="0" rtlCol="0" anchor="t"/>
+          <a:bodyPr wrap="none" lIns="0" tIns="0" rIns="0" bIns="0" rtlCol="0" anchor="t"/>
           <a:lstStyle/>
           <a:p>
             <a:pPr algn="l" indent="0" marL="0">
@@ -4169,7 +4235,7 @@
           <a:ln/>
         </p:spPr>
         <p:txBody>
-          <a:bodyPr wrap="square" lIns="0" tIns="0" rIns="0" bIns="0" rtlCol="0" anchor="t"/>
+          <a:bodyPr wrap="none" lIns="0" tIns="0" rIns="0" bIns="0" rtlCol="0" anchor="t"/>
           <a:lstStyle/>
           <a:p>
             <a:pPr algn="l" indent="0" marL="0">
@@ -4214,7 +4280,9 @@
           <a:ln/>
         </p:spPr>
         <p:txBody>
-          <a:bodyPr wrap="square" lIns="0" tIns="0" rIns="0" bIns="0" rtlCol="0" anchor="t"/>
+          <a:bodyPr wrap="square" lIns="0" tIns="0" rIns="0" bIns="0" rtlCol="0" anchor="t">
+            <a:normAutofit/>
+          </a:bodyPr>
           <a:lstStyle/>
           <a:p>
             <a:pPr algn="l" indent="0" marL="0">
@@ -4286,7 +4354,7 @@
           <a:ln/>
         </p:spPr>
         <p:txBody>
-          <a:bodyPr wrap="square" lIns="0" tIns="0" rIns="0" bIns="0" rtlCol="0" anchor="t"/>
+          <a:bodyPr wrap="none" lIns="0" tIns="0" rIns="0" bIns="0" rtlCol="0" anchor="t"/>
           <a:lstStyle/>
           <a:p>
             <a:pPr algn="ctr" indent="0" marL="0">
@@ -4332,6 +4400,10 @@
             <a:prstDash val="solid"/>
           </a:ln>
         </p:spPr>
+        <p:txBody>
+          <a:bodyPr/>
+          <a:p/>
+        </p:txBody>
       </p:sp>
       <p:sp>
         <p:nvSpPr>
@@ -4355,6 +4427,10 @@
             <a:prstDash val="solid"/>
           </a:ln>
         </p:spPr>
+        <p:txBody>
+          <a:bodyPr/>
+          <a:p/>
+        </p:txBody>
       </p:sp>
       <p:sp>
         <p:nvSpPr>
@@ -4378,6 +4454,10 @@
             <a:prstDash val="solid"/>
           </a:ln>
         </p:spPr>
+        <p:txBody>
+          <a:bodyPr/>
+          <a:p/>
+        </p:txBody>
       </p:sp>
       <p:sp>
         <p:nvSpPr>
@@ -4401,6 +4481,10 @@
             <a:prstDash val="solid"/>
           </a:ln>
         </p:spPr>
+        <p:txBody>
+          <a:bodyPr/>
+          <a:p/>
+        </p:txBody>
       </p:sp>
       <p:sp>
         <p:nvSpPr>
@@ -4420,7 +4504,7 @@
           <a:ln/>
         </p:spPr>
         <p:txBody>
-          <a:bodyPr wrap="square" lIns="0" tIns="0" rIns="0" bIns="0" rtlCol="0" anchor="t"/>
+          <a:bodyPr wrap="none" lIns="0" tIns="0" rIns="0" bIns="0" rtlCol="0" anchor="t"/>
           <a:lstStyle/>
           <a:p>
             <a:pPr algn="l" indent="0" marL="0">
@@ -4494,7 +4578,7 @@
           <a:ln/>
         </p:spPr>
         <p:txBody>
-          <a:bodyPr wrap="square" lIns="0" tIns="0" rIns="0" bIns="0" rtlCol="0" anchor="t"/>
+          <a:bodyPr wrap="none" lIns="0" tIns="0" rIns="0" bIns="0" rtlCol="0" anchor="t"/>
           <a:lstStyle/>
           <a:p>
             <a:pPr algn="l" indent="0" marL="0">
@@ -4540,6 +4624,10 @@
             <a:prstDash val="solid"/>
           </a:ln>
         </p:spPr>
+        <p:txBody>
+          <a:bodyPr/>
+          <a:p/>
+        </p:txBody>
       </p:sp>
       <p:sp>
         <p:nvSpPr>
@@ -4559,7 +4647,7 @@
           <a:ln/>
         </p:spPr>
         <p:txBody>
-          <a:bodyPr wrap="square" lIns="0" tIns="0" rIns="0" bIns="0" rtlCol="0" anchor="t"/>
+          <a:bodyPr wrap="none" lIns="0" tIns="0" rIns="0" bIns="0" rtlCol="0" anchor="t"/>
           <a:lstStyle/>
           <a:p>
             <a:pPr algn="l" indent="0" marL="0">
@@ -4605,6 +4693,10 @@
             <a:prstDash val="solid"/>
           </a:ln>
         </p:spPr>
+        <p:txBody>
+          <a:bodyPr/>
+          <a:p/>
+        </p:txBody>
       </p:sp>
       <p:sp>
         <p:nvSpPr>
@@ -4624,7 +4716,7 @@
           <a:ln/>
         </p:spPr>
         <p:txBody>
-          <a:bodyPr wrap="square" lIns="0" tIns="0" rIns="0" bIns="0" rtlCol="0" anchor="t"/>
+          <a:bodyPr wrap="none" lIns="0" tIns="0" rIns="0" bIns="0" rtlCol="0" anchor="t"/>
           <a:lstStyle/>
           <a:p>
             <a:pPr algn="l" indent="0" marL="0">
@@ -4698,7 +4790,7 @@
           <a:ln/>
         </p:spPr>
         <p:txBody>
-          <a:bodyPr wrap="square" lIns="0" tIns="0" rIns="0" bIns="0" rtlCol="0" anchor="t"/>
+          <a:bodyPr wrap="none" lIns="0" tIns="0" rIns="0" bIns="0" rtlCol="0" anchor="t"/>
           <a:lstStyle/>
           <a:p>
             <a:pPr algn="l" indent="0" marL="0">
@@ -4743,7 +4835,7 @@
           <a:ln/>
         </p:spPr>
         <p:txBody>
-          <a:bodyPr wrap="square" lIns="0" tIns="0" rIns="0" bIns="0" rtlCol="0" anchor="t"/>
+          <a:bodyPr wrap="none" lIns="0" tIns="0" rIns="0" bIns="0" rtlCol="0" anchor="t"/>
           <a:lstStyle/>
           <a:p>
             <a:pPr algn="l" indent="0" marL="0">
@@ -4820,7 +4912,7 @@
           <a:ln/>
         </p:spPr>
         <p:txBody>
-          <a:bodyPr wrap="square" lIns="0" tIns="0" rIns="0" bIns="0" rtlCol="0" anchor="t"/>
+          <a:bodyPr wrap="none" lIns="0" tIns="0" rIns="0" bIns="0" rtlCol="0" anchor="t"/>
           <a:lstStyle/>
           <a:p>
             <a:pPr algn="l" indent="0" marL="0">
@@ -4862,7 +4954,7 @@
           <a:ln/>
         </p:spPr>
         <p:txBody>
-          <a:bodyPr wrap="square" lIns="0" tIns="0" rIns="0" bIns="0" rtlCol="0" anchor="t"/>
+          <a:bodyPr wrap="none" lIns="0" tIns="0" rIns="0" bIns="0" rtlCol="0" anchor="t"/>
           <a:lstStyle/>
           <a:p>
             <a:pPr algn="l" indent="0" marL="0">
@@ -4904,7 +4996,7 @@
           <a:ln/>
         </p:spPr>
         <p:txBody>
-          <a:bodyPr wrap="square" lIns="0" tIns="0" rIns="0" bIns="0" rtlCol="0" anchor="t"/>
+          <a:bodyPr wrap="none" lIns="0" tIns="0" rIns="0" bIns="0" rtlCol="0" anchor="t"/>
           <a:lstStyle/>
           <a:p>
             <a:pPr algn="l" indent="0" marL="0">
@@ -4969,7 +5061,7 @@
           <a:ln/>
         </p:spPr>
         <p:txBody>
-          <a:bodyPr wrap="square" lIns="0" tIns="0" rIns="0" bIns="0" rtlCol="0" anchor="t"/>
+          <a:bodyPr wrap="none" lIns="0" tIns="0" rIns="0" bIns="0" rtlCol="0" anchor="t"/>
           <a:lstStyle/>
           <a:p>
             <a:pPr algn="l" indent="0" marL="0">
@@ -5060,7 +5152,7 @@
           <a:ln/>
         </p:spPr>
         <p:txBody>
-          <a:bodyPr wrap="square" lIns="0" tIns="0" rIns="0" bIns="0" rtlCol="0" anchor="t"/>
+          <a:bodyPr wrap="none" lIns="0" tIns="0" rIns="0" bIns="0" rtlCol="0" anchor="t"/>
           <a:lstStyle/>
           <a:p>
             <a:pPr algn="l" indent="0" marL="0">
@@ -5102,7 +5194,7 @@
           <a:ln/>
         </p:spPr>
         <p:txBody>
-          <a:bodyPr wrap="square" lIns="0" tIns="0" rIns="0" bIns="0" rtlCol="0" anchor="t"/>
+          <a:bodyPr wrap="none" lIns="0" tIns="0" rIns="0" bIns="0" rtlCol="0" anchor="t"/>
           <a:lstStyle/>
           <a:p>
             <a:pPr algn="l" indent="0" marL="0">
@@ -5144,7 +5236,7 @@
           <a:ln/>
         </p:spPr>
         <p:txBody>
-          <a:bodyPr wrap="square" lIns="0" tIns="0" rIns="0" bIns="0" rtlCol="0" anchor="t"/>
+          <a:bodyPr wrap="none" lIns="0" tIns="0" rIns="0" bIns="0" rtlCol="0" anchor="t"/>
           <a:lstStyle/>
           <a:p>
             <a:pPr algn="l" indent="0" marL="0">
@@ -5209,7 +5301,7 @@
           <a:ln/>
         </p:spPr>
         <p:txBody>
-          <a:bodyPr wrap="square" lIns="0" tIns="0" rIns="0" bIns="0" rtlCol="0" anchor="t"/>
+          <a:bodyPr wrap="none" lIns="0" tIns="0" rIns="0" bIns="0" rtlCol="0" anchor="t"/>
           <a:lstStyle/>
           <a:p>
             <a:pPr algn="l" indent="0" marL="0">
@@ -5300,7 +5392,7 @@
           <a:ln/>
         </p:spPr>
         <p:txBody>
-          <a:bodyPr wrap="square" lIns="0" tIns="0" rIns="0" bIns="0" rtlCol="0" anchor="t"/>
+          <a:bodyPr wrap="none" lIns="0" tIns="0" rIns="0" bIns="0" rtlCol="0" anchor="t"/>
           <a:lstStyle/>
           <a:p>
             <a:pPr algn="l" indent="0" marL="0">
@@ -5342,7 +5434,7 @@
           <a:ln/>
         </p:spPr>
         <p:txBody>
-          <a:bodyPr wrap="square" lIns="0" tIns="0" rIns="0" bIns="0" rtlCol="0" anchor="t"/>
+          <a:bodyPr wrap="none" lIns="0" tIns="0" rIns="0" bIns="0" rtlCol="0" anchor="t"/>
           <a:lstStyle/>
           <a:p>
             <a:pPr algn="l" indent="0" marL="0">
@@ -5384,7 +5476,7 @@
           <a:ln/>
         </p:spPr>
         <p:txBody>
-          <a:bodyPr wrap="square" lIns="0" tIns="0" rIns="0" bIns="0" rtlCol="0" anchor="t"/>
+          <a:bodyPr wrap="none" lIns="0" tIns="0" rIns="0" bIns="0" rtlCol="0" anchor="t"/>
           <a:lstStyle/>
           <a:p>
             <a:pPr algn="l" indent="0" marL="0">
@@ -5449,7 +5541,7 @@
           <a:ln/>
         </p:spPr>
         <p:txBody>
-          <a:bodyPr wrap="square" lIns="0" tIns="0" rIns="0" bIns="0" rtlCol="0" anchor="t"/>
+          <a:bodyPr wrap="none" lIns="0" tIns="0" rIns="0" bIns="0" rtlCol="0" anchor="t"/>
           <a:lstStyle/>
           <a:p>
             <a:pPr algn="l" indent="0" marL="0">
@@ -5540,7 +5632,7 @@
           <a:ln/>
         </p:spPr>
         <p:txBody>
-          <a:bodyPr wrap="square" lIns="0" tIns="0" rIns="0" bIns="0" rtlCol="0" anchor="t"/>
+          <a:bodyPr wrap="none" lIns="0" tIns="0" rIns="0" bIns="0" rtlCol="0" anchor="t"/>
           <a:lstStyle/>
           <a:p>
             <a:pPr algn="l" indent="0" marL="0">
@@ -5582,7 +5674,7 @@
           <a:ln/>
         </p:spPr>
         <p:txBody>
-          <a:bodyPr wrap="square" lIns="0" tIns="0" rIns="0" bIns="0" rtlCol="0" anchor="t"/>
+          <a:bodyPr wrap="none" lIns="0" tIns="0" rIns="0" bIns="0" rtlCol="0" anchor="t"/>
           <a:lstStyle/>
           <a:p>
             <a:pPr algn="l" indent="0" marL="0">
@@ -5624,7 +5716,7 @@
           <a:ln/>
         </p:spPr>
         <p:txBody>
-          <a:bodyPr wrap="square" lIns="0" tIns="0" rIns="0" bIns="0" rtlCol="0" anchor="t"/>
+          <a:bodyPr wrap="none" lIns="0" tIns="0" rIns="0" bIns="0" rtlCol="0" anchor="t"/>
           <a:lstStyle/>
           <a:p>
             <a:pPr algn="l" indent="0" marL="0">
@@ -5689,7 +5781,7 @@
           <a:ln/>
         </p:spPr>
         <p:txBody>
-          <a:bodyPr wrap="square" lIns="0" tIns="0" rIns="0" bIns="0" rtlCol="0" anchor="t"/>
+          <a:bodyPr wrap="none" lIns="0" tIns="0" rIns="0" bIns="0" rtlCol="0" anchor="t"/>
           <a:lstStyle/>
           <a:p>
             <a:pPr algn="l" indent="0" marL="0">
@@ -5780,7 +5872,7 @@
           <a:ln/>
         </p:spPr>
         <p:txBody>
-          <a:bodyPr wrap="square" lIns="0" tIns="0" rIns="0" bIns="0" rtlCol="0" anchor="t"/>
+          <a:bodyPr wrap="none" lIns="0" tIns="0" rIns="0" bIns="0" rtlCol="0" anchor="t"/>
           <a:lstStyle/>
           <a:p>
             <a:pPr algn="l" indent="0" marL="0">
@@ -5826,6 +5918,10 @@
             <a:prstDash val="solid"/>
           </a:ln>
         </p:spPr>
+        <p:txBody>
+          <a:bodyPr/>
+          <a:p/>
+        </p:txBody>
       </p:sp>
       <p:sp>
         <p:nvSpPr>
@@ -5845,7 +5941,7 @@
           <a:ln/>
         </p:spPr>
         <p:txBody>
-          <a:bodyPr wrap="square" lIns="0" tIns="0" rIns="0" bIns="0" rtlCol="0" anchor="t"/>
+          <a:bodyPr wrap="none" lIns="0" tIns="0" rIns="0" bIns="0" rtlCol="0" anchor="t"/>
           <a:lstStyle/>
           <a:p>
             <a:pPr algn="l" indent="0" marL="0">
@@ -5891,6 +5987,10 @@
             <a:prstDash val="solid"/>
           </a:ln>
         </p:spPr>
+        <p:txBody>
+          <a:bodyPr/>
+          <a:p/>
+        </p:txBody>
       </p:sp>
       <p:sp>
         <p:nvSpPr>
@@ -5910,7 +6010,7 @@
           <a:ln/>
         </p:spPr>
         <p:txBody>
-          <a:bodyPr wrap="square" lIns="0" tIns="0" rIns="0" bIns="0" rtlCol="0" anchor="t"/>
+          <a:bodyPr wrap="none" lIns="0" tIns="0" rIns="0" bIns="0" rtlCol="0" anchor="t"/>
           <a:lstStyle/>
           <a:p>
             <a:pPr algn="l" indent="0" marL="0">
@@ -5984,7 +6084,7 @@
           <a:ln/>
         </p:spPr>
         <p:txBody>
-          <a:bodyPr wrap="square" lIns="0" tIns="0" rIns="0" bIns="0" rtlCol="0" anchor="t"/>
+          <a:bodyPr wrap="none" lIns="0" tIns="0" rIns="0" bIns="0" rtlCol="0" anchor="t"/>
           <a:lstStyle/>
           <a:p>
             <a:pPr algn="l" indent="0" marL="0">
@@ -6095,6 +6195,10 @@
             <a:prstDash val="solid"/>
           </a:ln>
         </p:spPr>
+        <p:txBody>
+          <a:bodyPr/>
+          <a:p/>
+        </p:txBody>
       </p:sp>
       <p:sp>
         <p:nvSpPr>
@@ -6118,6 +6222,10 @@
             <a:prstDash val="solid"/>
           </a:ln>
         </p:spPr>
+        <p:txBody>
+          <a:bodyPr/>
+          <a:p/>
+        </p:txBody>
       </p:sp>
       <p:sp>
         <p:nvSpPr>
@@ -6137,7 +6245,7 @@
           <a:ln/>
         </p:spPr>
         <p:txBody>
-          <a:bodyPr wrap="square" lIns="0" tIns="0" rIns="0" bIns="0" rtlCol="0" anchor="t"/>
+          <a:bodyPr wrap="none" lIns="0" tIns="0" rIns="0" bIns="0" rtlCol="0" anchor="t"/>
           <a:lstStyle/>
           <a:p>
             <a:pPr algn="l" indent="0" marL="0">
@@ -6179,7 +6287,7 @@
           <a:ln/>
         </p:spPr>
         <p:txBody>
-          <a:bodyPr wrap="square" lIns="0" tIns="0" rIns="0" bIns="0" rtlCol="0" anchor="t"/>
+          <a:bodyPr wrap="none" lIns="0" tIns="0" rIns="0" bIns="0" rtlCol="0" anchor="t"/>
           <a:lstStyle/>
           <a:p>
             <a:pPr algn="l" indent="0" marL="0">
@@ -6211,25 +6319,57 @@
         </p:nvSpPr>
         <p:spPr>
           <a:xfrm>
-            <a:off x="588220" y="1746448"/>
-            <a:ext cx="5358259" cy="2683272"/>
-          </a:xfrm>
-          <a:prstGeom prst="rect">
-            <a:avLst/>
-          </a:prstGeom>
-          <a:noFill/>
-          <a:ln/>
-        </p:spPr>
-        <p:txBody>
-          <a:bodyPr wrap="square" lIns="110053" tIns="0" rIns="0" bIns="0" rtlCol="0" anchor="t"/>
-          <a:lstStyle/>
-          <a:p>
-            <a:pPr algn="l" marL="110053" indent="-110053">
-              <a:buSzPct val="100000"/>
-              <a:buChar char="•"/>
-            </a:pPr>
-            <a:r>
-              <a:rPr lang="en-US" sz="1600" dirty="0">
+            <a:off x="808232" y="2101850"/>
+            <a:ext cx="84513" cy="84534"/>
+          </a:xfrm>
+          <a:prstGeom prst="rect">
+            <a:avLst/>
+          </a:prstGeom>
+          <a:solidFill>
+            <a:srgbClr val="4FC8E8"/>
+          </a:solidFill>
+          <a:ln/>
+        </p:spPr>
+        <p:txBody>
+          <a:bodyPr wrap="square" rtlCol="0" anchor="ctr"/>
+          <a:lstStyle/>
+          <a:p>
+            <a:pPr indent="0" marL="0">
+              <a:buNone/>
+            </a:pPr>
+            <a:endParaRPr lang="en-US" dirty="0"/>
+          </a:p>
+        </p:txBody>
+      </p:sp>
+      <p:sp>
+        <p:nvSpPr>
+          <p:cNvPr id="10" name="Text 8"/>
+          <p:cNvSpPr/>
+          <p:nvPr/>
+        </p:nvSpPr>
+        <p:spPr>
+          <a:xfrm>
+            <a:off x="1061970" y="2000250"/>
+            <a:ext cx="3561459" cy="343694"/>
+          </a:xfrm>
+          <a:prstGeom prst="rect">
+            <a:avLst/>
+          </a:prstGeom>
+          <a:noFill/>
+          <a:ln/>
+        </p:spPr>
+        <p:txBody>
+          <a:bodyPr wrap="none" lIns="0" tIns="0" rIns="0" bIns="0" rtlCol="0" anchor="t"/>
+          <a:lstStyle/>
+          <a:p>
+            <a:pPr algn="l" indent="0" marL="0">
+              <a:lnSpc>
+                <a:spcPts val="2706"/>
+              </a:lnSpc>
+              <a:buNone/>
+            </a:pPr>
+            <a:r>
+              <a:rPr lang="en-US" sz="1866" dirty="0">
                 <a:solidFill>
                   <a:srgbClr val="E8EEF7"/>
                 </a:solidFill>
@@ -6239,15 +6379,69 @@
               </a:rPr>
               <a:t>Latency becomes a distribution</a:t>
             </a:r>
-            <a:endParaRPr lang="en-US" sz="1600" dirty="0"/>
-          </a:p>
-          <a:p>
-            <a:pPr algn="l" marL="110053" indent="-110053">
-              <a:buSzPct val="100000"/>
-              <a:buChar char="•"/>
-            </a:pPr>
-            <a:r>
-              <a:rPr lang="en-US" sz="1600" dirty="0">
+            <a:endParaRPr lang="en-US" sz="1866" dirty="0"/>
+          </a:p>
+        </p:txBody>
+      </p:sp>
+      <p:sp>
+        <p:nvSpPr>
+          <p:cNvPr id="11" name="Text 9"/>
+          <p:cNvSpPr/>
+          <p:nvPr/>
+        </p:nvSpPr>
+        <p:spPr>
+          <a:xfrm>
+            <a:off x="808232" y="2597944"/>
+            <a:ext cx="84513" cy="84534"/>
+          </a:xfrm>
+          <a:prstGeom prst="rect">
+            <a:avLst/>
+          </a:prstGeom>
+          <a:solidFill>
+            <a:srgbClr val="4FC8E8"/>
+          </a:solidFill>
+          <a:ln/>
+        </p:spPr>
+        <p:txBody>
+          <a:bodyPr wrap="square" rtlCol="0" anchor="ctr"/>
+          <a:lstStyle/>
+          <a:p>
+            <a:pPr indent="0" marL="0">
+              <a:buNone/>
+            </a:pPr>
+            <a:endParaRPr lang="en-US" dirty="0"/>
+          </a:p>
+        </p:txBody>
+      </p:sp>
+      <p:sp>
+        <p:nvSpPr>
+          <p:cNvPr id="12" name="Text 10"/>
+          <p:cNvSpPr/>
+          <p:nvPr/>
+        </p:nvSpPr>
+        <p:spPr>
+          <a:xfrm>
+            <a:off x="1061970" y="2496344"/>
+            <a:ext cx="3652115" cy="343694"/>
+          </a:xfrm>
+          <a:prstGeom prst="rect">
+            <a:avLst/>
+          </a:prstGeom>
+          <a:noFill/>
+          <a:ln/>
+        </p:spPr>
+        <p:txBody>
+          <a:bodyPr wrap="none" lIns="0" tIns="0" rIns="0" bIns="0" rtlCol="0" anchor="t"/>
+          <a:lstStyle/>
+          <a:p>
+            <a:pPr algn="l" indent="0" marL="0">
+              <a:lnSpc>
+                <a:spcPts val="2706"/>
+              </a:lnSpc>
+              <a:buNone/>
+            </a:pPr>
+            <a:r>
+              <a:rPr lang="en-US" sz="1866" dirty="0">
                 <a:solidFill>
                   <a:srgbClr val="E8EEF7"/>
                 </a:solidFill>
@@ -6257,15 +6451,71 @@
               </a:rPr>
               <a:t>Token cost scales with attempts</a:t>
             </a:r>
-            <a:endParaRPr lang="en-US" sz="1600" dirty="0"/>
-          </a:p>
-          <a:p>
-            <a:pPr algn="l" marL="110053" indent="-110053">
-              <a:buSzPct val="100000"/>
-              <a:buChar char="•"/>
-            </a:pPr>
-            <a:r>
-              <a:rPr lang="en-US" sz="1600" dirty="0">
+            <a:endParaRPr lang="en-US" sz="1866" dirty="0"/>
+          </a:p>
+        </p:txBody>
+      </p:sp>
+      <p:sp>
+        <p:nvSpPr>
+          <p:cNvPr id="13" name="Text 11"/>
+          <p:cNvSpPr/>
+          <p:nvPr/>
+        </p:nvSpPr>
+        <p:spPr>
+          <a:xfrm>
+            <a:off x="808232" y="3094038"/>
+            <a:ext cx="84513" cy="84534"/>
+          </a:xfrm>
+          <a:prstGeom prst="rect">
+            <a:avLst/>
+          </a:prstGeom>
+          <a:solidFill>
+            <a:srgbClr val="4FC8E8"/>
+          </a:solidFill>
+          <a:ln/>
+        </p:spPr>
+        <p:txBody>
+          <a:bodyPr wrap="square" rtlCol="0" anchor="ctr"/>
+          <a:lstStyle/>
+          <a:p>
+            <a:pPr indent="0" marL="0">
+              <a:buNone/>
+            </a:pPr>
+            <a:endParaRPr lang="en-US" dirty="0"/>
+          </a:p>
+        </p:txBody>
+      </p:sp>
+      <p:sp>
+        <p:nvSpPr>
+          <p:cNvPr id="14" name="Text 12"/>
+          <p:cNvSpPr/>
+          <p:nvPr/>
+        </p:nvSpPr>
+        <p:spPr>
+          <a:xfrm>
+            <a:off x="1061970" y="2992438"/>
+            <a:ext cx="4757786" cy="687388"/>
+          </a:xfrm>
+          <a:prstGeom prst="rect">
+            <a:avLst/>
+          </a:prstGeom>
+          <a:noFill/>
+          <a:ln/>
+        </p:spPr>
+        <p:txBody>
+          <a:bodyPr wrap="square" lIns="0" tIns="0" rIns="0" bIns="0" rtlCol="0" anchor="t">
+            <a:normAutofit/>
+          </a:bodyPr>
+          <a:lstStyle/>
+          <a:p>
+            <a:pPr algn="l" indent="0" marL="0">
+              <a:lnSpc>
+                <a:spcPts val="2706"/>
+              </a:lnSpc>
+              <a:buNone/>
+            </a:pPr>
+            <a:r>
+              <a:rPr lang="en-US" sz="1866" dirty="0">
                 <a:solidFill>
                   <a:srgbClr val="E8EEF7"/>
                 </a:solidFill>
@@ -6275,15 +6525,69 @@
               </a:rPr>
               <a:t>The same question can take different paths</a:t>
             </a:r>
-            <a:endParaRPr lang="en-US" sz="1600" dirty="0"/>
-          </a:p>
-          <a:p>
-            <a:pPr algn="l" marL="110053" indent="-110053">
-              <a:buSzPct val="100000"/>
-              <a:buChar char="•"/>
-            </a:pPr>
-            <a:r>
-              <a:rPr lang="en-US" sz="1600" dirty="0">
+            <a:endParaRPr lang="en-US" sz="1866" dirty="0"/>
+          </a:p>
+        </p:txBody>
+      </p:sp>
+      <p:sp>
+        <p:nvSpPr>
+          <p:cNvPr id="15" name="Text 13"/>
+          <p:cNvSpPr/>
+          <p:nvPr/>
+        </p:nvSpPr>
+        <p:spPr>
+          <a:xfrm>
+            <a:off x="808232" y="3933825"/>
+            <a:ext cx="84513" cy="84534"/>
+          </a:xfrm>
+          <a:prstGeom prst="rect">
+            <a:avLst/>
+          </a:prstGeom>
+          <a:solidFill>
+            <a:srgbClr val="4FC8E8"/>
+          </a:solidFill>
+          <a:ln/>
+        </p:spPr>
+        <p:txBody>
+          <a:bodyPr wrap="square" rtlCol="0" anchor="ctr"/>
+          <a:lstStyle/>
+          <a:p>
+            <a:pPr indent="0" marL="0">
+              <a:buNone/>
+            </a:pPr>
+            <a:endParaRPr lang="en-US" dirty="0"/>
+          </a:p>
+        </p:txBody>
+      </p:sp>
+      <p:sp>
+        <p:nvSpPr>
+          <p:cNvPr id="16" name="Text 14"/>
+          <p:cNvSpPr/>
+          <p:nvPr/>
+        </p:nvSpPr>
+        <p:spPr>
+          <a:xfrm>
+            <a:off x="1061970" y="3832225"/>
+            <a:ext cx="3794573" cy="343694"/>
+          </a:xfrm>
+          <a:prstGeom prst="rect">
+            <a:avLst/>
+          </a:prstGeom>
+          <a:noFill/>
+          <a:ln/>
+        </p:spPr>
+        <p:txBody>
+          <a:bodyPr wrap="none" lIns="0" tIns="0" rIns="0" bIns="0" rtlCol="0" anchor="t"/>
+          <a:lstStyle/>
+          <a:p>
+            <a:pPr algn="l" indent="0" marL="0">
+              <a:lnSpc>
+                <a:spcPts val="2706"/>
+              </a:lnSpc>
+              <a:buNone/>
+            </a:pPr>
+            <a:r>
+              <a:rPr lang="en-US" sz="1866" dirty="0">
                 <a:solidFill>
                   <a:srgbClr val="E8EEF7"/>
                 </a:solidFill>
@@ -6293,301 +6597,13 @@
               </a:rPr>
               <a:t>Failures become “never stopped”</a:t>
             </a:r>
-            <a:endParaRPr lang="en-US" sz="1600" dirty="0"/>
-          </a:p>
-        </p:txBody>
-      </p:sp>
-      <p:sp>
-        <p:nvSpPr>
-          <p:cNvPr id="10" name="Text 8"/>
-          <p:cNvSpPr/>
-          <p:nvPr/>
-        </p:nvSpPr>
-        <p:spPr>
-          <a:xfrm>
-            <a:off x="808232" y="2101850"/>
-            <a:ext cx="84513" cy="84534"/>
-          </a:xfrm>
-          <a:prstGeom prst="rect">
-            <a:avLst/>
-          </a:prstGeom>
-          <a:solidFill>
-            <a:srgbClr val="4FC8E8"/>
-          </a:solidFill>
-          <a:ln/>
-        </p:spPr>
-        <p:txBody>
-          <a:bodyPr wrap="square" rtlCol="0" anchor="ctr"/>
-          <a:lstStyle/>
-          <a:p>
-            <a:pPr indent="0" marL="0">
-              <a:buNone/>
-            </a:pPr>
-            <a:endParaRPr lang="en-US" dirty="0"/>
-          </a:p>
-        </p:txBody>
-      </p:sp>
-      <p:sp>
-        <p:nvSpPr>
-          <p:cNvPr id="11" name="Text 9"/>
-          <p:cNvSpPr/>
-          <p:nvPr/>
-        </p:nvSpPr>
-        <p:spPr>
-          <a:xfrm>
-            <a:off x="1061970" y="2000250"/>
-            <a:ext cx="3561459" cy="343694"/>
-          </a:xfrm>
-          <a:prstGeom prst="rect">
-            <a:avLst/>
-          </a:prstGeom>
-          <a:noFill/>
-          <a:ln/>
-        </p:spPr>
-        <p:txBody>
-          <a:bodyPr wrap="square" lIns="0" tIns="0" rIns="0" bIns="0" rtlCol="0" anchor="t"/>
-          <a:lstStyle/>
-          <a:p>
-            <a:pPr algn="l" indent="0" marL="0">
-              <a:lnSpc>
-                <a:spcPts val="2706"/>
-              </a:lnSpc>
-              <a:buNone/>
-            </a:pPr>
-            <a:r>
-              <a:rPr lang="en-US" sz="1866" dirty="0">
-                <a:solidFill>
-                  <a:srgbClr val="E8EEF7"/>
-                </a:solidFill>
-                <a:latin typeface="Inter" pitchFamily="34" charset="0"/>
-                <a:ea typeface="Inter" pitchFamily="34" charset="-122"/>
-                <a:cs typeface="Inter" pitchFamily="34" charset="-120"/>
-              </a:rPr>
-              <a:t>Latency becomes a distribution</a:t>
-            </a:r>
             <a:endParaRPr lang="en-US" sz="1866" dirty="0"/>
           </a:p>
         </p:txBody>
       </p:sp>
       <p:sp>
         <p:nvSpPr>
-          <p:cNvPr id="12" name="Text 10"/>
-          <p:cNvSpPr/>
-          <p:nvPr/>
-        </p:nvSpPr>
-        <p:spPr>
-          <a:xfrm>
-            <a:off x="808232" y="2597944"/>
-            <a:ext cx="84513" cy="84534"/>
-          </a:xfrm>
-          <a:prstGeom prst="rect">
-            <a:avLst/>
-          </a:prstGeom>
-          <a:solidFill>
-            <a:srgbClr val="4FC8E8"/>
-          </a:solidFill>
-          <a:ln/>
-        </p:spPr>
-        <p:txBody>
-          <a:bodyPr wrap="square" rtlCol="0" anchor="ctr"/>
-          <a:lstStyle/>
-          <a:p>
-            <a:pPr indent="0" marL="0">
-              <a:buNone/>
-            </a:pPr>
-            <a:endParaRPr lang="en-US" dirty="0"/>
-          </a:p>
-        </p:txBody>
-      </p:sp>
-      <p:sp>
-        <p:nvSpPr>
-          <p:cNvPr id="13" name="Text 11"/>
-          <p:cNvSpPr/>
-          <p:nvPr/>
-        </p:nvSpPr>
-        <p:spPr>
-          <a:xfrm>
-            <a:off x="1061970" y="2496344"/>
-            <a:ext cx="3652115" cy="343694"/>
-          </a:xfrm>
-          <a:prstGeom prst="rect">
-            <a:avLst/>
-          </a:prstGeom>
-          <a:noFill/>
-          <a:ln/>
-        </p:spPr>
-        <p:txBody>
-          <a:bodyPr wrap="square" lIns="0" tIns="0" rIns="0" bIns="0" rtlCol="0" anchor="t"/>
-          <a:lstStyle/>
-          <a:p>
-            <a:pPr algn="l" indent="0" marL="0">
-              <a:lnSpc>
-                <a:spcPts val="2706"/>
-              </a:lnSpc>
-              <a:buNone/>
-            </a:pPr>
-            <a:r>
-              <a:rPr lang="en-US" sz="1866" dirty="0">
-                <a:solidFill>
-                  <a:srgbClr val="E8EEF7"/>
-                </a:solidFill>
-                <a:latin typeface="Inter" pitchFamily="34" charset="0"/>
-                <a:ea typeface="Inter" pitchFamily="34" charset="-122"/>
-                <a:cs typeface="Inter" pitchFamily="34" charset="-120"/>
-              </a:rPr>
-              <a:t>Token cost scales with attempts</a:t>
-            </a:r>
-            <a:endParaRPr lang="en-US" sz="1866" dirty="0"/>
-          </a:p>
-        </p:txBody>
-      </p:sp>
-      <p:sp>
-        <p:nvSpPr>
-          <p:cNvPr id="14" name="Text 12"/>
-          <p:cNvSpPr/>
-          <p:nvPr/>
-        </p:nvSpPr>
-        <p:spPr>
-          <a:xfrm>
-            <a:off x="808232" y="3094038"/>
-            <a:ext cx="84513" cy="84534"/>
-          </a:xfrm>
-          <a:prstGeom prst="rect">
-            <a:avLst/>
-          </a:prstGeom>
-          <a:solidFill>
-            <a:srgbClr val="4FC8E8"/>
-          </a:solidFill>
-          <a:ln/>
-        </p:spPr>
-        <p:txBody>
-          <a:bodyPr wrap="square" rtlCol="0" anchor="ctr"/>
-          <a:lstStyle/>
-          <a:p>
-            <a:pPr indent="0" marL="0">
-              <a:buNone/>
-            </a:pPr>
-            <a:endParaRPr lang="en-US" dirty="0"/>
-          </a:p>
-        </p:txBody>
-      </p:sp>
-      <p:sp>
-        <p:nvSpPr>
-          <p:cNvPr id="15" name="Text 13"/>
-          <p:cNvSpPr/>
-          <p:nvPr/>
-        </p:nvSpPr>
-        <p:spPr>
-          <a:xfrm>
-            <a:off x="1061970" y="2992438"/>
-            <a:ext cx="4757786" cy="687388"/>
-          </a:xfrm>
-          <a:prstGeom prst="rect">
-            <a:avLst/>
-          </a:prstGeom>
-          <a:noFill/>
-          <a:ln/>
-        </p:spPr>
-        <p:txBody>
-          <a:bodyPr wrap="square" lIns="0" tIns="0" rIns="0" bIns="0" rtlCol="0" anchor="t"/>
-          <a:lstStyle/>
-          <a:p>
-            <a:pPr algn="l" indent="0" marL="0">
-              <a:lnSpc>
-                <a:spcPts val="2706"/>
-              </a:lnSpc>
-              <a:buNone/>
-            </a:pPr>
-            <a:r>
-              <a:rPr lang="en-US" sz="1866" dirty="0">
-                <a:solidFill>
-                  <a:srgbClr val="E8EEF7"/>
-                </a:solidFill>
-                <a:latin typeface="Inter" pitchFamily="34" charset="0"/>
-                <a:ea typeface="Inter" pitchFamily="34" charset="-122"/>
-                <a:cs typeface="Inter" pitchFamily="34" charset="-120"/>
-              </a:rPr>
-              <a:t>The same question can take different paths</a:t>
-            </a:r>
-            <a:endParaRPr lang="en-US" sz="1866" dirty="0"/>
-          </a:p>
-        </p:txBody>
-      </p:sp>
-      <p:sp>
-        <p:nvSpPr>
-          <p:cNvPr id="16" name="Text 14"/>
-          <p:cNvSpPr/>
-          <p:nvPr/>
-        </p:nvSpPr>
-        <p:spPr>
-          <a:xfrm>
-            <a:off x="808232" y="3933825"/>
-            <a:ext cx="84513" cy="84534"/>
-          </a:xfrm>
-          <a:prstGeom prst="rect">
-            <a:avLst/>
-          </a:prstGeom>
-          <a:solidFill>
-            <a:srgbClr val="4FC8E8"/>
-          </a:solidFill>
-          <a:ln/>
-        </p:spPr>
-        <p:txBody>
-          <a:bodyPr wrap="square" rtlCol="0" anchor="ctr"/>
-          <a:lstStyle/>
-          <a:p>
-            <a:pPr indent="0" marL="0">
-              <a:buNone/>
-            </a:pPr>
-            <a:endParaRPr lang="en-US" dirty="0"/>
-          </a:p>
-        </p:txBody>
-      </p:sp>
-      <p:sp>
-        <p:nvSpPr>
           <p:cNvPr id="17" name="Text 15"/>
-          <p:cNvSpPr/>
-          <p:nvPr/>
-        </p:nvSpPr>
-        <p:spPr>
-          <a:xfrm>
-            <a:off x="1061970" y="3832225"/>
-            <a:ext cx="3794573" cy="343694"/>
-          </a:xfrm>
-          <a:prstGeom prst="rect">
-            <a:avLst/>
-          </a:prstGeom>
-          <a:noFill/>
-          <a:ln/>
-        </p:spPr>
-        <p:txBody>
-          <a:bodyPr wrap="square" lIns="0" tIns="0" rIns="0" bIns="0" rtlCol="0" anchor="t"/>
-          <a:lstStyle/>
-          <a:p>
-            <a:pPr algn="l" indent="0" marL="0">
-              <a:lnSpc>
-                <a:spcPts val="2706"/>
-              </a:lnSpc>
-              <a:buNone/>
-            </a:pPr>
-            <a:r>
-              <a:rPr lang="en-US" sz="1866" dirty="0">
-                <a:solidFill>
-                  <a:srgbClr val="E8EEF7"/>
-                </a:solidFill>
-                <a:latin typeface="Inter" pitchFamily="34" charset="0"/>
-                <a:ea typeface="Inter" pitchFamily="34" charset="-122"/>
-                <a:cs typeface="Inter" pitchFamily="34" charset="-120"/>
-              </a:rPr>
-              <a:t>Failures become “never stopped”</a:t>
-            </a:r>
-            <a:endParaRPr lang="en-US" sz="1866" dirty="0"/>
-          </a:p>
-        </p:txBody>
-      </p:sp>
-      <p:sp>
-        <p:nvSpPr>
-          <p:cNvPr id="18" name="Text 16"/>
           <p:cNvSpPr/>
           <p:nvPr/>
         </p:nvSpPr>
@@ -6619,7 +6635,7 @@
       </p:sp>
       <p:sp>
         <p:nvSpPr>
-          <p:cNvPr id="19" name="Text 17"/>
+          <p:cNvPr id="18" name="Text 16"/>
           <p:cNvSpPr/>
           <p:nvPr/>
         </p:nvSpPr>
@@ -6649,7 +6665,7 @@
       </p:sp>
       <p:sp>
         <p:nvSpPr>
-          <p:cNvPr id="20" name="Shape 18"/>
+          <p:cNvPr id="19" name="Shape 17"/>
           <p:cNvSpPr/>
           <p:nvPr/>
         </p:nvSpPr>
@@ -6669,10 +6685,14 @@
             <a:prstDash val="solid"/>
           </a:ln>
         </p:spPr>
-      </p:sp>
-      <p:sp>
-        <p:nvSpPr>
-          <p:cNvPr id="21" name="Shape 19"/>
+        <p:txBody>
+          <a:bodyPr/>
+          <a:p/>
+        </p:txBody>
+      </p:sp>
+      <p:sp>
+        <p:nvSpPr>
+          <p:cNvPr id="20" name="Shape 18"/>
           <p:cNvSpPr/>
           <p:nvPr/>
         </p:nvSpPr>
@@ -6692,10 +6712,14 @@
             <a:prstDash val="solid"/>
           </a:ln>
         </p:spPr>
-      </p:sp>
-      <p:sp>
-        <p:nvSpPr>
-          <p:cNvPr id="22" name="Text 20"/>
+        <p:txBody>
+          <a:bodyPr/>
+          <a:p/>
+        </p:txBody>
+      </p:sp>
+      <p:sp>
+        <p:nvSpPr>
+          <p:cNvPr id="21" name="Text 19"/>
           <p:cNvSpPr/>
           <p:nvPr/>
         </p:nvSpPr>
@@ -6711,7 +6735,7 @@
           <a:ln/>
         </p:spPr>
         <p:txBody>
-          <a:bodyPr wrap="square" lIns="0" tIns="0" rIns="0" bIns="0" rtlCol="0" anchor="t"/>
+          <a:bodyPr wrap="none" lIns="0" tIns="0" rIns="0" bIns="0" rtlCol="0" anchor="t"/>
           <a:lstStyle/>
           <a:p>
             <a:pPr algn="l" indent="0" marL="0">
@@ -6737,7 +6761,7 @@
       </p:sp>
       <p:sp>
         <p:nvSpPr>
-          <p:cNvPr id="23" name="Text 21"/>
+          <p:cNvPr id="22" name="Text 20"/>
           <p:cNvSpPr/>
           <p:nvPr/>
         </p:nvSpPr>
@@ -6753,7 +6777,7 @@
           <a:ln/>
         </p:spPr>
         <p:txBody>
-          <a:bodyPr wrap="square" lIns="0" tIns="0" rIns="0" bIns="0" rtlCol="0" anchor="t"/>
+          <a:bodyPr wrap="none" lIns="0" tIns="0" rIns="0" bIns="0" rtlCol="0" anchor="t"/>
           <a:lstStyle/>
           <a:p>
             <a:pPr algn="l" indent="0" marL="0">
@@ -6779,31 +6803,63 @@
       </p:sp>
       <p:sp>
         <p:nvSpPr>
+          <p:cNvPr id="23" name="Text 21"/>
+          <p:cNvSpPr/>
+          <p:nvPr/>
+        </p:nvSpPr>
+        <p:spPr>
+          <a:xfrm>
+            <a:off x="6462684" y="2273697"/>
+            <a:ext cx="84513" cy="84534"/>
+          </a:xfrm>
+          <a:prstGeom prst="rect">
+            <a:avLst/>
+          </a:prstGeom>
+          <a:solidFill>
+            <a:srgbClr val="4FC8E8"/>
+          </a:solidFill>
+          <a:ln/>
+        </p:spPr>
+        <p:txBody>
+          <a:bodyPr wrap="square" rtlCol="0" anchor="ctr"/>
+          <a:lstStyle/>
+          <a:p>
+            <a:pPr indent="0" marL="0">
+              <a:buNone/>
+            </a:pPr>
+            <a:endParaRPr lang="en-US" dirty="0"/>
+          </a:p>
+        </p:txBody>
+      </p:sp>
+      <p:sp>
+        <p:nvSpPr>
           <p:cNvPr id="24" name="Text 22"/>
           <p:cNvSpPr/>
           <p:nvPr/>
         </p:nvSpPr>
         <p:spPr>
           <a:xfrm>
-            <a:off x="6242672" y="1746448"/>
-            <a:ext cx="5358259" cy="2683272"/>
-          </a:xfrm>
-          <a:prstGeom prst="rect">
-            <a:avLst/>
-          </a:prstGeom>
-          <a:noFill/>
-          <a:ln/>
-        </p:spPr>
-        <p:txBody>
-          <a:bodyPr wrap="square" lIns="110053" tIns="0" rIns="0" bIns="0" rtlCol="0" anchor="t"/>
-          <a:lstStyle/>
-          <a:p>
-            <a:pPr algn="l" marL="110053" indent="-110053">
-              <a:buSzPct val="100000"/>
-              <a:buChar char="•"/>
-            </a:pPr>
-            <a:r>
-              <a:rPr lang="en-US" sz="1600" dirty="0">
+            <a:off x="6716422" y="2172097"/>
+            <a:ext cx="3729819" cy="343694"/>
+          </a:xfrm>
+          <a:prstGeom prst="rect">
+            <a:avLst/>
+          </a:prstGeom>
+          <a:noFill/>
+          <a:ln/>
+        </p:spPr>
+        <p:txBody>
+          <a:bodyPr wrap="none" lIns="0" tIns="0" rIns="0" bIns="0" rtlCol="0" anchor="t"/>
+          <a:lstStyle/>
+          <a:p>
+            <a:pPr algn="l" indent="0" marL="0">
+              <a:lnSpc>
+                <a:spcPts val="2706"/>
+              </a:lnSpc>
+              <a:buNone/>
+            </a:pPr>
+            <a:r>
+              <a:rPr lang="en-US" sz="1866" dirty="0">
                 <a:solidFill>
                   <a:srgbClr val="E8EEF7"/>
                 </a:solidFill>
@@ -6813,15 +6869,69 @@
               </a:rPr>
               <a:t>The stop condition, written down</a:t>
             </a:r>
-            <a:endParaRPr lang="en-US" sz="1600" dirty="0"/>
-          </a:p>
-          <a:p>
-            <a:pPr algn="l" marL="110053" indent="-110053">
-              <a:buSzPct val="100000"/>
-              <a:buChar char="•"/>
-            </a:pPr>
-            <a:r>
-              <a:rPr lang="en-US" sz="1600" dirty="0">
+            <a:endParaRPr lang="en-US" sz="1866" dirty="0"/>
+          </a:p>
+        </p:txBody>
+      </p:sp>
+      <p:sp>
+        <p:nvSpPr>
+          <p:cNvPr id="25" name="Text 23"/>
+          <p:cNvSpPr/>
+          <p:nvPr/>
+        </p:nvSpPr>
+        <p:spPr>
+          <a:xfrm>
+            <a:off x="6462684" y="2769791"/>
+            <a:ext cx="84513" cy="84534"/>
+          </a:xfrm>
+          <a:prstGeom prst="rect">
+            <a:avLst/>
+          </a:prstGeom>
+          <a:solidFill>
+            <a:srgbClr val="4FC8E8"/>
+          </a:solidFill>
+          <a:ln/>
+        </p:spPr>
+        <p:txBody>
+          <a:bodyPr wrap="square" rtlCol="0" anchor="ctr"/>
+          <a:lstStyle/>
+          <a:p>
+            <a:pPr indent="0" marL="0">
+              <a:buNone/>
+            </a:pPr>
+            <a:endParaRPr lang="en-US" dirty="0"/>
+          </a:p>
+        </p:txBody>
+      </p:sp>
+      <p:sp>
+        <p:nvSpPr>
+          <p:cNvPr id="26" name="Text 24"/>
+          <p:cNvSpPr/>
+          <p:nvPr/>
+        </p:nvSpPr>
+        <p:spPr>
+          <a:xfrm>
+            <a:off x="6716422" y="2668191"/>
+            <a:ext cx="4364407" cy="343694"/>
+          </a:xfrm>
+          <a:prstGeom prst="rect">
+            <a:avLst/>
+          </a:prstGeom>
+          <a:noFill/>
+          <a:ln/>
+        </p:spPr>
+        <p:txBody>
+          <a:bodyPr wrap="none" lIns="0" tIns="0" rIns="0" bIns="0" rtlCol="0" anchor="t"/>
+          <a:lstStyle/>
+          <a:p>
+            <a:pPr algn="l" indent="0" marL="0">
+              <a:lnSpc>
+                <a:spcPts val="2706"/>
+              </a:lnSpc>
+              <a:buNone/>
+            </a:pPr>
+            <a:r>
+              <a:rPr lang="en-US" sz="1866" dirty="0">
                 <a:solidFill>
                   <a:srgbClr val="E8EEF7"/>
                 </a:solidFill>
@@ -6831,15 +6941,69 @@
               </a:rPr>
               <a:t>A hop budget, and the ceiling behavior</a:t>
             </a:r>
-            <a:endParaRPr lang="en-US" sz="1600" dirty="0"/>
-          </a:p>
-          <a:p>
-            <a:pPr algn="l" marL="110053" indent="-110053">
-              <a:buSzPct val="100000"/>
-              <a:buChar char="•"/>
-            </a:pPr>
-            <a:r>
-              <a:rPr lang="en-US" sz="1600" dirty="0">
+            <a:endParaRPr lang="en-US" sz="1866" dirty="0"/>
+          </a:p>
+        </p:txBody>
+      </p:sp>
+      <p:sp>
+        <p:nvSpPr>
+          <p:cNvPr id="27" name="Text 25"/>
+          <p:cNvSpPr/>
+          <p:nvPr/>
+        </p:nvSpPr>
+        <p:spPr>
+          <a:xfrm>
+            <a:off x="6462684" y="3265884"/>
+            <a:ext cx="84513" cy="84534"/>
+          </a:xfrm>
+          <a:prstGeom prst="rect">
+            <a:avLst/>
+          </a:prstGeom>
+          <a:solidFill>
+            <a:srgbClr val="4FC8E8"/>
+          </a:solidFill>
+          <a:ln/>
+        </p:spPr>
+        <p:txBody>
+          <a:bodyPr wrap="square" rtlCol="0" anchor="ctr"/>
+          <a:lstStyle/>
+          <a:p>
+            <a:pPr indent="0" marL="0">
+              <a:buNone/>
+            </a:pPr>
+            <a:endParaRPr lang="en-US" dirty="0"/>
+          </a:p>
+        </p:txBody>
+      </p:sp>
+      <p:sp>
+        <p:nvSpPr>
+          <p:cNvPr id="28" name="Text 26"/>
+          <p:cNvSpPr/>
+          <p:nvPr/>
+        </p:nvSpPr>
+        <p:spPr>
+          <a:xfrm>
+            <a:off x="6716422" y="3164284"/>
+            <a:ext cx="4636373" cy="343694"/>
+          </a:xfrm>
+          <a:prstGeom prst="rect">
+            <a:avLst/>
+          </a:prstGeom>
+          <a:noFill/>
+          <a:ln/>
+        </p:spPr>
+        <p:txBody>
+          <a:bodyPr wrap="none" lIns="0" tIns="0" rIns="0" bIns="0" rtlCol="0" anchor="t"/>
+          <a:lstStyle/>
+          <a:p>
+            <a:pPr algn="l" indent="0" marL="0">
+              <a:lnSpc>
+                <a:spcPts val="2706"/>
+              </a:lnSpc>
+              <a:buNone/>
+            </a:pPr>
+            <a:r>
+              <a:rPr lang="en-US" sz="1866" dirty="0">
                 <a:solidFill>
                   <a:srgbClr val="E8EEF7"/>
                 </a:solidFill>
@@ -6849,15 +7013,69 @@
               </a:rPr>
               <a:t>An eval set with real multi-hop questions</a:t>
             </a:r>
-            <a:endParaRPr lang="en-US" sz="1600" dirty="0"/>
-          </a:p>
-          <a:p>
-            <a:pPr algn="l" marL="110053" indent="-110053">
-              <a:buSzPct val="100000"/>
-              <a:buChar char="•"/>
-            </a:pPr>
-            <a:r>
-              <a:rPr lang="en-US" sz="1600" dirty="0">
+            <a:endParaRPr lang="en-US" sz="1866" dirty="0"/>
+          </a:p>
+        </p:txBody>
+      </p:sp>
+      <p:sp>
+        <p:nvSpPr>
+          <p:cNvPr id="29" name="Text 27"/>
+          <p:cNvSpPr/>
+          <p:nvPr/>
+        </p:nvSpPr>
+        <p:spPr>
+          <a:xfrm>
+            <a:off x="6462684" y="3761978"/>
+            <a:ext cx="84513" cy="84534"/>
+          </a:xfrm>
+          <a:prstGeom prst="rect">
+            <a:avLst/>
+          </a:prstGeom>
+          <a:solidFill>
+            <a:srgbClr val="4FC8E8"/>
+          </a:solidFill>
+          <a:ln/>
+        </p:spPr>
+        <p:txBody>
+          <a:bodyPr wrap="square" rtlCol="0" anchor="ctr"/>
+          <a:lstStyle/>
+          <a:p>
+            <a:pPr indent="0" marL="0">
+              <a:buNone/>
+            </a:pPr>
+            <a:endParaRPr lang="en-US" dirty="0"/>
+          </a:p>
+        </p:txBody>
+      </p:sp>
+      <p:sp>
+        <p:nvSpPr>
+          <p:cNvPr id="30" name="Text 28"/>
+          <p:cNvSpPr/>
+          <p:nvPr/>
+        </p:nvSpPr>
+        <p:spPr>
+          <a:xfrm>
+            <a:off x="6716422" y="3660378"/>
+            <a:ext cx="3949982" cy="343694"/>
+          </a:xfrm>
+          <a:prstGeom prst="rect">
+            <a:avLst/>
+          </a:prstGeom>
+          <a:noFill/>
+          <a:ln/>
+        </p:spPr>
+        <p:txBody>
+          <a:bodyPr wrap="none" lIns="0" tIns="0" rIns="0" bIns="0" rtlCol="0" anchor="t"/>
+          <a:lstStyle/>
+          <a:p>
+            <a:pPr algn="l" indent="0" marL="0">
+              <a:lnSpc>
+                <a:spcPts val="2706"/>
+              </a:lnSpc>
+              <a:buNone/>
+            </a:pPr>
+            <a:r>
+              <a:rPr lang="en-US" sz="1866" dirty="0">
                 <a:solidFill>
                   <a:srgbClr val="E8EEF7"/>
                 </a:solidFill>
@@ -6867,301 +7085,13 @@
               </a:rPr>
               <a:t>The fallback path back to one-shot</a:t>
             </a:r>
-            <a:endParaRPr lang="en-US" sz="1600" dirty="0"/>
-          </a:p>
-        </p:txBody>
-      </p:sp>
-      <p:sp>
-        <p:nvSpPr>
-          <p:cNvPr id="25" name="Text 23"/>
-          <p:cNvSpPr/>
-          <p:nvPr/>
-        </p:nvSpPr>
-        <p:spPr>
-          <a:xfrm>
-            <a:off x="6462684" y="2273697"/>
-            <a:ext cx="84513" cy="84534"/>
-          </a:xfrm>
-          <a:prstGeom prst="rect">
-            <a:avLst/>
-          </a:prstGeom>
-          <a:solidFill>
-            <a:srgbClr val="4FC8E8"/>
-          </a:solidFill>
-          <a:ln/>
-        </p:spPr>
-        <p:txBody>
-          <a:bodyPr wrap="square" rtlCol="0" anchor="ctr"/>
-          <a:lstStyle/>
-          <a:p>
-            <a:pPr indent="0" marL="0">
-              <a:buNone/>
-            </a:pPr>
-            <a:endParaRPr lang="en-US" dirty="0"/>
-          </a:p>
-        </p:txBody>
-      </p:sp>
-      <p:sp>
-        <p:nvSpPr>
-          <p:cNvPr id="26" name="Text 24"/>
-          <p:cNvSpPr/>
-          <p:nvPr/>
-        </p:nvSpPr>
-        <p:spPr>
-          <a:xfrm>
-            <a:off x="6716422" y="2172097"/>
-            <a:ext cx="3729819" cy="343694"/>
-          </a:xfrm>
-          <a:prstGeom prst="rect">
-            <a:avLst/>
-          </a:prstGeom>
-          <a:noFill/>
-          <a:ln/>
-        </p:spPr>
-        <p:txBody>
-          <a:bodyPr wrap="square" lIns="0" tIns="0" rIns="0" bIns="0" rtlCol="0" anchor="t"/>
-          <a:lstStyle/>
-          <a:p>
-            <a:pPr algn="l" indent="0" marL="0">
-              <a:lnSpc>
-                <a:spcPts val="2706"/>
-              </a:lnSpc>
-              <a:buNone/>
-            </a:pPr>
-            <a:r>
-              <a:rPr lang="en-US" sz="1866" dirty="0">
-                <a:solidFill>
-                  <a:srgbClr val="E8EEF7"/>
-                </a:solidFill>
-                <a:latin typeface="Inter" pitchFamily="34" charset="0"/>
-                <a:ea typeface="Inter" pitchFamily="34" charset="-122"/>
-                <a:cs typeface="Inter" pitchFamily="34" charset="-120"/>
-              </a:rPr>
-              <a:t>The stop condition, written down</a:t>
-            </a:r>
             <a:endParaRPr lang="en-US" sz="1866" dirty="0"/>
           </a:p>
         </p:txBody>
       </p:sp>
       <p:sp>
         <p:nvSpPr>
-          <p:cNvPr id="27" name="Text 25"/>
-          <p:cNvSpPr/>
-          <p:nvPr/>
-        </p:nvSpPr>
-        <p:spPr>
-          <a:xfrm>
-            <a:off x="6462684" y="2769791"/>
-            <a:ext cx="84513" cy="84534"/>
-          </a:xfrm>
-          <a:prstGeom prst="rect">
-            <a:avLst/>
-          </a:prstGeom>
-          <a:solidFill>
-            <a:srgbClr val="4FC8E8"/>
-          </a:solidFill>
-          <a:ln/>
-        </p:spPr>
-        <p:txBody>
-          <a:bodyPr wrap="square" rtlCol="0" anchor="ctr"/>
-          <a:lstStyle/>
-          <a:p>
-            <a:pPr indent="0" marL="0">
-              <a:buNone/>
-            </a:pPr>
-            <a:endParaRPr lang="en-US" dirty="0"/>
-          </a:p>
-        </p:txBody>
-      </p:sp>
-      <p:sp>
-        <p:nvSpPr>
-          <p:cNvPr id="28" name="Text 26"/>
-          <p:cNvSpPr/>
-          <p:nvPr/>
-        </p:nvSpPr>
-        <p:spPr>
-          <a:xfrm>
-            <a:off x="6716422" y="2668191"/>
-            <a:ext cx="4364407" cy="343694"/>
-          </a:xfrm>
-          <a:prstGeom prst="rect">
-            <a:avLst/>
-          </a:prstGeom>
-          <a:noFill/>
-          <a:ln/>
-        </p:spPr>
-        <p:txBody>
-          <a:bodyPr wrap="square" lIns="0" tIns="0" rIns="0" bIns="0" rtlCol="0" anchor="t"/>
-          <a:lstStyle/>
-          <a:p>
-            <a:pPr algn="l" indent="0" marL="0">
-              <a:lnSpc>
-                <a:spcPts val="2706"/>
-              </a:lnSpc>
-              <a:buNone/>
-            </a:pPr>
-            <a:r>
-              <a:rPr lang="en-US" sz="1866" dirty="0">
-                <a:solidFill>
-                  <a:srgbClr val="E8EEF7"/>
-                </a:solidFill>
-                <a:latin typeface="Inter" pitchFamily="34" charset="0"/>
-                <a:ea typeface="Inter" pitchFamily="34" charset="-122"/>
-                <a:cs typeface="Inter" pitchFamily="34" charset="-120"/>
-              </a:rPr>
-              <a:t>A hop budget, and the ceiling behavior</a:t>
-            </a:r>
-            <a:endParaRPr lang="en-US" sz="1866" dirty="0"/>
-          </a:p>
-        </p:txBody>
-      </p:sp>
-      <p:sp>
-        <p:nvSpPr>
-          <p:cNvPr id="29" name="Text 27"/>
-          <p:cNvSpPr/>
-          <p:nvPr/>
-        </p:nvSpPr>
-        <p:spPr>
-          <a:xfrm>
-            <a:off x="6462684" y="3265884"/>
-            <a:ext cx="84513" cy="84534"/>
-          </a:xfrm>
-          <a:prstGeom prst="rect">
-            <a:avLst/>
-          </a:prstGeom>
-          <a:solidFill>
-            <a:srgbClr val="4FC8E8"/>
-          </a:solidFill>
-          <a:ln/>
-        </p:spPr>
-        <p:txBody>
-          <a:bodyPr wrap="square" rtlCol="0" anchor="ctr"/>
-          <a:lstStyle/>
-          <a:p>
-            <a:pPr indent="0" marL="0">
-              <a:buNone/>
-            </a:pPr>
-            <a:endParaRPr lang="en-US" dirty="0"/>
-          </a:p>
-        </p:txBody>
-      </p:sp>
-      <p:sp>
-        <p:nvSpPr>
-          <p:cNvPr id="30" name="Text 28"/>
-          <p:cNvSpPr/>
-          <p:nvPr/>
-        </p:nvSpPr>
-        <p:spPr>
-          <a:xfrm>
-            <a:off x="6716422" y="3164284"/>
-            <a:ext cx="4636373" cy="343694"/>
-          </a:xfrm>
-          <a:prstGeom prst="rect">
-            <a:avLst/>
-          </a:prstGeom>
-          <a:noFill/>
-          <a:ln/>
-        </p:spPr>
-        <p:txBody>
-          <a:bodyPr wrap="square" lIns="0" tIns="0" rIns="0" bIns="0" rtlCol="0" anchor="t"/>
-          <a:lstStyle/>
-          <a:p>
-            <a:pPr algn="l" indent="0" marL="0">
-              <a:lnSpc>
-                <a:spcPts val="2706"/>
-              </a:lnSpc>
-              <a:buNone/>
-            </a:pPr>
-            <a:r>
-              <a:rPr lang="en-US" sz="1866" dirty="0">
-                <a:solidFill>
-                  <a:srgbClr val="E8EEF7"/>
-                </a:solidFill>
-                <a:latin typeface="Inter" pitchFamily="34" charset="0"/>
-                <a:ea typeface="Inter" pitchFamily="34" charset="-122"/>
-                <a:cs typeface="Inter" pitchFamily="34" charset="-120"/>
-              </a:rPr>
-              <a:t>An eval set with real multi-hop questions</a:t>
-            </a:r>
-            <a:endParaRPr lang="en-US" sz="1866" dirty="0"/>
-          </a:p>
-        </p:txBody>
-      </p:sp>
-      <p:sp>
-        <p:nvSpPr>
           <p:cNvPr id="31" name="Text 29"/>
-          <p:cNvSpPr/>
-          <p:nvPr/>
-        </p:nvSpPr>
-        <p:spPr>
-          <a:xfrm>
-            <a:off x="6462684" y="3761978"/>
-            <a:ext cx="84513" cy="84534"/>
-          </a:xfrm>
-          <a:prstGeom prst="rect">
-            <a:avLst/>
-          </a:prstGeom>
-          <a:solidFill>
-            <a:srgbClr val="4FC8E8"/>
-          </a:solidFill>
-          <a:ln/>
-        </p:spPr>
-        <p:txBody>
-          <a:bodyPr wrap="square" rtlCol="0" anchor="ctr"/>
-          <a:lstStyle/>
-          <a:p>
-            <a:pPr indent="0" marL="0">
-              <a:buNone/>
-            </a:pPr>
-            <a:endParaRPr lang="en-US" dirty="0"/>
-          </a:p>
-        </p:txBody>
-      </p:sp>
-      <p:sp>
-        <p:nvSpPr>
-          <p:cNvPr id="32" name="Text 30"/>
-          <p:cNvSpPr/>
-          <p:nvPr/>
-        </p:nvSpPr>
-        <p:spPr>
-          <a:xfrm>
-            <a:off x="6716422" y="3660378"/>
-            <a:ext cx="3949982" cy="343694"/>
-          </a:xfrm>
-          <a:prstGeom prst="rect">
-            <a:avLst/>
-          </a:prstGeom>
-          <a:noFill/>
-          <a:ln/>
-        </p:spPr>
-        <p:txBody>
-          <a:bodyPr wrap="square" lIns="0" tIns="0" rIns="0" bIns="0" rtlCol="0" anchor="t"/>
-          <a:lstStyle/>
-          <a:p>
-            <a:pPr algn="l" indent="0" marL="0">
-              <a:lnSpc>
-                <a:spcPts val="2706"/>
-              </a:lnSpc>
-              <a:buNone/>
-            </a:pPr>
-            <a:r>
-              <a:rPr lang="en-US" sz="1866" dirty="0">
-                <a:solidFill>
-                  <a:srgbClr val="E8EEF7"/>
-                </a:solidFill>
-                <a:latin typeface="Inter" pitchFamily="34" charset="0"/>
-                <a:ea typeface="Inter" pitchFamily="34" charset="-122"/>
-                <a:cs typeface="Inter" pitchFamily="34" charset="-120"/>
-              </a:rPr>
-              <a:t>The fallback path back to one-shot</a:t>
-            </a:r>
-            <a:endParaRPr lang="en-US" sz="1866" dirty="0"/>
-          </a:p>
-        </p:txBody>
-      </p:sp>
-      <p:sp>
-        <p:nvSpPr>
-          <p:cNvPr id="33" name="Text 31"/>
           <p:cNvSpPr/>
           <p:nvPr/>
         </p:nvSpPr>
@@ -7193,7 +7123,7 @@
       </p:sp>
       <p:sp>
         <p:nvSpPr>
-          <p:cNvPr id="34" name="Shape 32"/>
+          <p:cNvPr id="32" name="Shape 30"/>
           <p:cNvSpPr/>
           <p:nvPr/>
         </p:nvSpPr>
@@ -7213,10 +7143,14 @@
             <a:prstDash val="solid"/>
           </a:ln>
         </p:spPr>
-      </p:sp>
-      <p:sp>
-        <p:nvSpPr>
-          <p:cNvPr id="35" name="Shape 33"/>
+        <p:txBody>
+          <a:bodyPr/>
+          <a:p/>
+        </p:txBody>
+      </p:sp>
+      <p:sp>
+        <p:nvSpPr>
+          <p:cNvPr id="33" name="Shape 31"/>
           <p:cNvSpPr/>
           <p:nvPr/>
         </p:nvSpPr>
@@ -7236,10 +7170,14 @@
             <a:prstDash val="solid"/>
           </a:ln>
         </p:spPr>
-      </p:sp>
-      <p:sp>
-        <p:nvSpPr>
-          <p:cNvPr id="36" name="Shape 34"/>
+        <p:txBody>
+          <a:bodyPr/>
+          <a:p/>
+        </p:txBody>
+      </p:sp>
+      <p:sp>
+        <p:nvSpPr>
+          <p:cNvPr id="34" name="Shape 32"/>
           <p:cNvSpPr/>
           <p:nvPr/>
         </p:nvSpPr>
@@ -7259,10 +7197,14 @@
             <a:prstDash val="solid"/>
           </a:ln>
         </p:spPr>
-      </p:sp>
-      <p:sp>
-        <p:nvSpPr>
-          <p:cNvPr id="37" name="Shape 35"/>
+        <p:txBody>
+          <a:bodyPr/>
+          <a:p/>
+        </p:txBody>
+      </p:sp>
+      <p:sp>
+        <p:nvSpPr>
+          <p:cNvPr id="35" name="Shape 33"/>
           <p:cNvSpPr/>
           <p:nvPr/>
         </p:nvSpPr>
@@ -7282,10 +7224,14 @@
             <a:prstDash val="solid"/>
           </a:ln>
         </p:spPr>
-      </p:sp>
-      <p:sp>
-        <p:nvSpPr>
-          <p:cNvPr id="38" name="Text 36"/>
+        <p:txBody>
+          <a:bodyPr/>
+          <a:p/>
+        </p:txBody>
+      </p:sp>
+      <p:sp>
+        <p:nvSpPr>
+          <p:cNvPr id="36" name="Text 34"/>
           <p:cNvSpPr/>
           <p:nvPr/>
         </p:nvSpPr>
@@ -7301,7 +7247,9 @@
           <a:ln/>
         </p:spPr>
         <p:txBody>
-          <a:bodyPr wrap="square" lIns="0" tIns="0" rIns="0" bIns="0" rtlCol="0" anchor="t"/>
+          <a:bodyPr wrap="square" lIns="0" tIns="0" rIns="0" bIns="0" rtlCol="0" anchor="t">
+            <a:normAutofit/>
+          </a:bodyPr>
           <a:lstStyle/>
           <a:p>
             <a:pPr algn="l" indent="0" marL="0">
@@ -7327,7 +7275,7 @@
       </p:sp>
       <p:sp>
         <p:nvSpPr>
-          <p:cNvPr id="39" name="Text 37"/>
+          <p:cNvPr id="37" name="Text 35"/>
           <p:cNvSpPr/>
           <p:nvPr/>
         </p:nvSpPr>
@@ -7359,7 +7307,7 @@
       </p:sp>
       <p:sp>
         <p:nvSpPr>
-          <p:cNvPr id="40" name="Text 38"/>
+          <p:cNvPr id="38" name="Text 36"/>
           <p:cNvSpPr/>
           <p:nvPr/>
         </p:nvSpPr>
@@ -7375,7 +7323,7 @@
           <a:ln/>
         </p:spPr>
         <p:txBody>
-          <a:bodyPr wrap="square" lIns="0" tIns="0" rIns="0" bIns="0" rtlCol="0" anchor="t"/>
+          <a:bodyPr wrap="none" lIns="0" tIns="0" rIns="0" bIns="0" rtlCol="0" anchor="t"/>
           <a:lstStyle/>
           <a:p>
             <a:pPr algn="l" indent="0" marL="0">
@@ -7401,7 +7349,7 @@
       </p:sp>
       <p:sp>
         <p:nvSpPr>
-          <p:cNvPr id="41" name="Shape 39"/>
+          <p:cNvPr id="39" name="Shape 37"/>
           <p:cNvSpPr/>
           <p:nvPr/>
         </p:nvSpPr>
@@ -7421,10 +7369,14 @@
             <a:prstDash val="solid"/>
           </a:ln>
         </p:spPr>
-      </p:sp>
-      <p:sp>
-        <p:nvSpPr>
-          <p:cNvPr id="42" name="Text 40"/>
+        <p:txBody>
+          <a:bodyPr/>
+          <a:p/>
+        </p:txBody>
+      </p:sp>
+      <p:sp>
+        <p:nvSpPr>
+          <p:cNvPr id="40" name="Text 38"/>
           <p:cNvSpPr/>
           <p:nvPr/>
         </p:nvSpPr>
@@ -7440,7 +7392,7 @@
           <a:ln/>
         </p:spPr>
         <p:txBody>
-          <a:bodyPr wrap="square" lIns="0" tIns="0" rIns="0" bIns="0" rtlCol="0" anchor="t"/>
+          <a:bodyPr wrap="none" lIns="0" tIns="0" rIns="0" bIns="0" rtlCol="0" anchor="t"/>
           <a:lstStyle/>
           <a:p>
             <a:pPr algn="l" indent="0" marL="0">
@@ -7466,7 +7418,7 @@
       </p:sp>
       <p:sp>
         <p:nvSpPr>
-          <p:cNvPr id="43" name="Shape 41"/>
+          <p:cNvPr id="41" name="Shape 39"/>
           <p:cNvSpPr/>
           <p:nvPr/>
         </p:nvSpPr>
@@ -7486,10 +7438,14 @@
             <a:prstDash val="solid"/>
           </a:ln>
         </p:spPr>
-      </p:sp>
-      <p:sp>
-        <p:nvSpPr>
-          <p:cNvPr id="44" name="Text 42"/>
+        <p:txBody>
+          <a:bodyPr/>
+          <a:p/>
+        </p:txBody>
+      </p:sp>
+      <p:sp>
+        <p:nvSpPr>
+          <p:cNvPr id="42" name="Text 40"/>
           <p:cNvSpPr/>
           <p:nvPr/>
         </p:nvSpPr>
@@ -7505,7 +7461,7 @@
           <a:ln/>
         </p:spPr>
         <p:txBody>
-          <a:bodyPr wrap="square" lIns="0" tIns="0" rIns="0" bIns="0" rtlCol="0" anchor="t"/>
+          <a:bodyPr wrap="none" lIns="0" tIns="0" rIns="0" bIns="0" rtlCol="0" anchor="t"/>
           <a:lstStyle/>
           <a:p>
             <a:pPr algn="l" indent="0" marL="0">
@@ -7579,7 +7535,7 @@
           <a:ln/>
         </p:spPr>
         <p:txBody>
-          <a:bodyPr wrap="square" lIns="0" tIns="0" rIns="0" bIns="0" rtlCol="0" anchor="t"/>
+          <a:bodyPr wrap="none" lIns="0" tIns="0" rIns="0" bIns="0" rtlCol="0" anchor="t"/>
           <a:lstStyle/>
           <a:p>
             <a:pPr algn="l" indent="0" marL="0">
@@ -7651,7 +7607,9 @@
           <a:ln/>
         </p:spPr>
         <p:txBody>
-          <a:bodyPr wrap="square" lIns="0" tIns="0" rIns="0" bIns="0" rtlCol="0" anchor="t"/>
+          <a:bodyPr wrap="square" lIns="0" tIns="0" rIns="0" bIns="0" rtlCol="0" anchor="t">
+            <a:normAutofit/>
+          </a:bodyPr>
           <a:lstStyle/>
           <a:p>
             <a:pPr algn="l" indent="0" marL="0">
@@ -7677,402 +7635,14 @@
       </p:sp>
       <p:sp>
         <p:nvSpPr>
-          <p:cNvPr id="5" name="Text 3"/>
-          <p:cNvSpPr/>
-          <p:nvPr/>
-        </p:nvSpPr>
-        <p:spPr>
-          <a:xfrm>
-            <a:off x="5349331" y="1546423"/>
-            <a:ext cx="6264098" cy="2616200"/>
-          </a:xfrm>
-          <a:prstGeom prst="rect">
-            <a:avLst/>
-          </a:prstGeom>
-          <a:noFill/>
-          <a:ln/>
-        </p:spPr>
-        <p:txBody>
-          <a:bodyPr wrap="square" lIns="0" tIns="0" rIns="0" bIns="0" rtlCol="0" anchor="t"/>
-          <a:lstStyle/>
-          <a:p>
-            <a:pPr algn="l" marL="342900" indent="-342900">
-              <a:spcAft>
-                <a:spcPts val="1600"/>
-              </a:spcAft>
-              <a:buSzPct val="100000"/>
-              <a:buChar char="•"/>
-            </a:pPr>
-            <a:r>
-              <a:rPr lang="en-US" sz="1600" dirty="0">
-                <a:solidFill>
-                  <a:srgbClr val="4FC8E8"/>
-                </a:solidFill>
-                <a:latin typeface="Inter" pitchFamily="34" charset="0"/>
-                <a:ea typeface="Inter" pitchFamily="34" charset="-122"/>
-                <a:cs typeface="Inter" pitchFamily="34" charset="-120"/>
-              </a:rPr>
-              <a:t>01</a:t>
-            </a:r>
-            <a:pPr algn="l" indent="0" marL="0">
-              <a:spcAft>
-                <a:spcPts val="1600"/>
-              </a:spcAft>
-              <a:buNone/>
-            </a:pPr>
-            <a:r>
-              <a:rPr lang="en-US" sz="1600" dirty="0">
-                <a:solidFill>
-                  <a:srgbClr val="E8EEF7"/>
-                </a:solidFill>
-                <a:latin typeface="Inter" pitchFamily="34" charset="0"/>
-                <a:ea typeface="Inter" pitchFamily="34" charset="-122"/>
-                <a:cs typeface="Inter" pitchFamily="34" charset="-120"/>
-              </a:rPr>
-              <a:t>Which of our failures are retrieval, and which are generation?</a:t>
-            </a:r>
-            <a:endParaRPr lang="en-US" sz="1600" dirty="0"/>
-          </a:p>
-          <a:p>
-            <a:pPr algn="l" marL="342900" indent="-342900">
-              <a:spcAft>
-                <a:spcPts val="1600"/>
-              </a:spcAft>
-              <a:buSzPct val="100000"/>
-              <a:buChar char="•"/>
-            </a:pPr>
-            <a:r>
-              <a:rPr lang="en-US" sz="1600" dirty="0">
-                <a:solidFill>
-                  <a:srgbClr val="4FC8E8"/>
-                </a:solidFill>
-                <a:latin typeface="Inter" pitchFamily="34" charset="0"/>
-                <a:ea typeface="Inter" pitchFamily="34" charset="-122"/>
-                <a:cs typeface="Inter" pitchFamily="34" charset="-120"/>
-              </a:rPr>
-              <a:t>02</a:t>
-            </a:r>
-            <a:pPr algn="l" indent="0" marL="0">
-              <a:spcAft>
-                <a:spcPts val="1600"/>
-              </a:spcAft>
-              <a:buNone/>
-            </a:pPr>
-            <a:r>
-              <a:rPr lang="en-US" sz="1600" dirty="0">
-                <a:solidFill>
-                  <a:srgbClr val="E8EEF7"/>
-                </a:solidFill>
-                <a:latin typeface="Inter" pitchFamily="34" charset="0"/>
-                <a:ea typeface="Inter" pitchFamily="34" charset="-122"/>
-                <a:cs typeface="Inter" pitchFamily="34" charset="-120"/>
-              </a:rPr>
-              <a:t>What is our stop condition, and who owns it?</a:t>
-            </a:r>
-            <a:endParaRPr lang="en-US" sz="1600" dirty="0"/>
-          </a:p>
-          <a:p>
-            <a:pPr algn="l" marL="342900" indent="-342900">
-              <a:spcAft>
-                <a:spcPts val="1600"/>
-              </a:spcAft>
-              <a:buSzPct val="100000"/>
-              <a:buChar char="•"/>
-            </a:pPr>
-            <a:r>
-              <a:rPr lang="en-US" sz="1600" dirty="0">
-                <a:solidFill>
-                  <a:srgbClr val="4FC8E8"/>
-                </a:solidFill>
-                <a:latin typeface="Inter" pitchFamily="34" charset="0"/>
-                <a:ea typeface="Inter" pitchFamily="34" charset="-122"/>
-                <a:cs typeface="Inter" pitchFamily="34" charset="-120"/>
-              </a:rPr>
-              <a:t>03</a:t>
-            </a:r>
-            <a:pPr algn="l" indent="0" marL="0">
-              <a:spcAft>
-                <a:spcPts val="1600"/>
-              </a:spcAft>
-              <a:buNone/>
-            </a:pPr>
-            <a:r>
-              <a:rPr lang="en-US" sz="1600" dirty="0">
-                <a:solidFill>
-                  <a:srgbClr val="E8EEF7"/>
-                </a:solidFill>
-                <a:latin typeface="Inter" pitchFamily="34" charset="0"/>
-                <a:ea typeface="Inter" pitchFamily="34" charset="-122"/>
-                <a:cs typeface="Inter" pitchFamily="34" charset="-120"/>
-              </a:rPr>
-              <a:t>How would we know the loop got better?</a:t>
-            </a:r>
-            <a:endParaRPr lang="en-US" sz="1600" dirty="0"/>
-          </a:p>
-        </p:txBody>
-      </p:sp>
-      <p:sp>
-        <p:nvSpPr>
-          <p:cNvPr id="6" name="Text 4"/>
-          <p:cNvSpPr/>
-          <p:nvPr/>
-        </p:nvSpPr>
-        <p:spPr>
-          <a:xfrm>
-            <a:off x="5349331" y="1546423"/>
-            <a:ext cx="275608" cy="348655"/>
-          </a:xfrm>
-          <a:prstGeom prst="rect">
-            <a:avLst/>
-          </a:prstGeom>
-          <a:noFill/>
-          <a:ln/>
-        </p:spPr>
-        <p:txBody>
-          <a:bodyPr wrap="square" lIns="0" tIns="33862" rIns="0" bIns="0" rtlCol="0" anchor="t"/>
-          <a:lstStyle/>
-          <a:p>
-            <a:pPr algn="l" indent="0" marL="0">
-              <a:lnSpc>
-                <a:spcPts val="2480"/>
-              </a:lnSpc>
-              <a:buNone/>
-            </a:pPr>
-            <a:r>
-              <a:rPr lang="en-US" sz="1600" dirty="0">
-                <a:solidFill>
-                  <a:srgbClr val="4FC8E8"/>
-                </a:solidFill>
-                <a:latin typeface="JetBrainsMono" pitchFamily="34" charset="0"/>
-                <a:ea typeface="JetBrainsMono" pitchFamily="34" charset="-122"/>
-                <a:cs typeface="JetBrainsMono" pitchFamily="34" charset="-120"/>
-              </a:rPr>
-              <a:t>01</a:t>
-            </a:r>
-            <a:endParaRPr lang="en-US" sz="1600" dirty="0"/>
-          </a:p>
-        </p:txBody>
-      </p:sp>
-      <p:sp>
-        <p:nvSpPr>
-          <p:cNvPr id="7" name="Text 5"/>
-          <p:cNvSpPr/>
-          <p:nvPr/>
-        </p:nvSpPr>
-        <p:spPr>
-          <a:xfrm>
-            <a:off x="5856411" y="1546423"/>
-            <a:ext cx="5872159" cy="787400"/>
-          </a:xfrm>
-          <a:prstGeom prst="rect">
-            <a:avLst/>
-          </a:prstGeom>
-          <a:noFill/>
-          <a:ln/>
-        </p:spPr>
-        <p:txBody>
-          <a:bodyPr wrap="square" lIns="0" tIns="0" rIns="0" bIns="0" rtlCol="0" anchor="t"/>
-          <a:lstStyle/>
-          <a:p>
-            <a:pPr algn="l" indent="0" marL="0">
-              <a:lnSpc>
-                <a:spcPts val="3100"/>
-              </a:lnSpc>
-              <a:buNone/>
-            </a:pPr>
-            <a:r>
-              <a:rPr lang="en-US" sz="2000" dirty="0">
-                <a:solidFill>
-                  <a:srgbClr val="E8EEF7"/>
-                </a:solidFill>
-                <a:latin typeface="Inter" pitchFamily="34" charset="0"/>
-                <a:ea typeface="Inter" pitchFamily="34" charset="-122"/>
-                <a:cs typeface="Inter" pitchFamily="34" charset="-120"/>
-              </a:rPr>
-              <a:t>Which of our failures are retrieval, and which are generation?</a:t>
-            </a:r>
-            <a:endParaRPr lang="en-US" sz="2000" dirty="0"/>
-          </a:p>
-        </p:txBody>
-      </p:sp>
-      <p:sp>
-        <p:nvSpPr>
-          <p:cNvPr id="8" name="Text 6"/>
-          <p:cNvSpPr/>
-          <p:nvPr/>
-        </p:nvSpPr>
-        <p:spPr>
-          <a:xfrm>
-            <a:off x="5349331" y="2752923"/>
-            <a:ext cx="275608" cy="348655"/>
-          </a:xfrm>
-          <a:prstGeom prst="rect">
-            <a:avLst/>
-          </a:prstGeom>
-          <a:noFill/>
-          <a:ln/>
-        </p:spPr>
-        <p:txBody>
-          <a:bodyPr wrap="square" lIns="0" tIns="33862" rIns="0" bIns="0" rtlCol="0" anchor="t"/>
-          <a:lstStyle/>
-          <a:p>
-            <a:pPr algn="l" indent="0" marL="0">
-              <a:lnSpc>
-                <a:spcPts val="2480"/>
-              </a:lnSpc>
-              <a:buNone/>
-            </a:pPr>
-            <a:r>
-              <a:rPr lang="en-US" sz="1600" dirty="0">
-                <a:solidFill>
-                  <a:srgbClr val="4FC8E8"/>
-                </a:solidFill>
-                <a:latin typeface="JetBrainsMono" pitchFamily="34" charset="0"/>
-                <a:ea typeface="JetBrainsMono" pitchFamily="34" charset="-122"/>
-                <a:cs typeface="JetBrainsMono" pitchFamily="34" charset="-120"/>
-              </a:rPr>
-              <a:t>02</a:t>
-            </a:r>
-            <a:endParaRPr lang="en-US" sz="1600" dirty="0"/>
-          </a:p>
-        </p:txBody>
-      </p:sp>
-      <p:sp>
-        <p:nvSpPr>
-          <p:cNvPr id="9" name="Text 7"/>
-          <p:cNvSpPr/>
-          <p:nvPr/>
-        </p:nvSpPr>
-        <p:spPr>
-          <a:xfrm>
-            <a:off x="5856411" y="2752923"/>
-            <a:ext cx="5568827" cy="393700"/>
-          </a:xfrm>
-          <a:prstGeom prst="rect">
-            <a:avLst/>
-          </a:prstGeom>
-          <a:noFill/>
-          <a:ln/>
-        </p:spPr>
-        <p:txBody>
-          <a:bodyPr wrap="square" lIns="0" tIns="0" rIns="0" bIns="0" rtlCol="0" anchor="t"/>
-          <a:lstStyle/>
-          <a:p>
-            <a:pPr algn="l" indent="0" marL="0">
-              <a:lnSpc>
-                <a:spcPts val="3100"/>
-              </a:lnSpc>
-              <a:buNone/>
-            </a:pPr>
-            <a:r>
-              <a:rPr lang="en-US" sz="2000" dirty="0">
-                <a:solidFill>
-                  <a:srgbClr val="E8EEF7"/>
-                </a:solidFill>
-                <a:latin typeface="Inter" pitchFamily="34" charset="0"/>
-                <a:ea typeface="Inter" pitchFamily="34" charset="-122"/>
-                <a:cs typeface="Inter" pitchFamily="34" charset="-120"/>
-              </a:rPr>
-              <a:t>What is our stop condition, and who owns it?</a:t>
-            </a:r>
-            <a:endParaRPr lang="en-US" sz="2000" dirty="0"/>
-          </a:p>
-        </p:txBody>
-      </p:sp>
-      <p:sp>
-        <p:nvSpPr>
-          <p:cNvPr id="10" name="Text 8"/>
-          <p:cNvSpPr/>
-          <p:nvPr/>
-        </p:nvSpPr>
-        <p:spPr>
-          <a:xfrm>
-            <a:off x="5349331" y="3565723"/>
-            <a:ext cx="275608" cy="348655"/>
-          </a:xfrm>
-          <a:prstGeom prst="rect">
-            <a:avLst/>
-          </a:prstGeom>
-          <a:noFill/>
-          <a:ln/>
-        </p:spPr>
-        <p:txBody>
-          <a:bodyPr wrap="square" lIns="0" tIns="33862" rIns="0" bIns="0" rtlCol="0" anchor="t"/>
-          <a:lstStyle/>
-          <a:p>
-            <a:pPr algn="l" indent="0" marL="0">
-              <a:lnSpc>
-                <a:spcPts val="2480"/>
-              </a:lnSpc>
-              <a:buNone/>
-            </a:pPr>
-            <a:r>
-              <a:rPr lang="en-US" sz="1600" dirty="0">
-                <a:solidFill>
-                  <a:srgbClr val="4FC8E8"/>
-                </a:solidFill>
-                <a:latin typeface="JetBrainsMono" pitchFamily="34" charset="0"/>
-                <a:ea typeface="JetBrainsMono" pitchFamily="34" charset="-122"/>
-                <a:cs typeface="JetBrainsMono" pitchFamily="34" charset="-120"/>
-              </a:rPr>
-              <a:t>03</a:t>
-            </a:r>
-            <a:endParaRPr lang="en-US" sz="1600" dirty="0"/>
-          </a:p>
-        </p:txBody>
-      </p:sp>
-      <p:sp>
-        <p:nvSpPr>
-          <p:cNvPr id="11" name="Text 9"/>
-          <p:cNvSpPr/>
-          <p:nvPr/>
-        </p:nvSpPr>
-        <p:spPr>
-          <a:xfrm>
-            <a:off x="5856411" y="3565723"/>
-            <a:ext cx="5076699" cy="393700"/>
-          </a:xfrm>
-          <a:prstGeom prst="rect">
-            <a:avLst/>
-          </a:prstGeom>
-          <a:noFill/>
-          <a:ln/>
-        </p:spPr>
-        <p:txBody>
-          <a:bodyPr wrap="square" lIns="0" tIns="0" rIns="0" bIns="0" rtlCol="0" anchor="t"/>
-          <a:lstStyle/>
-          <a:p>
-            <a:pPr algn="l" indent="0" marL="0">
-              <a:lnSpc>
-                <a:spcPts val="3100"/>
-              </a:lnSpc>
-              <a:buNone/>
-            </a:pPr>
-            <a:r>
-              <a:rPr lang="en-US" sz="2000" dirty="0">
-                <a:solidFill>
-                  <a:srgbClr val="E8EEF7"/>
-                </a:solidFill>
-                <a:latin typeface="Inter" pitchFamily="34" charset="0"/>
-                <a:ea typeface="Inter" pitchFamily="34" charset="-122"/>
-                <a:cs typeface="Inter" pitchFamily="34" charset="-120"/>
-              </a:rPr>
-              <a:t>How would we know the loop got better?</a:t>
-            </a:r>
-            <a:endParaRPr lang="en-US" sz="2000" dirty="0"/>
-          </a:p>
-        </p:txBody>
-      </p:sp>
-      <p:sp>
-        <p:nvSpPr>
-          <p:cNvPr id="12" name="Shape 10"/>
-          <p:cNvSpPr/>
-          <p:nvPr/>
-        </p:nvSpPr>
-        <p:spPr>
-          <a:xfrm>
-            <a:off x="575523" y="5207397"/>
-            <a:ext cx="11037905" cy="0"/>
+          <p:cNvPr id="5" name="Shape 3"/>
+          <p:cNvSpPr/>
+          <p:nvPr/>
+        </p:nvSpPr>
+        <p:spPr>
+          <a:xfrm>
+            <a:off x="5349331" y="2543373"/>
+            <a:ext cx="6264098" cy="0"/>
           </a:xfrm>
           <a:prstGeom prst="line">
             <a:avLst/>
@@ -8085,26 +7655,30 @@
             <a:prstDash val="solid"/>
           </a:ln>
         </p:spPr>
-      </p:sp>
-      <p:sp>
-        <p:nvSpPr>
-          <p:cNvPr id="13" name="Text 11"/>
-          <p:cNvSpPr/>
-          <p:nvPr/>
-        </p:nvSpPr>
-        <p:spPr>
-          <a:xfrm>
-            <a:off x="575523" y="5429647"/>
-            <a:ext cx="1277471" cy="314920"/>
-          </a:xfrm>
-          <a:prstGeom prst="rect">
-            <a:avLst/>
-          </a:prstGeom>
-          <a:noFill/>
-          <a:ln/>
-        </p:spPr>
-        <p:txBody>
-          <a:bodyPr wrap="square" lIns="0" tIns="0" rIns="0" bIns="0" rtlCol="0" anchor="t"/>
+        <p:txBody>
+          <a:bodyPr/>
+          <a:p/>
+        </p:txBody>
+      </p:sp>
+      <p:sp>
+        <p:nvSpPr>
+          <p:cNvPr id="6" name="Text 4"/>
+          <p:cNvSpPr/>
+          <p:nvPr/>
+        </p:nvSpPr>
+        <p:spPr>
+          <a:xfrm>
+            <a:off x="5349331" y="1546423"/>
+            <a:ext cx="275608" cy="348655"/>
+          </a:xfrm>
+          <a:prstGeom prst="rect">
+            <a:avLst/>
+          </a:prstGeom>
+          <a:noFill/>
+          <a:ln/>
+        </p:spPr>
+        <p:txBody>
+          <a:bodyPr wrap="square" lIns="0" tIns="33862" rIns="0" bIns="0" rtlCol="0" anchor="t"/>
           <a:lstStyle/>
           <a:p>
             <a:pPr algn="l" indent="0" marL="0">
@@ -8116,13 +7690,13 @@
             <a:r>
               <a:rPr lang="en-US" sz="1600" dirty="0">
                 <a:solidFill>
-                  <a:srgbClr val="E8EEF7"/>
+                  <a:srgbClr val="4FC8E8"/>
                 </a:solidFill>
                 <a:latin typeface="JetBrainsMono" pitchFamily="34" charset="0"/>
                 <a:ea typeface="JetBrainsMono" pitchFamily="34" charset="-122"/>
                 <a:cs typeface="JetBrainsMono" pitchFamily="34" charset="-120"/>
               </a:rPr>
-              <a:t>THANK YOU</a:t>
+              <a:t>01</a:t>
             </a:r>
             <a:endParaRPr lang="en-US" sz="1600" dirty="0"/>
           </a:p>
@@ -8130,40 +7704,348 @@
       </p:sp>
       <p:sp>
         <p:nvSpPr>
-          <p:cNvPr id="14" name="Text 12"/>
-          <p:cNvSpPr/>
-          <p:nvPr/>
-        </p:nvSpPr>
-        <p:spPr>
-          <a:xfrm>
-            <a:off x="9423425" y="5416947"/>
-            <a:ext cx="2233804" cy="314920"/>
-          </a:xfrm>
-          <a:prstGeom prst="rect">
-            <a:avLst/>
-          </a:prstGeom>
-          <a:noFill/>
-          <a:ln/>
-        </p:spPr>
-        <p:txBody>
-          <a:bodyPr wrap="square" lIns="0" tIns="0" rIns="0" bIns="0" rtlCol="0" anchor="t"/>
-          <a:lstStyle/>
-          <a:p>
-            <a:pPr algn="l" indent="0" marL="0">
-              <a:lnSpc>
-                <a:spcPts val="2480"/>
-              </a:lnSpc>
-              <a:buNone/>
-            </a:pPr>
-            <a:r>
-              <a:rPr lang="en-US" sz="1600" dirty="0">
-                <a:solidFill>
-                  <a:srgbClr val="8FA3C8"/>
+          <p:cNvPr id="7" name="Text 5"/>
+          <p:cNvSpPr/>
+          <p:nvPr/>
+        </p:nvSpPr>
+        <p:spPr>
+          <a:xfrm>
+            <a:off x="5856411" y="1546423"/>
+            <a:ext cx="5872159" cy="787400"/>
+          </a:xfrm>
+          <a:prstGeom prst="rect">
+            <a:avLst/>
+          </a:prstGeom>
+          <a:noFill/>
+          <a:ln/>
+        </p:spPr>
+        <p:txBody>
+          <a:bodyPr wrap="square" lIns="0" tIns="0" rIns="0" bIns="0" rtlCol="0" anchor="t">
+            <a:normAutofit/>
+          </a:bodyPr>
+          <a:lstStyle/>
+          <a:p>
+            <a:pPr algn="l" indent="0" marL="0">
+              <a:lnSpc>
+                <a:spcPts val="3100"/>
+              </a:lnSpc>
+              <a:buNone/>
+            </a:pPr>
+            <a:r>
+              <a:rPr lang="en-US" sz="2000" dirty="0">
+                <a:solidFill>
+                  <a:srgbClr val="E8EEF7"/>
                 </a:solidFill>
                 <a:latin typeface="Inter" pitchFamily="34" charset="0"/>
                 <a:ea typeface="Inter" pitchFamily="34" charset="-122"/>
                 <a:cs typeface="Inter" pitchFamily="34" charset="-120"/>
               </a:rPr>
+              <a:t>Which of our failures are retrieval, and which are generation?</a:t>
+            </a:r>
+            <a:endParaRPr lang="en-US" sz="2000" dirty="0"/>
+          </a:p>
+        </p:txBody>
+      </p:sp>
+      <p:sp>
+        <p:nvSpPr>
+          <p:cNvPr id="8" name="Shape 6"/>
+          <p:cNvSpPr/>
+          <p:nvPr/>
+        </p:nvSpPr>
+        <p:spPr>
+          <a:xfrm>
+            <a:off x="5349331" y="3356173"/>
+            <a:ext cx="6264098" cy="0"/>
+          </a:xfrm>
+          <a:prstGeom prst="line">
+            <a:avLst/>
+          </a:prstGeom>
+          <a:noFill/>
+          <a:ln w="12698">
+            <a:solidFill>
+              <a:srgbClr val="2A4A8C"/>
+            </a:solidFill>
+            <a:prstDash val="solid"/>
+          </a:ln>
+        </p:spPr>
+        <p:txBody>
+          <a:bodyPr/>
+          <a:p/>
+        </p:txBody>
+      </p:sp>
+      <p:sp>
+        <p:nvSpPr>
+          <p:cNvPr id="9" name="Text 7"/>
+          <p:cNvSpPr/>
+          <p:nvPr/>
+        </p:nvSpPr>
+        <p:spPr>
+          <a:xfrm>
+            <a:off x="5349331" y="2752923"/>
+            <a:ext cx="275608" cy="348655"/>
+          </a:xfrm>
+          <a:prstGeom prst="rect">
+            <a:avLst/>
+          </a:prstGeom>
+          <a:noFill/>
+          <a:ln/>
+        </p:spPr>
+        <p:txBody>
+          <a:bodyPr wrap="square" lIns="0" tIns="33862" rIns="0" bIns="0" rtlCol="0" anchor="t"/>
+          <a:lstStyle/>
+          <a:p>
+            <a:pPr algn="l" indent="0" marL="0">
+              <a:lnSpc>
+                <a:spcPts val="2480"/>
+              </a:lnSpc>
+              <a:buNone/>
+            </a:pPr>
+            <a:r>
+              <a:rPr lang="en-US" sz="1600" dirty="0">
+                <a:solidFill>
+                  <a:srgbClr val="4FC8E8"/>
+                </a:solidFill>
+                <a:latin typeface="JetBrainsMono" pitchFamily="34" charset="0"/>
+                <a:ea typeface="JetBrainsMono" pitchFamily="34" charset="-122"/>
+                <a:cs typeface="JetBrainsMono" pitchFamily="34" charset="-120"/>
+              </a:rPr>
+              <a:t>02</a:t>
+            </a:r>
+            <a:endParaRPr lang="en-US" sz="1600" dirty="0"/>
+          </a:p>
+        </p:txBody>
+      </p:sp>
+      <p:sp>
+        <p:nvSpPr>
+          <p:cNvPr id="10" name="Text 8"/>
+          <p:cNvSpPr/>
+          <p:nvPr/>
+        </p:nvSpPr>
+        <p:spPr>
+          <a:xfrm>
+            <a:off x="5856411" y="2752923"/>
+            <a:ext cx="5568827" cy="393700"/>
+          </a:xfrm>
+          <a:prstGeom prst="rect">
+            <a:avLst/>
+          </a:prstGeom>
+          <a:noFill/>
+          <a:ln/>
+        </p:spPr>
+        <p:txBody>
+          <a:bodyPr wrap="none" lIns="0" tIns="0" rIns="0" bIns="0" rtlCol="0" anchor="t"/>
+          <a:lstStyle/>
+          <a:p>
+            <a:pPr algn="l" indent="0" marL="0">
+              <a:lnSpc>
+                <a:spcPts val="3100"/>
+              </a:lnSpc>
+              <a:buNone/>
+            </a:pPr>
+            <a:r>
+              <a:rPr lang="en-US" sz="2000" dirty="0">
+                <a:solidFill>
+                  <a:srgbClr val="E8EEF7"/>
+                </a:solidFill>
+                <a:latin typeface="Inter" pitchFamily="34" charset="0"/>
+                <a:ea typeface="Inter" pitchFamily="34" charset="-122"/>
+                <a:cs typeface="Inter" pitchFamily="34" charset="-120"/>
+              </a:rPr>
+              <a:t>What is our stop condition, and who owns it?</a:t>
+            </a:r>
+            <a:endParaRPr lang="en-US" sz="2000" dirty="0"/>
+          </a:p>
+        </p:txBody>
+      </p:sp>
+      <p:sp>
+        <p:nvSpPr>
+          <p:cNvPr id="11" name="Text 9"/>
+          <p:cNvSpPr/>
+          <p:nvPr/>
+        </p:nvSpPr>
+        <p:spPr>
+          <a:xfrm>
+            <a:off x="5349331" y="3565723"/>
+            <a:ext cx="275608" cy="348655"/>
+          </a:xfrm>
+          <a:prstGeom prst="rect">
+            <a:avLst/>
+          </a:prstGeom>
+          <a:noFill/>
+          <a:ln/>
+        </p:spPr>
+        <p:txBody>
+          <a:bodyPr wrap="square" lIns="0" tIns="33862" rIns="0" bIns="0" rtlCol="0" anchor="t"/>
+          <a:lstStyle/>
+          <a:p>
+            <a:pPr algn="l" indent="0" marL="0">
+              <a:lnSpc>
+                <a:spcPts val="2480"/>
+              </a:lnSpc>
+              <a:buNone/>
+            </a:pPr>
+            <a:r>
+              <a:rPr lang="en-US" sz="1600" dirty="0">
+                <a:solidFill>
+                  <a:srgbClr val="4FC8E8"/>
+                </a:solidFill>
+                <a:latin typeface="JetBrainsMono" pitchFamily="34" charset="0"/>
+                <a:ea typeface="JetBrainsMono" pitchFamily="34" charset="-122"/>
+                <a:cs typeface="JetBrainsMono" pitchFamily="34" charset="-120"/>
+              </a:rPr>
+              <a:t>03</a:t>
+            </a:r>
+            <a:endParaRPr lang="en-US" sz="1600" dirty="0"/>
+          </a:p>
+        </p:txBody>
+      </p:sp>
+      <p:sp>
+        <p:nvSpPr>
+          <p:cNvPr id="12" name="Text 10"/>
+          <p:cNvSpPr/>
+          <p:nvPr/>
+        </p:nvSpPr>
+        <p:spPr>
+          <a:xfrm>
+            <a:off x="5856411" y="3565723"/>
+            <a:ext cx="5076699" cy="393700"/>
+          </a:xfrm>
+          <a:prstGeom prst="rect">
+            <a:avLst/>
+          </a:prstGeom>
+          <a:noFill/>
+          <a:ln/>
+        </p:spPr>
+        <p:txBody>
+          <a:bodyPr wrap="none" lIns="0" tIns="0" rIns="0" bIns="0" rtlCol="0" anchor="t"/>
+          <a:lstStyle/>
+          <a:p>
+            <a:pPr algn="l" indent="0" marL="0">
+              <a:lnSpc>
+                <a:spcPts val="3100"/>
+              </a:lnSpc>
+              <a:buNone/>
+            </a:pPr>
+            <a:r>
+              <a:rPr lang="en-US" sz="2000" dirty="0">
+                <a:solidFill>
+                  <a:srgbClr val="E8EEF7"/>
+                </a:solidFill>
+                <a:latin typeface="Inter" pitchFamily="34" charset="0"/>
+                <a:ea typeface="Inter" pitchFamily="34" charset="-122"/>
+                <a:cs typeface="Inter" pitchFamily="34" charset="-120"/>
+              </a:rPr>
+              <a:t>How would we know the loop got better?</a:t>
+            </a:r>
+            <a:endParaRPr lang="en-US" sz="2000" dirty="0"/>
+          </a:p>
+        </p:txBody>
+      </p:sp>
+      <p:sp>
+        <p:nvSpPr>
+          <p:cNvPr id="13" name="Shape 11"/>
+          <p:cNvSpPr/>
+          <p:nvPr/>
+        </p:nvSpPr>
+        <p:spPr>
+          <a:xfrm>
+            <a:off x="575523" y="5207397"/>
+            <a:ext cx="11037905" cy="0"/>
+          </a:xfrm>
+          <a:prstGeom prst="line">
+            <a:avLst/>
+          </a:prstGeom>
+          <a:noFill/>
+          <a:ln w="12698">
+            <a:solidFill>
+              <a:srgbClr val="2A4A8C"/>
+            </a:solidFill>
+            <a:prstDash val="solid"/>
+          </a:ln>
+        </p:spPr>
+        <p:txBody>
+          <a:bodyPr/>
+          <a:p/>
+        </p:txBody>
+      </p:sp>
+      <p:sp>
+        <p:nvSpPr>
+          <p:cNvPr id="14" name="Text 12"/>
+          <p:cNvSpPr/>
+          <p:nvPr/>
+        </p:nvSpPr>
+        <p:spPr>
+          <a:xfrm>
+            <a:off x="575523" y="5429647"/>
+            <a:ext cx="1277471" cy="314920"/>
+          </a:xfrm>
+          <a:prstGeom prst="rect">
+            <a:avLst/>
+          </a:prstGeom>
+          <a:noFill/>
+          <a:ln/>
+        </p:spPr>
+        <p:txBody>
+          <a:bodyPr wrap="none" lIns="0" tIns="0" rIns="0" bIns="0" rtlCol="0" anchor="t"/>
+          <a:lstStyle/>
+          <a:p>
+            <a:pPr algn="l" indent="0" marL="0">
+              <a:lnSpc>
+                <a:spcPts val="2480"/>
+              </a:lnSpc>
+              <a:buNone/>
+            </a:pPr>
+            <a:r>
+              <a:rPr lang="en-US" sz="1600" dirty="0">
+                <a:solidFill>
+                  <a:srgbClr val="E8EEF7"/>
+                </a:solidFill>
+                <a:latin typeface="JetBrainsMono" pitchFamily="34" charset="0"/>
+                <a:ea typeface="JetBrainsMono" pitchFamily="34" charset="-122"/>
+                <a:cs typeface="JetBrainsMono" pitchFamily="34" charset="-120"/>
+              </a:rPr>
+              <a:t>THANK YOU</a:t>
+            </a:r>
+            <a:endParaRPr lang="en-US" sz="1600" dirty="0"/>
+          </a:p>
+        </p:txBody>
+      </p:sp>
+      <p:sp>
+        <p:nvSpPr>
+          <p:cNvPr id="15" name="Text 13"/>
+          <p:cNvSpPr/>
+          <p:nvPr/>
+        </p:nvSpPr>
+        <p:spPr>
+          <a:xfrm>
+            <a:off x="9423425" y="5416947"/>
+            <a:ext cx="2233804" cy="314920"/>
+          </a:xfrm>
+          <a:prstGeom prst="rect">
+            <a:avLst/>
+          </a:prstGeom>
+          <a:noFill/>
+          <a:ln/>
+        </p:spPr>
+        <p:txBody>
+          <a:bodyPr wrap="none" lIns="0" tIns="0" rIns="0" bIns="0" rtlCol="0" anchor="t"/>
+          <a:lstStyle/>
+          <a:p>
+            <a:pPr algn="l" indent="0" marL="0">
+              <a:lnSpc>
+                <a:spcPts val="2480"/>
+              </a:lnSpc>
+              <a:buNone/>
+            </a:pPr>
+            <a:r>
+              <a:rPr lang="en-US" sz="1600" dirty="0">
+                <a:solidFill>
+                  <a:srgbClr val="8FA3C8"/>
+                </a:solidFill>
+                <a:latin typeface="Inter" pitchFamily="34" charset="0"/>
+                <a:ea typeface="Inter" pitchFamily="34" charset="-122"/>
+                <a:cs typeface="Inter" pitchFamily="34" charset="-120"/>
+              </a:rPr>
               <a:t>PRESENTER · TEAM</a:t>
             </a:r>
             <a:endParaRPr lang="en-US" sz="1600" dirty="0"/>
@@ -8172,7 +8054,7 @@
       </p:sp>
       <p:sp>
         <p:nvSpPr>
-          <p:cNvPr id="15" name="Text 13"/>
+          <p:cNvPr id="16" name="Text 14"/>
           <p:cNvSpPr/>
           <p:nvPr/>
         </p:nvSpPr>
@@ -8204,7 +8086,7 @@
       </p:sp>
       <p:sp>
         <p:nvSpPr>
-          <p:cNvPr id="16" name="Text 14"/>
+          <p:cNvPr id="17" name="Text 15"/>
           <p:cNvSpPr/>
           <p:nvPr/>
         </p:nvSpPr>
@@ -8220,7 +8102,7 @@
           <a:ln/>
         </p:spPr>
         <p:txBody>
-          <a:bodyPr wrap="square" lIns="0" tIns="0" rIns="0" bIns="0" rtlCol="0" anchor="t"/>
+          <a:bodyPr wrap="none" lIns="0" tIns="0" rIns="0" bIns="0" rtlCol="0" anchor="t"/>
           <a:lstStyle/>
           <a:p>
             <a:pPr algn="l" indent="0" marL="0">
@@ -8246,7 +8128,7 @@
       </p:sp>
       <p:sp>
         <p:nvSpPr>
-          <p:cNvPr id="17" name="Shape 15"/>
+          <p:cNvPr id="18" name="Shape 16"/>
           <p:cNvSpPr/>
           <p:nvPr/>
         </p:nvSpPr>
@@ -8266,10 +8148,14 @@
             <a:prstDash val="solid"/>
           </a:ln>
         </p:spPr>
-      </p:sp>
-      <p:sp>
-        <p:nvSpPr>
-          <p:cNvPr id="18" name="Text 16"/>
+        <p:txBody>
+          <a:bodyPr/>
+          <a:p/>
+        </p:txBody>
+      </p:sp>
+      <p:sp>
+        <p:nvSpPr>
+          <p:cNvPr id="19" name="Text 17"/>
           <p:cNvSpPr/>
           <p:nvPr/>
         </p:nvSpPr>
@@ -8285,7 +8171,7 @@
           <a:ln/>
         </p:spPr>
         <p:txBody>
-          <a:bodyPr wrap="square" lIns="0" tIns="0" rIns="0" bIns="0" rtlCol="0" anchor="t"/>
+          <a:bodyPr wrap="none" lIns="0" tIns="0" rIns="0" bIns="0" rtlCol="0" anchor="t"/>
           <a:lstStyle/>
           <a:p>
             <a:pPr algn="l" indent="0" marL="0">
@@ -8311,7 +8197,7 @@
       </p:sp>
       <p:sp>
         <p:nvSpPr>
-          <p:cNvPr id="19" name="Shape 17"/>
+          <p:cNvPr id="20" name="Shape 18"/>
           <p:cNvSpPr/>
           <p:nvPr/>
         </p:nvSpPr>
@@ -8331,10 +8217,14 @@
             <a:prstDash val="solid"/>
           </a:ln>
         </p:spPr>
-      </p:sp>
-      <p:sp>
-        <p:nvSpPr>
-          <p:cNvPr id="20" name="Text 18"/>
+        <p:txBody>
+          <a:bodyPr/>
+          <a:p/>
+        </p:txBody>
+      </p:sp>
+      <p:sp>
+        <p:nvSpPr>
+          <p:cNvPr id="21" name="Text 19"/>
           <p:cNvSpPr/>
           <p:nvPr/>
         </p:nvSpPr>
@@ -8350,7 +8240,7 @@
           <a:ln/>
         </p:spPr>
         <p:txBody>
-          <a:bodyPr wrap="square" lIns="0" tIns="0" rIns="0" bIns="0" rtlCol="0" anchor="t"/>
+          <a:bodyPr wrap="none" lIns="0" tIns="0" rIns="0" bIns="0" rtlCol="0" anchor="t"/>
           <a:lstStyle/>
           <a:p>
             <a:pPr algn="l" indent="0" marL="0">

--- a/decks/agentic-rag/agentic-rag.pptx
+++ b/decks/agentic-rag/agentic-rag.pptx
@@ -1383,9 +1383,7 @@
           <a:ln/>
         </p:spPr>
         <p:txBody>
-          <a:bodyPr wrap="square" lIns="0" tIns="0" rIns="0" bIns="0" rtlCol="0" anchor="t">
-            <a:normAutofit/>
-          </a:bodyPr>
+          <a:bodyPr wrap="none" lIns="0" tIns="0" rIns="0" bIns="0" rtlCol="0" anchor="t"/>
           <a:lstStyle/>
           <a:p>
             <a:pPr algn="l" indent="0" marL="0">
@@ -4504,7 +4502,9 @@
           <a:ln/>
         </p:spPr>
         <p:txBody>
-          <a:bodyPr wrap="none" lIns="0" tIns="0" rIns="0" bIns="0" rtlCol="0" anchor="t"/>
+          <a:bodyPr wrap="square" lIns="0" tIns="0" rIns="0" bIns="0" rtlCol="0" anchor="t">
+            <a:normAutofit/>
+          </a:bodyPr>
           <a:lstStyle/>
           <a:p>
             <a:pPr algn="l" indent="0" marL="0">
@@ -7678,7 +7678,7 @@
           <a:ln/>
         </p:spPr>
         <p:txBody>
-          <a:bodyPr wrap="square" lIns="0" tIns="33862" rIns="0" bIns="0" rtlCol="0" anchor="t"/>
+          <a:bodyPr wrap="none" lIns="0" tIns="33862" rIns="0" bIns="0" rtlCol="0" anchor="t"/>
           <a:lstStyle/>
           <a:p>
             <a:pPr algn="l" indent="0" marL="0">
@@ -7791,7 +7791,7 @@
           <a:ln/>
         </p:spPr>
         <p:txBody>
-          <a:bodyPr wrap="square" lIns="0" tIns="33862" rIns="0" bIns="0" rtlCol="0" anchor="t"/>
+          <a:bodyPr wrap="none" lIns="0" tIns="33862" rIns="0" bIns="0" rtlCol="0" anchor="t"/>
           <a:lstStyle/>
           <a:p>
             <a:pPr algn="l" indent="0" marL="0">
@@ -7875,7 +7875,7 @@
           <a:ln/>
         </p:spPr>
         <p:txBody>
-          <a:bodyPr wrap="square" lIns="0" tIns="33862" rIns="0" bIns="0" rtlCol="0" anchor="t"/>
+          <a:bodyPr wrap="none" lIns="0" tIns="33862" rIns="0" bIns="0" rtlCol="0" anchor="t"/>
           <a:lstStyle/>
           <a:p>
             <a:pPr algn="l" indent="0" marL="0">
